--- a/DR_Final_5min.pptx
+++ b/DR_Final_5min.pptx
@@ -17,13 +17,11 @@
     <p:sldId id="304" r:id="rId30"/>
     <p:sldId id="308" r:id="rId34"/>
     <p:sldId id="309" r:id="rId35"/>
-    <p:sldId id="310" r:id="rId36"/>
     <p:sldId id="305" r:id="rId31"/>
     <p:sldId id="288" r:id="rId7"/>
-    <p:sldId id="293" r:id="rId19"/>
+    <p:sldId id="312" r:id="rId38"/>
+    <p:sldId id="310" r:id="rId36"/>
     <p:sldId id="311" r:id="rId37"/>
-    <p:sldId id="306" r:id="rId32"/>
-    <p:sldId id="312" r:id="rId38"/>
     <p:sldId id="265" r:id="rId10"/>
     <p:sldId id="267" r:id="rId11"/>
   </p:sldIdLst>
@@ -2077,7 +2075,7 @@
           <a:lstStyle/>
           <a:p>
             <a:r>
-              <a:t>[0:20] The method has three arms with everything else the same. A is DDR only, B is DDR plus EyePACS source-balanced, and C is my earlier merge as a negative control. I also test a weighted sampler, class-balanced and focal loss, and augmentation, one at a time.</a:t>
+              <a:t>[0:30] The model is simple. A fundus image is cropped and resized, passed through an EfficientNet-B0, then calibrated with temperature scaling and a prior-shift correction. The output is a probability of early disease and a flag at a fixed specificity of 0.90, all set on validation data only.</a:t>
             </a:r>
           </a:p>
         </p:txBody>
@@ -2147,7 +2145,7 @@
           <a:lstStyle/>
           <a:p>
             <a:r>
-              <a:t>[0:20] This is the full pipeline: preprocess, EfficientNet-B0, then on validation only I pick the best epoch, fit temperature scaling and prior-shift correction, and freeze a threshold at specificity 0.90. Test sets are opened after that.</a:t>
+              <a:t>[0:25] For data I use DDR, EyePACS split by patient, and APTOS as an external test only. The splits are frozen files, the model is EfficientNet-B0 at 512 pixels with three seeds on a Kaggle GPU, and test sets are opened only through a declared analysis.</a:t>
             </a:r>
           </a:p>
         </p:txBody>
@@ -2217,7 +2215,7 @@
           <a:lstStyle/>
           <a:p>
             <a:r>
-              <a:t>[0:25] For data I use DDR, EyePACS split by patient, and APTOS as an external test only. The splits are frozen files, the model is EfficientNet-B0 at 512 pixels with three seeds on a Kaggle GPU, and test sets are opened only through a declared analysis.</a:t>
+              <a:t>[0:25] Next steps: train the three arms with several seeds, compare the imbalance methods one at a time, test on held-out EyePACS patients and APTOS with confidence intervals, calibrate and report sensitivity at a fixed specificity, and finish the literature search and thesis.</a:t>
             </a:r>
           </a:p>
         </p:txBody>
@@ -2243,146 +2241,6 @@
 </file>
 
 <file path=ppt/notesSlides/notesSlide13.xml><?xml version="1.0" encoding="utf-8"?>
-<p:notes xmlns:a="http://schemas.openxmlformats.org/drawingml/2006/main" xmlns:p="http://schemas.openxmlformats.org/presentationml/2006/main" xmlns:r="http://schemas.openxmlformats.org/officeDocument/2006/relationships">
-  <p:cSld>
-    <p:spTree>
-      <p:nvGrpSpPr>
-        <p:cNvPr id="1" name=""/>
-        <p:cNvGrpSpPr/>
-        <p:nvPr/>
-      </p:nvGrpSpPr>
-      <p:grpSpPr>
-        <a:xfrm>
-          <a:off x="0" y="0"/>
-          <a:ext cx="0" cy="0"/>
-          <a:chOff x="0" y="0"/>
-          <a:chExt cx="0" cy="0"/>
-        </a:xfrm>
-      </p:grpSpPr>
-      <p:sp>
-        <p:nvSpPr>
-          <p:cNvPr id="2" name="Slide Image Placeholder 1"/>
-          <p:cNvSpPr>
-            <a:spLocks noGrp="1"/>
-          </p:cNvSpPr>
-          <p:nvPr>
-            <p:ph type="sldImg" idx="3"/>
-          </p:nvPr>
-        </p:nvSpPr>
-        <p:spPr/>
-      </p:sp>
-      <p:sp>
-        <p:nvSpPr>
-          <p:cNvPr id="3" name="Notes Placeholder 2"/>
-          <p:cNvSpPr>
-            <a:spLocks noGrp="1"/>
-          </p:cNvSpPr>
-          <p:nvPr>
-            <p:ph type="body" idx="1"/>
-          </p:nvPr>
-        </p:nvSpPr>
-        <p:spPr/>
-        <p:txBody>
-          <a:bodyPr/>
-          <a:lstStyle/>
-          <a:p>
-            <a:r>
-              <a:t>[0:20] Six rules keep the evidence trustworthy: freeze splits first, declare the analysis, change one thing per run, select on validation only, measure the noise with seeds and bootstrap intervals, and open the test once with external data last.</a:t>
-            </a:r>
-          </a:p>
-        </p:txBody>
-      </p:sp>
-      <p:sp>
-        <p:nvSpPr>
-          <p:cNvPr id="4" name="Slide Number Placeholder 3"/>
-          <p:cNvSpPr>
-            <a:spLocks noGrp="1"/>
-          </p:cNvSpPr>
-          <p:nvPr>
-            <p:ph type="sldNum" idx="12"/>
-          </p:nvPr>
-        </p:nvSpPr>
-        <p:spPr/>
-      </p:sp>
-    </p:spTree>
-  </p:cSld>
-  <p:clrMapOvr>
-    <a:masterClrMapping/>
-  </p:clrMapOvr>
-</p:notes>
-</file>
-
-<file path=ppt/notesSlides/notesSlide14.xml><?xml version="1.0" encoding="utf-8"?>
-<p:notes xmlns:a="http://schemas.openxmlformats.org/drawingml/2006/main" xmlns:p="http://schemas.openxmlformats.org/presentationml/2006/main" xmlns:r="http://schemas.openxmlformats.org/officeDocument/2006/relationships">
-  <p:cSld>
-    <p:spTree>
-      <p:nvGrpSpPr>
-        <p:cNvPr id="1" name=""/>
-        <p:cNvGrpSpPr/>
-        <p:nvPr/>
-      </p:nvGrpSpPr>
-      <p:grpSpPr>
-        <a:xfrm>
-          <a:off x="0" y="0"/>
-          <a:ext cx="0" cy="0"/>
-          <a:chOff x="0" y="0"/>
-          <a:chExt cx="0" cy="0"/>
-        </a:xfrm>
-      </p:grpSpPr>
-      <p:sp>
-        <p:nvSpPr>
-          <p:cNvPr id="2" name="Slide Image Placeholder 1"/>
-          <p:cNvSpPr>
-            <a:spLocks noGrp="1"/>
-          </p:cNvSpPr>
-          <p:nvPr>
-            <p:ph type="sldImg" idx="3"/>
-          </p:nvPr>
-        </p:nvSpPr>
-        <p:spPr/>
-      </p:sp>
-      <p:sp>
-        <p:nvSpPr>
-          <p:cNvPr id="3" name="Notes Placeholder 2"/>
-          <p:cNvSpPr>
-            <a:spLocks noGrp="1"/>
-          </p:cNvSpPr>
-          <p:nvPr>
-            <p:ph type="body" idx="1"/>
-          </p:nvPr>
-        </p:nvSpPr>
-        <p:spPr/>
-        <p:txBody>
-          <a:bodyPr/>
-          <a:lstStyle/>
-          <a:p>
-            <a:r>
-              <a:t>[0:15] Next steps: five seeds on the group-aware split, full reporting with intervals, calibration and per-grade results, own-source operating points, and a matched-subset check on APTOS. Then the literature search and the thesis writing.</a:t>
-            </a:r>
-          </a:p>
-        </p:txBody>
-      </p:sp>
-      <p:sp>
-        <p:nvSpPr>
-          <p:cNvPr id="4" name="Slide Number Placeholder 3"/>
-          <p:cNvSpPr>
-            <a:spLocks noGrp="1"/>
-          </p:cNvSpPr>
-          <p:nvPr>
-            <p:ph type="sldNum" idx="12"/>
-          </p:nvPr>
-        </p:nvSpPr>
-        <p:spPr/>
-      </p:sp>
-    </p:spTree>
-  </p:cSld>
-  <p:clrMapOvr>
-    <a:masterClrMapping/>
-  </p:clrMapOvr>
-</p:notes>
-</file>
-
-<file path=ppt/notesSlides/notesSlide15.xml><?xml version="1.0" encoding="utf-8"?>
 <p:notes xmlns:a="http://schemas.openxmlformats.org/drawingml/2006/main" xmlns:p="http://schemas.openxmlformats.org/presentationml/2006/main" xmlns:r="http://schemas.openxmlformats.org/officeDocument/2006/relationships">
   <p:cSld>
     <p:spTree>
@@ -2608,7 +2466,7 @@
           <a:lstStyle/>
           <a:p>
             <a:r>
-              <a:t>[0:22] Let me start with why. The number of adults living with diabetes grew from 151 million in 2000 to 589 million in 2024. Each of them needs regular retinal screening, so the number of fundus images to grade keeps growing.</a:t>
+              <a:t>[0:22] Let me start with why I chose this. The number of adults living with diabetes grew from 151 million in 2000 to 589 million in 2024. Each of them needs regular retinal screening, so the number of fundus images to grade keeps growing.</a:t>
             </a:r>
           </a:p>
         </p:txBody>
@@ -2678,7 +2536,7 @@
           <a:lstStyle/>
           <a:p>
             <a:r>
-              <a:t>[0:20] But the screening pathway breaks down before an image is graded. About 60 percent of patients do not get an annual eye exam, grading takes specialist time, and early disease has no symptoms, so late detection lets preventable vision loss progress.</a:t>
+              <a:t>[0:25] The screening pathway breaks down before an image is graded. About 60 percent of patients do not get an annual eye exam, grading takes specialist time, and early disease has no symptoms, so late detection lets preventable vision loss progress.</a:t>
             </a:r>
           </a:p>
         </p:txBody>
@@ -2748,7 +2606,7 @@
           <a:lstStyle/>
           <a:p>
             <a:r>
-              <a:t>[0:20] So the goal is a triage aid for the ophthalmologist, not a replacement. The model reads a fundus image and gives a calibrated probability of early disease, grades 1 and 2, at a fixed specificity, so high-risk images are seen first.</a:t>
+              <a:t>[0:25] So the goal is a triage aid for the ophthalmologist, not a replacement. The model reads a fundus image and gives a calibrated probability of early disease, grades 1 and 2, at a fixed specificity, so high-risk images are seen first.</a:t>
             </a:r>
           </a:p>
         </p:txBody>
@@ -2818,7 +2676,7 @@
           <a:lstStyle/>
           <a:p>
             <a:r>
-              <a:t>[0:30] Here is an early result from my own runs. I trained on DDR and on a merge with EyePACS, and tested on held-out EyePACS patients with one frozen threshold. The original merge has specificity 0.013: it flags 99 percent of healthy images, because it learned which dataset an image came from. A source-balanced merge reaches 0.89, close to the 0.90 target. DDR alone gives 0.39.</a:t>
+              <a:t>[0:35] My research question is: does merging datasets help early detection, or does the model only learn which dataset an image came from? RQ1: does adding EyePACS to DDR improve sensitivity at a fixed specificity on sources the model has not seen? RQ2: do calibrated probabilities and a frozen threshold still hold on unseen data?</a:t>
             </a:r>
           </a:p>
         </p:txBody>
@@ -2888,7 +2746,7 @@
           <a:lstStyle/>
           <a:p>
             <a:r>
-              <a:t>[0:25] So my research question is: does merging datasets help early detection, or does the model only learn the source? RQ1: does adding EyePACS improve sensitivity at a fixed specificity on unseen sources? RQ2: do calibrated probabilities and a frozen threshold still hold on unseen data?</a:t>
+              <a:t>[0:30] This work builds on a few key pieces. Gulshan and colleagues showed deep learning for referable DR. DDR, EyePACS and APTOS are my data sources, and temperature scaling gives calibrated outputs. What I still need to do is a literature search for early-DR and merged-data studies.</a:t>
             </a:r>
           </a:p>
         </p:txBody>
@@ -2958,7 +2816,7 @@
           <a:lstStyle/>
           <a:p>
             <a:r>
-              <a:t>[0:25] This work builds on a few key pieces. Gulshan and colleagues showed deep learning for referable DR. DDR, EyePACS and APTOS are my data sources, and temperature scaling gives calibrated outputs. What I still need to do is a literature search for early-DR and merged-data studies.</a:t>
+              <a:t>[0:35] How is this different? The common target is referable DR; mine is early DR at a fixed specificity. I test the merge instead of assuming it helps, I compare imbalance methods one at a time with a control, I test on held-out patients and an external set, and I report calibrated probabilities. It is not a new network: the value is the design and the evidence.</a:t>
             </a:r>
           </a:p>
         </p:txBody>
@@ -3028,7 +2886,7 @@
           <a:lstStyle/>
           <a:p>
             <a:r>
-              <a:t>[0:25] How is this different? The common target is referable DR; mine is early DR at a fixed specificity. I test the merge instead of assuming it helps, I compare imbalance methods one at a time with a control, I test on held-out patients and an external set, and I report calibrated probabilities. It is not a new network: the value is the design and the evidence.</a:t>
+              <a:t>[0:30] The method has three arms with everything else the same. A is DDR only, B is DDR plus EyePACS source-balanced, and C is an earlier merge kept as a negative control. I also test a weighted sampler, class-balanced and focal loss, and augmentation, one at a time.</a:t>
             </a:r>
           </a:p>
         </p:txBody>
@@ -21096,7 +20954,7 @@
                 </a:solidFill>
                 <a:latin typeface="Arial"/>
               </a:rPr>
-              <a:t>Complete Model Architecture</a:t>
+              <a:t>Datasets and Experimental Setup</a:t>
             </a:r>
           </a:p>
         </p:txBody>
@@ -21110,7 +20968,7 @@
         <p:spPr>
           <a:xfrm>
             <a:off x="566928" y="932688"/>
-            <a:ext cx="5486400" cy="256032"/>
+            <a:ext cx="8138160" cy="256032"/>
           </a:xfrm>
           <a:prstGeom prst="rect">
             <a:avLst/>
@@ -21131,7 +20989,7 @@
                 </a:solidFill>
                 <a:latin typeface="Arial"/>
               </a:rPr>
-              <a:t>From fundus image to a calibrated early-DR flag</a:t>
+              <a:t>Three sources, frozen splits</a:t>
             </a:r>
           </a:p>
         </p:txBody>
@@ -21173,59 +21031,78 @@
       </p:sp>
       <p:sp>
         <p:nvSpPr>
-          <p:cNvPr id="101" name="Label train"/>
-          <p:cNvSpPr txBox="1"/>
+          <p:cNvPr id="201" name="H Dataset"/>
+          <p:cNvSpPr/>
           <p:nvPr/>
         </p:nvSpPr>
         <p:spPr>
           <a:xfrm>
-            <a:off x="502920" y="1188720"/>
-            <a:ext cx="5486400" cy="201168"/>
-          </a:xfrm>
-          <a:prstGeom prst="rect">
+            <a:off x="502920" y="1280160"/>
+            <a:ext cx="1371600" cy="292608"/>
+          </a:xfrm>
+          <a:prstGeom prst="roundRect">
             <a:avLst/>
           </a:prstGeom>
-          <a:noFill/>
+          <a:solidFill>
+            <a:srgbClr val="3D5F84"/>
+          </a:solidFill>
+          <a:ln w="9525">
+            <a:solidFill>
+              <a:srgbClr val="3D5F84"/>
+            </a:solidFill>
+          </a:ln>
         </p:spPr>
+        <p:style>
+          <a:lnRef idx="1">
+            <a:schemeClr val="accent1"/>
+          </a:lnRef>
+          <a:fillRef idx="3">
+            <a:schemeClr val="accent1"/>
+          </a:fillRef>
+          <a:effectRef idx="2">
+            <a:schemeClr val="accent1"/>
+          </a:effectRef>
+          <a:fontRef idx="minor">
+            <a:schemeClr val="lt1"/>
+          </a:fontRef>
+        </p:style>
         <p:txBody>
-          <a:bodyPr wrap="square" lIns="27432" tIns="18288" rIns="27432" bIns="18288" anchor="t">
-            <a:spAutoFit/>
-          </a:bodyPr>
+          <a:bodyPr wrap="square" lIns="91440" tIns="36576" rIns="91440" bIns="36576" rtlCol="0" anchor="ctr"/>
           <a:lstStyle/>
           <a:p>
             <a:pPr algn="l"/>
             <a:r>
-              <a:rPr sz="950" b="1">
-                <a:solidFill>
-                  <a:srgbClr val="1E7A5A"/>
+              <a:rPr sz="1050" b="1">
+                <a:solidFill>
+                  <a:srgbClr val="FFFFFF"/>
                 </a:solidFill>
                 <a:latin typeface="Arial"/>
               </a:rPr>
-              <a:t>TRAIN: one model per arm, task and seed</a:t>
+              <a:t>Dataset</a:t>
             </a:r>
           </a:p>
         </p:txBody>
       </p:sp>
       <p:sp>
         <p:nvSpPr>
-          <p:cNvPr id="102" name="Train 1"/>
+          <p:cNvPr id="202" name="H Role"/>
           <p:cNvSpPr/>
           <p:nvPr/>
         </p:nvSpPr>
         <p:spPr>
           <a:xfrm>
-            <a:off x="502920" y="1481328"/>
-            <a:ext cx="1216152" cy="914400"/>
+            <a:off x="1965960" y="1280160"/>
+            <a:ext cx="2377440" cy="292608"/>
           </a:xfrm>
           <a:prstGeom prst="roundRect">
             <a:avLst/>
           </a:prstGeom>
           <a:solidFill>
-            <a:srgbClr val="BCCFE4"/>
+            <a:srgbClr val="3D5F84"/>
           </a:solidFill>
           <a:ln w="9525">
             <a:solidFill>
-              <a:srgbClr val="BCCFE4"/>
+              <a:srgbClr val="3D5F84"/>
             </a:solidFill>
           </a:ln>
         </p:spPr>
@@ -21244,85 +21121,42 @@
           </a:fontRef>
         </p:style>
         <p:txBody>
-          <a:bodyPr wrap="square" lIns="54864" tIns="36576" rIns="54864" bIns="36576" rtlCol="0" anchor="ctr"/>
+          <a:bodyPr wrap="square" lIns="91440" tIns="36576" rIns="91440" bIns="36576" rtlCol="0" anchor="ctr"/>
           <a:lstStyle/>
           <a:p>
-            <a:pPr algn="ctr"/>
+            <a:pPr algn="l"/>
             <a:r>
-              <a:rPr sz="1000" b="1">
-                <a:solidFill>
-                  <a:srgbClr val="121212"/>
+              <a:rPr sz="1050" b="1">
+                <a:solidFill>
+                  <a:srgbClr val="FFFFFF"/>
                 </a:solidFill>
                 <a:latin typeface="Arial"/>
               </a:rPr>
-              <a:t>Fundus image</a:t>
-            </a:r>
-          </a:p>
-          <a:p>
-            <a:pPr algn="ctr"/>
-            <a:r>
-              <a:rPr sz="800" b="0">
-                <a:solidFill>
-                  <a:srgbClr val="2B2B2B"/>
-                </a:solidFill>
-                <a:latin typeface="Arial"/>
-              </a:rPr>
-              <a:t>DDR, EyePACS, APTOS; frozen patient-level splits</a:t>
+              <a:t>Role</a:t>
             </a:r>
           </a:p>
         </p:txBody>
       </p:sp>
       <p:sp>
         <p:nvSpPr>
-          <p:cNvPr id="103" name="Arrow 1"/>
+          <p:cNvPr id="203" name="H Images"/>
           <p:cNvSpPr/>
           <p:nvPr/>
         </p:nvSpPr>
         <p:spPr>
           <a:xfrm>
-            <a:off x="1746504" y="1938528"/>
-            <a:ext cx="128016" cy="0"/>
-          </a:xfrm>
-          <a:prstGeom prst="line">
-            <a:avLst/>
-          </a:prstGeom>
-          <a:noFill/>
-          <a:ln w="25400">
-            <a:solidFill>
-              <a:srgbClr val="555555"/>
-            </a:solidFill>
-            <a:prstDash val="solid"/>
-            <a:tailEnd type="triangle"/>
-          </a:ln>
-        </p:spPr>
-        <p:txBody>
-          <a:bodyPr/>
-          <a:lstStyle/>
-          <a:p>
-            <a:endParaRPr sz="1050"/>
-          </a:p>
-        </p:txBody>
-      </p:sp>
-      <p:sp>
-        <p:nvSpPr>
-          <p:cNvPr id="104" name="Train 2"/>
-          <p:cNvSpPr/>
-          <p:nvPr/>
-        </p:nvSpPr>
-        <p:spPr>
-          <a:xfrm>
-            <a:off x="1901952" y="1481328"/>
-            <a:ext cx="1216152" cy="914400"/>
+            <a:off x="4434840" y="1280160"/>
+            <a:ext cx="1737360" cy="292608"/>
           </a:xfrm>
           <a:prstGeom prst="roundRect">
             <a:avLst/>
           </a:prstGeom>
           <a:solidFill>
-            <a:srgbClr val="BCCFE4"/>
+            <a:srgbClr val="3D5F84"/>
           </a:solidFill>
           <a:ln w="9525">
             <a:solidFill>
-              <a:srgbClr val="BCCFE4"/>
+              <a:srgbClr val="3D5F84"/>
             </a:solidFill>
           </a:ln>
         </p:spPr>
@@ -21341,75 +21175,86 @@
           </a:fontRef>
         </p:style>
         <p:txBody>
-          <a:bodyPr wrap="square" lIns="54864" tIns="36576" rIns="54864" bIns="36576" rtlCol="0" anchor="ctr"/>
+          <a:bodyPr wrap="square" lIns="91440" tIns="36576" rIns="91440" bIns="36576" rtlCol="0" anchor="ctr"/>
           <a:lstStyle/>
           <a:p>
-            <a:pPr algn="ctr"/>
+            <a:pPr algn="l"/>
             <a:r>
-              <a:rPr sz="1000" b="1">
-                <a:solidFill>
-                  <a:srgbClr val="121212"/>
+              <a:rPr sz="1050" b="1">
+                <a:solidFill>
+                  <a:srgbClr val="FFFFFF"/>
                 </a:solidFill>
                 <a:latin typeface="Arial"/>
               </a:rPr>
-              <a:t>Preprocess</a:t>
-            </a:r>
-          </a:p>
-          <a:p>
-            <a:pPr algn="ctr"/>
-            <a:r>
-              <a:rPr sz="800" b="0">
-                <a:solidFill>
-                  <a:srgbClr val="2B2B2B"/>
-                </a:solidFill>
-                <a:latin typeface="Arial"/>
-              </a:rPr>
-              <a:t>Crop border, pad to square, resize to 512 px (colour norm optional)</a:t>
+              <a:t>Images</a:t>
             </a:r>
           </a:p>
         </p:txBody>
       </p:sp>
       <p:sp>
         <p:nvSpPr>
-          <p:cNvPr id="105" name="Arrow 2"/>
+          <p:cNvPr id="204" name="H Split"/>
           <p:cNvSpPr/>
           <p:nvPr/>
         </p:nvSpPr>
         <p:spPr>
           <a:xfrm>
-            <a:off x="3145536" y="1938528"/>
-            <a:ext cx="128016" cy="0"/>
-          </a:xfrm>
-          <a:prstGeom prst="line">
+            <a:off x="6263640" y="1280160"/>
+            <a:ext cx="2377440" cy="292608"/>
+          </a:xfrm>
+          <a:prstGeom prst="roundRect">
             <a:avLst/>
           </a:prstGeom>
-          <a:noFill/>
-          <a:ln w="25400">
+          <a:solidFill>
+            <a:srgbClr val="3D5F84"/>
+          </a:solidFill>
+          <a:ln w="9525">
             <a:solidFill>
-              <a:srgbClr val="555555"/>
+              <a:srgbClr val="3D5F84"/>
             </a:solidFill>
-            <a:prstDash val="solid"/>
-            <a:tailEnd type="triangle"/>
           </a:ln>
         </p:spPr>
+        <p:style>
+          <a:lnRef idx="1">
+            <a:schemeClr val="accent1"/>
+          </a:lnRef>
+          <a:fillRef idx="3">
+            <a:schemeClr val="accent1"/>
+          </a:fillRef>
+          <a:effectRef idx="2">
+            <a:schemeClr val="accent1"/>
+          </a:effectRef>
+          <a:fontRef idx="minor">
+            <a:schemeClr val="lt1"/>
+          </a:fontRef>
+        </p:style>
         <p:txBody>
-          <a:bodyPr/>
+          <a:bodyPr wrap="square" lIns="91440" tIns="36576" rIns="91440" bIns="36576" rtlCol="0" anchor="ctr"/>
           <a:lstStyle/>
           <a:p>
-            <a:endParaRPr sz="1050"/>
+            <a:pPr algn="l"/>
+            <a:r>
+              <a:rPr sz="1050" b="1">
+                <a:solidFill>
+                  <a:srgbClr val="FFFFFF"/>
+                </a:solidFill>
+                <a:latin typeface="Arial"/>
+              </a:rPr>
+              <a:t>Split</a:t>
+            </a:r>
           </a:p>
         </p:txBody>
       </p:sp>
       <p:sp>
         <p:nvSpPr>
-          <p:cNvPr id="106" name="Train 3"/>
+          <p:cNvPr id="205" name="D00.55"/>
           <p:cNvSpPr/>
           <p:nvPr/>
         </p:nvSpPr>
         <p:spPr>
           <a:xfrm>
-            <a:off x="3300984" y="1481328"/>
-            <a:ext cx="1216152" cy="914400"/>
+            <a:off x="502920" y="1627632"/>
+            <a:ext cx="1371600" cy="512064"/>
           </a:xfrm>
           <a:prstGeom prst="roundRect">
             <a:avLst/>
@@ -21438,172 +21283,32 @@
           </a:fontRef>
         </p:style>
         <p:txBody>
-          <a:bodyPr wrap="square" lIns="54864" tIns="36576" rIns="54864" bIns="36576" rtlCol="0" anchor="ctr"/>
+          <a:bodyPr wrap="square" lIns="91440" tIns="36576" rIns="91440" bIns="36576" rtlCol="0" anchor="ctr"/>
           <a:lstStyle/>
           <a:p>
-            <a:pPr algn="ctr"/>
+            <a:pPr algn="l"/>
             <a:r>
-              <a:rPr sz="1000" b="1">
-                <a:solidFill>
-                  <a:srgbClr val="121212"/>
+              <a:rPr sz="1050" b="1">
+                <a:solidFill>
+                  <a:srgbClr val="3a3a3a"/>
                 </a:solidFill>
                 <a:latin typeface="Arial"/>
               </a:rPr>
-              <a:t>Sampler + augment</a:t>
-            </a:r>
-          </a:p>
-          <a:p>
-            <a:pPr algn="ctr"/>
-            <a:r>
-              <a:rPr sz="800" b="0">
-                <a:solidFill>
-                  <a:srgbClr val="2B2B2B"/>
-                </a:solidFill>
-                <a:latin typeface="Arial"/>
-              </a:rPr>
-              <a:t>Arm B: source-balanced. Weighted, class-aware or repeat-factor. Mild or strong</a:t>
+              <a:t>DDR</a:t>
             </a:r>
           </a:p>
         </p:txBody>
       </p:sp>
       <p:sp>
         <p:nvSpPr>
-          <p:cNvPr id="107" name="Arrow 3"/>
+          <p:cNvPr id="206" name="D02.15"/>
           <p:cNvSpPr/>
           <p:nvPr/>
         </p:nvSpPr>
         <p:spPr>
           <a:xfrm>
-            <a:off x="4544568" y="1938528"/>
-            <a:ext cx="128016" cy="0"/>
-          </a:xfrm>
-          <a:prstGeom prst="line">
-            <a:avLst/>
-          </a:prstGeom>
-          <a:noFill/>
-          <a:ln w="25400">
-            <a:solidFill>
-              <a:srgbClr val="555555"/>
-            </a:solidFill>
-            <a:prstDash val="solid"/>
-            <a:tailEnd type="triangle"/>
-          </a:ln>
-        </p:spPr>
-        <p:txBody>
-          <a:bodyPr/>
-          <a:lstStyle/>
-          <a:p>
-            <a:endParaRPr sz="1050"/>
-          </a:p>
-        </p:txBody>
-      </p:sp>
-      <p:sp>
-        <p:nvSpPr>
-          <p:cNvPr id="108" name="Train 4"/>
-          <p:cNvSpPr/>
-          <p:nvPr/>
-        </p:nvSpPr>
-        <p:spPr>
-          <a:xfrm>
-            <a:off x="4700016" y="1481328"/>
-            <a:ext cx="1216152" cy="914400"/>
-          </a:xfrm>
-          <a:prstGeom prst="roundRect">
-            <a:avLst/>
-          </a:prstGeom>
-          <a:solidFill>
-            <a:srgbClr val="E3F2EA"/>
-          </a:solidFill>
-          <a:ln w="9525">
-            <a:solidFill>
-              <a:srgbClr val="1E7A5A"/>
-            </a:solidFill>
-          </a:ln>
-        </p:spPr>
-        <p:style>
-          <a:lnRef idx="1">
-            <a:schemeClr val="accent1"/>
-          </a:lnRef>
-          <a:fillRef idx="3">
-            <a:schemeClr val="accent1"/>
-          </a:fillRef>
-          <a:effectRef idx="2">
-            <a:schemeClr val="accent1"/>
-          </a:effectRef>
-          <a:fontRef idx="minor">
-            <a:schemeClr val="lt1"/>
-          </a:fontRef>
-        </p:style>
-        <p:txBody>
-          <a:bodyPr wrap="square" lIns="54864" tIns="36576" rIns="54864" bIns="36576" rtlCol="0" anchor="ctr"/>
-          <a:lstStyle/>
-          <a:p>
-            <a:pPr algn="ctr"/>
-            <a:r>
-              <a:rPr sz="1000" b="1">
-                <a:solidFill>
-                  <a:srgbClr val="121212"/>
-                </a:solidFill>
-                <a:latin typeface="Arial"/>
-              </a:rPr>
-              <a:t>Backbone</a:t>
-            </a:r>
-          </a:p>
-          <a:p>
-            <a:pPr algn="ctr"/>
-            <a:r>
-              <a:rPr sz="800" b="0">
-                <a:solidFill>
-                  <a:srgbClr val="2B2B2B"/>
-                </a:solidFill>
-                <a:latin typeface="Arial"/>
-              </a:rPr>
-              <a:t>EfficientNet-B0, ImageNet weights (ViT + RETFound as extension)</a:t>
-            </a:r>
-          </a:p>
-        </p:txBody>
-      </p:sp>
-      <p:sp>
-        <p:nvSpPr>
-          <p:cNvPr id="109" name="Arrow 4"/>
-          <p:cNvSpPr/>
-          <p:nvPr/>
-        </p:nvSpPr>
-        <p:spPr>
-          <a:xfrm>
-            <a:off x="5943600" y="1938528"/>
-            <a:ext cx="128016" cy="0"/>
-          </a:xfrm>
-          <a:prstGeom prst="line">
-            <a:avLst/>
-          </a:prstGeom>
-          <a:noFill/>
-          <a:ln w="25400">
-            <a:solidFill>
-              <a:srgbClr val="555555"/>
-            </a:solidFill>
-            <a:prstDash val="solid"/>
-            <a:tailEnd type="triangle"/>
-          </a:ln>
-        </p:spPr>
-        <p:txBody>
-          <a:bodyPr/>
-          <a:lstStyle/>
-          <a:p>
-            <a:endParaRPr sz="1050"/>
-          </a:p>
-        </p:txBody>
-      </p:sp>
-      <p:sp>
-        <p:nvSpPr>
-          <p:cNvPr id="110" name="Train 5"/>
-          <p:cNvSpPr/>
-          <p:nvPr/>
-        </p:nvSpPr>
-        <p:spPr>
-          <a:xfrm>
-            <a:off x="6099048" y="1481328"/>
-            <a:ext cx="1216152" cy="914400"/>
+            <a:off x="1965960" y="1627632"/>
+            <a:ext cx="2377440" cy="512064"/>
           </a:xfrm>
           <a:prstGeom prst="roundRect">
             <a:avLst/>
@@ -21632,75 +21337,32 @@
           </a:fontRef>
         </p:style>
         <p:txBody>
-          <a:bodyPr wrap="square" lIns="54864" tIns="36576" rIns="54864" bIns="36576" rtlCol="0" anchor="ctr"/>
+          <a:bodyPr wrap="square" lIns="91440" tIns="36576" rIns="91440" bIns="36576" rtlCol="0" anchor="ctr"/>
           <a:lstStyle/>
           <a:p>
-            <a:pPr algn="ctr"/>
+            <a:pPr algn="l"/>
             <a:r>
-              <a:rPr sz="1000" b="1">
-                <a:solidFill>
-                  <a:srgbClr val="121212"/>
+              <a:rPr sz="1050" b="0">
+                <a:solidFill>
+                  <a:srgbClr val="3a3a3a"/>
                 </a:solidFill>
                 <a:latin typeface="Arial"/>
               </a:rPr>
-              <a:t>Head (1 per run)</a:t>
-            </a:r>
-          </a:p>
-          <a:p>
-            <a:pPr algn="ctr"/>
-            <a:r>
-              <a:rPr sz="800" b="0">
-                <a:solidFill>
-                  <a:srgbClr val="2B2B2B"/>
-                </a:solidFill>
-                <a:latin typeface="Arial"/>
-              </a:rPr>
-              <a:t>0 vs 1-4, early vs late, 3-class or 5-grade</a:t>
+              <a:t>Training source and internal test</a:t>
             </a:r>
           </a:p>
         </p:txBody>
       </p:sp>
       <p:sp>
         <p:nvSpPr>
-          <p:cNvPr id="111" name="Arrow 5"/>
+          <p:cNvPr id="207" name="D04.85"/>
           <p:cNvSpPr/>
           <p:nvPr/>
         </p:nvSpPr>
         <p:spPr>
           <a:xfrm>
-            <a:off x="7342631" y="1938528"/>
-            <a:ext cx="128016" cy="0"/>
-          </a:xfrm>
-          <a:prstGeom prst="line">
-            <a:avLst/>
-          </a:prstGeom>
-          <a:noFill/>
-          <a:ln w="25400">
-            <a:solidFill>
-              <a:srgbClr val="555555"/>
-            </a:solidFill>
-            <a:prstDash val="solid"/>
-            <a:tailEnd type="triangle"/>
-          </a:ln>
-        </p:spPr>
-        <p:txBody>
-          <a:bodyPr/>
-          <a:lstStyle/>
-          <a:p>
-            <a:endParaRPr sz="1050"/>
-          </a:p>
-        </p:txBody>
-      </p:sp>
-      <p:sp>
-        <p:nvSpPr>
-          <p:cNvPr id="112" name="Train 6"/>
-          <p:cNvSpPr/>
-          <p:nvPr/>
-        </p:nvSpPr>
-        <p:spPr>
-          <a:xfrm>
-            <a:off x="7498080" y="1481328"/>
-            <a:ext cx="1216152" cy="914400"/>
+            <a:off x="4434840" y="1627632"/>
+            <a:ext cx="1737360" cy="512064"/>
           </a:xfrm>
           <a:prstGeom prst="roundRect">
             <a:avLst/>
@@ -21729,207 +21391,32 @@
           </a:fontRef>
         </p:style>
         <p:txBody>
-          <a:bodyPr wrap="square" lIns="54864" tIns="36576" rIns="54864" bIns="36576" rtlCol="0" anchor="ctr"/>
+          <a:bodyPr wrap="square" lIns="91440" tIns="36576" rIns="91440" bIns="36576" rtlCol="0" anchor="ctr"/>
           <a:lstStyle/>
           <a:p>
-            <a:pPr algn="ctr"/>
+            <a:pPr algn="l"/>
             <a:r>
-              <a:rPr sz="1000" b="1">
-                <a:solidFill>
-                  <a:srgbClr val="121212"/>
+              <a:rPr sz="1050" b="0">
+                <a:solidFill>
+                  <a:srgbClr val="3a3a3a"/>
                 </a:solidFill>
                 <a:latin typeface="Arial"/>
               </a:rPr>
-              <a:t>Loss</a:t>
-            </a:r>
-          </a:p>
-          <a:p>
-            <a:pPr algn="ctr"/>
-            <a:r>
-              <a:rPr sz="800" b="0">
-                <a:solidFill>
-                  <a:srgbClr val="2B2B2B"/>
-                </a:solidFill>
-                <a:latin typeface="Arial"/>
-              </a:rPr>
-              <a:t>Cross-entropy, class-balanced CE, or focal (gamma 1-3)</a:t>
+              <a:t>12,522</a:t>
             </a:r>
           </a:p>
         </p:txBody>
       </p:sp>
       <p:sp>
         <p:nvSpPr>
-          <p:cNvPr id="113" name="Arrow down"/>
+          <p:cNvPr id="208" name="D06.85"/>
           <p:cNvSpPr/>
           <p:nvPr/>
         </p:nvSpPr>
         <p:spPr>
           <a:xfrm>
-            <a:off x="8106156" y="2423160"/>
-            <a:ext cx="0" cy="502920"/>
-          </a:xfrm>
-          <a:prstGeom prst="line">
-            <a:avLst/>
-          </a:prstGeom>
-          <a:noFill/>
-          <a:ln w="25400">
-            <a:solidFill>
-              <a:srgbClr val="555555"/>
-            </a:solidFill>
-            <a:prstDash val="solid"/>
-            <a:tailEnd type="triangle"/>
-          </a:ln>
-        </p:spPr>
-        <p:txBody>
-          <a:bodyPr/>
-          <a:lstStyle/>
-          <a:p>
-            <a:endParaRPr sz="1050"/>
-          </a:p>
-        </p:txBody>
-      </p:sp>
-      <p:sp>
-        <p:nvSpPr>
-          <p:cNvPr id="114" name="Label validate"/>
-          <p:cNvSpPr txBox="1"/>
-          <p:nvPr/>
-        </p:nvSpPr>
-        <p:spPr>
-          <a:xfrm>
-            <a:off x="502920" y="2651760"/>
-            <a:ext cx="5486400" cy="201168"/>
-          </a:xfrm>
-          <a:prstGeom prst="rect">
-            <a:avLst/>
-          </a:prstGeom>
-          <a:noFill/>
-        </p:spPr>
-        <p:txBody>
-          <a:bodyPr wrap="square" lIns="27432" tIns="18288" rIns="27432" bIns="18288" anchor="t">
-            <a:spAutoFit/>
-          </a:bodyPr>
-          <a:lstStyle/>
-          <a:p>
-            <a:pPr algn="l"/>
-            <a:r>
-              <a:rPr sz="950" b="1">
-                <a:solidFill>
-                  <a:srgbClr val="1E7A5A"/>
-                </a:solidFill>
-                <a:latin typeface="Arial"/>
-              </a:rPr>
-              <a:t>VALIDATE AND FREEZE, THEN TEST</a:t>
-            </a:r>
-          </a:p>
-        </p:txBody>
-      </p:sp>
-      <p:sp>
-        <p:nvSpPr>
-          <p:cNvPr id="115" name="Eval 1"/>
-          <p:cNvSpPr/>
-          <p:nvPr/>
-        </p:nvSpPr>
-        <p:spPr>
-          <a:xfrm>
-            <a:off x="7251192" y="3017520"/>
-            <a:ext cx="1463040" cy="914400"/>
-          </a:xfrm>
-          <a:prstGeom prst="roundRect">
-            <a:avLst/>
-          </a:prstGeom>
-          <a:solidFill>
-            <a:srgbClr val="BCCFE4"/>
-          </a:solidFill>
-          <a:ln w="9525">
-            <a:solidFill>
-              <a:srgbClr val="BCCFE4"/>
-            </a:solidFill>
-          </a:ln>
-        </p:spPr>
-        <p:style>
-          <a:lnRef idx="1">
-            <a:schemeClr val="accent1"/>
-          </a:lnRef>
-          <a:fillRef idx="3">
-            <a:schemeClr val="accent1"/>
-          </a:fillRef>
-          <a:effectRef idx="2">
-            <a:schemeClr val="accent1"/>
-          </a:effectRef>
-          <a:fontRef idx="minor">
-            <a:schemeClr val="lt1"/>
-          </a:fontRef>
-        </p:style>
-        <p:txBody>
-          <a:bodyPr wrap="square" lIns="54864" tIns="36576" rIns="54864" bIns="36576" rtlCol="0" anchor="ctr"/>
-          <a:lstStyle/>
-          <a:p>
-            <a:pPr algn="ctr"/>
-            <a:r>
-              <a:rPr sz="1000" b="1">
-                <a:solidFill>
-                  <a:srgbClr val="121212"/>
-                </a:solidFill>
-                <a:latin typeface="Arial"/>
-              </a:rPr>
-              <a:t>Best epoch</a:t>
-            </a:r>
-          </a:p>
-          <a:p>
-            <a:pPr algn="ctr"/>
-            <a:r>
-              <a:rPr sz="800" b="0">
-                <a:solidFill>
-                  <a:srgbClr val="2B2B2B"/>
-                </a:solidFill>
-                <a:latin typeface="Arial"/>
-              </a:rPr>
-              <a:t>Chosen on validation score only</a:t>
-            </a:r>
-          </a:p>
-        </p:txBody>
-      </p:sp>
-      <p:sp>
-        <p:nvSpPr>
-          <p:cNvPr id="116" name="Arrow back 1"/>
-          <p:cNvSpPr/>
-          <p:nvPr/>
-        </p:nvSpPr>
-        <p:spPr>
-          <a:xfrm flipH="1">
-            <a:off x="7054596" y="3474720"/>
-            <a:ext cx="169164" cy="0"/>
-          </a:xfrm>
-          <a:prstGeom prst="line">
-            <a:avLst/>
-          </a:prstGeom>
-          <a:noFill/>
-          <a:ln w="25400">
-            <a:solidFill>
-              <a:srgbClr val="555555"/>
-            </a:solidFill>
-            <a:prstDash val="solid"/>
-            <a:tailEnd type="triangle"/>
-          </a:ln>
-        </p:spPr>
-        <p:txBody>
-          <a:bodyPr/>
-          <a:lstStyle/>
-          <a:p>
-            <a:endParaRPr sz="1050"/>
-          </a:p>
-        </p:txBody>
-      </p:sp>
-      <p:sp>
-        <p:nvSpPr>
-          <p:cNvPr id="117" name="Eval 2"/>
-          <p:cNvSpPr/>
-          <p:nvPr/>
-        </p:nvSpPr>
-        <p:spPr>
-          <a:xfrm>
-            <a:off x="5564124" y="3017520"/>
-            <a:ext cx="1463040" cy="914400"/>
+            <a:off x="6263640" y="1627632"/>
+            <a:ext cx="2377440" cy="512064"/>
           </a:xfrm>
           <a:prstGeom prst="roundRect">
             <a:avLst/>
@@ -21958,75 +21445,32 @@
           </a:fontRef>
         </p:style>
         <p:txBody>
-          <a:bodyPr wrap="square" lIns="54864" tIns="36576" rIns="54864" bIns="36576" rtlCol="0" anchor="ctr"/>
+          <a:bodyPr wrap="square" lIns="91440" tIns="36576" rIns="91440" bIns="36576" rtlCol="0" anchor="ctr"/>
           <a:lstStyle/>
           <a:p>
-            <a:pPr algn="ctr"/>
+            <a:pPr algn="l"/>
             <a:r>
-              <a:rPr sz="1000" b="1">
-                <a:solidFill>
-                  <a:srgbClr val="121212"/>
+              <a:rPr sz="1050" b="0">
+                <a:solidFill>
+                  <a:srgbClr val="3a3a3a"/>
                 </a:solidFill>
                 <a:latin typeface="Arial"/>
               </a:rPr>
-              <a:t>Temperature scaling</a:t>
-            </a:r>
-          </a:p>
-          <a:p>
-            <a:pPr algn="ctr"/>
-            <a:r>
-              <a:rPr sz="800" b="0">
-                <a:solidFill>
-                  <a:srgbClr val="2B2B2B"/>
-                </a:solidFill>
-                <a:latin typeface="Arial"/>
-              </a:rPr>
-              <a:t>One number T, fitted on validation</a:t>
+              <a:t>Random 60/20/20 (patient IDs not available)</a:t>
             </a:r>
           </a:p>
         </p:txBody>
       </p:sp>
       <p:sp>
         <p:nvSpPr>
-          <p:cNvPr id="118" name="Arrow back 2"/>
-          <p:cNvSpPr/>
-          <p:nvPr/>
-        </p:nvSpPr>
-        <p:spPr>
-          <a:xfrm flipH="1">
-            <a:off x="5367528" y="3474720"/>
-            <a:ext cx="169164" cy="0"/>
-          </a:xfrm>
-          <a:prstGeom prst="line">
-            <a:avLst/>
-          </a:prstGeom>
-          <a:noFill/>
-          <a:ln w="25400">
-            <a:solidFill>
-              <a:srgbClr val="555555"/>
-            </a:solidFill>
-            <a:prstDash val="solid"/>
-            <a:tailEnd type="triangle"/>
-          </a:ln>
-        </p:spPr>
-        <p:txBody>
-          <a:bodyPr/>
-          <a:lstStyle/>
-          <a:p>
-            <a:endParaRPr sz="1050"/>
-          </a:p>
-        </p:txBody>
-      </p:sp>
-      <p:sp>
-        <p:nvSpPr>
-          <p:cNvPr id="119" name="Eval 3"/>
+          <p:cNvPr id="209" name="D10.55"/>
           <p:cNvSpPr/>
           <p:nvPr/>
         </p:nvSpPr>
         <p:spPr>
           <a:xfrm>
-            <a:off x="3877056" y="3017520"/>
-            <a:ext cx="1463040" cy="914400"/>
+            <a:off x="502920" y="2194560"/>
+            <a:ext cx="1371600" cy="512064"/>
           </a:xfrm>
           <a:prstGeom prst="roundRect">
             <a:avLst/>
@@ -22055,75 +21499,32 @@
           </a:fontRef>
         </p:style>
         <p:txBody>
-          <a:bodyPr wrap="square" lIns="54864" tIns="36576" rIns="54864" bIns="36576" rtlCol="0" anchor="ctr"/>
+          <a:bodyPr wrap="square" lIns="91440" tIns="36576" rIns="91440" bIns="36576" rtlCol="0" anchor="ctr"/>
           <a:lstStyle/>
           <a:p>
-            <a:pPr algn="ctr"/>
+            <a:pPr algn="l"/>
             <a:r>
-              <a:rPr sz="1000" b="1">
-                <a:solidFill>
-                  <a:srgbClr val="121212"/>
+              <a:rPr sz="1050" b="1">
+                <a:solidFill>
+                  <a:srgbClr val="3a3a3a"/>
                 </a:solidFill>
                 <a:latin typeface="Arial"/>
               </a:rPr>
-              <a:t>Prior-shift correction</a:t>
-            </a:r>
-          </a:p>
-          <a:p>
-            <a:pPr algn="ctr"/>
-            <a:r>
-              <a:rPr sz="800" b="0">
-                <a:solidFill>
-                  <a:srgbClr val="2B2B2B"/>
-                </a:solidFill>
-                <a:latin typeface="Arial"/>
-              </a:rPr>
-              <a:t>Training class mix back to natural prevalence</a:t>
+              <a:t>EyePACS</a:t>
             </a:r>
           </a:p>
         </p:txBody>
       </p:sp>
       <p:sp>
         <p:nvSpPr>
-          <p:cNvPr id="120" name="Arrow back 3"/>
-          <p:cNvSpPr/>
-          <p:nvPr/>
-        </p:nvSpPr>
-        <p:spPr>
-          <a:xfrm flipH="1">
-            <a:off x="3680460" y="3474720"/>
-            <a:ext cx="169164" cy="0"/>
-          </a:xfrm>
-          <a:prstGeom prst="line">
-            <a:avLst/>
-          </a:prstGeom>
-          <a:noFill/>
-          <a:ln w="25400">
-            <a:solidFill>
-              <a:srgbClr val="555555"/>
-            </a:solidFill>
-            <a:prstDash val="solid"/>
-            <a:tailEnd type="triangle"/>
-          </a:ln>
-        </p:spPr>
-        <p:txBody>
-          <a:bodyPr/>
-          <a:lstStyle/>
-          <a:p>
-            <a:endParaRPr sz="1050"/>
-          </a:p>
-        </p:txBody>
-      </p:sp>
-      <p:sp>
-        <p:nvSpPr>
-          <p:cNvPr id="121" name="Eval 4"/>
+          <p:cNvPr id="210" name="D12.15"/>
           <p:cNvSpPr/>
           <p:nvPr/>
         </p:nvSpPr>
         <p:spPr>
           <a:xfrm>
-            <a:off x="2189988" y="3017520"/>
-            <a:ext cx="1463040" cy="914400"/>
+            <a:off x="1965960" y="2194560"/>
+            <a:ext cx="2377440" cy="512064"/>
           </a:xfrm>
           <a:prstGeom prst="roundRect">
             <a:avLst/>
@@ -22152,85 +21553,42 @@
           </a:fontRef>
         </p:style>
         <p:txBody>
-          <a:bodyPr wrap="square" lIns="54864" tIns="36576" rIns="54864" bIns="36576" rtlCol="0" anchor="ctr"/>
+          <a:bodyPr wrap="square" lIns="91440" tIns="36576" rIns="91440" bIns="36576" rtlCol="0" anchor="ctr"/>
           <a:lstStyle/>
           <a:p>
-            <a:pPr algn="ctr"/>
+            <a:pPr algn="l"/>
             <a:r>
-              <a:rPr sz="1000" b="1">
-                <a:solidFill>
-                  <a:srgbClr val="121212"/>
+              <a:rPr sz="1050" b="0">
+                <a:solidFill>
+                  <a:srgbClr val="3a3a3a"/>
                 </a:solidFill>
                 <a:latin typeface="Arial"/>
               </a:rPr>
-              <a:t>Frozen threshold</a:t>
-            </a:r>
-          </a:p>
-          <a:p>
-            <a:pPr algn="ctr"/>
-            <a:r>
-              <a:rPr sz="800" b="0">
-                <a:solidFill>
-                  <a:srgbClr val="2B2B2B"/>
-                </a:solidFill>
-                <a:latin typeface="Arial"/>
-              </a:rPr>
-              <a:t>Set at the declared specificity (0.90) on validation</a:t>
+              <a:t>Second source; held-out test</a:t>
             </a:r>
           </a:p>
         </p:txBody>
       </p:sp>
       <p:sp>
         <p:nvSpPr>
-          <p:cNvPr id="122" name="Arrow back 4"/>
-          <p:cNvSpPr/>
-          <p:nvPr/>
-        </p:nvSpPr>
-        <p:spPr>
-          <a:xfrm flipH="1">
-            <a:off x="1993392" y="3474720"/>
-            <a:ext cx="169164" cy="0"/>
-          </a:xfrm>
-          <a:prstGeom prst="line">
-            <a:avLst/>
-          </a:prstGeom>
-          <a:noFill/>
-          <a:ln w="25400">
-            <a:solidFill>
-              <a:srgbClr val="555555"/>
-            </a:solidFill>
-            <a:prstDash val="solid"/>
-            <a:tailEnd type="triangle"/>
-          </a:ln>
-        </p:spPr>
-        <p:txBody>
-          <a:bodyPr/>
-          <a:lstStyle/>
-          <a:p>
-            <a:endParaRPr sz="1050"/>
-          </a:p>
-        </p:txBody>
-      </p:sp>
-      <p:sp>
-        <p:nvSpPr>
-          <p:cNvPr id="123" name="Eval 5"/>
+          <p:cNvPr id="211" name="D14.85"/>
           <p:cNvSpPr/>
           <p:nvPr/>
         </p:nvSpPr>
         <p:spPr>
           <a:xfrm>
-            <a:off x="502920" y="3017520"/>
-            <a:ext cx="1463040" cy="914400"/>
+            <a:off x="4434840" y="2194560"/>
+            <a:ext cx="1737360" cy="512064"/>
           </a:xfrm>
           <a:prstGeom prst="roundRect">
             <a:avLst/>
           </a:prstGeom>
           <a:solidFill>
-            <a:srgbClr val="FFF0B3"/>
+            <a:srgbClr val="FFFFFF"/>
           </a:solidFill>
           <a:ln w="9525">
             <a:solidFill>
-              <a:srgbClr val="E0B400"/>
+              <a:srgbClr val="CDD2D7"/>
             </a:solidFill>
           </a:ln>
         </p:spPr>
@@ -22249,44 +21607,434 @@
           </a:fontRef>
         </p:style>
         <p:txBody>
-          <a:bodyPr wrap="square" lIns="54864" tIns="36576" rIns="54864" bIns="36576" rtlCol="0" anchor="ctr"/>
+          <a:bodyPr wrap="square" lIns="91440" tIns="36576" rIns="91440" bIns="36576" rtlCol="0" anchor="ctr"/>
           <a:lstStyle/>
           <a:p>
-            <a:pPr algn="ctr"/>
+            <a:pPr algn="l"/>
             <a:r>
-              <a:rPr sz="1000" b="1">
-                <a:solidFill>
-                  <a:srgbClr val="121212"/>
+              <a:rPr sz="1050" b="0">
+                <a:solidFill>
+                  <a:srgbClr val="3a3a3a"/>
                 </a:solidFill>
                 <a:latin typeface="Arial"/>
               </a:rPr>
-              <a:t>Outputs</a:t>
-            </a:r>
-          </a:p>
-          <a:p>
-            <a:pPr algn="ctr"/>
-            <a:r>
-              <a:rPr sz="800" b="0">
-                <a:solidFill>
-                  <a:srgbClr val="2B2B2B"/>
-                </a:solidFill>
-                <a:latin typeface="Arial"/>
-              </a:rPr>
-              <a:t>Calibrated probability, early-DR flag, per-source metrics with 95% CI</a:t>
+              <a:t>35,108</a:t>
             </a:r>
           </a:p>
         </p:txBody>
       </p:sp>
       <p:sp>
         <p:nvSpPr>
-          <p:cNvPr id="124" name="Banner"/>
+          <p:cNvPr id="212" name="D16.85"/>
           <p:cNvSpPr/>
           <p:nvPr/>
         </p:nvSpPr>
         <p:spPr>
           <a:xfrm>
-            <a:off x="502920" y="4133087"/>
-            <a:ext cx="8211312" cy="384048"/>
+            <a:off x="6263640" y="2194560"/>
+            <a:ext cx="2377440" cy="512064"/>
+          </a:xfrm>
+          <a:prstGeom prst="roundRect">
+            <a:avLst/>
+          </a:prstGeom>
+          <a:solidFill>
+            <a:srgbClr val="FFFFFF"/>
+          </a:solidFill>
+          <a:ln w="9525">
+            <a:solidFill>
+              <a:srgbClr val="CDD2D7"/>
+            </a:solidFill>
+          </a:ln>
+        </p:spPr>
+        <p:style>
+          <a:lnRef idx="1">
+            <a:schemeClr val="accent1"/>
+          </a:lnRef>
+          <a:fillRef idx="3">
+            <a:schemeClr val="accent1"/>
+          </a:fillRef>
+          <a:effectRef idx="2">
+            <a:schemeClr val="accent1"/>
+          </a:effectRef>
+          <a:fontRef idx="minor">
+            <a:schemeClr val="lt1"/>
+          </a:fontRef>
+        </p:style>
+        <p:txBody>
+          <a:bodyPr wrap="square" lIns="91440" tIns="36576" rIns="91440" bIns="36576" rtlCol="0" anchor="ctr"/>
+          <a:lstStyle/>
+          <a:p>
+            <a:pPr algn="l"/>
+            <a:r>
+              <a:rPr sz="1050" b="0">
+                <a:solidFill>
+                  <a:srgbClr val="3a3a3a"/>
+                </a:solidFill>
+                <a:latin typeface="Arial"/>
+              </a:rPr>
+              <a:t>By patient, 70/15/15</a:t>
+            </a:r>
+          </a:p>
+        </p:txBody>
+      </p:sp>
+      <p:sp>
+        <p:nvSpPr>
+          <p:cNvPr id="213" name="D20.55"/>
+          <p:cNvSpPr/>
+          <p:nvPr/>
+        </p:nvSpPr>
+        <p:spPr>
+          <a:xfrm>
+            <a:off x="502920" y="2761488"/>
+            <a:ext cx="1371600" cy="512064"/>
+          </a:xfrm>
+          <a:prstGeom prst="roundRect">
+            <a:avLst/>
+          </a:prstGeom>
+          <a:solidFill>
+            <a:srgbClr val="FFFFFF"/>
+          </a:solidFill>
+          <a:ln w="9525">
+            <a:solidFill>
+              <a:srgbClr val="CDD2D7"/>
+            </a:solidFill>
+          </a:ln>
+        </p:spPr>
+        <p:style>
+          <a:lnRef idx="1">
+            <a:schemeClr val="accent1"/>
+          </a:lnRef>
+          <a:fillRef idx="3">
+            <a:schemeClr val="accent1"/>
+          </a:fillRef>
+          <a:effectRef idx="2">
+            <a:schemeClr val="accent1"/>
+          </a:effectRef>
+          <a:fontRef idx="minor">
+            <a:schemeClr val="lt1"/>
+          </a:fontRef>
+        </p:style>
+        <p:txBody>
+          <a:bodyPr wrap="square" lIns="91440" tIns="36576" rIns="91440" bIns="36576" rtlCol="0" anchor="ctr"/>
+          <a:lstStyle/>
+          <a:p>
+            <a:pPr algn="l"/>
+            <a:r>
+              <a:rPr sz="1050" b="1">
+                <a:solidFill>
+                  <a:srgbClr val="3a3a3a"/>
+                </a:solidFill>
+                <a:latin typeface="Arial"/>
+              </a:rPr>
+              <a:t>APTOS</a:t>
+            </a:r>
+          </a:p>
+        </p:txBody>
+      </p:sp>
+      <p:sp>
+        <p:nvSpPr>
+          <p:cNvPr id="214" name="D22.15"/>
+          <p:cNvSpPr/>
+          <p:nvPr/>
+        </p:nvSpPr>
+        <p:spPr>
+          <a:xfrm>
+            <a:off x="1965960" y="2761488"/>
+            <a:ext cx="2377440" cy="512064"/>
+          </a:xfrm>
+          <a:prstGeom prst="roundRect">
+            <a:avLst/>
+          </a:prstGeom>
+          <a:solidFill>
+            <a:srgbClr val="FFFFFF"/>
+          </a:solidFill>
+          <a:ln w="9525">
+            <a:solidFill>
+              <a:srgbClr val="CDD2D7"/>
+            </a:solidFill>
+          </a:ln>
+        </p:spPr>
+        <p:style>
+          <a:lnRef idx="1">
+            <a:schemeClr val="accent1"/>
+          </a:lnRef>
+          <a:fillRef idx="3">
+            <a:schemeClr val="accent1"/>
+          </a:fillRef>
+          <a:effectRef idx="2">
+            <a:schemeClr val="accent1"/>
+          </a:effectRef>
+          <a:fontRef idx="minor">
+            <a:schemeClr val="lt1"/>
+          </a:fontRef>
+        </p:style>
+        <p:txBody>
+          <a:bodyPr wrap="square" lIns="91440" tIns="36576" rIns="91440" bIns="36576" rtlCol="0" anchor="ctr"/>
+          <a:lstStyle/>
+          <a:p>
+            <a:pPr algn="l"/>
+            <a:r>
+              <a:rPr sz="1050" b="0">
+                <a:solidFill>
+                  <a:srgbClr val="3a3a3a"/>
+                </a:solidFill>
+                <a:latin typeface="Arial"/>
+              </a:rPr>
+              <a:t>External test only</a:t>
+            </a:r>
+          </a:p>
+        </p:txBody>
+      </p:sp>
+      <p:sp>
+        <p:nvSpPr>
+          <p:cNvPr id="215" name="D24.85"/>
+          <p:cNvSpPr/>
+          <p:nvPr/>
+        </p:nvSpPr>
+        <p:spPr>
+          <a:xfrm>
+            <a:off x="4434840" y="2761488"/>
+            <a:ext cx="1737360" cy="512064"/>
+          </a:xfrm>
+          <a:prstGeom prst="roundRect">
+            <a:avLst/>
+          </a:prstGeom>
+          <a:solidFill>
+            <a:srgbClr val="FFFFFF"/>
+          </a:solidFill>
+          <a:ln w="9525">
+            <a:solidFill>
+              <a:srgbClr val="CDD2D7"/>
+            </a:solidFill>
+          </a:ln>
+        </p:spPr>
+        <p:style>
+          <a:lnRef idx="1">
+            <a:schemeClr val="accent1"/>
+          </a:lnRef>
+          <a:fillRef idx="3">
+            <a:schemeClr val="accent1"/>
+          </a:fillRef>
+          <a:effectRef idx="2">
+            <a:schemeClr val="accent1"/>
+          </a:effectRef>
+          <a:fontRef idx="minor">
+            <a:schemeClr val="lt1"/>
+          </a:fontRef>
+        </p:style>
+        <p:txBody>
+          <a:bodyPr wrap="square" lIns="91440" tIns="36576" rIns="91440" bIns="36576" rtlCol="0" anchor="ctr"/>
+          <a:lstStyle/>
+          <a:p>
+            <a:pPr algn="l"/>
+            <a:r>
+              <a:rPr sz="1050" b="0">
+                <a:solidFill>
+                  <a:srgbClr val="3a3a3a"/>
+                </a:solidFill>
+                <a:latin typeface="Arial"/>
+              </a:rPr>
+              <a:t>3,662</a:t>
+            </a:r>
+          </a:p>
+        </p:txBody>
+      </p:sp>
+      <p:sp>
+        <p:nvSpPr>
+          <p:cNvPr id="216" name="D26.85"/>
+          <p:cNvSpPr/>
+          <p:nvPr/>
+        </p:nvSpPr>
+        <p:spPr>
+          <a:xfrm>
+            <a:off x="6263640" y="2761488"/>
+            <a:ext cx="2377440" cy="512064"/>
+          </a:xfrm>
+          <a:prstGeom prst="roundRect">
+            <a:avLst/>
+          </a:prstGeom>
+          <a:solidFill>
+            <a:srgbClr val="FFFFFF"/>
+          </a:solidFill>
+          <a:ln w="9525">
+            <a:solidFill>
+              <a:srgbClr val="CDD2D7"/>
+            </a:solidFill>
+          </a:ln>
+        </p:spPr>
+        <p:style>
+          <a:lnRef idx="1">
+            <a:schemeClr val="accent1"/>
+          </a:lnRef>
+          <a:fillRef idx="3">
+            <a:schemeClr val="accent1"/>
+          </a:fillRef>
+          <a:effectRef idx="2">
+            <a:schemeClr val="accent1"/>
+          </a:effectRef>
+          <a:fontRef idx="minor">
+            <a:schemeClr val="lt1"/>
+          </a:fontRef>
+        </p:style>
+        <p:txBody>
+          <a:bodyPr wrap="square" lIns="91440" tIns="36576" rIns="91440" bIns="36576" rtlCol="0" anchor="ctr"/>
+          <a:lstStyle/>
+          <a:p>
+            <a:pPr algn="l"/>
+            <a:r>
+              <a:rPr sz="1050" b="0">
+                <a:solidFill>
+                  <a:srgbClr val="3a3a3a"/>
+                </a:solidFill>
+                <a:latin typeface="Arial"/>
+              </a:rPr>
+              <a:t>Never used for training or selection</a:t>
+            </a:r>
+          </a:p>
+        </p:txBody>
+      </p:sp>
+      <p:sp>
+        <p:nvSpPr>
+          <p:cNvPr id="217" name="Model"/>
+          <p:cNvSpPr/>
+          <p:nvPr/>
+        </p:nvSpPr>
+        <p:spPr>
+          <a:xfrm>
+            <a:off x="502920" y="3429000"/>
+            <a:ext cx="3977639" cy="777240"/>
+          </a:xfrm>
+          <a:prstGeom prst="roundRect">
+            <a:avLst/>
+          </a:prstGeom>
+          <a:solidFill>
+            <a:srgbClr val="E4ECF6"/>
+          </a:solidFill>
+          <a:ln w="9525">
+            <a:solidFill>
+              <a:srgbClr val="BCCFE4"/>
+            </a:solidFill>
+          </a:ln>
+        </p:spPr>
+        <p:style>
+          <a:lnRef idx="1">
+            <a:schemeClr val="accent1"/>
+          </a:lnRef>
+          <a:fillRef idx="3">
+            <a:schemeClr val="accent1"/>
+          </a:fillRef>
+          <a:effectRef idx="2">
+            <a:schemeClr val="accent1"/>
+          </a:effectRef>
+          <a:fontRef idx="minor">
+            <a:schemeClr val="lt1"/>
+          </a:fontRef>
+        </p:style>
+        <p:txBody>
+          <a:bodyPr wrap="square" lIns="91440" tIns="36576" rIns="91440" bIns="36576" rtlCol="0" anchor="ctr"/>
+          <a:lstStyle/>
+          <a:p>
+            <a:pPr algn="l"/>
+            <a:r>
+              <a:rPr sz="1100" b="1">
+                <a:solidFill>
+                  <a:srgbClr val="121212"/>
+                </a:solidFill>
+                <a:latin typeface="Arial"/>
+              </a:rPr>
+              <a:t>Model and training</a:t>
+            </a:r>
+          </a:p>
+          <a:p>
+            <a:pPr algn="l"/>
+            <a:r>
+              <a:rPr sz="1050" b="0">
+                <a:solidFill>
+                  <a:srgbClr val="3a3a3a"/>
+                </a:solidFill>
+                <a:latin typeface="Arial"/>
+              </a:rPr>
+              <a:t>EfficientNet-B0, 512 px, 3 seeds, Kaggle GPU</a:t>
+            </a:r>
+          </a:p>
+        </p:txBody>
+      </p:sp>
+      <p:sp>
+        <p:nvSpPr>
+          <p:cNvPr id="218" name="Calib"/>
+          <p:cNvSpPr/>
+          <p:nvPr/>
+        </p:nvSpPr>
+        <p:spPr>
+          <a:xfrm>
+            <a:off x="4663440" y="3429000"/>
+            <a:ext cx="3977639" cy="777240"/>
+          </a:xfrm>
+          <a:prstGeom prst="roundRect">
+            <a:avLst/>
+          </a:prstGeom>
+          <a:solidFill>
+            <a:srgbClr val="E4ECF6"/>
+          </a:solidFill>
+          <a:ln w="9525">
+            <a:solidFill>
+              <a:srgbClr val="BCCFE4"/>
+            </a:solidFill>
+          </a:ln>
+        </p:spPr>
+        <p:style>
+          <a:lnRef idx="1">
+            <a:schemeClr val="accent1"/>
+          </a:lnRef>
+          <a:fillRef idx="3">
+            <a:schemeClr val="accent1"/>
+          </a:fillRef>
+          <a:effectRef idx="2">
+            <a:schemeClr val="accent1"/>
+          </a:effectRef>
+          <a:fontRef idx="minor">
+            <a:schemeClr val="lt1"/>
+          </a:fontRef>
+        </p:style>
+        <p:txBody>
+          <a:bodyPr wrap="square" lIns="91440" tIns="36576" rIns="91440" bIns="36576" rtlCol="0" anchor="ctr"/>
+          <a:lstStyle/>
+          <a:p>
+            <a:pPr algn="l"/>
+            <a:r>
+              <a:rPr sz="1100" b="1">
+                <a:solidFill>
+                  <a:srgbClr val="121212"/>
+                </a:solidFill>
+                <a:latin typeface="Arial"/>
+              </a:rPr>
+              <a:t>Calibration</a:t>
+            </a:r>
+          </a:p>
+          <a:p>
+            <a:pPr algn="l"/>
+            <a:r>
+              <a:rPr sz="1050" b="0">
+                <a:solidFill>
+                  <a:srgbClr val="3a3a3a"/>
+                </a:solidFill>
+                <a:latin typeface="Arial"/>
+              </a:rPr>
+              <a:t>Temperature and prior shift on validation; threshold at specificity 0.90</a:t>
+            </a:r>
+          </a:p>
+        </p:txBody>
+      </p:sp>
+      <p:sp>
+        <p:nvSpPr>
+          <p:cNvPr id="219" name="Banner"/>
+          <p:cNvSpPr/>
+          <p:nvPr/>
+        </p:nvSpPr>
+        <p:spPr>
+          <a:xfrm>
+            <a:off x="502920" y="4315968"/>
+            <a:ext cx="8138160" cy="365760"/>
           </a:xfrm>
           <a:prstGeom prst="roundRect">
             <a:avLst/>
@@ -22315,18 +22063,18 @@
           </a:fontRef>
         </p:style>
         <p:txBody>
-          <a:bodyPr wrap="square" lIns="54864" tIns="36576" rIns="54864" bIns="36576" rtlCol="0" anchor="ctr"/>
+          <a:bodyPr wrap="square" lIns="91440" tIns="36576" rIns="91440" bIns="36576" rtlCol="0" anchor="ctr"/>
           <a:lstStyle/>
           <a:p>
             <a:pPr algn="ctr"/>
             <a:r>
-              <a:rPr sz="980" b="1">
+              <a:rPr sz="1100" b="1">
                 <a:solidFill>
                   <a:srgbClr val="121212"/>
                 </a:solidFill>
                 <a:latin typeface="Arial"/>
               </a:rPr>
-              <a:t>Test sets opened once: DDR + held-out EyePACS, then APTOS last. Grad-CAM with a randomised-weights check.</a:t>
+              <a:t>Splits are frozen files; test sets are opened only through a declared analysis.</a:t>
             </a:r>
           </a:p>
         </p:txBody>
@@ -22384,7 +22132,7 @@
                 </a:solidFill>
                 <a:latin typeface="Arial"/>
               </a:rPr>
-              <a:t>Datasets and Experimental Setup</a:t>
+              <a:t>Next Steps</a:t>
             </a:r>
           </a:p>
         </p:txBody>
@@ -22419,7 +22167,7 @@
                 </a:solidFill>
                 <a:latin typeface="Arial"/>
               </a:rPr>
-              <a:t>Three sources, frozen splits</a:t>
+              <a:t>What is planned</a:t>
             </a:r>
           </a:p>
         </p:txBody>
@@ -22461,24 +22209,26 @@
       </p:sp>
       <p:sp>
         <p:nvSpPr>
-          <p:cNvPr id="201" name="H Dataset"/>
+          <p:cNvPr id="201" name="Steps"/>
           <p:cNvSpPr/>
           <p:nvPr/>
         </p:nvSpPr>
         <p:spPr>
           <a:xfrm>
             <a:off x="502920" y="1280160"/>
-            <a:ext cx="1371600" cy="292608"/>
+            <a:ext cx="8138160" cy="2377440"/>
           </a:xfrm>
           <a:prstGeom prst="roundRect">
-            <a:avLst/>
+            <a:avLst>
+              <a:gd name="adj" fmla="val 6000"/>
+            </a:avLst>
           </a:prstGeom>
           <a:solidFill>
-            <a:srgbClr val="3D5F84"/>
+            <a:srgbClr val="FFFFFF"/>
           </a:solidFill>
           <a:ln w="9525">
             <a:solidFill>
-              <a:srgbClr val="3D5F84"/>
+              <a:srgbClr val="FFFFFF"/>
             </a:solidFill>
           </a:ln>
         </p:spPr>
@@ -22502,837 +22252,75 @@
           <a:p>
             <a:pPr algn="l"/>
             <a:r>
-              <a:rPr sz="1050" b="1">
-                <a:solidFill>
-                  <a:srgbClr val="FFFFFF"/>
+              <a:rPr sz="1600" b="0">
+                <a:solidFill>
+                  <a:srgbClr val="3a3a3a"/>
                 </a:solidFill>
                 <a:latin typeface="Arial"/>
               </a:rPr>
-              <a:t>Dataset</a:t>
+              <a:t>• Train the three data arms with several seeds on frozen patient-level splits</a:t>
+            </a:r>
+          </a:p>
+          <a:p>
+            <a:pPr algn="l"/>
+            <a:r>
+              <a:rPr sz="1600" b="0">
+                <a:solidFill>
+                  <a:srgbClr val="3a3a3a"/>
+                </a:solidFill>
+                <a:latin typeface="Arial"/>
+              </a:rPr>
+              <a:t>• Compare sampler, loss and augmentation methods one at a time</a:t>
+            </a:r>
+          </a:p>
+          <a:p>
+            <a:pPr algn="l"/>
+            <a:r>
+              <a:rPr sz="1600" b="0">
+                <a:solidFill>
+                  <a:srgbClr val="3a3a3a"/>
+                </a:solidFill>
+                <a:latin typeface="Arial"/>
+              </a:rPr>
+              <a:t>• Test on held-out EyePACS patients and APTOS, with 95% confidence intervals</a:t>
+            </a:r>
+          </a:p>
+          <a:p>
+            <a:pPr algn="l"/>
+            <a:r>
+              <a:rPr sz="1600" b="0">
+                <a:solidFill>
+                  <a:srgbClr val="3a3a3a"/>
+                </a:solidFill>
+                <a:latin typeface="Arial"/>
+              </a:rPr>
+              <a:t>• Calibrate probabilities and report sensitivity at a fixed specificity</a:t>
+            </a:r>
+          </a:p>
+          <a:p>
+            <a:pPr algn="l"/>
+            <a:r>
+              <a:rPr sz="1600" b="0">
+                <a:solidFill>
+                  <a:srgbClr val="3a3a3a"/>
+                </a:solidFill>
+                <a:latin typeface="Arial"/>
+              </a:rPr>
+              <a:t>• Finish the literature search and write the thesis</a:t>
             </a:r>
           </a:p>
         </p:txBody>
       </p:sp>
       <p:sp>
         <p:nvSpPr>
-          <p:cNvPr id="202" name="H Role"/>
+          <p:cNvPr id="202" name="Later"/>
           <p:cNvSpPr/>
           <p:nvPr/>
         </p:nvSpPr>
         <p:spPr>
           <a:xfrm>
-            <a:off x="1965960" y="1280160"/>
-            <a:ext cx="2377440" cy="292608"/>
-          </a:xfrm>
-          <a:prstGeom prst="roundRect">
-            <a:avLst/>
-          </a:prstGeom>
-          <a:solidFill>
-            <a:srgbClr val="3D5F84"/>
-          </a:solidFill>
-          <a:ln w="9525">
-            <a:solidFill>
-              <a:srgbClr val="3D5F84"/>
-            </a:solidFill>
-          </a:ln>
-        </p:spPr>
-        <p:style>
-          <a:lnRef idx="1">
-            <a:schemeClr val="accent1"/>
-          </a:lnRef>
-          <a:fillRef idx="3">
-            <a:schemeClr val="accent1"/>
-          </a:fillRef>
-          <a:effectRef idx="2">
-            <a:schemeClr val="accent1"/>
-          </a:effectRef>
-          <a:fontRef idx="minor">
-            <a:schemeClr val="lt1"/>
-          </a:fontRef>
-        </p:style>
-        <p:txBody>
-          <a:bodyPr wrap="square" lIns="91440" tIns="36576" rIns="91440" bIns="36576" rtlCol="0" anchor="ctr"/>
-          <a:lstStyle/>
-          <a:p>
-            <a:pPr algn="l"/>
-            <a:r>
-              <a:rPr sz="1050" b="1">
-                <a:solidFill>
-                  <a:srgbClr val="FFFFFF"/>
-                </a:solidFill>
-                <a:latin typeface="Arial"/>
-              </a:rPr>
-              <a:t>Role</a:t>
-            </a:r>
-          </a:p>
-        </p:txBody>
-      </p:sp>
-      <p:sp>
-        <p:nvSpPr>
-          <p:cNvPr id="203" name="H Images"/>
-          <p:cNvSpPr/>
-          <p:nvPr/>
-        </p:nvSpPr>
-        <p:spPr>
-          <a:xfrm>
-            <a:off x="4434840" y="1280160"/>
-            <a:ext cx="1737360" cy="292608"/>
-          </a:xfrm>
-          <a:prstGeom prst="roundRect">
-            <a:avLst/>
-          </a:prstGeom>
-          <a:solidFill>
-            <a:srgbClr val="3D5F84"/>
-          </a:solidFill>
-          <a:ln w="9525">
-            <a:solidFill>
-              <a:srgbClr val="3D5F84"/>
-            </a:solidFill>
-          </a:ln>
-        </p:spPr>
-        <p:style>
-          <a:lnRef idx="1">
-            <a:schemeClr val="accent1"/>
-          </a:lnRef>
-          <a:fillRef idx="3">
-            <a:schemeClr val="accent1"/>
-          </a:fillRef>
-          <a:effectRef idx="2">
-            <a:schemeClr val="accent1"/>
-          </a:effectRef>
-          <a:fontRef idx="minor">
-            <a:schemeClr val="lt1"/>
-          </a:fontRef>
-        </p:style>
-        <p:txBody>
-          <a:bodyPr wrap="square" lIns="91440" tIns="36576" rIns="91440" bIns="36576" rtlCol="0" anchor="ctr"/>
-          <a:lstStyle/>
-          <a:p>
-            <a:pPr algn="l"/>
-            <a:r>
-              <a:rPr sz="1050" b="1">
-                <a:solidFill>
-                  <a:srgbClr val="FFFFFF"/>
-                </a:solidFill>
-                <a:latin typeface="Arial"/>
-              </a:rPr>
-              <a:t>Images</a:t>
-            </a:r>
-          </a:p>
-        </p:txBody>
-      </p:sp>
-      <p:sp>
-        <p:nvSpPr>
-          <p:cNvPr id="204" name="H Split"/>
-          <p:cNvSpPr/>
-          <p:nvPr/>
-        </p:nvSpPr>
-        <p:spPr>
-          <a:xfrm>
-            <a:off x="6263640" y="1280160"/>
-            <a:ext cx="2377440" cy="292608"/>
-          </a:xfrm>
-          <a:prstGeom prst="roundRect">
-            <a:avLst/>
-          </a:prstGeom>
-          <a:solidFill>
-            <a:srgbClr val="3D5F84"/>
-          </a:solidFill>
-          <a:ln w="9525">
-            <a:solidFill>
-              <a:srgbClr val="3D5F84"/>
-            </a:solidFill>
-          </a:ln>
-        </p:spPr>
-        <p:style>
-          <a:lnRef idx="1">
-            <a:schemeClr val="accent1"/>
-          </a:lnRef>
-          <a:fillRef idx="3">
-            <a:schemeClr val="accent1"/>
-          </a:fillRef>
-          <a:effectRef idx="2">
-            <a:schemeClr val="accent1"/>
-          </a:effectRef>
-          <a:fontRef idx="minor">
-            <a:schemeClr val="lt1"/>
-          </a:fontRef>
-        </p:style>
-        <p:txBody>
-          <a:bodyPr wrap="square" lIns="91440" tIns="36576" rIns="91440" bIns="36576" rtlCol="0" anchor="ctr"/>
-          <a:lstStyle/>
-          <a:p>
-            <a:pPr algn="l"/>
-            <a:r>
-              <a:rPr sz="1050" b="1">
-                <a:solidFill>
-                  <a:srgbClr val="FFFFFF"/>
-                </a:solidFill>
-                <a:latin typeface="Arial"/>
-              </a:rPr>
-              <a:t>Split</a:t>
-            </a:r>
-          </a:p>
-        </p:txBody>
-      </p:sp>
-      <p:sp>
-        <p:nvSpPr>
-          <p:cNvPr id="205" name="D00.55"/>
-          <p:cNvSpPr/>
-          <p:nvPr/>
-        </p:nvSpPr>
-        <p:spPr>
-          <a:xfrm>
-            <a:off x="502920" y="1627632"/>
-            <a:ext cx="1371600" cy="512064"/>
-          </a:xfrm>
-          <a:prstGeom prst="roundRect">
-            <a:avLst/>
-          </a:prstGeom>
-          <a:solidFill>
-            <a:srgbClr val="FFFFFF"/>
-          </a:solidFill>
-          <a:ln w="9525">
-            <a:solidFill>
-              <a:srgbClr val="CDD2D7"/>
-            </a:solidFill>
-          </a:ln>
-        </p:spPr>
-        <p:style>
-          <a:lnRef idx="1">
-            <a:schemeClr val="accent1"/>
-          </a:lnRef>
-          <a:fillRef idx="3">
-            <a:schemeClr val="accent1"/>
-          </a:fillRef>
-          <a:effectRef idx="2">
-            <a:schemeClr val="accent1"/>
-          </a:effectRef>
-          <a:fontRef idx="minor">
-            <a:schemeClr val="lt1"/>
-          </a:fontRef>
-        </p:style>
-        <p:txBody>
-          <a:bodyPr wrap="square" lIns="91440" tIns="36576" rIns="91440" bIns="36576" rtlCol="0" anchor="ctr"/>
-          <a:lstStyle/>
-          <a:p>
-            <a:pPr algn="l"/>
-            <a:r>
-              <a:rPr sz="1050" b="1">
-                <a:solidFill>
-                  <a:srgbClr val="3a3a3a"/>
-                </a:solidFill>
-                <a:latin typeface="Arial"/>
-              </a:rPr>
-              <a:t>DDR</a:t>
-            </a:r>
-          </a:p>
-        </p:txBody>
-      </p:sp>
-      <p:sp>
-        <p:nvSpPr>
-          <p:cNvPr id="206" name="D02.15"/>
-          <p:cNvSpPr/>
-          <p:nvPr/>
-        </p:nvSpPr>
-        <p:spPr>
-          <a:xfrm>
-            <a:off x="1965960" y="1627632"/>
-            <a:ext cx="2377440" cy="512064"/>
-          </a:xfrm>
-          <a:prstGeom prst="roundRect">
-            <a:avLst/>
-          </a:prstGeom>
-          <a:solidFill>
-            <a:srgbClr val="FFFFFF"/>
-          </a:solidFill>
-          <a:ln w="9525">
-            <a:solidFill>
-              <a:srgbClr val="CDD2D7"/>
-            </a:solidFill>
-          </a:ln>
-        </p:spPr>
-        <p:style>
-          <a:lnRef idx="1">
-            <a:schemeClr val="accent1"/>
-          </a:lnRef>
-          <a:fillRef idx="3">
-            <a:schemeClr val="accent1"/>
-          </a:fillRef>
-          <a:effectRef idx="2">
-            <a:schemeClr val="accent1"/>
-          </a:effectRef>
-          <a:fontRef idx="minor">
-            <a:schemeClr val="lt1"/>
-          </a:fontRef>
-        </p:style>
-        <p:txBody>
-          <a:bodyPr wrap="square" lIns="91440" tIns="36576" rIns="91440" bIns="36576" rtlCol="0" anchor="ctr"/>
-          <a:lstStyle/>
-          <a:p>
-            <a:pPr algn="l"/>
-            <a:r>
-              <a:rPr sz="1050" b="0">
-                <a:solidFill>
-                  <a:srgbClr val="3a3a3a"/>
-                </a:solidFill>
-                <a:latin typeface="Arial"/>
-              </a:rPr>
-              <a:t>Training source and internal test</a:t>
-            </a:r>
-          </a:p>
-        </p:txBody>
-      </p:sp>
-      <p:sp>
-        <p:nvSpPr>
-          <p:cNvPr id="207" name="D04.85"/>
-          <p:cNvSpPr/>
-          <p:nvPr/>
-        </p:nvSpPr>
-        <p:spPr>
-          <a:xfrm>
-            <a:off x="4434840" y="1627632"/>
-            <a:ext cx="1737360" cy="512064"/>
-          </a:xfrm>
-          <a:prstGeom prst="roundRect">
-            <a:avLst/>
-          </a:prstGeom>
-          <a:solidFill>
-            <a:srgbClr val="FFFFFF"/>
-          </a:solidFill>
-          <a:ln w="9525">
-            <a:solidFill>
-              <a:srgbClr val="CDD2D7"/>
-            </a:solidFill>
-          </a:ln>
-        </p:spPr>
-        <p:style>
-          <a:lnRef idx="1">
-            <a:schemeClr val="accent1"/>
-          </a:lnRef>
-          <a:fillRef idx="3">
-            <a:schemeClr val="accent1"/>
-          </a:fillRef>
-          <a:effectRef idx="2">
-            <a:schemeClr val="accent1"/>
-          </a:effectRef>
-          <a:fontRef idx="minor">
-            <a:schemeClr val="lt1"/>
-          </a:fontRef>
-        </p:style>
-        <p:txBody>
-          <a:bodyPr wrap="square" lIns="91440" tIns="36576" rIns="91440" bIns="36576" rtlCol="0" anchor="ctr"/>
-          <a:lstStyle/>
-          <a:p>
-            <a:pPr algn="l"/>
-            <a:r>
-              <a:rPr sz="1050" b="0">
-                <a:solidFill>
-                  <a:srgbClr val="3a3a3a"/>
-                </a:solidFill>
-                <a:latin typeface="Arial"/>
-              </a:rPr>
-              <a:t>12,522</a:t>
-            </a:r>
-          </a:p>
-        </p:txBody>
-      </p:sp>
-      <p:sp>
-        <p:nvSpPr>
-          <p:cNvPr id="208" name="D06.85"/>
-          <p:cNvSpPr/>
-          <p:nvPr/>
-        </p:nvSpPr>
-        <p:spPr>
-          <a:xfrm>
-            <a:off x="6263640" y="1627632"/>
-            <a:ext cx="2377440" cy="512064"/>
-          </a:xfrm>
-          <a:prstGeom prst="roundRect">
-            <a:avLst/>
-          </a:prstGeom>
-          <a:solidFill>
-            <a:srgbClr val="FFFFFF"/>
-          </a:solidFill>
-          <a:ln w="9525">
-            <a:solidFill>
-              <a:srgbClr val="CDD2D7"/>
-            </a:solidFill>
-          </a:ln>
-        </p:spPr>
-        <p:style>
-          <a:lnRef idx="1">
-            <a:schemeClr val="accent1"/>
-          </a:lnRef>
-          <a:fillRef idx="3">
-            <a:schemeClr val="accent1"/>
-          </a:fillRef>
-          <a:effectRef idx="2">
-            <a:schemeClr val="accent1"/>
-          </a:effectRef>
-          <a:fontRef idx="minor">
-            <a:schemeClr val="lt1"/>
-          </a:fontRef>
-        </p:style>
-        <p:txBody>
-          <a:bodyPr wrap="square" lIns="91440" tIns="36576" rIns="91440" bIns="36576" rtlCol="0" anchor="ctr"/>
-          <a:lstStyle/>
-          <a:p>
-            <a:pPr algn="l"/>
-            <a:r>
-              <a:rPr sz="1050" b="0">
-                <a:solidFill>
-                  <a:srgbClr val="3a3a3a"/>
-                </a:solidFill>
-                <a:latin typeface="Arial"/>
-              </a:rPr>
-              <a:t>60/20/20 (group-aware version also built)</a:t>
-            </a:r>
-          </a:p>
-        </p:txBody>
-      </p:sp>
-      <p:sp>
-        <p:nvSpPr>
-          <p:cNvPr id="209" name="D10.55"/>
-          <p:cNvSpPr/>
-          <p:nvPr/>
-        </p:nvSpPr>
-        <p:spPr>
-          <a:xfrm>
-            <a:off x="502920" y="2194560"/>
-            <a:ext cx="1371600" cy="512064"/>
-          </a:xfrm>
-          <a:prstGeom prst="roundRect">
-            <a:avLst/>
-          </a:prstGeom>
-          <a:solidFill>
-            <a:srgbClr val="FFFFFF"/>
-          </a:solidFill>
-          <a:ln w="9525">
-            <a:solidFill>
-              <a:srgbClr val="CDD2D7"/>
-            </a:solidFill>
-          </a:ln>
-        </p:spPr>
-        <p:style>
-          <a:lnRef idx="1">
-            <a:schemeClr val="accent1"/>
-          </a:lnRef>
-          <a:fillRef idx="3">
-            <a:schemeClr val="accent1"/>
-          </a:fillRef>
-          <a:effectRef idx="2">
-            <a:schemeClr val="accent1"/>
-          </a:effectRef>
-          <a:fontRef idx="minor">
-            <a:schemeClr val="lt1"/>
-          </a:fontRef>
-        </p:style>
-        <p:txBody>
-          <a:bodyPr wrap="square" lIns="91440" tIns="36576" rIns="91440" bIns="36576" rtlCol="0" anchor="ctr"/>
-          <a:lstStyle/>
-          <a:p>
-            <a:pPr algn="l"/>
-            <a:r>
-              <a:rPr sz="1050" b="1">
-                <a:solidFill>
-                  <a:srgbClr val="3a3a3a"/>
-                </a:solidFill>
-                <a:latin typeface="Arial"/>
-              </a:rPr>
-              <a:t>EyePACS</a:t>
-            </a:r>
-          </a:p>
-        </p:txBody>
-      </p:sp>
-      <p:sp>
-        <p:nvSpPr>
-          <p:cNvPr id="210" name="D12.15"/>
-          <p:cNvSpPr/>
-          <p:nvPr/>
-        </p:nvSpPr>
-        <p:spPr>
-          <a:xfrm>
-            <a:off x="1965960" y="2194560"/>
-            <a:ext cx="2377440" cy="512064"/>
-          </a:xfrm>
-          <a:prstGeom prst="roundRect">
-            <a:avLst/>
-          </a:prstGeom>
-          <a:solidFill>
-            <a:srgbClr val="FFFFFF"/>
-          </a:solidFill>
-          <a:ln w="9525">
-            <a:solidFill>
-              <a:srgbClr val="CDD2D7"/>
-            </a:solidFill>
-          </a:ln>
-        </p:spPr>
-        <p:style>
-          <a:lnRef idx="1">
-            <a:schemeClr val="accent1"/>
-          </a:lnRef>
-          <a:fillRef idx="3">
-            <a:schemeClr val="accent1"/>
-          </a:fillRef>
-          <a:effectRef idx="2">
-            <a:schemeClr val="accent1"/>
-          </a:effectRef>
-          <a:fontRef idx="minor">
-            <a:schemeClr val="lt1"/>
-          </a:fontRef>
-        </p:style>
-        <p:txBody>
-          <a:bodyPr wrap="square" lIns="91440" tIns="36576" rIns="91440" bIns="36576" rtlCol="0" anchor="ctr"/>
-          <a:lstStyle/>
-          <a:p>
-            <a:pPr algn="l"/>
-            <a:r>
-              <a:rPr sz="1050" b="0">
-                <a:solidFill>
-                  <a:srgbClr val="3a3a3a"/>
-                </a:solidFill>
-                <a:latin typeface="Arial"/>
-              </a:rPr>
-              <a:t>Second source; held-out test</a:t>
-            </a:r>
-          </a:p>
-        </p:txBody>
-      </p:sp>
-      <p:sp>
-        <p:nvSpPr>
-          <p:cNvPr id="211" name="D14.85"/>
-          <p:cNvSpPr/>
-          <p:nvPr/>
-        </p:nvSpPr>
-        <p:spPr>
-          <a:xfrm>
-            <a:off x="4434840" y="2194560"/>
-            <a:ext cx="1737360" cy="512064"/>
-          </a:xfrm>
-          <a:prstGeom prst="roundRect">
-            <a:avLst/>
-          </a:prstGeom>
-          <a:solidFill>
-            <a:srgbClr val="FFFFFF"/>
-          </a:solidFill>
-          <a:ln w="9525">
-            <a:solidFill>
-              <a:srgbClr val="CDD2D7"/>
-            </a:solidFill>
-          </a:ln>
-        </p:spPr>
-        <p:style>
-          <a:lnRef idx="1">
-            <a:schemeClr val="accent1"/>
-          </a:lnRef>
-          <a:fillRef idx="3">
-            <a:schemeClr val="accent1"/>
-          </a:fillRef>
-          <a:effectRef idx="2">
-            <a:schemeClr val="accent1"/>
-          </a:effectRef>
-          <a:fontRef idx="minor">
-            <a:schemeClr val="lt1"/>
-          </a:fontRef>
-        </p:style>
-        <p:txBody>
-          <a:bodyPr wrap="square" lIns="91440" tIns="36576" rIns="91440" bIns="36576" rtlCol="0" anchor="ctr"/>
-          <a:lstStyle/>
-          <a:p>
-            <a:pPr algn="l"/>
-            <a:r>
-              <a:rPr sz="1050" b="0">
-                <a:solidFill>
-                  <a:srgbClr val="3a3a3a"/>
-                </a:solidFill>
-                <a:latin typeface="Arial"/>
-              </a:rPr>
-              <a:t>35,108</a:t>
-            </a:r>
-          </a:p>
-        </p:txBody>
-      </p:sp>
-      <p:sp>
-        <p:nvSpPr>
-          <p:cNvPr id="212" name="D16.85"/>
-          <p:cNvSpPr/>
-          <p:nvPr/>
-        </p:nvSpPr>
-        <p:spPr>
-          <a:xfrm>
-            <a:off x="6263640" y="2194560"/>
-            <a:ext cx="2377440" cy="512064"/>
-          </a:xfrm>
-          <a:prstGeom prst="roundRect">
-            <a:avLst/>
-          </a:prstGeom>
-          <a:solidFill>
-            <a:srgbClr val="FFFFFF"/>
-          </a:solidFill>
-          <a:ln w="9525">
-            <a:solidFill>
-              <a:srgbClr val="CDD2D7"/>
-            </a:solidFill>
-          </a:ln>
-        </p:spPr>
-        <p:style>
-          <a:lnRef idx="1">
-            <a:schemeClr val="accent1"/>
-          </a:lnRef>
-          <a:fillRef idx="3">
-            <a:schemeClr val="accent1"/>
-          </a:fillRef>
-          <a:effectRef idx="2">
-            <a:schemeClr val="accent1"/>
-          </a:effectRef>
-          <a:fontRef idx="minor">
-            <a:schemeClr val="lt1"/>
-          </a:fontRef>
-        </p:style>
-        <p:txBody>
-          <a:bodyPr wrap="square" lIns="91440" tIns="36576" rIns="91440" bIns="36576" rtlCol="0" anchor="ctr"/>
-          <a:lstStyle/>
-          <a:p>
-            <a:pPr algn="l"/>
-            <a:r>
-              <a:rPr sz="1050" b="0">
-                <a:solidFill>
-                  <a:srgbClr val="3a3a3a"/>
-                </a:solidFill>
-                <a:latin typeface="Arial"/>
-              </a:rPr>
-              <a:t>By patient, 70/15/15</a:t>
-            </a:r>
-          </a:p>
-        </p:txBody>
-      </p:sp>
-      <p:sp>
-        <p:nvSpPr>
-          <p:cNvPr id="213" name="D20.55"/>
-          <p:cNvSpPr/>
-          <p:nvPr/>
-        </p:nvSpPr>
-        <p:spPr>
-          <a:xfrm>
-            <a:off x="502920" y="2761488"/>
-            <a:ext cx="1371600" cy="512064"/>
-          </a:xfrm>
-          <a:prstGeom prst="roundRect">
-            <a:avLst/>
-          </a:prstGeom>
-          <a:solidFill>
-            <a:srgbClr val="FFFFFF"/>
-          </a:solidFill>
-          <a:ln w="9525">
-            <a:solidFill>
-              <a:srgbClr val="CDD2D7"/>
-            </a:solidFill>
-          </a:ln>
-        </p:spPr>
-        <p:style>
-          <a:lnRef idx="1">
-            <a:schemeClr val="accent1"/>
-          </a:lnRef>
-          <a:fillRef idx="3">
-            <a:schemeClr val="accent1"/>
-          </a:fillRef>
-          <a:effectRef idx="2">
-            <a:schemeClr val="accent1"/>
-          </a:effectRef>
-          <a:fontRef idx="minor">
-            <a:schemeClr val="lt1"/>
-          </a:fontRef>
-        </p:style>
-        <p:txBody>
-          <a:bodyPr wrap="square" lIns="91440" tIns="36576" rIns="91440" bIns="36576" rtlCol="0" anchor="ctr"/>
-          <a:lstStyle/>
-          <a:p>
-            <a:pPr algn="l"/>
-            <a:r>
-              <a:rPr sz="1050" b="1">
-                <a:solidFill>
-                  <a:srgbClr val="3a3a3a"/>
-                </a:solidFill>
-                <a:latin typeface="Arial"/>
-              </a:rPr>
-              <a:t>APTOS</a:t>
-            </a:r>
-          </a:p>
-        </p:txBody>
-      </p:sp>
-      <p:sp>
-        <p:nvSpPr>
-          <p:cNvPr id="214" name="D22.15"/>
-          <p:cNvSpPr/>
-          <p:nvPr/>
-        </p:nvSpPr>
-        <p:spPr>
-          <a:xfrm>
-            <a:off x="1965960" y="2761488"/>
-            <a:ext cx="2377440" cy="512064"/>
-          </a:xfrm>
-          <a:prstGeom prst="roundRect">
-            <a:avLst/>
-          </a:prstGeom>
-          <a:solidFill>
-            <a:srgbClr val="FFFFFF"/>
-          </a:solidFill>
-          <a:ln w="9525">
-            <a:solidFill>
-              <a:srgbClr val="CDD2D7"/>
-            </a:solidFill>
-          </a:ln>
-        </p:spPr>
-        <p:style>
-          <a:lnRef idx="1">
-            <a:schemeClr val="accent1"/>
-          </a:lnRef>
-          <a:fillRef idx="3">
-            <a:schemeClr val="accent1"/>
-          </a:fillRef>
-          <a:effectRef idx="2">
-            <a:schemeClr val="accent1"/>
-          </a:effectRef>
-          <a:fontRef idx="minor">
-            <a:schemeClr val="lt1"/>
-          </a:fontRef>
-        </p:style>
-        <p:txBody>
-          <a:bodyPr wrap="square" lIns="91440" tIns="36576" rIns="91440" bIns="36576" rtlCol="0" anchor="ctr"/>
-          <a:lstStyle/>
-          <a:p>
-            <a:pPr algn="l"/>
-            <a:r>
-              <a:rPr sz="1050" b="0">
-                <a:solidFill>
-                  <a:srgbClr val="3a3a3a"/>
-                </a:solidFill>
-                <a:latin typeface="Arial"/>
-              </a:rPr>
-              <a:t>External test only</a:t>
-            </a:r>
-          </a:p>
-        </p:txBody>
-      </p:sp>
-      <p:sp>
-        <p:nvSpPr>
-          <p:cNvPr id="215" name="D24.85"/>
-          <p:cNvSpPr/>
-          <p:nvPr/>
-        </p:nvSpPr>
-        <p:spPr>
-          <a:xfrm>
-            <a:off x="4434840" y="2761488"/>
-            <a:ext cx="1737360" cy="512064"/>
-          </a:xfrm>
-          <a:prstGeom prst="roundRect">
-            <a:avLst/>
-          </a:prstGeom>
-          <a:solidFill>
-            <a:srgbClr val="FFFFFF"/>
-          </a:solidFill>
-          <a:ln w="9525">
-            <a:solidFill>
-              <a:srgbClr val="CDD2D7"/>
-            </a:solidFill>
-          </a:ln>
-        </p:spPr>
-        <p:style>
-          <a:lnRef idx="1">
-            <a:schemeClr val="accent1"/>
-          </a:lnRef>
-          <a:fillRef idx="3">
-            <a:schemeClr val="accent1"/>
-          </a:fillRef>
-          <a:effectRef idx="2">
-            <a:schemeClr val="accent1"/>
-          </a:effectRef>
-          <a:fontRef idx="minor">
-            <a:schemeClr val="lt1"/>
-          </a:fontRef>
-        </p:style>
-        <p:txBody>
-          <a:bodyPr wrap="square" lIns="91440" tIns="36576" rIns="91440" bIns="36576" rtlCol="0" anchor="ctr"/>
-          <a:lstStyle/>
-          <a:p>
-            <a:pPr algn="l"/>
-            <a:r>
-              <a:rPr sz="1050" b="0">
-                <a:solidFill>
-                  <a:srgbClr val="3a3a3a"/>
-                </a:solidFill>
-                <a:latin typeface="Arial"/>
-              </a:rPr>
-              <a:t>3,662</a:t>
-            </a:r>
-          </a:p>
-        </p:txBody>
-      </p:sp>
-      <p:sp>
-        <p:nvSpPr>
-          <p:cNvPr id="216" name="D26.85"/>
-          <p:cNvSpPr/>
-          <p:nvPr/>
-        </p:nvSpPr>
-        <p:spPr>
-          <a:xfrm>
-            <a:off x="6263640" y="2761488"/>
-            <a:ext cx="2377440" cy="512064"/>
-          </a:xfrm>
-          <a:prstGeom prst="roundRect">
-            <a:avLst/>
-          </a:prstGeom>
-          <a:solidFill>
-            <a:srgbClr val="FFFFFF"/>
-          </a:solidFill>
-          <a:ln w="9525">
-            <a:solidFill>
-              <a:srgbClr val="CDD2D7"/>
-            </a:solidFill>
-          </a:ln>
-        </p:spPr>
-        <p:style>
-          <a:lnRef idx="1">
-            <a:schemeClr val="accent1"/>
-          </a:lnRef>
-          <a:fillRef idx="3">
-            <a:schemeClr val="accent1"/>
-          </a:fillRef>
-          <a:effectRef idx="2">
-            <a:schemeClr val="accent1"/>
-          </a:effectRef>
-          <a:fontRef idx="minor">
-            <a:schemeClr val="lt1"/>
-          </a:fontRef>
-        </p:style>
-        <p:txBody>
-          <a:bodyPr wrap="square" lIns="91440" tIns="36576" rIns="91440" bIns="36576" rtlCol="0" anchor="ctr"/>
-          <a:lstStyle/>
-          <a:p>
-            <a:pPr algn="l"/>
-            <a:r>
-              <a:rPr sz="1050" b="0">
-                <a:solidFill>
-                  <a:srgbClr val="3a3a3a"/>
-                </a:solidFill>
-                <a:latin typeface="Arial"/>
-              </a:rPr>
-              <a:t>Never used for training or selection</a:t>
-            </a:r>
-          </a:p>
-        </p:txBody>
-      </p:sp>
-      <p:sp>
-        <p:nvSpPr>
-          <p:cNvPr id="217" name="Model"/>
-          <p:cNvSpPr/>
-          <p:nvPr/>
-        </p:nvSpPr>
-        <p:spPr>
-          <a:xfrm>
-            <a:off x="502920" y="3429000"/>
-            <a:ext cx="3977639" cy="777240"/>
+            <a:off x="502920" y="3703320"/>
+            <a:ext cx="8138160" cy="502920"/>
           </a:xfrm>
           <a:prstGeom prst="roundRect">
             <a:avLst/>
@@ -23366,145 +22354,13 @@
           <a:p>
             <a:pPr algn="l"/>
             <a:r>
-              <a:rPr sz="1100" b="1">
-                <a:solidFill>
-                  <a:srgbClr val="121212"/>
+              <a:rPr sz="1100" b="0">
+                <a:solidFill>
+                  <a:srgbClr val="3a3a3a"/>
                 </a:solidFill>
                 <a:latin typeface="Arial"/>
               </a:rPr>
-              <a:t>Model and training</a:t>
-            </a:r>
-          </a:p>
-          <a:p>
-            <a:pPr algn="l"/>
-            <a:r>
-              <a:rPr sz="1050" b="0">
-                <a:solidFill>
-                  <a:srgbClr val="3a3a3a"/>
-                </a:solidFill>
-                <a:latin typeface="Arial"/>
-              </a:rPr>
-              <a:t>EfficientNet-B0, 512 px, 3 seeds, Kaggle GPU</a:t>
-            </a:r>
-          </a:p>
-        </p:txBody>
-      </p:sp>
-      <p:sp>
-        <p:nvSpPr>
-          <p:cNvPr id="218" name="Calib"/>
-          <p:cNvSpPr/>
-          <p:nvPr/>
-        </p:nvSpPr>
-        <p:spPr>
-          <a:xfrm>
-            <a:off x="4663440" y="3429000"/>
-            <a:ext cx="3977639" cy="777240"/>
-          </a:xfrm>
-          <a:prstGeom prst="roundRect">
-            <a:avLst/>
-          </a:prstGeom>
-          <a:solidFill>
-            <a:srgbClr val="E4ECF6"/>
-          </a:solidFill>
-          <a:ln w="9525">
-            <a:solidFill>
-              <a:srgbClr val="BCCFE4"/>
-            </a:solidFill>
-          </a:ln>
-        </p:spPr>
-        <p:style>
-          <a:lnRef idx="1">
-            <a:schemeClr val="accent1"/>
-          </a:lnRef>
-          <a:fillRef idx="3">
-            <a:schemeClr val="accent1"/>
-          </a:fillRef>
-          <a:effectRef idx="2">
-            <a:schemeClr val="accent1"/>
-          </a:effectRef>
-          <a:fontRef idx="minor">
-            <a:schemeClr val="lt1"/>
-          </a:fontRef>
-        </p:style>
-        <p:txBody>
-          <a:bodyPr wrap="square" lIns="91440" tIns="36576" rIns="91440" bIns="36576" rtlCol="0" anchor="ctr"/>
-          <a:lstStyle/>
-          <a:p>
-            <a:pPr algn="l"/>
-            <a:r>
-              <a:rPr sz="1100" b="1">
-                <a:solidFill>
-                  <a:srgbClr val="121212"/>
-                </a:solidFill>
-                <a:latin typeface="Arial"/>
-              </a:rPr>
-              <a:t>Calibration</a:t>
-            </a:r>
-          </a:p>
-          <a:p>
-            <a:pPr algn="l"/>
-            <a:r>
-              <a:rPr sz="1050" b="0">
-                <a:solidFill>
-                  <a:srgbClr val="3a3a3a"/>
-                </a:solidFill>
-                <a:latin typeface="Arial"/>
-              </a:rPr>
-              <a:t>Temperature and prior shift on validation; threshold at specificity 0.90</a:t>
-            </a:r>
-          </a:p>
-        </p:txBody>
-      </p:sp>
-      <p:sp>
-        <p:nvSpPr>
-          <p:cNvPr id="219" name="Banner"/>
-          <p:cNvSpPr/>
-          <p:nvPr/>
-        </p:nvSpPr>
-        <p:spPr>
-          <a:xfrm>
-            <a:off x="502920" y="4315968"/>
-            <a:ext cx="8138160" cy="365760"/>
-          </a:xfrm>
-          <a:prstGeom prst="roundRect">
-            <a:avLst/>
-          </a:prstGeom>
-          <a:solidFill>
-            <a:srgbClr val="F2F5F8"/>
-          </a:solidFill>
-          <a:ln w="9525">
-            <a:solidFill>
-              <a:srgbClr val="CDD2D7"/>
-            </a:solidFill>
-          </a:ln>
-        </p:spPr>
-        <p:style>
-          <a:lnRef idx="1">
-            <a:schemeClr val="accent1"/>
-          </a:lnRef>
-          <a:fillRef idx="3">
-            <a:schemeClr val="accent1"/>
-          </a:fillRef>
-          <a:effectRef idx="2">
-            <a:schemeClr val="accent1"/>
-          </a:effectRef>
-          <a:fontRef idx="minor">
-            <a:schemeClr val="lt1"/>
-          </a:fontRef>
-        </p:style>
-        <p:txBody>
-          <a:bodyPr wrap="square" lIns="91440" tIns="36576" rIns="91440" bIns="36576" rtlCol="0" anchor="ctr"/>
-          <a:lstStyle/>
-          <a:p>
-            <a:pPr algn="ctr"/>
-            <a:r>
-              <a:rPr sz="1100" b="1">
-                <a:solidFill>
-                  <a:srgbClr val="121212"/>
-                </a:solidFill>
-                <a:latin typeface="Arial"/>
-              </a:rPr>
-              <a:t>Splits are frozen files; test sets are opened only through a declared analysis.</a:t>
+              <a:t>Later, as an extension: an external check on IDRiD.</a:t>
             </a:r>
           </a:p>
         </p:txBody>
@@ -23562,1030 +22418,6 @@
                 </a:solidFill>
                 <a:latin typeface="Arial"/>
               </a:rPr>
-              <a:t>Six Rules for Every Experiment</a:t>
-            </a:r>
-          </a:p>
-        </p:txBody>
-      </p:sp>
-      <p:sp>
-        <p:nvSpPr>
-          <p:cNvPr id="3" name="TextBox 2"/>
-          <p:cNvSpPr txBox="1"/>
-          <p:nvPr/>
-        </p:nvSpPr>
-        <p:spPr>
-          <a:xfrm>
-            <a:off x="566928" y="932688"/>
-            <a:ext cx="8138160" cy="256032"/>
-          </a:xfrm>
-          <a:prstGeom prst="rect">
-            <a:avLst/>
-          </a:prstGeom>
-          <a:noFill/>
-        </p:spPr>
-        <p:txBody>
-          <a:bodyPr wrap="square" lIns="27432" tIns="18288" rIns="27432" bIns="18288" anchor="t">
-            <a:spAutoFit/>
-          </a:bodyPr>
-          <a:lstStyle/>
-          <a:p>
-            <a:pPr algn="l"/>
-            <a:r>
-              <a:rPr sz="1480" b="1" i="0">
-                <a:solidFill>
-                  <a:srgbClr val="121212"/>
-                </a:solidFill>
-                <a:latin typeface="Arial"/>
-              </a:rPr>
-              <a:t>What makes the evidence trustworthy</a:t>
-            </a:r>
-          </a:p>
-        </p:txBody>
-      </p:sp>
-      <p:sp>
-        <p:nvSpPr>
-          <p:cNvPr id="25" name="TextBox 24">
-            <a:extLst>
-              <a:ext uri="{FF2B5EF4-FFF2-40B4-BE49-F238E27FC236}">
-                <a16:creationId xmlns:a16="http://schemas.microsoft.com/office/drawing/2014/main" id="{6AB72007-F5D0-AF78-B89C-794457398D1F}"/>
-              </a:ext>
-            </a:extLst>
-          </p:cNvPr>
-          <p:cNvSpPr txBox="1"/>
-          <p:nvPr/>
-        </p:nvSpPr>
-        <p:spPr>
-          <a:xfrm>
-            <a:off x="8801100" y="4792436"/>
-            <a:ext cx="342900" cy="261610"/>
-          </a:xfrm>
-          <a:prstGeom prst="rect">
-            <a:avLst/>
-          </a:prstGeom>
-          <a:noFill/>
-        </p:spPr>
-        <p:txBody>
-          <a:bodyPr wrap="square" rtlCol="0">
-            <a:spAutoFit/>
-          </a:bodyPr>
-          <a:lstStyle/>
-          <a:p>
-            <a:r>
-              <a:rPr lang="en-US" sz="1100" dirty="0"/>
-              <a:t>12</a:t>
-            </a:r>
-          </a:p>
-        </p:txBody>
-      </p:sp>
-      <p:sp>
-        <p:nvSpPr>
-          <p:cNvPr id="201" name="Rule 1"/>
-          <p:cNvSpPr/>
-          <p:nvPr/>
-        </p:nvSpPr>
-        <p:spPr>
-          <a:xfrm>
-            <a:off x="502920" y="1280160"/>
-            <a:ext cx="2606040" cy="1371600"/>
-          </a:xfrm>
-          <a:prstGeom prst="roundRect">
-            <a:avLst/>
-          </a:prstGeom>
-          <a:solidFill>
-            <a:srgbClr val="FFFFFF"/>
-          </a:solidFill>
-          <a:ln w="9525">
-            <a:solidFill>
-              <a:srgbClr val="CDD2D7"/>
-            </a:solidFill>
-          </a:ln>
-        </p:spPr>
-        <p:style>
-          <a:lnRef idx="1">
-            <a:schemeClr val="accent1"/>
-          </a:lnRef>
-          <a:fillRef idx="3">
-            <a:schemeClr val="accent1"/>
-          </a:fillRef>
-          <a:effectRef idx="2">
-            <a:schemeClr val="accent1"/>
-          </a:effectRef>
-          <a:fontRef idx="minor">
-            <a:schemeClr val="lt1"/>
-          </a:fontRef>
-        </p:style>
-        <p:txBody>
-          <a:bodyPr wrap="square" lIns="91440" tIns="36576" rIns="91440" bIns="36576" rtlCol="0" anchor="ctr"/>
-          <a:lstStyle/>
-          <a:p>
-            <a:pPr algn="l"/>
-            <a:r>
-              <a:rPr sz="1150" b="1">
-                <a:solidFill>
-                  <a:srgbClr val="121212"/>
-                </a:solidFill>
-                <a:latin typeface="Arial"/>
-              </a:rPr>
-              <a:t>1  Freeze the splits first</a:t>
-            </a:r>
-          </a:p>
-          <a:p>
-            <a:pPr algn="l"/>
-            <a:r>
-              <a:rPr sz="1050" b="0">
-                <a:solidFill>
-                  <a:srgbClr val="3a3a3a"/>
-                </a:solidFill>
-                <a:latin typeface="Arial"/>
-              </a:rPr>
-              <a:t>Split by patient where IDs exist, save as files, never change them.</a:t>
-            </a:r>
-          </a:p>
-        </p:txBody>
-      </p:sp>
-      <p:sp>
-        <p:nvSpPr>
-          <p:cNvPr id="202" name="Rule 2"/>
-          <p:cNvSpPr/>
-          <p:nvPr/>
-        </p:nvSpPr>
-        <p:spPr>
-          <a:xfrm>
-            <a:off x="3246120" y="1280160"/>
-            <a:ext cx="2606040" cy="1371600"/>
-          </a:xfrm>
-          <a:prstGeom prst="roundRect">
-            <a:avLst/>
-          </a:prstGeom>
-          <a:solidFill>
-            <a:srgbClr val="E3F2EA"/>
-          </a:solidFill>
-          <a:ln w="9525">
-            <a:solidFill>
-              <a:srgbClr val="1E7A5A"/>
-            </a:solidFill>
-          </a:ln>
-        </p:spPr>
-        <p:style>
-          <a:lnRef idx="1">
-            <a:schemeClr val="accent1"/>
-          </a:lnRef>
-          <a:fillRef idx="3">
-            <a:schemeClr val="accent1"/>
-          </a:fillRef>
-          <a:effectRef idx="2">
-            <a:schemeClr val="accent1"/>
-          </a:effectRef>
-          <a:fontRef idx="minor">
-            <a:schemeClr val="lt1"/>
-          </a:fontRef>
-        </p:style>
-        <p:txBody>
-          <a:bodyPr wrap="square" lIns="91440" tIns="36576" rIns="91440" bIns="36576" rtlCol="0" anchor="ctr"/>
-          <a:lstStyle/>
-          <a:p>
-            <a:pPr algn="l"/>
-            <a:r>
-              <a:rPr sz="1150" b="1">
-                <a:solidFill>
-                  <a:srgbClr val="121212"/>
-                </a:solidFill>
-                <a:latin typeface="Arial"/>
-              </a:rPr>
-              <a:t>2  Declare the analysis</a:t>
-            </a:r>
-          </a:p>
-          <a:p>
-            <a:pPr algn="l"/>
-            <a:r>
-              <a:rPr sz="1050" b="0">
-                <a:solidFill>
-                  <a:srgbClr val="3a3a3a"/>
-                </a:solidFill>
-                <a:latin typeface="Arial"/>
-              </a:rPr>
-              <a:t>One primary comparison and the specificity target are written down before any test split is opened.</a:t>
-            </a:r>
-          </a:p>
-        </p:txBody>
-      </p:sp>
-      <p:sp>
-        <p:nvSpPr>
-          <p:cNvPr id="203" name="Rule 3"/>
-          <p:cNvSpPr/>
-          <p:nvPr/>
-        </p:nvSpPr>
-        <p:spPr>
-          <a:xfrm>
-            <a:off x="5989320" y="1280160"/>
-            <a:ext cx="2606040" cy="1371600"/>
-          </a:xfrm>
-          <a:prstGeom prst="roundRect">
-            <a:avLst/>
-          </a:prstGeom>
-          <a:solidFill>
-            <a:srgbClr val="FFFFFF"/>
-          </a:solidFill>
-          <a:ln w="9525">
-            <a:solidFill>
-              <a:srgbClr val="CDD2D7"/>
-            </a:solidFill>
-          </a:ln>
-        </p:spPr>
-        <p:style>
-          <a:lnRef idx="1">
-            <a:schemeClr val="accent1"/>
-          </a:lnRef>
-          <a:fillRef idx="3">
-            <a:schemeClr val="accent1"/>
-          </a:fillRef>
-          <a:effectRef idx="2">
-            <a:schemeClr val="accent1"/>
-          </a:effectRef>
-          <a:fontRef idx="minor">
-            <a:schemeClr val="lt1"/>
-          </a:fontRef>
-        </p:style>
-        <p:txBody>
-          <a:bodyPr wrap="square" lIns="91440" tIns="36576" rIns="91440" bIns="36576" rtlCol="0" anchor="ctr"/>
-          <a:lstStyle/>
-          <a:p>
-            <a:pPr algn="l"/>
-            <a:r>
-              <a:rPr sz="1150" b="1">
-                <a:solidFill>
-                  <a:srgbClr val="121212"/>
-                </a:solidFill>
-                <a:latin typeface="Arial"/>
-              </a:rPr>
-              <a:t>3  Change one thing per run</a:t>
-            </a:r>
-          </a:p>
-          <a:p>
-            <a:pPr algn="l"/>
-            <a:r>
-              <a:rPr sz="1050" b="0">
-                <a:solidFill>
-                  <a:srgbClr val="3a3a3a"/>
-                </a:solidFill>
-                <a:latin typeface="Arial"/>
-              </a:rPr>
-              <a:t>One training script and one config file per experiment.</a:t>
-            </a:r>
-          </a:p>
-        </p:txBody>
-      </p:sp>
-      <p:sp>
-        <p:nvSpPr>
-          <p:cNvPr id="204" name="Rule 4"/>
-          <p:cNvSpPr/>
-          <p:nvPr/>
-        </p:nvSpPr>
-        <p:spPr>
-          <a:xfrm>
-            <a:off x="502920" y="2788920"/>
-            <a:ext cx="2606040" cy="1371600"/>
-          </a:xfrm>
-          <a:prstGeom prst="roundRect">
-            <a:avLst/>
-          </a:prstGeom>
-          <a:solidFill>
-            <a:srgbClr val="FFFFFF"/>
-          </a:solidFill>
-          <a:ln w="9525">
-            <a:solidFill>
-              <a:srgbClr val="CDD2D7"/>
-            </a:solidFill>
-          </a:ln>
-        </p:spPr>
-        <p:style>
-          <a:lnRef idx="1">
-            <a:schemeClr val="accent1"/>
-          </a:lnRef>
-          <a:fillRef idx="3">
-            <a:schemeClr val="accent1"/>
-          </a:fillRef>
-          <a:effectRef idx="2">
-            <a:schemeClr val="accent1"/>
-          </a:effectRef>
-          <a:fontRef idx="minor">
-            <a:schemeClr val="lt1"/>
-          </a:fontRef>
-        </p:style>
-        <p:txBody>
-          <a:bodyPr wrap="square" lIns="91440" tIns="36576" rIns="91440" bIns="36576" rtlCol="0" anchor="ctr"/>
-          <a:lstStyle/>
-          <a:p>
-            <a:pPr algn="l"/>
-            <a:r>
-              <a:rPr sz="1150" b="1">
-                <a:solidFill>
-                  <a:srgbClr val="121212"/>
-                </a:solidFill>
-                <a:latin typeface="Arial"/>
-              </a:rPr>
-              <a:t>4  Select on validation only</a:t>
-            </a:r>
-          </a:p>
-          <a:p>
-            <a:pPr algn="l"/>
-            <a:r>
-              <a:rPr sz="1050" b="0">
-                <a:solidFill>
-                  <a:srgbClr val="3a3a3a"/>
-                </a:solidFill>
-                <a:latin typeface="Arial"/>
-              </a:rPr>
-              <a:t>Thresholds, temperature and prior correction are fitted on validation, then frozen.</a:t>
-            </a:r>
-          </a:p>
-        </p:txBody>
-      </p:sp>
-      <p:sp>
-        <p:nvSpPr>
-          <p:cNvPr id="205" name="Rule 5"/>
-          <p:cNvSpPr/>
-          <p:nvPr/>
-        </p:nvSpPr>
-        <p:spPr>
-          <a:xfrm>
-            <a:off x="3246120" y="2788920"/>
-            <a:ext cx="2606040" cy="1371600"/>
-          </a:xfrm>
-          <a:prstGeom prst="roundRect">
-            <a:avLst/>
-          </a:prstGeom>
-          <a:solidFill>
-            <a:srgbClr val="FFFFFF"/>
-          </a:solidFill>
-          <a:ln w="9525">
-            <a:solidFill>
-              <a:srgbClr val="CDD2D7"/>
-            </a:solidFill>
-          </a:ln>
-        </p:spPr>
-        <p:style>
-          <a:lnRef idx="1">
-            <a:schemeClr val="accent1"/>
-          </a:lnRef>
-          <a:fillRef idx="3">
-            <a:schemeClr val="accent1"/>
-          </a:fillRef>
-          <a:effectRef idx="2">
-            <a:schemeClr val="accent1"/>
-          </a:effectRef>
-          <a:fontRef idx="minor">
-            <a:schemeClr val="lt1"/>
-          </a:fontRef>
-        </p:style>
-        <p:txBody>
-          <a:bodyPr wrap="square" lIns="91440" tIns="36576" rIns="91440" bIns="36576" rtlCol="0" anchor="ctr"/>
-          <a:lstStyle/>
-          <a:p>
-            <a:pPr algn="l"/>
-            <a:r>
-              <a:rPr sz="1150" b="1">
-                <a:solidFill>
-                  <a:srgbClr val="121212"/>
-                </a:solidFill>
-                <a:latin typeface="Arial"/>
-              </a:rPr>
-              <a:t>5  Measure the noise</a:t>
-            </a:r>
-          </a:p>
-          <a:p>
-            <a:pPr algn="l"/>
-            <a:r>
-              <a:rPr sz="1050" b="0">
-                <a:solidFill>
-                  <a:srgbClr val="3a3a3a"/>
-                </a:solidFill>
-                <a:latin typeface="Arial"/>
-              </a:rPr>
-              <a:t>3-5 seeds, patient-level bootstrap intervals, Holm-corrected comparisons.</a:t>
-            </a:r>
-          </a:p>
-        </p:txBody>
-      </p:sp>
-      <p:sp>
-        <p:nvSpPr>
-          <p:cNvPr id="206" name="Rule 6"/>
-          <p:cNvSpPr/>
-          <p:nvPr/>
-        </p:nvSpPr>
-        <p:spPr>
-          <a:xfrm>
-            <a:off x="5989320" y="2788920"/>
-            <a:ext cx="2606040" cy="1371600"/>
-          </a:xfrm>
-          <a:prstGeom prst="roundRect">
-            <a:avLst/>
-          </a:prstGeom>
-          <a:solidFill>
-            <a:srgbClr val="E3F2EA"/>
-          </a:solidFill>
-          <a:ln w="9525">
-            <a:solidFill>
-              <a:srgbClr val="1E7A5A"/>
-            </a:solidFill>
-          </a:ln>
-        </p:spPr>
-        <p:style>
-          <a:lnRef idx="1">
-            <a:schemeClr val="accent1"/>
-          </a:lnRef>
-          <a:fillRef idx="3">
-            <a:schemeClr val="accent1"/>
-          </a:fillRef>
-          <a:effectRef idx="2">
-            <a:schemeClr val="accent1"/>
-          </a:effectRef>
-          <a:fontRef idx="minor">
-            <a:schemeClr val="lt1"/>
-          </a:fontRef>
-        </p:style>
-        <p:txBody>
-          <a:bodyPr wrap="square" lIns="91440" tIns="36576" rIns="91440" bIns="36576" rtlCol="0" anchor="ctr"/>
-          <a:lstStyle/>
-          <a:p>
-            <a:pPr algn="l"/>
-            <a:r>
-              <a:rPr sz="1150" b="1">
-                <a:solidFill>
-                  <a:srgbClr val="121212"/>
-                </a:solidFill>
-                <a:latin typeface="Arial"/>
-              </a:rPr>
-              <a:t>6  Open the test once, external last</a:t>
-            </a:r>
-          </a:p>
-          <a:p>
-            <a:pPr algn="l"/>
-            <a:r>
-              <a:rPr sz="1050" b="0">
-                <a:solidFill>
-                  <a:srgbClr val="3a3a3a"/>
-                </a:solidFill>
-                <a:latin typeface="Arial"/>
-              </a:rPr>
-              <a:t>Held-out EyePACS and APTOS are never used for training or selection.</a:t>
-            </a:r>
-          </a:p>
-        </p:txBody>
-      </p:sp>
-      <p:sp>
-        <p:nvSpPr>
-          <p:cNvPr id="207" name="Banner"/>
-          <p:cNvSpPr/>
-          <p:nvPr/>
-        </p:nvSpPr>
-        <p:spPr>
-          <a:xfrm>
-            <a:off x="502920" y="4315968"/>
-            <a:ext cx="8138160" cy="365760"/>
-          </a:xfrm>
-          <a:prstGeom prst="roundRect">
-            <a:avLst/>
-          </a:prstGeom>
-          <a:solidFill>
-            <a:srgbClr val="F2F5F8"/>
-          </a:solidFill>
-          <a:ln w="9525">
-            <a:solidFill>
-              <a:srgbClr val="CDD2D7"/>
-            </a:solidFill>
-          </a:ln>
-        </p:spPr>
-        <p:style>
-          <a:lnRef idx="1">
-            <a:schemeClr val="accent1"/>
-          </a:lnRef>
-          <a:fillRef idx="3">
-            <a:schemeClr val="accent1"/>
-          </a:fillRef>
-          <a:effectRef idx="2">
-            <a:schemeClr val="accent1"/>
-          </a:effectRef>
-          <a:fontRef idx="minor">
-            <a:schemeClr val="lt1"/>
-          </a:fontRef>
-        </p:style>
-        <p:txBody>
-          <a:bodyPr wrap="square" lIns="91440" tIns="36576" rIns="91440" bIns="36576" rtlCol="0" anchor="ctr"/>
-          <a:lstStyle/>
-          <a:p>
-            <a:pPr algn="ctr"/>
-            <a:r>
-              <a:rPr sz="1100" b="1">
-                <a:solidFill>
-                  <a:srgbClr val="121212"/>
-                </a:solidFill>
-                <a:latin typeface="Arial"/>
-              </a:rPr>
-              <a:t>Every result is reported per source, with confidence intervals.</a:t>
-            </a:r>
-          </a:p>
-        </p:txBody>
-      </p:sp>
-    </p:spTree>
-  </p:cSld>
-  <p:clrMapOvr>
-    <a:masterClrMapping/>
-  </p:clrMapOvr>
-</p:sld>
-</file>
-
-<file path=ppt/slides/slide13.xml><?xml version="1.0" encoding="utf-8"?>
-<p:sld xmlns:a="http://schemas.openxmlformats.org/drawingml/2006/main" xmlns:r="http://schemas.openxmlformats.org/officeDocument/2006/relationships" xmlns:p="http://schemas.openxmlformats.org/presentationml/2006/main">
-  <p:cSld>
-    <p:spTree>
-      <p:nvGrpSpPr>
-        <p:cNvPr id="1" name=""/>
-        <p:cNvGrpSpPr/>
-        <p:nvPr/>
-      </p:nvGrpSpPr>
-      <p:grpSpPr>
-        <a:xfrm>
-          <a:off x="0" y="0"/>
-          <a:ext cx="0" cy="0"/>
-          <a:chOff x="0" y="0"/>
-          <a:chExt cx="0" cy="0"/>
-        </a:xfrm>
-      </p:grpSpPr>
-      <p:sp>
-        <p:nvSpPr>
-          <p:cNvPr id="2" name="Title 1"/>
-          <p:cNvSpPr>
-            <a:spLocks noGrp="1"/>
-          </p:cNvSpPr>
-          <p:nvPr>
-            <p:ph type="title"/>
-          </p:nvPr>
-        </p:nvSpPr>
-        <p:spPr>
-          <a:xfrm>
-            <a:off x="713232" y="283464"/>
-            <a:ext cx="7909560" cy="502920"/>
-          </a:xfrm>
-        </p:spPr>
-        <p:txBody>
-          <a:bodyPr/>
-          <a:lstStyle/>
-          <a:p>
-            <a:pPr algn="l"/>
-            <a:r>
-              <a:rPr sz="2200" b="1">
-                <a:solidFill>
-                  <a:srgbClr val="121212"/>
-                </a:solidFill>
-                <a:latin typeface="Arial"/>
-              </a:rPr>
-              <a:t>Next Steps</a:t>
-            </a:r>
-          </a:p>
-        </p:txBody>
-      </p:sp>
-      <p:sp>
-        <p:nvSpPr>
-          <p:cNvPr id="3" name="TextBox 2"/>
-          <p:cNvSpPr txBox="1"/>
-          <p:nvPr/>
-        </p:nvSpPr>
-        <p:spPr>
-          <a:xfrm>
-            <a:off x="566928" y="932688"/>
-            <a:ext cx="8138160" cy="256032"/>
-          </a:xfrm>
-          <a:prstGeom prst="rect">
-            <a:avLst/>
-          </a:prstGeom>
-          <a:noFill/>
-        </p:spPr>
-        <p:txBody>
-          <a:bodyPr wrap="square" lIns="27432" tIns="18288" rIns="27432" bIns="18288" anchor="t">
-            <a:spAutoFit/>
-          </a:bodyPr>
-          <a:lstStyle/>
-          <a:p>
-            <a:pPr algn="l"/>
-            <a:r>
-              <a:rPr sz="1480" b="1" i="0">
-                <a:solidFill>
-                  <a:srgbClr val="121212"/>
-                </a:solidFill>
-                <a:latin typeface="Arial"/>
-              </a:rPr>
-              <a:t>What is left</a:t>
-            </a:r>
-          </a:p>
-        </p:txBody>
-      </p:sp>
-      <p:sp>
-        <p:nvSpPr>
-          <p:cNvPr id="25" name="TextBox 24">
-            <a:extLst>
-              <a:ext uri="{FF2B5EF4-FFF2-40B4-BE49-F238E27FC236}">
-                <a16:creationId xmlns:a16="http://schemas.microsoft.com/office/drawing/2014/main" id="{6AB72007-F5D0-AF78-B89C-794457398D1F}"/>
-              </a:ext>
-            </a:extLst>
-          </p:cNvPr>
-          <p:cNvSpPr txBox="1"/>
-          <p:nvPr/>
-        </p:nvSpPr>
-        <p:spPr>
-          <a:xfrm>
-            <a:off x="8801100" y="4792436"/>
-            <a:ext cx="342900" cy="261610"/>
-          </a:xfrm>
-          <a:prstGeom prst="rect">
-            <a:avLst/>
-          </a:prstGeom>
-          <a:noFill/>
-        </p:spPr>
-        <p:txBody>
-          <a:bodyPr wrap="square" rtlCol="0">
-            <a:spAutoFit/>
-          </a:bodyPr>
-          <a:lstStyle/>
-          <a:p>
-            <a:r>
-              <a:rPr lang="en-US" sz="1100" dirty="0"/>
-              <a:t>13</a:t>
-            </a:r>
-          </a:p>
-        </p:txBody>
-      </p:sp>
-      <p:sp>
-        <p:nvSpPr>
-          <p:cNvPr id="201" name="Step 1"/>
-          <p:cNvSpPr/>
-          <p:nvPr/>
-        </p:nvSpPr>
-        <p:spPr>
-          <a:xfrm>
-            <a:off x="502920" y="1280160"/>
-            <a:ext cx="3977639" cy="1097280"/>
-          </a:xfrm>
-          <a:prstGeom prst="roundRect">
-            <a:avLst/>
-          </a:prstGeom>
-          <a:solidFill>
-            <a:srgbClr val="E3F2EA"/>
-          </a:solidFill>
-          <a:ln w="9525">
-            <a:solidFill>
-              <a:srgbClr val="1E7A5A"/>
-            </a:solidFill>
-          </a:ln>
-        </p:spPr>
-        <p:style>
-          <a:lnRef idx="1">
-            <a:schemeClr val="accent1"/>
-          </a:lnRef>
-          <a:fillRef idx="3">
-            <a:schemeClr val="accent1"/>
-          </a:fillRef>
-          <a:effectRef idx="2">
-            <a:schemeClr val="accent1"/>
-          </a:effectRef>
-          <a:fontRef idx="minor">
-            <a:schemeClr val="lt1"/>
-          </a:fontRef>
-        </p:style>
-        <p:txBody>
-          <a:bodyPr wrap="square" lIns="91440" tIns="36576" rIns="91440" bIns="36576" rtlCol="0" anchor="ctr"/>
-          <a:lstStyle/>
-          <a:p>
-            <a:pPr algn="l"/>
-            <a:r>
-              <a:rPr sz="1200" b="1">
-                <a:solidFill>
-                  <a:srgbClr val="121212"/>
-                </a:solidFill>
-                <a:latin typeface="Arial"/>
-              </a:rPr>
-              <a:t>1  Five seeds on the group-aware split</a:t>
-            </a:r>
-          </a:p>
-          <a:p>
-            <a:pPr algn="l"/>
-            <a:r>
-              <a:rPr sz="1050" b="0">
-                <a:solidFill>
-                  <a:srgbClr val="3a3a3a"/>
-                </a:solidFill>
-                <a:latin typeface="Arial"/>
-              </a:rPr>
-              <a:t>Train four more seeds and re-evaluate with a new declaration.</a:t>
-            </a:r>
-          </a:p>
-        </p:txBody>
-      </p:sp>
-      <p:sp>
-        <p:nvSpPr>
-          <p:cNvPr id="202" name="Step 2"/>
-          <p:cNvSpPr/>
-          <p:nvPr/>
-        </p:nvSpPr>
-        <p:spPr>
-          <a:xfrm>
-            <a:off x="4663440" y="1280160"/>
-            <a:ext cx="3977639" cy="1097280"/>
-          </a:xfrm>
-          <a:prstGeom prst="roundRect">
-            <a:avLst/>
-          </a:prstGeom>
-          <a:solidFill>
-            <a:srgbClr val="E3F2EA"/>
-          </a:solidFill>
-          <a:ln w="9525">
-            <a:solidFill>
-              <a:srgbClr val="1E7A5A"/>
-            </a:solidFill>
-          </a:ln>
-        </p:spPr>
-        <p:style>
-          <a:lnRef idx="1">
-            <a:schemeClr val="accent1"/>
-          </a:lnRef>
-          <a:fillRef idx="3">
-            <a:schemeClr val="accent1"/>
-          </a:fillRef>
-          <a:effectRef idx="2">
-            <a:schemeClr val="accent1"/>
-          </a:effectRef>
-          <a:fontRef idx="minor">
-            <a:schemeClr val="lt1"/>
-          </a:fontRef>
-        </p:style>
-        <p:txBody>
-          <a:bodyPr wrap="square" lIns="91440" tIns="36576" rIns="91440" bIns="36576" rtlCol="0" anchor="ctr"/>
-          <a:lstStyle/>
-          <a:p>
-            <a:pPr algn="l"/>
-            <a:r>
-              <a:rPr sz="1200" b="1">
-                <a:solidFill>
-                  <a:srgbClr val="121212"/>
-                </a:solidFill>
-                <a:latin typeface="Arial"/>
-              </a:rPr>
-              <a:t>2  Full reporting</a:t>
-            </a:r>
-          </a:p>
-          <a:p>
-            <a:pPr algn="l"/>
-            <a:r>
-              <a:rPr sz="1050" b="0">
-                <a:solidFill>
-                  <a:srgbClr val="3a3a3a"/>
-                </a:solidFill>
-                <a:latin typeface="Arial"/>
-              </a:rPr>
-              <a:t>AUROC, per-grade results, ECE, Brier and patient-level confidence intervals.</a:t>
-            </a:r>
-          </a:p>
-        </p:txBody>
-      </p:sp>
-      <p:sp>
-        <p:nvSpPr>
-          <p:cNvPr id="203" name="Step 3"/>
-          <p:cNvSpPr/>
-          <p:nvPr/>
-        </p:nvSpPr>
-        <p:spPr>
-          <a:xfrm>
-            <a:off x="502920" y="2468880"/>
-            <a:ext cx="3977639" cy="1097280"/>
-          </a:xfrm>
-          <a:prstGeom prst="roundRect">
-            <a:avLst/>
-          </a:prstGeom>
-          <a:solidFill>
-            <a:srgbClr val="FFFFFF"/>
-          </a:solidFill>
-          <a:ln w="9525">
-            <a:solidFill>
-              <a:srgbClr val="CDD2D7"/>
-            </a:solidFill>
-          </a:ln>
-        </p:spPr>
-        <p:style>
-          <a:lnRef idx="1">
-            <a:schemeClr val="accent1"/>
-          </a:lnRef>
-          <a:fillRef idx="3">
-            <a:schemeClr val="accent1"/>
-          </a:fillRef>
-          <a:effectRef idx="2">
-            <a:schemeClr val="accent1"/>
-          </a:effectRef>
-          <a:fontRef idx="minor">
-            <a:schemeClr val="lt1"/>
-          </a:fontRef>
-        </p:style>
-        <p:txBody>
-          <a:bodyPr wrap="square" lIns="91440" tIns="36576" rIns="91440" bIns="36576" rtlCol="0" anchor="ctr"/>
-          <a:lstStyle/>
-          <a:p>
-            <a:pPr algn="l"/>
-            <a:r>
-              <a:rPr sz="1200" b="1">
-                <a:solidFill>
-                  <a:srgbClr val="121212"/>
-                </a:solidFill>
-                <a:latin typeface="Arial"/>
-              </a:rPr>
-              <a:t>3  Own-source operating points</a:t>
-            </a:r>
-          </a:p>
-          <a:p>
-            <a:pPr algn="l"/>
-            <a:r>
-              <a:rPr sz="1050" b="0">
-                <a:solidFill>
-                  <a:srgbClr val="3a3a3a"/>
-                </a:solidFill>
-                <a:latin typeface="Arial"/>
-              </a:rPr>
-              <a:t>Threshold set per dataset, labelled post-hoc.</a:t>
-            </a:r>
-          </a:p>
-        </p:txBody>
-      </p:sp>
-      <p:sp>
-        <p:nvSpPr>
-          <p:cNvPr id="204" name="Step 4"/>
-          <p:cNvSpPr/>
-          <p:nvPr/>
-        </p:nvSpPr>
-        <p:spPr>
-          <a:xfrm>
-            <a:off x="4663440" y="2468880"/>
-            <a:ext cx="3977639" cy="1097280"/>
-          </a:xfrm>
-          <a:prstGeom prst="roundRect">
-            <a:avLst/>
-          </a:prstGeom>
-          <a:solidFill>
-            <a:srgbClr val="FFFFFF"/>
-          </a:solidFill>
-          <a:ln w="9525">
-            <a:solidFill>
-              <a:srgbClr val="CDD2D7"/>
-            </a:solidFill>
-          </a:ln>
-        </p:spPr>
-        <p:style>
-          <a:lnRef idx="1">
-            <a:schemeClr val="accent1"/>
-          </a:lnRef>
-          <a:fillRef idx="3">
-            <a:schemeClr val="accent1"/>
-          </a:fillRef>
-          <a:effectRef idx="2">
-            <a:schemeClr val="accent1"/>
-          </a:effectRef>
-          <a:fontRef idx="minor">
-            <a:schemeClr val="lt1"/>
-          </a:fontRef>
-        </p:style>
-        <p:txBody>
-          <a:bodyPr wrap="square" lIns="91440" tIns="36576" rIns="91440" bIns="36576" rtlCol="0" anchor="ctr"/>
-          <a:lstStyle/>
-          <a:p>
-            <a:pPr algn="l"/>
-            <a:r>
-              <a:rPr sz="1200" b="1">
-                <a:solidFill>
-                  <a:srgbClr val="121212"/>
-                </a:solidFill>
-                <a:latin typeface="Arial"/>
-              </a:rPr>
-              <a:t>4  Matched-subset check on APTOS</a:t>
-            </a:r>
-          </a:p>
-          <a:p>
-            <a:pPr algn="l"/>
-            <a:r>
-              <a:rPr sz="1050" b="0">
-                <a:solidFill>
-                  <a:srgbClr val="3a3a3a"/>
-                </a:solidFill>
-                <a:latin typeface="Arial"/>
-              </a:rPr>
-              <a:t>Follow-up to the size check, for other capture cues.</a:t>
-            </a:r>
-          </a:p>
-        </p:txBody>
-      </p:sp>
-      <p:sp>
-        <p:nvSpPr>
-          <p:cNvPr id="205" name="Later"/>
-          <p:cNvSpPr/>
-          <p:nvPr/>
-        </p:nvSpPr>
-        <p:spPr>
-          <a:xfrm>
-            <a:off x="502920" y="3657600"/>
-            <a:ext cx="8138160" cy="548640"/>
-          </a:xfrm>
-          <a:prstGeom prst="roundRect">
-            <a:avLst/>
-          </a:prstGeom>
-          <a:solidFill>
-            <a:srgbClr val="E4ECF6"/>
-          </a:solidFill>
-          <a:ln w="9525">
-            <a:solidFill>
-              <a:srgbClr val="BCCFE4"/>
-            </a:solidFill>
-          </a:ln>
-        </p:spPr>
-        <p:style>
-          <a:lnRef idx="1">
-            <a:schemeClr val="accent1"/>
-          </a:lnRef>
-          <a:fillRef idx="3">
-            <a:schemeClr val="accent1"/>
-          </a:fillRef>
-          <a:effectRef idx="2">
-            <a:schemeClr val="accent1"/>
-          </a:effectRef>
-          <a:fontRef idx="minor">
-            <a:schemeClr val="lt1"/>
-          </a:fontRef>
-        </p:style>
-        <p:txBody>
-          <a:bodyPr wrap="square" lIns="91440" tIns="36576" rIns="91440" bIns="36576" rtlCol="0" anchor="ctr"/>
-          <a:lstStyle/>
-          <a:p>
-            <a:pPr algn="l"/>
-            <a:r>
-              <a:rPr sz="1100" b="0">
-                <a:solidFill>
-                  <a:srgbClr val="3a3a3a"/>
-                </a:solidFill>
-                <a:latin typeface="Arial"/>
-              </a:rPr>
-              <a:t>Then: literature search and thesis writing. Later, optionally, an IDRiD external check.</a:t>
-            </a:r>
-          </a:p>
-        </p:txBody>
-      </p:sp>
-    </p:spTree>
-  </p:cSld>
-  <p:clrMapOvr>
-    <a:masterClrMapping/>
-  </p:clrMapOvr>
-</p:sld>
-</file>
-
-<file path=ppt/slides/slide14.xml><?xml version="1.0" encoding="utf-8"?>
-<p:sld xmlns:a="http://schemas.openxmlformats.org/drawingml/2006/main" xmlns:r="http://schemas.openxmlformats.org/officeDocument/2006/relationships" xmlns:p="http://schemas.openxmlformats.org/presentationml/2006/main">
-  <p:cSld>
-    <p:spTree>
-      <p:nvGrpSpPr>
-        <p:cNvPr id="1" name=""/>
-        <p:cNvGrpSpPr/>
-        <p:nvPr/>
-      </p:nvGrpSpPr>
-      <p:grpSpPr>
-        <a:xfrm>
-          <a:off x="0" y="0"/>
-          <a:ext cx="0" cy="0"/>
-          <a:chOff x="0" y="0"/>
-          <a:chExt cx="0" cy="0"/>
-        </a:xfrm>
-      </p:grpSpPr>
-      <p:sp>
-        <p:nvSpPr>
-          <p:cNvPr id="2" name="Title 1"/>
-          <p:cNvSpPr>
-            <a:spLocks noGrp="1"/>
-          </p:cNvSpPr>
-          <p:nvPr>
-            <p:ph type="title"/>
-          </p:nvPr>
-        </p:nvSpPr>
-        <p:spPr>
-          <a:xfrm>
-            <a:off x="713232" y="283464"/>
-            <a:ext cx="7909560" cy="502920"/>
-          </a:xfrm>
-        </p:spPr>
-        <p:txBody>
-          <a:bodyPr/>
-          <a:lstStyle/>
-          <a:p>
-            <a:pPr algn="l"/>
-            <a:r>
-              <a:rPr sz="2200" b="1">
-                <a:solidFill>
-                  <a:srgbClr val="121212"/>
-                </a:solidFill>
-                <a:latin typeface="Arial"/>
-              </a:rPr>
               <a:t>References</a:t>
             </a:r>
           </a:p>
@@ -24853,7 +22685,7 @@
           <a:p>
             <a:r>
               <a:rPr lang="en-US" sz="1100" dirty="0"/>
-              <a:t>14</a:t>
+              <a:t>12</a:t>
             </a:r>
           </a:p>
         </p:txBody>
@@ -24866,7 +22698,7 @@
 </p:sld>
 </file>
 
-<file path=ppt/slides/slide15.xml><?xml version="1.0" encoding="utf-8"?>
+<file path=ppt/slides/slide13.xml><?xml version="1.0" encoding="utf-8"?>
 <p:sld xmlns:a="http://schemas.openxmlformats.org/drawingml/2006/main" xmlns:r="http://schemas.openxmlformats.org/officeDocument/2006/relationships" xmlns:p="http://schemas.openxmlformats.org/presentationml/2006/main">
   <p:cSld>
     <p:spTree>
@@ -27097,7 +24929,7 @@
                 </a:solidFill>
                 <a:latin typeface="Arial"/>
               </a:rPr>
-              <a:t>Early Results: The Merge Changes the Answer</a:t>
+              <a:t>Research Question</a:t>
             </a:r>
           </a:p>
         </p:txBody>
@@ -27132,7 +24964,7 @@
                 </a:solidFill>
                 <a:latin typeface="Arial"/>
               </a:rPr>
-              <a:t>Held-out EyePACS patients, one frozen threshold, mean of 3 seeds</a:t>
+              <a:t>What this project asks</a:t>
             </a:r>
           </a:p>
         </p:txBody>
@@ -27172,50 +25004,26 @@
           </a:p>
         </p:txBody>
       </p:sp>
-      <p:pic>
-        <p:nvPicPr>
-          <p:cNvPr id="201" name="Chart 1" descr="Bar charts: EyePACS sensitivity and specificity for arms A, B and C"/>
-          <p:cNvPicPr>
-            <a:picLocks noChangeAspect="1"/>
-          </p:cNvPicPr>
-          <p:nvPr/>
-        </p:nvPicPr>
-        <p:blipFill>
-          <a:blip r:embed="rIdImg1"/>
-          <a:stretch>
-            <a:fillRect/>
-          </a:stretch>
-        </p:blipFill>
-        <p:spPr>
-          <a:xfrm>
-            <a:off x="457200" y="1261872"/>
-            <a:ext cx="5120640" cy="2926080"/>
-          </a:xfrm>
-          <a:prstGeom prst="rect">
-            <a:avLst/>
-          </a:prstGeom>
-        </p:spPr>
-      </p:pic>
       <p:sp>
         <p:nvSpPr>
-          <p:cNvPr id="202" name="Card 1"/>
+          <p:cNvPr id="201" name="Question"/>
           <p:cNvSpPr/>
           <p:nvPr/>
         </p:nvSpPr>
         <p:spPr>
           <a:xfrm>
-            <a:off x="5760720" y="1261872"/>
-            <a:ext cx="2926080" cy="932688"/>
+            <a:off x="502920" y="1280160"/>
+            <a:ext cx="8138160" cy="731520"/>
           </a:xfrm>
           <a:prstGeom prst="roundRect">
             <a:avLst/>
           </a:prstGeom>
           <a:solidFill>
-            <a:srgbClr val="FFE9D9"/>
+            <a:srgbClr val="E4ECF6"/>
           </a:solidFill>
           <a:ln w="9525">
             <a:solidFill>
-              <a:srgbClr val="EB6834"/>
+              <a:srgbClr val="BCCFE4"/>
             </a:solidFill>
           </a:ln>
         </p:spPr>
@@ -27237,41 +25045,29 @@
           <a:bodyPr wrap="square" lIns="91440" tIns="36576" rIns="91440" bIns="36576" rtlCol="0" anchor="ctr"/>
           <a:lstStyle/>
           <a:p>
-            <a:pPr algn="l"/>
+            <a:pPr algn="ctr"/>
             <a:r>
-              <a:rPr sz="1150" b="1">
+              <a:rPr sz="1300" b="1">
                 <a:solidFill>
                   <a:srgbClr val="121212"/>
                 </a:solidFill>
                 <a:latin typeface="Arial"/>
               </a:rPr>
-              <a:t>Original merge (C): specificity 0.013</a:t>
-            </a:r>
-          </a:p>
-          <a:p>
-            <a:pPr algn="l"/>
-            <a:r>
-              <a:rPr sz="1050" b="0">
-                <a:solidFill>
-                  <a:srgbClr val="3a3a3a"/>
-                </a:solidFill>
-                <a:latin typeface="Arial"/>
-              </a:rPr>
-              <a:t>It flags 99% of healthy images as disease: it learned the source.</a:t>
+              <a:t>Does merging datasets help early-DR detection, or does the model only learn which dataset an image came from?</a:t>
             </a:r>
           </a:p>
         </p:txBody>
       </p:sp>
       <p:sp>
         <p:nvSpPr>
-          <p:cNvPr id="203" name="Card 2"/>
+          <p:cNvPr id="202" name="RQ1"/>
           <p:cNvSpPr/>
           <p:nvPr/>
         </p:nvSpPr>
         <p:spPr>
           <a:xfrm>
-            <a:off x="5760720" y="2286000"/>
-            <a:ext cx="2926080" cy="932688"/>
+            <a:off x="502920" y="2148840"/>
+            <a:ext cx="3977639" cy="1371600"/>
           </a:xfrm>
           <a:prstGeom prst="roundRect">
             <a:avLst/>
@@ -27305,39 +25101,105 @@
           <a:p>
             <a:pPr algn="l"/>
             <a:r>
-              <a:rPr sz="1150" b="1">
+              <a:rPr sz="1200" b="1">
                 <a:solidFill>
                   <a:srgbClr val="121212"/>
                 </a:solidFill>
                 <a:latin typeface="Arial"/>
               </a:rPr>
-              <a:t>Source-balanced (B): specificity 0.89</a:t>
+              <a:t>RQ1</a:t>
             </a:r>
           </a:p>
           <a:p>
             <a:pPr algn="l"/>
             <a:r>
-              <a:rPr sz="1050" b="0">
+              <a:rPr sz="1100" b="0">
                 <a:solidFill>
                   <a:srgbClr val="3a3a3a"/>
                 </a:solidFill>
                 <a:latin typeface="Arial"/>
               </a:rPr>
-              <a:t>Close to the 0.90 target, with the same DDR sensitivity.</a:t>
+              <a:t>Does adding EyePACS to DDR improve early-DR sensitivity at a fixed specificity on sources the model has not seen?</a:t>
             </a:r>
           </a:p>
         </p:txBody>
       </p:sp>
       <p:sp>
         <p:nvSpPr>
-          <p:cNvPr id="204" name="Card 3"/>
+          <p:cNvPr id="203" name="RQ2"/>
           <p:cNvSpPr/>
           <p:nvPr/>
         </p:nvSpPr>
         <p:spPr>
           <a:xfrm>
-            <a:off x="5760720" y="3310128"/>
-            <a:ext cx="2926080" cy="932688"/>
+            <a:off x="4663440" y="2148840"/>
+            <a:ext cx="3977639" cy="1371600"/>
+          </a:xfrm>
+          <a:prstGeom prst="roundRect">
+            <a:avLst/>
+          </a:prstGeom>
+          <a:solidFill>
+            <a:srgbClr val="E3F2EA"/>
+          </a:solidFill>
+          <a:ln w="9525">
+            <a:solidFill>
+              <a:srgbClr val="1E7A5A"/>
+            </a:solidFill>
+          </a:ln>
+        </p:spPr>
+        <p:style>
+          <a:lnRef idx="1">
+            <a:schemeClr val="accent1"/>
+          </a:lnRef>
+          <a:fillRef idx="3">
+            <a:schemeClr val="accent1"/>
+          </a:fillRef>
+          <a:effectRef idx="2">
+            <a:schemeClr val="accent1"/>
+          </a:effectRef>
+          <a:fontRef idx="minor">
+            <a:schemeClr val="lt1"/>
+          </a:fontRef>
+        </p:style>
+        <p:txBody>
+          <a:bodyPr wrap="square" lIns="91440" tIns="36576" rIns="91440" bIns="36576" rtlCol="0" anchor="ctr"/>
+          <a:lstStyle/>
+          <a:p>
+            <a:pPr algn="l"/>
+            <a:r>
+              <a:rPr sz="1200" b="1">
+                <a:solidFill>
+                  <a:srgbClr val="121212"/>
+                </a:solidFill>
+                <a:latin typeface="Arial"/>
+              </a:rPr>
+              <a:t>RQ2</a:t>
+            </a:r>
+          </a:p>
+          <a:p>
+            <a:pPr algn="l"/>
+            <a:r>
+              <a:rPr sz="1100" b="0">
+                <a:solidFill>
+                  <a:srgbClr val="3a3a3a"/>
+                </a:solidFill>
+                <a:latin typeface="Arial"/>
+              </a:rPr>
+              <a:t>Do calibrated probabilities and a threshold frozen on validation still hold on unseen data?</a:t>
+            </a:r>
+          </a:p>
+        </p:txBody>
+      </p:sp>
+      <p:sp>
+        <p:nvSpPr>
+          <p:cNvPr id="204" name="Signal"/>
+          <p:cNvSpPr/>
+          <p:nvPr/>
+        </p:nvSpPr>
+        <p:spPr>
+          <a:xfrm>
+            <a:off x="502920" y="3657600"/>
+            <a:ext cx="8138160" cy="548640"/>
           </a:xfrm>
           <a:prstGeom prst="roundRect">
             <a:avLst/>
@@ -27371,25 +25233,13 @@
           <a:p>
             <a:pPr algn="l"/>
             <a:r>
-              <a:rPr sz="1150" b="1">
-                <a:solidFill>
-                  <a:srgbClr val="121212"/>
+              <a:rPr sz="1100" b="0">
+                <a:solidFill>
+                  <a:srgbClr val="3a3a3a"/>
                 </a:solidFill>
                 <a:latin typeface="Arial"/>
               </a:rPr>
-              <a:t>DDR only (A): specificity 0.39</a:t>
-            </a:r>
-          </a:p>
-          <a:p>
-            <a:pPr algn="l"/>
-            <a:r>
-              <a:rPr sz="1050" b="0">
-                <a:solidFill>
-                  <a:srgbClr val="3a3a3a"/>
-                </a:solidFill>
-                <a:latin typeface="Arial"/>
-              </a:rPr>
-              <a:t>The threshold set on DDR does not transfer.</a:t>
+              <a:t>Measure: sensitivity at specificity 0.90 for grades 1-2 vs No DR, on held-out EyePACS patients and APTOS.</a:t>
             </a:r>
           </a:p>
         </p:txBody>
@@ -27443,7 +25293,7 @@
                 </a:solidFill>
                 <a:latin typeface="Arial"/>
               </a:rPr>
-              <a:t>Preliminary results from my own runs; more seeds and intervals are still to come.</a:t>
+              <a:t>Three data arms, one change at a time, with a negative control.</a:t>
             </a:r>
           </a:p>
         </p:txBody>
@@ -27501,7 +25351,7 @@
                 </a:solidFill>
                 <a:latin typeface="Arial"/>
               </a:rPr>
-              <a:t>Research Question</a:t>
+              <a:t>Relevant Works</a:t>
             </a:r>
           </a:p>
         </p:txBody>
@@ -27536,7 +25386,7 @@
                 </a:solidFill>
                 <a:latin typeface="Arial"/>
               </a:rPr>
-              <a:t>What this project asks</a:t>
+              <a:t>Data and methods this project builds on</a:t>
             </a:r>
           </a:p>
         </p:txBody>
@@ -27578,24 +25428,24 @@
       </p:sp>
       <p:sp>
         <p:nvSpPr>
-          <p:cNvPr id="201" name="Question"/>
+          <p:cNvPr id="201" name="H Work"/>
           <p:cNvSpPr/>
           <p:nvPr/>
         </p:nvSpPr>
         <p:spPr>
           <a:xfrm>
             <a:off x="502920" y="1280160"/>
-            <a:ext cx="8138160" cy="731520"/>
+            <a:ext cx="2377440" cy="292608"/>
           </a:xfrm>
           <a:prstGeom prst="roundRect">
             <a:avLst/>
           </a:prstGeom>
           <a:solidFill>
-            <a:srgbClr val="E4ECF6"/>
+            <a:srgbClr val="3D5F84"/>
           </a:solidFill>
           <a:ln w="9525">
             <a:solidFill>
-              <a:srgbClr val="BCCFE4"/>
+              <a:srgbClr val="3D5F84"/>
             </a:solidFill>
           </a:ln>
         </p:spPr>
@@ -27617,29 +25467,245 @@
           <a:bodyPr wrap="square" lIns="91440" tIns="36576" rIns="91440" bIns="36576" rtlCol="0" anchor="ctr"/>
           <a:lstStyle/>
           <a:p>
-            <a:pPr algn="ctr"/>
+            <a:pPr algn="l"/>
             <a:r>
-              <a:rPr sz="1300" b="1">
-                <a:solidFill>
-                  <a:srgbClr val="121212"/>
+              <a:rPr sz="1050" b="1">
+                <a:solidFill>
+                  <a:srgbClr val="FFFFFF"/>
                 </a:solidFill>
                 <a:latin typeface="Arial"/>
               </a:rPr>
-              <a:t>Does merging datasets help early-DR detection, or does the model only learn which dataset an image came from?</a:t>
+              <a:t>Work</a:t>
             </a:r>
           </a:p>
         </p:txBody>
       </p:sp>
       <p:sp>
         <p:nvSpPr>
-          <p:cNvPr id="202" name="RQ1"/>
+          <p:cNvPr id="202" name="H What it provides"/>
           <p:cNvSpPr/>
           <p:nvPr/>
         </p:nvSpPr>
         <p:spPr>
           <a:xfrm>
-            <a:off x="502920" y="2148840"/>
-            <a:ext cx="3977639" cy="1371600"/>
+            <a:off x="2971800" y="1280160"/>
+            <a:ext cx="3108960" cy="292608"/>
+          </a:xfrm>
+          <a:prstGeom prst="roundRect">
+            <a:avLst/>
+          </a:prstGeom>
+          <a:solidFill>
+            <a:srgbClr val="3D5F84"/>
+          </a:solidFill>
+          <a:ln w="9525">
+            <a:solidFill>
+              <a:srgbClr val="3D5F84"/>
+            </a:solidFill>
+          </a:ln>
+        </p:spPr>
+        <p:style>
+          <a:lnRef idx="1">
+            <a:schemeClr val="accent1"/>
+          </a:lnRef>
+          <a:fillRef idx="3">
+            <a:schemeClr val="accent1"/>
+          </a:fillRef>
+          <a:effectRef idx="2">
+            <a:schemeClr val="accent1"/>
+          </a:effectRef>
+          <a:fontRef idx="minor">
+            <a:schemeClr val="lt1"/>
+          </a:fontRef>
+        </p:style>
+        <p:txBody>
+          <a:bodyPr wrap="square" lIns="91440" tIns="36576" rIns="91440" bIns="36576" rtlCol="0" anchor="ctr"/>
+          <a:lstStyle/>
+          <a:p>
+            <a:pPr algn="l"/>
+            <a:r>
+              <a:rPr sz="1050" b="1">
+                <a:solidFill>
+                  <a:srgbClr val="FFFFFF"/>
+                </a:solidFill>
+                <a:latin typeface="Arial"/>
+              </a:rPr>
+              <a:t>What it provides</a:t>
+            </a:r>
+          </a:p>
+        </p:txBody>
+      </p:sp>
+      <p:sp>
+        <p:nvSpPr>
+          <p:cNvPr id="203" name="H Role in this project"/>
+          <p:cNvSpPr/>
+          <p:nvPr/>
+        </p:nvSpPr>
+        <p:spPr>
+          <a:xfrm>
+            <a:off x="6172200" y="1280160"/>
+            <a:ext cx="2468880" cy="292608"/>
+          </a:xfrm>
+          <a:prstGeom prst="roundRect">
+            <a:avLst/>
+          </a:prstGeom>
+          <a:solidFill>
+            <a:srgbClr val="3D5F84"/>
+          </a:solidFill>
+          <a:ln w="9525">
+            <a:solidFill>
+              <a:srgbClr val="3D5F84"/>
+            </a:solidFill>
+          </a:ln>
+        </p:spPr>
+        <p:style>
+          <a:lnRef idx="1">
+            <a:schemeClr val="accent1"/>
+          </a:lnRef>
+          <a:fillRef idx="3">
+            <a:schemeClr val="accent1"/>
+          </a:fillRef>
+          <a:effectRef idx="2">
+            <a:schemeClr val="accent1"/>
+          </a:effectRef>
+          <a:fontRef idx="minor">
+            <a:schemeClr val="lt1"/>
+          </a:fontRef>
+        </p:style>
+        <p:txBody>
+          <a:bodyPr wrap="square" lIns="91440" tIns="36576" rIns="91440" bIns="36576" rtlCol="0" anchor="ctr"/>
+          <a:lstStyle/>
+          <a:p>
+            <a:pPr algn="l"/>
+            <a:r>
+              <a:rPr sz="1050" b="1">
+                <a:solidFill>
+                  <a:srgbClr val="FFFFFF"/>
+                </a:solidFill>
+                <a:latin typeface="Arial"/>
+              </a:rPr>
+              <a:t>Role in this project</a:t>
+            </a:r>
+          </a:p>
+        </p:txBody>
+      </p:sp>
+      <p:sp>
+        <p:nvSpPr>
+          <p:cNvPr id="204" name="W00.55"/>
+          <p:cNvSpPr/>
+          <p:nvPr/>
+        </p:nvSpPr>
+        <p:spPr>
+          <a:xfrm>
+            <a:off x="502920" y="1627632"/>
+            <a:ext cx="2377440" cy="457200"/>
+          </a:xfrm>
+          <a:prstGeom prst="roundRect">
+            <a:avLst/>
+          </a:prstGeom>
+          <a:solidFill>
+            <a:srgbClr val="FFFFFF"/>
+          </a:solidFill>
+          <a:ln w="9525">
+            <a:solidFill>
+              <a:srgbClr val="CDD2D7"/>
+            </a:solidFill>
+          </a:ln>
+        </p:spPr>
+        <p:style>
+          <a:lnRef idx="1">
+            <a:schemeClr val="accent1"/>
+          </a:lnRef>
+          <a:fillRef idx="3">
+            <a:schemeClr val="accent1"/>
+          </a:fillRef>
+          <a:effectRef idx="2">
+            <a:schemeClr val="accent1"/>
+          </a:effectRef>
+          <a:fontRef idx="minor">
+            <a:schemeClr val="lt1"/>
+          </a:fontRef>
+        </p:style>
+        <p:txBody>
+          <a:bodyPr wrap="square" lIns="91440" tIns="36576" rIns="91440" bIns="36576" rtlCol="0" anchor="ctr"/>
+          <a:lstStyle/>
+          <a:p>
+            <a:pPr algn="l"/>
+            <a:r>
+              <a:rPr sz="1000" b="0">
+                <a:solidFill>
+                  <a:srgbClr val="3a3a3a"/>
+                </a:solidFill>
+                <a:latin typeface="Arial"/>
+              </a:rPr>
+              <a:t>Gulshan et al. (2016)</a:t>
+            </a:r>
+          </a:p>
+        </p:txBody>
+      </p:sp>
+      <p:sp>
+        <p:nvSpPr>
+          <p:cNvPr id="205" name="W03.25"/>
+          <p:cNvSpPr/>
+          <p:nvPr/>
+        </p:nvSpPr>
+        <p:spPr>
+          <a:xfrm>
+            <a:off x="2971800" y="1627632"/>
+            <a:ext cx="3108960" cy="457200"/>
+          </a:xfrm>
+          <a:prstGeom prst="roundRect">
+            <a:avLst/>
+          </a:prstGeom>
+          <a:solidFill>
+            <a:srgbClr val="FFFFFF"/>
+          </a:solidFill>
+          <a:ln w="9525">
+            <a:solidFill>
+              <a:srgbClr val="CDD2D7"/>
+            </a:solidFill>
+          </a:ln>
+        </p:spPr>
+        <p:style>
+          <a:lnRef idx="1">
+            <a:schemeClr val="accent1"/>
+          </a:lnRef>
+          <a:fillRef idx="3">
+            <a:schemeClr val="accent1"/>
+          </a:fillRef>
+          <a:effectRef idx="2">
+            <a:schemeClr val="accent1"/>
+          </a:effectRef>
+          <a:fontRef idx="minor">
+            <a:schemeClr val="lt1"/>
+          </a:fontRef>
+        </p:style>
+        <p:txBody>
+          <a:bodyPr wrap="square" lIns="91440" tIns="36576" rIns="91440" bIns="36576" rtlCol="0" anchor="ctr"/>
+          <a:lstStyle/>
+          <a:p>
+            <a:pPr algn="l"/>
+            <a:r>
+              <a:rPr sz="1000" b="0">
+                <a:solidFill>
+                  <a:srgbClr val="3a3a3a"/>
+                </a:solidFill>
+                <a:latin typeface="Arial"/>
+              </a:rPr>
+              <a:t>Deep learning for referable DR (moderate or worse) on retinal images</a:t>
+            </a:r>
+          </a:p>
+        </p:txBody>
+      </p:sp>
+      <p:sp>
+        <p:nvSpPr>
+          <p:cNvPr id="206" name="W06.75"/>
+          <p:cNvSpPr/>
+          <p:nvPr/>
+        </p:nvSpPr>
+        <p:spPr>
+          <a:xfrm>
+            <a:off x="6172200" y="1627632"/>
+            <a:ext cx="2468880" cy="457200"/>
           </a:xfrm>
           <a:prstGeom prst="roundRect">
             <a:avLst/>
@@ -27673,39 +25739,135 @@
           <a:p>
             <a:pPr algn="l"/>
             <a:r>
-              <a:rPr sz="1200" b="1">
-                <a:solidFill>
-                  <a:srgbClr val="121212"/>
+              <a:rPr sz="1000" b="0">
+                <a:solidFill>
+                  <a:srgbClr val="3a3a3a"/>
                 </a:solidFill>
                 <a:latin typeface="Arial"/>
               </a:rPr>
-              <a:t>RQ1</a:t>
-            </a:r>
-          </a:p>
-          <a:p>
-            <a:pPr algn="l"/>
-            <a:r>
-              <a:rPr sz="1100" b="0">
-                <a:solidFill>
-                  <a:srgbClr val="3a3a3a"/>
-                </a:solidFill>
-                <a:latin typeface="Arial"/>
-              </a:rPr>
-              <a:t>Does adding EyePACS to DDR improve early-DR sensitivity at a fixed specificity on sources the model has not seen?</a:t>
+              <a:t>Reference point; I target early DR (grades 1-2)</a:t>
             </a:r>
           </a:p>
         </p:txBody>
       </p:sp>
       <p:sp>
         <p:nvSpPr>
-          <p:cNvPr id="203" name="RQ2"/>
+          <p:cNvPr id="207" name="W10.55"/>
           <p:cNvSpPr/>
           <p:nvPr/>
         </p:nvSpPr>
         <p:spPr>
           <a:xfrm>
-            <a:off x="4663440" y="2148840"/>
-            <a:ext cx="3977639" cy="1371600"/>
+            <a:off x="502920" y="2121408"/>
+            <a:ext cx="2377440" cy="457200"/>
+          </a:xfrm>
+          <a:prstGeom prst="roundRect">
+            <a:avLst/>
+          </a:prstGeom>
+          <a:solidFill>
+            <a:srgbClr val="FFFFFF"/>
+          </a:solidFill>
+          <a:ln w="9525">
+            <a:solidFill>
+              <a:srgbClr val="CDD2D7"/>
+            </a:solidFill>
+          </a:ln>
+        </p:spPr>
+        <p:style>
+          <a:lnRef idx="1">
+            <a:schemeClr val="accent1"/>
+          </a:lnRef>
+          <a:fillRef idx="3">
+            <a:schemeClr val="accent1"/>
+          </a:fillRef>
+          <a:effectRef idx="2">
+            <a:schemeClr val="accent1"/>
+          </a:effectRef>
+          <a:fontRef idx="minor">
+            <a:schemeClr val="lt1"/>
+          </a:fontRef>
+        </p:style>
+        <p:txBody>
+          <a:bodyPr wrap="square" lIns="91440" tIns="36576" rIns="91440" bIns="36576" rtlCol="0" anchor="ctr"/>
+          <a:lstStyle/>
+          <a:p>
+            <a:pPr algn="l"/>
+            <a:r>
+              <a:rPr sz="1000" b="0">
+                <a:solidFill>
+                  <a:srgbClr val="3a3a3a"/>
+                </a:solidFill>
+                <a:latin typeface="Arial"/>
+              </a:rPr>
+              <a:t>Li et al. (2019), DDR</a:t>
+            </a:r>
+          </a:p>
+        </p:txBody>
+      </p:sp>
+      <p:sp>
+        <p:nvSpPr>
+          <p:cNvPr id="208" name="W13.25"/>
+          <p:cNvSpPr/>
+          <p:nvPr/>
+        </p:nvSpPr>
+        <p:spPr>
+          <a:xfrm>
+            <a:off x="2971800" y="2121408"/>
+            <a:ext cx="3108960" cy="457200"/>
+          </a:xfrm>
+          <a:prstGeom prst="roundRect">
+            <a:avLst/>
+          </a:prstGeom>
+          <a:solidFill>
+            <a:srgbClr val="FFFFFF"/>
+          </a:solidFill>
+          <a:ln w="9525">
+            <a:solidFill>
+              <a:srgbClr val="CDD2D7"/>
+            </a:solidFill>
+          </a:ln>
+        </p:spPr>
+        <p:style>
+          <a:lnRef idx="1">
+            <a:schemeClr val="accent1"/>
+          </a:lnRef>
+          <a:fillRef idx="3">
+            <a:schemeClr val="accent1"/>
+          </a:fillRef>
+          <a:effectRef idx="2">
+            <a:schemeClr val="accent1"/>
+          </a:effectRef>
+          <a:fontRef idx="minor">
+            <a:schemeClr val="lt1"/>
+          </a:fontRef>
+        </p:style>
+        <p:txBody>
+          <a:bodyPr wrap="square" lIns="91440" tIns="36576" rIns="91440" bIns="36576" rtlCol="0" anchor="ctr"/>
+          <a:lstStyle/>
+          <a:p>
+            <a:pPr algn="l"/>
+            <a:r>
+              <a:rPr sz="1000" b="0">
+                <a:solidFill>
+                  <a:srgbClr val="3a3a3a"/>
+                </a:solidFill>
+                <a:latin typeface="Arial"/>
+              </a:rPr>
+              <a:t>Graded fundus image dataset (grades 0-4)</a:t>
+            </a:r>
+          </a:p>
+        </p:txBody>
+      </p:sp>
+      <p:sp>
+        <p:nvSpPr>
+          <p:cNvPr id="209" name="W16.75"/>
+          <p:cNvSpPr/>
+          <p:nvPr/>
+        </p:nvSpPr>
+        <p:spPr>
+          <a:xfrm>
+            <a:off x="6172200" y="2121408"/>
+            <a:ext cx="2468880" cy="457200"/>
           </a:xfrm>
           <a:prstGeom prst="roundRect">
             <a:avLst/>
@@ -27739,39 +25901,27 @@
           <a:p>
             <a:pPr algn="l"/>
             <a:r>
-              <a:rPr sz="1200" b="1">
-                <a:solidFill>
-                  <a:srgbClr val="121212"/>
+              <a:rPr sz="1000" b="0">
+                <a:solidFill>
+                  <a:srgbClr val="3a3a3a"/>
                 </a:solidFill>
                 <a:latin typeface="Arial"/>
               </a:rPr>
-              <a:t>RQ2</a:t>
-            </a:r>
-          </a:p>
-          <a:p>
-            <a:pPr algn="l"/>
-            <a:r>
-              <a:rPr sz="1100" b="0">
-                <a:solidFill>
-                  <a:srgbClr val="3a3a3a"/>
-                </a:solidFill>
-                <a:latin typeface="Arial"/>
-              </a:rPr>
-              <a:t>Do calibrated probabilities and a threshold frozen on validation still hold on unseen data?</a:t>
+              <a:t>Training source and internal test</a:t>
             </a:r>
           </a:p>
         </p:txBody>
       </p:sp>
       <p:sp>
         <p:nvSpPr>
-          <p:cNvPr id="204" name="Signal"/>
+          <p:cNvPr id="210" name="W20.55"/>
           <p:cNvSpPr/>
           <p:nvPr/>
         </p:nvSpPr>
         <p:spPr>
           <a:xfrm>
-            <a:off x="502920" y="3657600"/>
-            <a:ext cx="8138160" cy="548640"/>
+            <a:off x="502920" y="2615184"/>
+            <a:ext cx="2377440" cy="457200"/>
           </a:xfrm>
           <a:prstGeom prst="roundRect">
             <a:avLst/>
@@ -27805,20 +25955,452 @@
           <a:p>
             <a:pPr algn="l"/>
             <a:r>
-              <a:rPr sz="1100" b="0">
+              <a:rPr sz="1000" b="0">
                 <a:solidFill>
                   <a:srgbClr val="3a3a3a"/>
                 </a:solidFill>
                 <a:latin typeface="Arial"/>
               </a:rPr>
-              <a:t>Measure: sensitivity at specificity 0.90 for grades 1-2 vs No DR, on held-out EyePACS patients and APTOS.</a:t>
+              <a:t>Kaggle EyePACS (2015)</a:t>
             </a:r>
           </a:p>
         </p:txBody>
       </p:sp>
       <p:sp>
         <p:nvSpPr>
-          <p:cNvPr id="205" name="Banner"/>
+          <p:cNvPr id="211" name="W23.25"/>
+          <p:cNvSpPr/>
+          <p:nvPr/>
+        </p:nvSpPr>
+        <p:spPr>
+          <a:xfrm>
+            <a:off x="2971800" y="2615184"/>
+            <a:ext cx="3108960" cy="457200"/>
+          </a:xfrm>
+          <a:prstGeom prst="roundRect">
+            <a:avLst/>
+          </a:prstGeom>
+          <a:solidFill>
+            <a:srgbClr val="FFFFFF"/>
+          </a:solidFill>
+          <a:ln w="9525">
+            <a:solidFill>
+              <a:srgbClr val="CDD2D7"/>
+            </a:solidFill>
+          </a:ln>
+        </p:spPr>
+        <p:style>
+          <a:lnRef idx="1">
+            <a:schemeClr val="accent1"/>
+          </a:lnRef>
+          <a:fillRef idx="3">
+            <a:schemeClr val="accent1"/>
+          </a:fillRef>
+          <a:effectRef idx="2">
+            <a:schemeClr val="accent1"/>
+          </a:effectRef>
+          <a:fontRef idx="minor">
+            <a:schemeClr val="lt1"/>
+          </a:fontRef>
+        </p:style>
+        <p:txBody>
+          <a:bodyPr wrap="square" lIns="91440" tIns="36576" rIns="91440" bIns="36576" rtlCol="0" anchor="ctr"/>
+          <a:lstStyle/>
+          <a:p>
+            <a:pPr algn="l"/>
+            <a:r>
+              <a:rPr sz="1000" b="0">
+                <a:solidFill>
+                  <a:srgbClr val="3a3a3a"/>
+                </a:solidFill>
+                <a:latin typeface="Arial"/>
+              </a:rPr>
+              <a:t>Large graded fundus image set</a:t>
+            </a:r>
+          </a:p>
+        </p:txBody>
+      </p:sp>
+      <p:sp>
+        <p:nvSpPr>
+          <p:cNvPr id="212" name="W26.75"/>
+          <p:cNvSpPr/>
+          <p:nvPr/>
+        </p:nvSpPr>
+        <p:spPr>
+          <a:xfrm>
+            <a:off x="6172200" y="2615184"/>
+            <a:ext cx="2468880" cy="457200"/>
+          </a:xfrm>
+          <a:prstGeom prst="roundRect">
+            <a:avLst/>
+          </a:prstGeom>
+          <a:solidFill>
+            <a:srgbClr val="E3F2EA"/>
+          </a:solidFill>
+          <a:ln w="9525">
+            <a:solidFill>
+              <a:srgbClr val="1E7A5A"/>
+            </a:solidFill>
+          </a:ln>
+        </p:spPr>
+        <p:style>
+          <a:lnRef idx="1">
+            <a:schemeClr val="accent1"/>
+          </a:lnRef>
+          <a:fillRef idx="3">
+            <a:schemeClr val="accent1"/>
+          </a:fillRef>
+          <a:effectRef idx="2">
+            <a:schemeClr val="accent1"/>
+          </a:effectRef>
+          <a:fontRef idx="minor">
+            <a:schemeClr val="lt1"/>
+          </a:fontRef>
+        </p:style>
+        <p:txBody>
+          <a:bodyPr wrap="square" lIns="91440" tIns="36576" rIns="91440" bIns="36576" rtlCol="0" anchor="ctr"/>
+          <a:lstStyle/>
+          <a:p>
+            <a:pPr algn="l"/>
+            <a:r>
+              <a:rPr sz="1000" b="0">
+                <a:solidFill>
+                  <a:srgbClr val="3a3a3a"/>
+                </a:solidFill>
+                <a:latin typeface="Arial"/>
+              </a:rPr>
+              <a:t>Second source; held-out patients as test</a:t>
+            </a:r>
+          </a:p>
+        </p:txBody>
+      </p:sp>
+      <p:sp>
+        <p:nvSpPr>
+          <p:cNvPr id="213" name="W30.55"/>
+          <p:cNvSpPr/>
+          <p:nvPr/>
+        </p:nvSpPr>
+        <p:spPr>
+          <a:xfrm>
+            <a:off x="502920" y="3108960"/>
+            <a:ext cx="2377440" cy="457200"/>
+          </a:xfrm>
+          <a:prstGeom prst="roundRect">
+            <a:avLst/>
+          </a:prstGeom>
+          <a:solidFill>
+            <a:srgbClr val="FFFFFF"/>
+          </a:solidFill>
+          <a:ln w="9525">
+            <a:solidFill>
+              <a:srgbClr val="CDD2D7"/>
+            </a:solidFill>
+          </a:ln>
+        </p:spPr>
+        <p:style>
+          <a:lnRef idx="1">
+            <a:schemeClr val="accent1"/>
+          </a:lnRef>
+          <a:fillRef idx="3">
+            <a:schemeClr val="accent1"/>
+          </a:fillRef>
+          <a:effectRef idx="2">
+            <a:schemeClr val="accent1"/>
+          </a:effectRef>
+          <a:fontRef idx="minor">
+            <a:schemeClr val="lt1"/>
+          </a:fontRef>
+        </p:style>
+        <p:txBody>
+          <a:bodyPr wrap="square" lIns="91440" tIns="36576" rIns="91440" bIns="36576" rtlCol="0" anchor="ctr"/>
+          <a:lstStyle/>
+          <a:p>
+            <a:pPr algn="l"/>
+            <a:r>
+              <a:rPr sz="1000" b="0">
+                <a:solidFill>
+                  <a:srgbClr val="3a3a3a"/>
+                </a:solidFill>
+                <a:latin typeface="Arial"/>
+              </a:rPr>
+              <a:t>APTOS 2019</a:t>
+            </a:r>
+          </a:p>
+        </p:txBody>
+      </p:sp>
+      <p:sp>
+        <p:nvSpPr>
+          <p:cNvPr id="214" name="W33.25"/>
+          <p:cNvSpPr/>
+          <p:nvPr/>
+        </p:nvSpPr>
+        <p:spPr>
+          <a:xfrm>
+            <a:off x="2971800" y="3108960"/>
+            <a:ext cx="3108960" cy="457200"/>
+          </a:xfrm>
+          <a:prstGeom prst="roundRect">
+            <a:avLst/>
+          </a:prstGeom>
+          <a:solidFill>
+            <a:srgbClr val="FFFFFF"/>
+          </a:solidFill>
+          <a:ln w="9525">
+            <a:solidFill>
+              <a:srgbClr val="CDD2D7"/>
+            </a:solidFill>
+          </a:ln>
+        </p:spPr>
+        <p:style>
+          <a:lnRef idx="1">
+            <a:schemeClr val="accent1"/>
+          </a:lnRef>
+          <a:fillRef idx="3">
+            <a:schemeClr val="accent1"/>
+          </a:fillRef>
+          <a:effectRef idx="2">
+            <a:schemeClr val="accent1"/>
+          </a:effectRef>
+          <a:fontRef idx="minor">
+            <a:schemeClr val="lt1"/>
+          </a:fontRef>
+        </p:style>
+        <p:txBody>
+          <a:bodyPr wrap="square" lIns="91440" tIns="36576" rIns="91440" bIns="36576" rtlCol="0" anchor="ctr"/>
+          <a:lstStyle/>
+          <a:p>
+            <a:pPr algn="l"/>
+            <a:r>
+              <a:rPr sz="1000" b="0">
+                <a:solidFill>
+                  <a:srgbClr val="3a3a3a"/>
+                </a:solidFill>
+                <a:latin typeface="Arial"/>
+              </a:rPr>
+              <a:t>Graded images from a separate source</a:t>
+            </a:r>
+          </a:p>
+        </p:txBody>
+      </p:sp>
+      <p:sp>
+        <p:nvSpPr>
+          <p:cNvPr id="215" name="W36.75"/>
+          <p:cNvSpPr/>
+          <p:nvPr/>
+        </p:nvSpPr>
+        <p:spPr>
+          <a:xfrm>
+            <a:off x="6172200" y="3108960"/>
+            <a:ext cx="2468880" cy="457200"/>
+          </a:xfrm>
+          <a:prstGeom prst="roundRect">
+            <a:avLst/>
+          </a:prstGeom>
+          <a:solidFill>
+            <a:srgbClr val="E3F2EA"/>
+          </a:solidFill>
+          <a:ln w="9525">
+            <a:solidFill>
+              <a:srgbClr val="1E7A5A"/>
+            </a:solidFill>
+          </a:ln>
+        </p:spPr>
+        <p:style>
+          <a:lnRef idx="1">
+            <a:schemeClr val="accent1"/>
+          </a:lnRef>
+          <a:fillRef idx="3">
+            <a:schemeClr val="accent1"/>
+          </a:fillRef>
+          <a:effectRef idx="2">
+            <a:schemeClr val="accent1"/>
+          </a:effectRef>
+          <a:fontRef idx="minor">
+            <a:schemeClr val="lt1"/>
+          </a:fontRef>
+        </p:style>
+        <p:txBody>
+          <a:bodyPr wrap="square" lIns="91440" tIns="36576" rIns="91440" bIns="36576" rtlCol="0" anchor="ctr"/>
+          <a:lstStyle/>
+          <a:p>
+            <a:pPr algn="l"/>
+            <a:r>
+              <a:rPr sz="1000" b="0">
+                <a:solidFill>
+                  <a:srgbClr val="3a3a3a"/>
+                </a:solidFill>
+                <a:latin typeface="Arial"/>
+              </a:rPr>
+              <a:t>External test only, never trained on</a:t>
+            </a:r>
+          </a:p>
+        </p:txBody>
+      </p:sp>
+      <p:sp>
+        <p:nvSpPr>
+          <p:cNvPr id="216" name="W40.55"/>
+          <p:cNvSpPr/>
+          <p:nvPr/>
+        </p:nvSpPr>
+        <p:spPr>
+          <a:xfrm>
+            <a:off x="502920" y="3602736"/>
+            <a:ext cx="2377440" cy="457200"/>
+          </a:xfrm>
+          <a:prstGeom prst="roundRect">
+            <a:avLst/>
+          </a:prstGeom>
+          <a:solidFill>
+            <a:srgbClr val="FFFFFF"/>
+          </a:solidFill>
+          <a:ln w="9525">
+            <a:solidFill>
+              <a:srgbClr val="CDD2D7"/>
+            </a:solidFill>
+          </a:ln>
+        </p:spPr>
+        <p:style>
+          <a:lnRef idx="1">
+            <a:schemeClr val="accent1"/>
+          </a:lnRef>
+          <a:fillRef idx="3">
+            <a:schemeClr val="accent1"/>
+          </a:fillRef>
+          <a:effectRef idx="2">
+            <a:schemeClr val="accent1"/>
+          </a:effectRef>
+          <a:fontRef idx="minor">
+            <a:schemeClr val="lt1"/>
+          </a:fontRef>
+        </p:style>
+        <p:txBody>
+          <a:bodyPr wrap="square" lIns="91440" tIns="36576" rIns="91440" bIns="36576" rtlCol="0" anchor="ctr"/>
+          <a:lstStyle/>
+          <a:p>
+            <a:pPr algn="l"/>
+            <a:r>
+              <a:rPr sz="1000" b="0">
+                <a:solidFill>
+                  <a:srgbClr val="3a3a3a"/>
+                </a:solidFill>
+                <a:latin typeface="Arial"/>
+              </a:rPr>
+              <a:t>Guo et al. (2017)</a:t>
+            </a:r>
+          </a:p>
+        </p:txBody>
+      </p:sp>
+      <p:sp>
+        <p:nvSpPr>
+          <p:cNvPr id="217" name="W43.25"/>
+          <p:cNvSpPr/>
+          <p:nvPr/>
+        </p:nvSpPr>
+        <p:spPr>
+          <a:xfrm>
+            <a:off x="2971800" y="3602736"/>
+            <a:ext cx="3108960" cy="457200"/>
+          </a:xfrm>
+          <a:prstGeom prst="roundRect">
+            <a:avLst/>
+          </a:prstGeom>
+          <a:solidFill>
+            <a:srgbClr val="FFFFFF"/>
+          </a:solidFill>
+          <a:ln w="9525">
+            <a:solidFill>
+              <a:srgbClr val="CDD2D7"/>
+            </a:solidFill>
+          </a:ln>
+        </p:spPr>
+        <p:style>
+          <a:lnRef idx="1">
+            <a:schemeClr val="accent1"/>
+          </a:lnRef>
+          <a:fillRef idx="3">
+            <a:schemeClr val="accent1"/>
+          </a:fillRef>
+          <a:effectRef idx="2">
+            <a:schemeClr val="accent1"/>
+          </a:effectRef>
+          <a:fontRef idx="minor">
+            <a:schemeClr val="lt1"/>
+          </a:fontRef>
+        </p:style>
+        <p:txBody>
+          <a:bodyPr wrap="square" lIns="91440" tIns="36576" rIns="91440" bIns="36576" rtlCol="0" anchor="ctr"/>
+          <a:lstStyle/>
+          <a:p>
+            <a:pPr algn="l"/>
+            <a:r>
+              <a:rPr sz="1000" b="0">
+                <a:solidFill>
+                  <a:srgbClr val="3a3a3a"/>
+                </a:solidFill>
+                <a:latin typeface="Arial"/>
+              </a:rPr>
+              <a:t>Temperature scaling for calibrated outputs</a:t>
+            </a:r>
+          </a:p>
+        </p:txBody>
+      </p:sp>
+      <p:sp>
+        <p:nvSpPr>
+          <p:cNvPr id="218" name="W46.75"/>
+          <p:cNvSpPr/>
+          <p:nvPr/>
+        </p:nvSpPr>
+        <p:spPr>
+          <a:xfrm>
+            <a:off x="6172200" y="3602736"/>
+            <a:ext cx="2468880" cy="457200"/>
+          </a:xfrm>
+          <a:prstGeom prst="roundRect">
+            <a:avLst/>
+          </a:prstGeom>
+          <a:solidFill>
+            <a:srgbClr val="E3F2EA"/>
+          </a:solidFill>
+          <a:ln w="9525">
+            <a:solidFill>
+              <a:srgbClr val="1E7A5A"/>
+            </a:solidFill>
+          </a:ln>
+        </p:spPr>
+        <p:style>
+          <a:lnRef idx="1">
+            <a:schemeClr val="accent1"/>
+          </a:lnRef>
+          <a:fillRef idx="3">
+            <a:schemeClr val="accent1"/>
+          </a:fillRef>
+          <a:effectRef idx="2">
+            <a:schemeClr val="accent1"/>
+          </a:effectRef>
+          <a:fontRef idx="minor">
+            <a:schemeClr val="lt1"/>
+          </a:fontRef>
+        </p:style>
+        <p:txBody>
+          <a:bodyPr wrap="square" lIns="91440" tIns="36576" rIns="91440" bIns="36576" rtlCol="0" anchor="ctr"/>
+          <a:lstStyle/>
+          <a:p>
+            <a:pPr algn="l"/>
+            <a:r>
+              <a:rPr sz="1000" b="0">
+                <a:solidFill>
+                  <a:srgbClr val="3a3a3a"/>
+                </a:solidFill>
+                <a:latin typeface="Arial"/>
+              </a:rPr>
+              <a:t>Used to calibrate probabilities</a:t>
+            </a:r>
+          </a:p>
+        </p:txBody>
+      </p:sp>
+      <p:sp>
+        <p:nvSpPr>
+          <p:cNvPr id="219" name="Banner"/>
           <p:cNvSpPr/>
           <p:nvPr/>
         </p:nvSpPr>
@@ -27865,7 +26447,7 @@
                 </a:solidFill>
                 <a:latin typeface="Arial"/>
               </a:rPr>
-              <a:t>Three data arms, one change at a time, with a negative control.</a:t>
+              <a:t>Still to do: a literature search for early-DR and merged-data studies.</a:t>
             </a:r>
           </a:p>
         </p:txBody>
@@ -27923,7 +26505,7 @@
                 </a:solidFill>
                 <a:latin typeface="Arial"/>
               </a:rPr>
-              <a:t>Relevant Works</a:t>
+              <a:t>How It Is Different</a:t>
             </a:r>
           </a:p>
         </p:txBody>
@@ -27958,7 +26540,7 @@
                 </a:solidFill>
                 <a:latin typeface="Arial"/>
               </a:rPr>
-              <a:t>Data and methods this project builds on</a:t>
+              <a:t>Common practice as I understand it, to be checked in the literature review</a:t>
             </a:r>
           </a:p>
         </p:txBody>
@@ -28000,14 +26582,68 @@
       </p:sp>
       <p:sp>
         <p:nvSpPr>
-          <p:cNvPr id="201" name="H Work"/>
+          <p:cNvPr id="201" name="H0"/>
           <p:cNvSpPr/>
           <p:nvPr/>
         </p:nvSpPr>
         <p:spPr>
           <a:xfrm>
             <a:off x="502920" y="1280160"/>
-            <a:ext cx="2377440" cy="292608"/>
+            <a:ext cx="1188720" cy="292608"/>
+          </a:xfrm>
+          <a:prstGeom prst="roundRect">
+            <a:avLst/>
+          </a:prstGeom>
+          <a:solidFill>
+            <a:srgbClr val="FFFFFF"/>
+          </a:solidFill>
+          <a:ln w="9525">
+            <a:solidFill>
+              <a:srgbClr val="FFFFFF"/>
+            </a:solidFill>
+          </a:ln>
+        </p:spPr>
+        <p:style>
+          <a:lnRef idx="1">
+            <a:schemeClr val="accent1"/>
+          </a:lnRef>
+          <a:fillRef idx="3">
+            <a:schemeClr val="accent1"/>
+          </a:fillRef>
+          <a:effectRef idx="2">
+            <a:schemeClr val="accent1"/>
+          </a:effectRef>
+          <a:fontRef idx="minor">
+            <a:schemeClr val="lt1"/>
+          </a:fontRef>
+        </p:style>
+        <p:txBody>
+          <a:bodyPr wrap="square" lIns="91440" tIns="36576" rIns="91440" bIns="36576" rtlCol="0" anchor="ctr"/>
+          <a:lstStyle/>
+          <a:p>
+            <a:pPr algn="l"/>
+            <a:r>
+              <a:rPr sz="1000" b="1">
+                <a:solidFill>
+                  <a:srgbClr val="121212"/>
+                </a:solidFill>
+                <a:latin typeface="Arial"/>
+              </a:rPr>
+              <a:t/>
+            </a:r>
+          </a:p>
+        </p:txBody>
+      </p:sp>
+      <p:sp>
+        <p:nvSpPr>
+          <p:cNvPr id="202" name="H1"/>
+          <p:cNvSpPr/>
+          <p:nvPr/>
+        </p:nvSpPr>
+        <p:spPr>
+          <a:xfrm>
+            <a:off x="1783080" y="1280160"/>
+            <a:ext cx="3246120" cy="292608"/>
           </a:xfrm>
           <a:prstGeom prst="roundRect">
             <a:avLst/>
@@ -28047,31 +26683,31 @@
                 </a:solidFill>
                 <a:latin typeface="Arial"/>
               </a:rPr>
-              <a:t>Work</a:t>
+              <a:t>Common in existing work (to verify)</a:t>
             </a:r>
           </a:p>
         </p:txBody>
       </p:sp>
       <p:sp>
         <p:nvSpPr>
-          <p:cNvPr id="202" name="H What it provides"/>
+          <p:cNvPr id="203" name="H2"/>
           <p:cNvSpPr/>
           <p:nvPr/>
         </p:nvSpPr>
         <p:spPr>
           <a:xfrm>
-            <a:off x="2971800" y="1280160"/>
-            <a:ext cx="3108960" cy="292608"/>
+            <a:off x="5120640" y="1280160"/>
+            <a:ext cx="3566160" cy="292608"/>
           </a:xfrm>
           <a:prstGeom prst="roundRect">
             <a:avLst/>
           </a:prstGeom>
           <a:solidFill>
-            <a:srgbClr val="3D5F84"/>
+            <a:srgbClr val="1E7A5A"/>
           </a:solidFill>
           <a:ln w="9525">
             <a:solidFill>
-              <a:srgbClr val="3D5F84"/>
+              <a:srgbClr val="1E7A5A"/>
             </a:solidFill>
           </a:ln>
         </p:spPr>
@@ -28101,31 +26737,31 @@
                 </a:solidFill>
                 <a:latin typeface="Arial"/>
               </a:rPr>
-              <a:t>What it provides</a:t>
+              <a:t>This project</a:t>
             </a:r>
           </a:p>
         </p:txBody>
       </p:sp>
       <p:sp>
         <p:nvSpPr>
-          <p:cNvPr id="203" name="H Role in this project"/>
+          <p:cNvPr id="204" name="L0"/>
           <p:cNvSpPr/>
           <p:nvPr/>
         </p:nvSpPr>
         <p:spPr>
           <a:xfrm>
-            <a:off x="6172200" y="1280160"/>
-            <a:ext cx="2468880" cy="292608"/>
+            <a:off x="502920" y="1645920"/>
+            <a:ext cx="1188720" cy="457200"/>
           </a:xfrm>
           <a:prstGeom prst="roundRect">
             <a:avLst/>
           </a:prstGeom>
           <a:solidFill>
-            <a:srgbClr val="3D5F84"/>
+            <a:srgbClr val="E4ECF6"/>
           </a:solidFill>
           <a:ln w="9525">
             <a:solidFill>
-              <a:srgbClr val="3D5F84"/>
+              <a:srgbClr val="BCCFE4"/>
             </a:solidFill>
           </a:ln>
         </p:spPr>
@@ -28149,27 +26785,27 @@
           <a:p>
             <a:pPr algn="l"/>
             <a:r>
-              <a:rPr sz="1050" b="1">
-                <a:solidFill>
-                  <a:srgbClr val="FFFFFF"/>
+              <a:rPr sz="1100" b="1">
+                <a:solidFill>
+                  <a:srgbClr val="121212"/>
                 </a:solidFill>
                 <a:latin typeface="Arial"/>
               </a:rPr>
-              <a:t>Role in this project</a:t>
+              <a:t>Target</a:t>
             </a:r>
           </a:p>
         </p:txBody>
       </p:sp>
       <p:sp>
         <p:nvSpPr>
-          <p:cNvPr id="204" name="W00.55"/>
+          <p:cNvPr id="205" name="C0"/>
           <p:cNvSpPr/>
           <p:nvPr/>
         </p:nvSpPr>
         <p:spPr>
           <a:xfrm>
-            <a:off x="502920" y="1627632"/>
-            <a:ext cx="2377440" cy="457200"/>
+            <a:off x="1783080" y="1645920"/>
+            <a:ext cx="3246120" cy="457200"/>
           </a:xfrm>
           <a:prstGeom prst="roundRect">
             <a:avLst/>
@@ -28203,27 +26839,135 @@
           <a:p>
             <a:pPr algn="l"/>
             <a:r>
-              <a:rPr sz="1000" b="0">
+              <a:rPr sz="1050" b="0">
                 <a:solidFill>
                   <a:srgbClr val="3a3a3a"/>
                 </a:solidFill>
                 <a:latin typeface="Arial"/>
               </a:rPr>
-              <a:t>Gulshan et al. (2016)</a:t>
+              <a:t>Referable DR (moderate or worse)</a:t>
             </a:r>
           </a:p>
         </p:txBody>
       </p:sp>
       <p:sp>
         <p:nvSpPr>
-          <p:cNvPr id="205" name="W03.25"/>
+          <p:cNvPr id="206" name="D0"/>
           <p:cNvSpPr/>
           <p:nvPr/>
         </p:nvSpPr>
         <p:spPr>
           <a:xfrm>
-            <a:off x="2971800" y="1627632"/>
-            <a:ext cx="3108960" cy="457200"/>
+            <a:off x="5120640" y="1645920"/>
+            <a:ext cx="3566160" cy="457200"/>
+          </a:xfrm>
+          <a:prstGeom prst="roundRect">
+            <a:avLst/>
+          </a:prstGeom>
+          <a:solidFill>
+            <a:srgbClr val="E3F2EA"/>
+          </a:solidFill>
+          <a:ln w="9525">
+            <a:solidFill>
+              <a:srgbClr val="1E7A5A"/>
+            </a:solidFill>
+          </a:ln>
+        </p:spPr>
+        <p:style>
+          <a:lnRef idx="1">
+            <a:schemeClr val="accent1"/>
+          </a:lnRef>
+          <a:fillRef idx="3">
+            <a:schemeClr val="accent1"/>
+          </a:fillRef>
+          <a:effectRef idx="2">
+            <a:schemeClr val="accent1"/>
+          </a:effectRef>
+          <a:fontRef idx="minor">
+            <a:schemeClr val="lt1"/>
+          </a:fontRef>
+        </p:style>
+        <p:txBody>
+          <a:bodyPr wrap="square" lIns="91440" tIns="36576" rIns="91440" bIns="36576" rtlCol="0" anchor="ctr"/>
+          <a:lstStyle/>
+          <a:p>
+            <a:pPr algn="l"/>
+            <a:r>
+              <a:rPr sz="1050" b="0">
+                <a:solidFill>
+                  <a:srgbClr val="121212"/>
+                </a:solidFill>
+                <a:latin typeface="Arial"/>
+              </a:rPr>
+              <a:t>Early DR (grades 1-2) at a fixed specificity</a:t>
+            </a:r>
+          </a:p>
+        </p:txBody>
+      </p:sp>
+      <p:sp>
+        <p:nvSpPr>
+          <p:cNvPr id="207" name="L1"/>
+          <p:cNvSpPr/>
+          <p:nvPr/>
+        </p:nvSpPr>
+        <p:spPr>
+          <a:xfrm>
+            <a:off x="502920" y="2167128"/>
+            <a:ext cx="1188720" cy="457200"/>
+          </a:xfrm>
+          <a:prstGeom prst="roundRect">
+            <a:avLst/>
+          </a:prstGeom>
+          <a:solidFill>
+            <a:srgbClr val="E4ECF6"/>
+          </a:solidFill>
+          <a:ln w="9525">
+            <a:solidFill>
+              <a:srgbClr val="BCCFE4"/>
+            </a:solidFill>
+          </a:ln>
+        </p:spPr>
+        <p:style>
+          <a:lnRef idx="1">
+            <a:schemeClr val="accent1"/>
+          </a:lnRef>
+          <a:fillRef idx="3">
+            <a:schemeClr val="accent1"/>
+          </a:fillRef>
+          <a:effectRef idx="2">
+            <a:schemeClr val="accent1"/>
+          </a:effectRef>
+          <a:fontRef idx="minor">
+            <a:schemeClr val="lt1"/>
+          </a:fontRef>
+        </p:style>
+        <p:txBody>
+          <a:bodyPr wrap="square" lIns="91440" tIns="36576" rIns="91440" bIns="36576" rtlCol="0" anchor="ctr"/>
+          <a:lstStyle/>
+          <a:p>
+            <a:pPr algn="l"/>
+            <a:r>
+              <a:rPr sz="1100" b="1">
+                <a:solidFill>
+                  <a:srgbClr val="121212"/>
+                </a:solidFill>
+                <a:latin typeface="Arial"/>
+              </a:rPr>
+              <a:t>Data</a:t>
+            </a:r>
+          </a:p>
+        </p:txBody>
+      </p:sp>
+      <p:sp>
+        <p:nvSpPr>
+          <p:cNvPr id="208" name="C1"/>
+          <p:cNvSpPr/>
+          <p:nvPr/>
+        </p:nvSpPr>
+        <p:spPr>
+          <a:xfrm>
+            <a:off x="1783080" y="2167128"/>
+            <a:ext cx="3246120" cy="457200"/>
           </a:xfrm>
           <a:prstGeom prst="roundRect">
             <a:avLst/>
@@ -28257,27 +27001,27 @@
           <a:p>
             <a:pPr algn="l"/>
             <a:r>
-              <a:rPr sz="1000" b="0">
+              <a:rPr sz="1050" b="0">
                 <a:solidFill>
                   <a:srgbClr val="3a3a3a"/>
                 </a:solidFill>
                 <a:latin typeface="Arial"/>
               </a:rPr>
-              <a:t>Deep learning for referable DR (moderate or worse) on retinal images</a:t>
+              <a:t>One dataset, or merged without testing the merge</a:t>
             </a:r>
           </a:p>
         </p:txBody>
       </p:sp>
       <p:sp>
         <p:nvSpPr>
-          <p:cNvPr id="206" name="W06.75"/>
+          <p:cNvPr id="209" name="D1"/>
           <p:cNvSpPr/>
           <p:nvPr/>
         </p:nvSpPr>
         <p:spPr>
           <a:xfrm>
-            <a:off x="6172200" y="1627632"/>
-            <a:ext cx="2468880" cy="457200"/>
+            <a:off x="5120640" y="2167128"/>
+            <a:ext cx="3566160" cy="457200"/>
           </a:xfrm>
           <a:prstGeom prst="roundRect">
             <a:avLst/>
@@ -28311,27 +27055,81 @@
           <a:p>
             <a:pPr algn="l"/>
             <a:r>
-              <a:rPr sz="1000" b="0">
-                <a:solidFill>
-                  <a:srgbClr val="3a3a3a"/>
+              <a:rPr sz="1050" b="0">
+                <a:solidFill>
+                  <a:srgbClr val="121212"/>
                 </a:solidFill>
                 <a:latin typeface="Arial"/>
               </a:rPr>
-              <a:t>Reference point; I target early DR (grades 1-2)</a:t>
+              <a:t>The merge is tested: DDR only, source-balanced, and the old merge as a control</a:t>
             </a:r>
           </a:p>
         </p:txBody>
       </p:sp>
       <p:sp>
         <p:nvSpPr>
-          <p:cNvPr id="207" name="W10.55"/>
+          <p:cNvPr id="210" name="L2"/>
           <p:cNvSpPr/>
           <p:nvPr/>
         </p:nvSpPr>
         <p:spPr>
           <a:xfrm>
-            <a:off x="502920" y="2121408"/>
-            <a:ext cx="2377440" cy="457200"/>
+            <a:off x="502920" y="2688336"/>
+            <a:ext cx="1188720" cy="457200"/>
+          </a:xfrm>
+          <a:prstGeom prst="roundRect">
+            <a:avLst/>
+          </a:prstGeom>
+          <a:solidFill>
+            <a:srgbClr val="E4ECF6"/>
+          </a:solidFill>
+          <a:ln w="9525">
+            <a:solidFill>
+              <a:srgbClr val="BCCFE4"/>
+            </a:solidFill>
+          </a:ln>
+        </p:spPr>
+        <p:style>
+          <a:lnRef idx="1">
+            <a:schemeClr val="accent1"/>
+          </a:lnRef>
+          <a:fillRef idx="3">
+            <a:schemeClr val="accent1"/>
+          </a:fillRef>
+          <a:effectRef idx="2">
+            <a:schemeClr val="accent1"/>
+          </a:effectRef>
+          <a:fontRef idx="minor">
+            <a:schemeClr val="lt1"/>
+          </a:fontRef>
+        </p:style>
+        <p:txBody>
+          <a:bodyPr wrap="square" lIns="91440" tIns="36576" rIns="91440" bIns="36576" rtlCol="0" anchor="ctr"/>
+          <a:lstStyle/>
+          <a:p>
+            <a:pPr algn="l"/>
+            <a:r>
+              <a:rPr sz="1100" b="1">
+                <a:solidFill>
+                  <a:srgbClr val="121212"/>
+                </a:solidFill>
+                <a:latin typeface="Arial"/>
+              </a:rPr>
+              <a:t>Imbalance</a:t>
+            </a:r>
+          </a:p>
+        </p:txBody>
+      </p:sp>
+      <p:sp>
+        <p:nvSpPr>
+          <p:cNvPr id="211" name="C2"/>
+          <p:cNvSpPr/>
+          <p:nvPr/>
+        </p:nvSpPr>
+        <p:spPr>
+          <a:xfrm>
+            <a:off x="1783080" y="2688336"/>
+            <a:ext cx="3246120" cy="457200"/>
           </a:xfrm>
           <a:prstGeom prst="roundRect">
             <a:avLst/>
@@ -28365,27 +27163,135 @@
           <a:p>
             <a:pPr algn="l"/>
             <a:r>
-              <a:rPr sz="1000" b="0">
+              <a:rPr sz="1050" b="0">
                 <a:solidFill>
                   <a:srgbClr val="3a3a3a"/>
                 </a:solidFill>
                 <a:latin typeface="Arial"/>
               </a:rPr>
-              <a:t>Li et al. (2019), DDR</a:t>
+              <a:t>A new method against a few baselines</a:t>
             </a:r>
           </a:p>
         </p:txBody>
       </p:sp>
       <p:sp>
         <p:nvSpPr>
-          <p:cNvPr id="208" name="W13.25"/>
+          <p:cNvPr id="212" name="D2"/>
           <p:cNvSpPr/>
           <p:nvPr/>
         </p:nvSpPr>
         <p:spPr>
           <a:xfrm>
-            <a:off x="2971800" y="2121408"/>
-            <a:ext cx="3108960" cy="457200"/>
+            <a:off x="5120640" y="2688336"/>
+            <a:ext cx="3566160" cy="457200"/>
+          </a:xfrm>
+          <a:prstGeom prst="roundRect">
+            <a:avLst/>
+          </a:prstGeom>
+          <a:solidFill>
+            <a:srgbClr val="E3F2EA"/>
+          </a:solidFill>
+          <a:ln w="9525">
+            <a:solidFill>
+              <a:srgbClr val="1E7A5A"/>
+            </a:solidFill>
+          </a:ln>
+        </p:spPr>
+        <p:style>
+          <a:lnRef idx="1">
+            <a:schemeClr val="accent1"/>
+          </a:lnRef>
+          <a:fillRef idx="3">
+            <a:schemeClr val="accent1"/>
+          </a:fillRef>
+          <a:effectRef idx="2">
+            <a:schemeClr val="accent1"/>
+          </a:effectRef>
+          <a:fontRef idx="minor">
+            <a:schemeClr val="lt1"/>
+          </a:fontRef>
+        </p:style>
+        <p:txBody>
+          <a:bodyPr wrap="square" lIns="91440" tIns="36576" rIns="91440" bIns="36576" rtlCol="0" anchor="ctr"/>
+          <a:lstStyle/>
+          <a:p>
+            <a:pPr algn="l"/>
+            <a:r>
+              <a:rPr sz="1050" b="0">
+                <a:solidFill>
+                  <a:srgbClr val="121212"/>
+                </a:solidFill>
+                <a:latin typeface="Arial"/>
+              </a:rPr>
+              <a:t>Sampler, loss and augmentation one at a time, with a control</a:t>
+            </a:r>
+          </a:p>
+        </p:txBody>
+      </p:sp>
+      <p:sp>
+        <p:nvSpPr>
+          <p:cNvPr id="213" name="L3"/>
+          <p:cNvSpPr/>
+          <p:nvPr/>
+        </p:nvSpPr>
+        <p:spPr>
+          <a:xfrm>
+            <a:off x="502920" y="3209544"/>
+            <a:ext cx="1188720" cy="457200"/>
+          </a:xfrm>
+          <a:prstGeom prst="roundRect">
+            <a:avLst/>
+          </a:prstGeom>
+          <a:solidFill>
+            <a:srgbClr val="E4ECF6"/>
+          </a:solidFill>
+          <a:ln w="9525">
+            <a:solidFill>
+              <a:srgbClr val="BCCFE4"/>
+            </a:solidFill>
+          </a:ln>
+        </p:spPr>
+        <p:style>
+          <a:lnRef idx="1">
+            <a:schemeClr val="accent1"/>
+          </a:lnRef>
+          <a:fillRef idx="3">
+            <a:schemeClr val="accent1"/>
+          </a:fillRef>
+          <a:effectRef idx="2">
+            <a:schemeClr val="accent1"/>
+          </a:effectRef>
+          <a:fontRef idx="minor">
+            <a:schemeClr val="lt1"/>
+          </a:fontRef>
+        </p:style>
+        <p:txBody>
+          <a:bodyPr wrap="square" lIns="91440" tIns="36576" rIns="91440" bIns="36576" rtlCol="0" anchor="ctr"/>
+          <a:lstStyle/>
+          <a:p>
+            <a:pPr algn="l"/>
+            <a:r>
+              <a:rPr sz="1100" b="1">
+                <a:solidFill>
+                  <a:srgbClr val="121212"/>
+                </a:solidFill>
+                <a:latin typeface="Arial"/>
+              </a:rPr>
+              <a:t>Transfer</a:t>
+            </a:r>
+          </a:p>
+        </p:txBody>
+      </p:sp>
+      <p:sp>
+        <p:nvSpPr>
+          <p:cNvPr id="214" name="C3"/>
+          <p:cNvSpPr/>
+          <p:nvPr/>
+        </p:nvSpPr>
+        <p:spPr>
+          <a:xfrm>
+            <a:off x="1783080" y="3209544"/>
+            <a:ext cx="3246120" cy="457200"/>
           </a:xfrm>
           <a:prstGeom prst="roundRect">
             <a:avLst/>
@@ -28419,27 +27325,27 @@
           <a:p>
             <a:pPr algn="l"/>
             <a:r>
-              <a:rPr sz="1000" b="0">
+              <a:rPr sz="1050" b="0">
                 <a:solidFill>
                   <a:srgbClr val="3a3a3a"/>
                 </a:solidFill>
                 <a:latin typeface="Arial"/>
               </a:rPr>
-              <a:t>Graded fundus image dataset (grades 0-4)</a:t>
+              <a:t>Internal splits or one external set</a:t>
             </a:r>
           </a:p>
         </p:txBody>
       </p:sp>
       <p:sp>
         <p:nvSpPr>
-          <p:cNvPr id="209" name="W16.75"/>
+          <p:cNvPr id="215" name="D3"/>
           <p:cNvSpPr/>
           <p:nvPr/>
         </p:nvSpPr>
         <p:spPr>
           <a:xfrm>
-            <a:off x="6172200" y="2121408"/>
-            <a:ext cx="2468880" cy="457200"/>
+            <a:off x="5120640" y="3209544"/>
+            <a:ext cx="3566160" cy="457200"/>
           </a:xfrm>
           <a:prstGeom prst="roundRect">
             <a:avLst/>
@@ -28473,27 +27379,81 @@
           <a:p>
             <a:pPr algn="l"/>
             <a:r>
-              <a:rPr sz="1000" b="0">
-                <a:solidFill>
-                  <a:srgbClr val="3a3a3a"/>
+              <a:rPr sz="1050" b="0">
+                <a:solidFill>
+                  <a:srgbClr val="121212"/>
                 </a:solidFill>
                 <a:latin typeface="Arial"/>
               </a:rPr>
-              <a:t>Training source and internal test</a:t>
+              <a:t>Held-out EyePACS patients plus APTOS, reported per source</a:t>
             </a:r>
           </a:p>
         </p:txBody>
       </p:sp>
       <p:sp>
         <p:nvSpPr>
-          <p:cNvPr id="210" name="W20.55"/>
+          <p:cNvPr id="216" name="L4"/>
           <p:cNvSpPr/>
           <p:nvPr/>
         </p:nvSpPr>
         <p:spPr>
           <a:xfrm>
-            <a:off x="502920" y="2615184"/>
-            <a:ext cx="2377440" cy="457200"/>
+            <a:off x="502920" y="3730752"/>
+            <a:ext cx="1188720" cy="457200"/>
+          </a:xfrm>
+          <a:prstGeom prst="roundRect">
+            <a:avLst/>
+          </a:prstGeom>
+          <a:solidFill>
+            <a:srgbClr val="E4ECF6"/>
+          </a:solidFill>
+          <a:ln w="9525">
+            <a:solidFill>
+              <a:srgbClr val="BCCFE4"/>
+            </a:solidFill>
+          </a:ln>
+        </p:spPr>
+        <p:style>
+          <a:lnRef idx="1">
+            <a:schemeClr val="accent1"/>
+          </a:lnRef>
+          <a:fillRef idx="3">
+            <a:schemeClr val="accent1"/>
+          </a:fillRef>
+          <a:effectRef idx="2">
+            <a:schemeClr val="accent1"/>
+          </a:effectRef>
+          <a:fontRef idx="minor">
+            <a:schemeClr val="lt1"/>
+          </a:fontRef>
+        </p:style>
+        <p:txBody>
+          <a:bodyPr wrap="square" lIns="91440" tIns="36576" rIns="91440" bIns="36576" rtlCol="0" anchor="ctr"/>
+          <a:lstStyle/>
+          <a:p>
+            <a:pPr algn="l"/>
+            <a:r>
+              <a:rPr sz="1100" b="1">
+                <a:solidFill>
+                  <a:srgbClr val="121212"/>
+                </a:solidFill>
+                <a:latin typeface="Arial"/>
+              </a:rPr>
+              <a:t>Probabilities</a:t>
+            </a:r>
+          </a:p>
+        </p:txBody>
+      </p:sp>
+      <p:sp>
+        <p:nvSpPr>
+          <p:cNvPr id="217" name="C4"/>
+          <p:cNvSpPr/>
+          <p:nvPr/>
+        </p:nvSpPr>
+        <p:spPr>
+          <a:xfrm>
+            <a:off x="1783080" y="3730752"/>
+            <a:ext cx="3246120" cy="457200"/>
           </a:xfrm>
           <a:prstGeom prst="roundRect">
             <a:avLst/>
@@ -28527,81 +27487,27 @@
           <a:p>
             <a:pPr algn="l"/>
             <a:r>
-              <a:rPr sz="1000" b="0">
+              <a:rPr sz="1050" b="0">
                 <a:solidFill>
                   <a:srgbClr val="3a3a3a"/>
                 </a:solidFill>
                 <a:latin typeface="Arial"/>
               </a:rPr>
-              <a:t>Kaggle EyePACS (2015)</a:t>
+              <a:t>Accuracy or AUC</a:t>
             </a:r>
           </a:p>
         </p:txBody>
       </p:sp>
       <p:sp>
         <p:nvSpPr>
-          <p:cNvPr id="211" name="W23.25"/>
+          <p:cNvPr id="218" name="D4"/>
           <p:cNvSpPr/>
           <p:nvPr/>
         </p:nvSpPr>
         <p:spPr>
           <a:xfrm>
-            <a:off x="2971800" y="2615184"/>
-            <a:ext cx="3108960" cy="457200"/>
-          </a:xfrm>
-          <a:prstGeom prst="roundRect">
-            <a:avLst/>
-          </a:prstGeom>
-          <a:solidFill>
-            <a:srgbClr val="FFFFFF"/>
-          </a:solidFill>
-          <a:ln w="9525">
-            <a:solidFill>
-              <a:srgbClr val="CDD2D7"/>
-            </a:solidFill>
-          </a:ln>
-        </p:spPr>
-        <p:style>
-          <a:lnRef idx="1">
-            <a:schemeClr val="accent1"/>
-          </a:lnRef>
-          <a:fillRef idx="3">
-            <a:schemeClr val="accent1"/>
-          </a:fillRef>
-          <a:effectRef idx="2">
-            <a:schemeClr val="accent1"/>
-          </a:effectRef>
-          <a:fontRef idx="minor">
-            <a:schemeClr val="lt1"/>
-          </a:fontRef>
-        </p:style>
-        <p:txBody>
-          <a:bodyPr wrap="square" lIns="91440" tIns="36576" rIns="91440" bIns="36576" rtlCol="0" anchor="ctr"/>
-          <a:lstStyle/>
-          <a:p>
-            <a:pPr algn="l"/>
-            <a:r>
-              <a:rPr sz="1000" b="0">
-                <a:solidFill>
-                  <a:srgbClr val="3a3a3a"/>
-                </a:solidFill>
-                <a:latin typeface="Arial"/>
-              </a:rPr>
-              <a:t>Large graded fundus image set</a:t>
-            </a:r>
-          </a:p>
-        </p:txBody>
-      </p:sp>
-      <p:sp>
-        <p:nvSpPr>
-          <p:cNvPr id="212" name="W26.75"/>
-          <p:cNvSpPr/>
-          <p:nvPr/>
-        </p:nvSpPr>
-        <p:spPr>
-          <a:xfrm>
-            <a:off x="6172200" y="2615184"/>
-            <a:ext cx="2468880" cy="457200"/>
+            <a:off x="5120640" y="3730752"/>
+            <a:ext cx="3566160" cy="457200"/>
           </a:xfrm>
           <a:prstGeom prst="roundRect">
             <a:avLst/>
@@ -28635,337 +27541,13 @@
           <a:p>
             <a:pPr algn="l"/>
             <a:r>
-              <a:rPr sz="1000" b="0">
-                <a:solidFill>
-                  <a:srgbClr val="3a3a3a"/>
+              <a:rPr sz="1050" b="0">
+                <a:solidFill>
+                  <a:srgbClr val="121212"/>
                 </a:solidFill>
                 <a:latin typeface="Arial"/>
               </a:rPr>
-              <a:t>Second source; held-out patients as test</a:t>
-            </a:r>
-          </a:p>
-        </p:txBody>
-      </p:sp>
-      <p:sp>
-        <p:nvSpPr>
-          <p:cNvPr id="213" name="W30.55"/>
-          <p:cNvSpPr/>
-          <p:nvPr/>
-        </p:nvSpPr>
-        <p:spPr>
-          <a:xfrm>
-            <a:off x="502920" y="3108960"/>
-            <a:ext cx="2377440" cy="457200"/>
-          </a:xfrm>
-          <a:prstGeom prst="roundRect">
-            <a:avLst/>
-          </a:prstGeom>
-          <a:solidFill>
-            <a:srgbClr val="FFFFFF"/>
-          </a:solidFill>
-          <a:ln w="9525">
-            <a:solidFill>
-              <a:srgbClr val="CDD2D7"/>
-            </a:solidFill>
-          </a:ln>
-        </p:spPr>
-        <p:style>
-          <a:lnRef idx="1">
-            <a:schemeClr val="accent1"/>
-          </a:lnRef>
-          <a:fillRef idx="3">
-            <a:schemeClr val="accent1"/>
-          </a:fillRef>
-          <a:effectRef idx="2">
-            <a:schemeClr val="accent1"/>
-          </a:effectRef>
-          <a:fontRef idx="minor">
-            <a:schemeClr val="lt1"/>
-          </a:fontRef>
-        </p:style>
-        <p:txBody>
-          <a:bodyPr wrap="square" lIns="91440" tIns="36576" rIns="91440" bIns="36576" rtlCol="0" anchor="ctr"/>
-          <a:lstStyle/>
-          <a:p>
-            <a:pPr algn="l"/>
-            <a:r>
-              <a:rPr sz="1000" b="0">
-                <a:solidFill>
-                  <a:srgbClr val="3a3a3a"/>
-                </a:solidFill>
-                <a:latin typeface="Arial"/>
-              </a:rPr>
-              <a:t>APTOS 2019</a:t>
-            </a:r>
-          </a:p>
-        </p:txBody>
-      </p:sp>
-      <p:sp>
-        <p:nvSpPr>
-          <p:cNvPr id="214" name="W33.25"/>
-          <p:cNvSpPr/>
-          <p:nvPr/>
-        </p:nvSpPr>
-        <p:spPr>
-          <a:xfrm>
-            <a:off x="2971800" y="3108960"/>
-            <a:ext cx="3108960" cy="457200"/>
-          </a:xfrm>
-          <a:prstGeom prst="roundRect">
-            <a:avLst/>
-          </a:prstGeom>
-          <a:solidFill>
-            <a:srgbClr val="FFFFFF"/>
-          </a:solidFill>
-          <a:ln w="9525">
-            <a:solidFill>
-              <a:srgbClr val="CDD2D7"/>
-            </a:solidFill>
-          </a:ln>
-        </p:spPr>
-        <p:style>
-          <a:lnRef idx="1">
-            <a:schemeClr val="accent1"/>
-          </a:lnRef>
-          <a:fillRef idx="3">
-            <a:schemeClr val="accent1"/>
-          </a:fillRef>
-          <a:effectRef idx="2">
-            <a:schemeClr val="accent1"/>
-          </a:effectRef>
-          <a:fontRef idx="minor">
-            <a:schemeClr val="lt1"/>
-          </a:fontRef>
-        </p:style>
-        <p:txBody>
-          <a:bodyPr wrap="square" lIns="91440" tIns="36576" rIns="91440" bIns="36576" rtlCol="0" anchor="ctr"/>
-          <a:lstStyle/>
-          <a:p>
-            <a:pPr algn="l"/>
-            <a:r>
-              <a:rPr sz="1000" b="0">
-                <a:solidFill>
-                  <a:srgbClr val="3a3a3a"/>
-                </a:solidFill>
-                <a:latin typeface="Arial"/>
-              </a:rPr>
-              <a:t>Graded images from a separate source</a:t>
-            </a:r>
-          </a:p>
-        </p:txBody>
-      </p:sp>
-      <p:sp>
-        <p:nvSpPr>
-          <p:cNvPr id="215" name="W36.75"/>
-          <p:cNvSpPr/>
-          <p:nvPr/>
-        </p:nvSpPr>
-        <p:spPr>
-          <a:xfrm>
-            <a:off x="6172200" y="3108960"/>
-            <a:ext cx="2468880" cy="457200"/>
-          </a:xfrm>
-          <a:prstGeom prst="roundRect">
-            <a:avLst/>
-          </a:prstGeom>
-          <a:solidFill>
-            <a:srgbClr val="E3F2EA"/>
-          </a:solidFill>
-          <a:ln w="9525">
-            <a:solidFill>
-              <a:srgbClr val="1E7A5A"/>
-            </a:solidFill>
-          </a:ln>
-        </p:spPr>
-        <p:style>
-          <a:lnRef idx="1">
-            <a:schemeClr val="accent1"/>
-          </a:lnRef>
-          <a:fillRef idx="3">
-            <a:schemeClr val="accent1"/>
-          </a:fillRef>
-          <a:effectRef idx="2">
-            <a:schemeClr val="accent1"/>
-          </a:effectRef>
-          <a:fontRef idx="minor">
-            <a:schemeClr val="lt1"/>
-          </a:fontRef>
-        </p:style>
-        <p:txBody>
-          <a:bodyPr wrap="square" lIns="91440" tIns="36576" rIns="91440" bIns="36576" rtlCol="0" anchor="ctr"/>
-          <a:lstStyle/>
-          <a:p>
-            <a:pPr algn="l"/>
-            <a:r>
-              <a:rPr sz="1000" b="0">
-                <a:solidFill>
-                  <a:srgbClr val="3a3a3a"/>
-                </a:solidFill>
-                <a:latin typeface="Arial"/>
-              </a:rPr>
-              <a:t>External test only, never trained on</a:t>
-            </a:r>
-          </a:p>
-        </p:txBody>
-      </p:sp>
-      <p:sp>
-        <p:nvSpPr>
-          <p:cNvPr id="216" name="W40.55"/>
-          <p:cNvSpPr/>
-          <p:nvPr/>
-        </p:nvSpPr>
-        <p:spPr>
-          <a:xfrm>
-            <a:off x="502920" y="3602736"/>
-            <a:ext cx="2377440" cy="457200"/>
-          </a:xfrm>
-          <a:prstGeom prst="roundRect">
-            <a:avLst/>
-          </a:prstGeom>
-          <a:solidFill>
-            <a:srgbClr val="FFFFFF"/>
-          </a:solidFill>
-          <a:ln w="9525">
-            <a:solidFill>
-              <a:srgbClr val="CDD2D7"/>
-            </a:solidFill>
-          </a:ln>
-        </p:spPr>
-        <p:style>
-          <a:lnRef idx="1">
-            <a:schemeClr val="accent1"/>
-          </a:lnRef>
-          <a:fillRef idx="3">
-            <a:schemeClr val="accent1"/>
-          </a:fillRef>
-          <a:effectRef idx="2">
-            <a:schemeClr val="accent1"/>
-          </a:effectRef>
-          <a:fontRef idx="minor">
-            <a:schemeClr val="lt1"/>
-          </a:fontRef>
-        </p:style>
-        <p:txBody>
-          <a:bodyPr wrap="square" lIns="91440" tIns="36576" rIns="91440" bIns="36576" rtlCol="0" anchor="ctr"/>
-          <a:lstStyle/>
-          <a:p>
-            <a:pPr algn="l"/>
-            <a:r>
-              <a:rPr sz="1000" b="0">
-                <a:solidFill>
-                  <a:srgbClr val="3a3a3a"/>
-                </a:solidFill>
-                <a:latin typeface="Arial"/>
-              </a:rPr>
-              <a:t>Guo et al. (2017)</a:t>
-            </a:r>
-          </a:p>
-        </p:txBody>
-      </p:sp>
-      <p:sp>
-        <p:nvSpPr>
-          <p:cNvPr id="217" name="W43.25"/>
-          <p:cNvSpPr/>
-          <p:nvPr/>
-        </p:nvSpPr>
-        <p:spPr>
-          <a:xfrm>
-            <a:off x="2971800" y="3602736"/>
-            <a:ext cx="3108960" cy="457200"/>
-          </a:xfrm>
-          <a:prstGeom prst="roundRect">
-            <a:avLst/>
-          </a:prstGeom>
-          <a:solidFill>
-            <a:srgbClr val="FFFFFF"/>
-          </a:solidFill>
-          <a:ln w="9525">
-            <a:solidFill>
-              <a:srgbClr val="CDD2D7"/>
-            </a:solidFill>
-          </a:ln>
-        </p:spPr>
-        <p:style>
-          <a:lnRef idx="1">
-            <a:schemeClr val="accent1"/>
-          </a:lnRef>
-          <a:fillRef idx="3">
-            <a:schemeClr val="accent1"/>
-          </a:fillRef>
-          <a:effectRef idx="2">
-            <a:schemeClr val="accent1"/>
-          </a:effectRef>
-          <a:fontRef idx="minor">
-            <a:schemeClr val="lt1"/>
-          </a:fontRef>
-        </p:style>
-        <p:txBody>
-          <a:bodyPr wrap="square" lIns="91440" tIns="36576" rIns="91440" bIns="36576" rtlCol="0" anchor="ctr"/>
-          <a:lstStyle/>
-          <a:p>
-            <a:pPr algn="l"/>
-            <a:r>
-              <a:rPr sz="1000" b="0">
-                <a:solidFill>
-                  <a:srgbClr val="3a3a3a"/>
-                </a:solidFill>
-                <a:latin typeface="Arial"/>
-              </a:rPr>
-              <a:t>Temperature scaling for calibrated outputs</a:t>
-            </a:r>
-          </a:p>
-        </p:txBody>
-      </p:sp>
-      <p:sp>
-        <p:nvSpPr>
-          <p:cNvPr id="218" name="W46.75"/>
-          <p:cNvSpPr/>
-          <p:nvPr/>
-        </p:nvSpPr>
-        <p:spPr>
-          <a:xfrm>
-            <a:off x="6172200" y="3602736"/>
-            <a:ext cx="2468880" cy="457200"/>
-          </a:xfrm>
-          <a:prstGeom prst="roundRect">
-            <a:avLst/>
-          </a:prstGeom>
-          <a:solidFill>
-            <a:srgbClr val="E3F2EA"/>
-          </a:solidFill>
-          <a:ln w="9525">
-            <a:solidFill>
-              <a:srgbClr val="1E7A5A"/>
-            </a:solidFill>
-          </a:ln>
-        </p:spPr>
-        <p:style>
-          <a:lnRef idx="1">
-            <a:schemeClr val="accent1"/>
-          </a:lnRef>
-          <a:fillRef idx="3">
-            <a:schemeClr val="accent1"/>
-          </a:fillRef>
-          <a:effectRef idx="2">
-            <a:schemeClr val="accent1"/>
-          </a:effectRef>
-          <a:fontRef idx="minor">
-            <a:schemeClr val="lt1"/>
-          </a:fontRef>
-        </p:style>
-        <p:txBody>
-          <a:bodyPr wrap="square" lIns="91440" tIns="36576" rIns="91440" bIns="36576" rtlCol="0" anchor="ctr"/>
-          <a:lstStyle/>
-          <a:p>
-            <a:pPr algn="l"/>
-            <a:r>
-              <a:rPr sz="1000" b="0">
-                <a:solidFill>
-                  <a:srgbClr val="3a3a3a"/>
-                </a:solidFill>
-                <a:latin typeface="Arial"/>
-              </a:rPr>
-              <a:t>Used to calibrate probabilities</a:t>
+              <a:t>Calibrated, prior-shift-corrected, with reliability curves</a:t>
             </a:r>
           </a:p>
         </p:txBody>
@@ -29019,7 +27601,7 @@
                 </a:solidFill>
                 <a:latin typeface="Arial"/>
               </a:rPr>
-              <a:t>Still to do: a literature search for early-DR and merged-data studies.</a:t>
+              <a:t>Not a new network: the value is the design and the evidence. Novelty claims wait for the literature search.</a:t>
             </a:r>
           </a:p>
         </p:txBody>
@@ -29077,7 +27659,7 @@
                 </a:solidFill>
                 <a:latin typeface="Arial"/>
               </a:rPr>
-              <a:t>How It Is Different</a:t>
+              <a:t>Proposed Methods</a:t>
             </a:r>
           </a:p>
         </p:txBody>
@@ -29091,7 +27673,7 @@
         <p:spPr>
           <a:xfrm>
             <a:off x="566928" y="932688"/>
-            <a:ext cx="8138160" cy="256032"/>
+            <a:ext cx="5486400" cy="256032"/>
           </a:xfrm>
           <a:prstGeom prst="rect">
             <a:avLst/>
@@ -29112,7 +27694,890 @@
                 </a:solidFill>
                 <a:latin typeface="Arial"/>
               </a:rPr>
-              <a:t>Common practice as I understand it, to be checked in the literature review</a:t>
+              <a:t>Three data arms, one change at a time</a:t>
+            </a:r>
+          </a:p>
+        </p:txBody>
+      </p:sp>
+      <p:sp>
+        <p:nvSpPr>
+          <p:cNvPr id="4" name="TextBox 3"/>
+          <p:cNvSpPr txBox="1"/>
+          <p:nvPr/>
+        </p:nvSpPr>
+        <p:spPr>
+          <a:xfrm>
+            <a:off x="566928" y="1207008"/>
+            <a:ext cx="7315200" cy="274320"/>
+          </a:xfrm>
+          <a:prstGeom prst="rect">
+            <a:avLst/>
+          </a:prstGeom>
+          <a:noFill/>
+        </p:spPr>
+        <p:txBody>
+          <a:bodyPr wrap="square" lIns="27432" tIns="18288" rIns="27432" bIns="18288" anchor="t">
+            <a:spAutoFit/>
+          </a:bodyPr>
+          <a:lstStyle/>
+          <a:p>
+            <a:pPr algn="l"/>
+            <a:r>
+              <a:rPr sz="1120" b="0" i="0">
+                <a:solidFill>
+                  <a:srgbClr val="121212"/>
+                </a:solidFill>
+                <a:latin typeface="Arial"/>
+              </a:rPr>
+              <a:t>Same model, image size and epochs; frozen patient-level splits; test sets opened once.</a:t>
+            </a:r>
+          </a:p>
+        </p:txBody>
+      </p:sp>
+      <p:sp>
+        <p:nvSpPr>
+          <p:cNvPr id="9" name="Rounded Rectangle 8"/>
+          <p:cNvSpPr/>
+          <p:nvPr/>
+        </p:nvSpPr>
+        <p:spPr>
+          <a:xfrm>
+            <a:off x="640080" y="1737360"/>
+            <a:ext cx="1335024" cy="640080"/>
+          </a:xfrm>
+          <a:prstGeom prst="roundRect">
+            <a:avLst/>
+          </a:prstGeom>
+          <a:solidFill>
+            <a:srgbClr val="BCCFE4"/>
+          </a:solidFill>
+          <a:ln w="9525">
+            <a:solidFill>
+              <a:srgbClr val="BCCFE4"/>
+            </a:solidFill>
+          </a:ln>
+        </p:spPr>
+        <p:style>
+          <a:lnRef idx="1">
+            <a:schemeClr val="accent1"/>
+          </a:lnRef>
+          <a:fillRef idx="3">
+            <a:schemeClr val="accent1"/>
+          </a:fillRef>
+          <a:effectRef idx="2">
+            <a:schemeClr val="accent1"/>
+          </a:effectRef>
+          <a:fontRef idx="minor">
+            <a:schemeClr val="lt1"/>
+          </a:fontRef>
+        </p:style>
+        <p:txBody>
+          <a:bodyPr wrap="square" lIns="54864" tIns="36576" rIns="54864" bIns="36576" rtlCol="0" anchor="ctr"/>
+          <a:lstStyle/>
+          <a:p>
+            <a:pPr algn="ctr"/>
+            <a:r>
+              <a:rPr sz="880" b="1">
+                <a:solidFill>
+                  <a:srgbClr val="121212"/>
+                </a:solidFill>
+                <a:latin typeface="Arial"/>
+              </a:rPr>
+              <a:t>Data</a:t>
+            </a:r>
+            <a:br>
+              <a:rPr sz="880" b="1">
+                <a:solidFill>
+                  <a:srgbClr val="121212"/>
+                </a:solidFill>
+                <a:latin typeface="Arial"/>
+              </a:rPr>
+            </a:br>
+            <a:r>
+              <a:rPr sz="880" b="1">
+                <a:solidFill>
+                  <a:srgbClr val="121212"/>
+                </a:solidFill>
+                <a:latin typeface="Arial"/>
+              </a:rPr>
+              <a:t>DDR, EyePACS, APTOS</a:t>
+            </a:r>
+          </a:p>
+        </p:txBody>
+      </p:sp>
+      <p:sp>
+        <p:nvSpPr>
+          <p:cNvPr id="10" name="Rounded Rectangle 9"/>
+          <p:cNvSpPr/>
+          <p:nvPr/>
+        </p:nvSpPr>
+        <p:spPr>
+          <a:xfrm>
+            <a:off x="2249424" y="1737360"/>
+            <a:ext cx="1335024" cy="640080"/>
+          </a:xfrm>
+          <a:prstGeom prst="roundRect">
+            <a:avLst/>
+          </a:prstGeom>
+          <a:solidFill>
+            <a:srgbClr val="BCCFE4"/>
+          </a:solidFill>
+          <a:ln w="9525">
+            <a:solidFill>
+              <a:srgbClr val="BCCFE4"/>
+            </a:solidFill>
+          </a:ln>
+        </p:spPr>
+        <p:style>
+          <a:lnRef idx="1">
+            <a:schemeClr val="accent1"/>
+          </a:lnRef>
+          <a:fillRef idx="3">
+            <a:schemeClr val="accent1"/>
+          </a:fillRef>
+          <a:effectRef idx="2">
+            <a:schemeClr val="accent1"/>
+          </a:effectRef>
+          <a:fontRef idx="minor">
+            <a:schemeClr val="lt1"/>
+          </a:fontRef>
+        </p:style>
+        <p:txBody>
+          <a:bodyPr wrap="square" lIns="54864" tIns="36576" rIns="54864" bIns="36576" rtlCol="0" anchor="ctr"/>
+          <a:lstStyle/>
+          <a:p>
+            <a:pPr algn="ctr"/>
+            <a:r>
+              <a:rPr sz="880" b="1">
+                <a:solidFill>
+                  <a:srgbClr val="121212"/>
+                </a:solidFill>
+                <a:latin typeface="Arial"/>
+              </a:rPr>
+              <a:t>Prepare</a:t>
+            </a:r>
+            <a:br>
+              <a:rPr sz="880" b="1">
+                <a:solidFill>
+                  <a:srgbClr val="121212"/>
+                </a:solidFill>
+                <a:latin typeface="Arial"/>
+              </a:rPr>
+            </a:br>
+            <a:r>
+              <a:rPr sz="880" b="1">
+                <a:solidFill>
+                  <a:srgbClr val="121212"/>
+                </a:solidFill>
+                <a:latin typeface="Arial"/>
+              </a:rPr>
+              <a:t>Crop, pad, 512 px</a:t>
+            </a:r>
+          </a:p>
+        </p:txBody>
+      </p:sp>
+      <p:sp>
+        <p:nvSpPr>
+          <p:cNvPr id="11" name="Rounded Rectangle 10"/>
+          <p:cNvSpPr/>
+          <p:nvPr/>
+        </p:nvSpPr>
+        <p:spPr>
+          <a:xfrm>
+            <a:off x="3858768" y="1737360"/>
+            <a:ext cx="1335024" cy="640080"/>
+          </a:xfrm>
+          <a:prstGeom prst="roundRect">
+            <a:avLst/>
+          </a:prstGeom>
+          <a:solidFill>
+            <a:srgbClr val="BCCFE4"/>
+          </a:solidFill>
+          <a:ln w="9525">
+            <a:solidFill>
+              <a:srgbClr val="BCCFE4"/>
+            </a:solidFill>
+          </a:ln>
+        </p:spPr>
+        <p:style>
+          <a:lnRef idx="1">
+            <a:schemeClr val="accent1"/>
+          </a:lnRef>
+          <a:fillRef idx="3">
+            <a:schemeClr val="accent1"/>
+          </a:fillRef>
+          <a:effectRef idx="2">
+            <a:schemeClr val="accent1"/>
+          </a:effectRef>
+          <a:fontRef idx="minor">
+            <a:schemeClr val="lt1"/>
+          </a:fontRef>
+        </p:style>
+        <p:txBody>
+          <a:bodyPr wrap="square" lIns="54864" tIns="36576" rIns="54864" bIns="36576" rtlCol="0" anchor="ctr"/>
+          <a:lstStyle/>
+          <a:p>
+            <a:pPr algn="ctr"/>
+            <a:r>
+              <a:rPr sz="880" b="1">
+                <a:solidFill>
+                  <a:srgbClr val="121212"/>
+                </a:solidFill>
+                <a:latin typeface="Arial"/>
+              </a:rPr>
+              <a:t>Merge arms</a:t>
+            </a:r>
+            <a:br>
+              <a:rPr sz="880" b="1">
+                <a:solidFill>
+                  <a:srgbClr val="121212"/>
+                </a:solidFill>
+                <a:latin typeface="Arial"/>
+              </a:rPr>
+            </a:br>
+            <a:r>
+              <a:rPr sz="880" b="1">
+                <a:solidFill>
+                  <a:srgbClr val="121212"/>
+                </a:solidFill>
+                <a:latin typeface="Arial"/>
+              </a:rPr>
+              <a:t>A, B, C</a:t>
+            </a:r>
+          </a:p>
+        </p:txBody>
+      </p:sp>
+      <p:sp>
+        <p:nvSpPr>
+          <p:cNvPr id="12" name="Rounded Rectangle 11"/>
+          <p:cNvSpPr/>
+          <p:nvPr/>
+        </p:nvSpPr>
+        <p:spPr>
+          <a:xfrm>
+            <a:off x="5468112" y="1737360"/>
+            <a:ext cx="1335024" cy="640080"/>
+          </a:xfrm>
+          <a:prstGeom prst="roundRect">
+            <a:avLst/>
+          </a:prstGeom>
+          <a:solidFill>
+            <a:srgbClr val="E0F1EB"/>
+          </a:solidFill>
+          <a:ln w="9525">
+            <a:solidFill>
+              <a:srgbClr val="00634A"/>
+            </a:solidFill>
+          </a:ln>
+        </p:spPr>
+        <p:style>
+          <a:lnRef idx="1">
+            <a:schemeClr val="accent1"/>
+          </a:lnRef>
+          <a:fillRef idx="3">
+            <a:schemeClr val="accent1"/>
+          </a:fillRef>
+          <a:effectRef idx="2">
+            <a:schemeClr val="accent1"/>
+          </a:effectRef>
+          <a:fontRef idx="minor">
+            <a:schemeClr val="lt1"/>
+          </a:fontRef>
+        </p:style>
+        <p:txBody>
+          <a:bodyPr wrap="square" lIns="54864" tIns="36576" rIns="54864" bIns="36576" rtlCol="0" anchor="ctr"/>
+          <a:lstStyle/>
+          <a:p>
+            <a:pPr algn="ctr"/>
+            <a:r>
+              <a:rPr sz="880" b="1">
+                <a:solidFill>
+                  <a:srgbClr val="121212"/>
+                </a:solidFill>
+                <a:latin typeface="Arial"/>
+              </a:rPr>
+              <a:t>Model</a:t>
+            </a:r>
+            <a:br>
+              <a:rPr sz="880" b="1">
+                <a:solidFill>
+                  <a:srgbClr val="121212"/>
+                </a:solidFill>
+                <a:latin typeface="Arial"/>
+              </a:rPr>
+            </a:br>
+            <a:r>
+              <a:rPr sz="880" b="1">
+                <a:solidFill>
+                  <a:srgbClr val="121212"/>
+                </a:solidFill>
+                <a:latin typeface="Arial"/>
+              </a:rPr>
+              <a:t>EfficientNet-B0</a:t>
+            </a:r>
+          </a:p>
+        </p:txBody>
+      </p:sp>
+      <p:sp>
+        <p:nvSpPr>
+          <p:cNvPr id="13" name="Rounded Rectangle 12"/>
+          <p:cNvSpPr/>
+          <p:nvPr/>
+        </p:nvSpPr>
+        <p:spPr>
+          <a:xfrm>
+            <a:off x="7077456" y="1737360"/>
+            <a:ext cx="1335024" cy="640080"/>
+          </a:xfrm>
+          <a:prstGeom prst="roundRect">
+            <a:avLst/>
+          </a:prstGeom>
+          <a:solidFill>
+            <a:srgbClr val="E0F1EB"/>
+          </a:solidFill>
+          <a:ln w="9525">
+            <a:solidFill>
+              <a:srgbClr val="00634A"/>
+            </a:solidFill>
+          </a:ln>
+        </p:spPr>
+        <p:style>
+          <a:lnRef idx="1">
+            <a:schemeClr val="accent1"/>
+          </a:lnRef>
+          <a:fillRef idx="3">
+            <a:schemeClr val="accent1"/>
+          </a:fillRef>
+          <a:effectRef idx="2">
+            <a:schemeClr val="accent1"/>
+          </a:effectRef>
+          <a:fontRef idx="minor">
+            <a:schemeClr val="lt1"/>
+          </a:fontRef>
+        </p:style>
+        <p:txBody>
+          <a:bodyPr wrap="square" lIns="54864" tIns="36576" rIns="54864" bIns="36576" rtlCol="0" anchor="ctr"/>
+          <a:lstStyle/>
+          <a:p>
+            <a:pPr algn="ctr"/>
+            <a:r>
+              <a:rPr sz="880" b="1">
+                <a:solidFill>
+                  <a:srgbClr val="121212"/>
+                </a:solidFill>
+                <a:latin typeface="Arial"/>
+              </a:rPr>
+              <a:t>Output</a:t>
+            </a:r>
+            <a:br>
+              <a:rPr sz="880" b="1">
+                <a:solidFill>
+                  <a:srgbClr val="121212"/>
+                </a:solidFill>
+                <a:latin typeface="Arial"/>
+              </a:rPr>
+            </a:br>
+            <a:r>
+              <a:rPr sz="880" b="1">
+                <a:solidFill>
+                  <a:srgbClr val="121212"/>
+                </a:solidFill>
+                <a:latin typeface="Arial"/>
+              </a:rPr>
+              <a:t>Calibrated, 95% CI</a:t>
+            </a:r>
+          </a:p>
+        </p:txBody>
+      </p:sp>
+      <p:sp>
+        <p:nvSpPr>
+          <p:cNvPr id="14" name="TextBox 13"/>
+          <p:cNvSpPr txBox="1"/>
+          <p:nvPr/>
+        </p:nvSpPr>
+        <p:spPr>
+          <a:xfrm>
+            <a:off x="694944" y="2743200"/>
+            <a:ext cx="2514600" cy="201168"/>
+          </a:xfrm>
+          <a:prstGeom prst="rect">
+            <a:avLst/>
+          </a:prstGeom>
+          <a:noFill/>
+        </p:spPr>
+        <p:txBody>
+          <a:bodyPr wrap="square" lIns="27432" tIns="18288" rIns="27432" bIns="18288" anchor="t">
+            <a:spAutoFit/>
+          </a:bodyPr>
+          <a:lstStyle/>
+          <a:p>
+            <a:pPr algn="l"/>
+            <a:r>
+              <a:rPr sz="1220" b="1" i="0">
+                <a:solidFill>
+                  <a:srgbClr val="3D5F84"/>
+                </a:solidFill>
+                <a:latin typeface="Arial"/>
+              </a:rPr>
+              <a:t>Imbalance methods tested</a:t>
+            </a:r>
+          </a:p>
+        </p:txBody>
+      </p:sp>
+      <p:sp>
+        <p:nvSpPr>
+          <p:cNvPr id="15" name="Rounded Rectangle 14"/>
+          <p:cNvSpPr/>
+          <p:nvPr/>
+        </p:nvSpPr>
+        <p:spPr>
+          <a:xfrm>
+            <a:off x="731520" y="3044952"/>
+            <a:ext cx="1261872" cy="320040"/>
+          </a:xfrm>
+          <a:prstGeom prst="roundRect">
+            <a:avLst/>
+          </a:prstGeom>
+          <a:solidFill>
+            <a:srgbClr val="FFFFFF"/>
+          </a:solidFill>
+          <a:ln w="9525">
+            <a:solidFill>
+              <a:srgbClr val="CDD2D7"/>
+            </a:solidFill>
+          </a:ln>
+        </p:spPr>
+        <p:style>
+          <a:lnRef idx="1">
+            <a:schemeClr val="accent1"/>
+          </a:lnRef>
+          <a:fillRef idx="3">
+            <a:schemeClr val="accent1"/>
+          </a:fillRef>
+          <a:effectRef idx="2">
+            <a:schemeClr val="accent1"/>
+          </a:effectRef>
+          <a:fontRef idx="minor">
+            <a:schemeClr val="lt1"/>
+          </a:fontRef>
+        </p:style>
+        <p:txBody>
+          <a:bodyPr wrap="square" lIns="54864" tIns="36576" rIns="54864" bIns="36576" rtlCol="0" anchor="ctr"/>
+          <a:lstStyle/>
+          <a:p>
+            <a:pPr algn="ctr"/>
+            <a:r>
+              <a:rPr sz="869" b="1">
+                <a:solidFill>
+                  <a:srgbClr val="121212"/>
+                </a:solidFill>
+                <a:latin typeface="Arial"/>
+              </a:rPr>
+              <a:t>Weighted sampler</a:t>
+            </a:r>
+          </a:p>
+        </p:txBody>
+      </p:sp>
+      <p:sp>
+        <p:nvSpPr>
+          <p:cNvPr id="16" name="Rounded Rectangle 15"/>
+          <p:cNvSpPr/>
+          <p:nvPr/>
+        </p:nvSpPr>
+        <p:spPr>
+          <a:xfrm>
+            <a:off x="2130552" y="3044952"/>
+            <a:ext cx="1261872" cy="320040"/>
+          </a:xfrm>
+          <a:prstGeom prst="roundRect">
+            <a:avLst/>
+          </a:prstGeom>
+          <a:solidFill>
+            <a:srgbClr val="FFFFFF"/>
+          </a:solidFill>
+          <a:ln w="9525">
+            <a:solidFill>
+              <a:srgbClr val="CDD2D7"/>
+            </a:solidFill>
+          </a:ln>
+        </p:spPr>
+        <p:style>
+          <a:lnRef idx="1">
+            <a:schemeClr val="accent1"/>
+          </a:lnRef>
+          <a:fillRef idx="3">
+            <a:schemeClr val="accent1"/>
+          </a:fillRef>
+          <a:effectRef idx="2">
+            <a:schemeClr val="accent1"/>
+          </a:effectRef>
+          <a:fontRef idx="minor">
+            <a:schemeClr val="lt1"/>
+          </a:fontRef>
+        </p:style>
+        <p:txBody>
+          <a:bodyPr wrap="square" lIns="54864" tIns="36576" rIns="54864" bIns="36576" rtlCol="0" anchor="ctr"/>
+          <a:lstStyle/>
+          <a:p>
+            <a:pPr algn="ctr"/>
+            <a:r>
+              <a:rPr sz="869" b="1">
+                <a:solidFill>
+                  <a:srgbClr val="121212"/>
+                </a:solidFill>
+                <a:latin typeface="Arial"/>
+              </a:rPr>
+              <a:t>Class-balanced loss</a:t>
+            </a:r>
+          </a:p>
+        </p:txBody>
+      </p:sp>
+      <p:sp>
+        <p:nvSpPr>
+          <p:cNvPr id="17" name="Rounded Rectangle 16"/>
+          <p:cNvSpPr/>
+          <p:nvPr/>
+        </p:nvSpPr>
+        <p:spPr>
+          <a:xfrm>
+            <a:off x="3529584" y="3044952"/>
+            <a:ext cx="1261872" cy="320040"/>
+          </a:xfrm>
+          <a:prstGeom prst="roundRect">
+            <a:avLst/>
+          </a:prstGeom>
+          <a:solidFill>
+            <a:srgbClr val="FFFFFF"/>
+          </a:solidFill>
+          <a:ln w="9525">
+            <a:solidFill>
+              <a:srgbClr val="CDD2D7"/>
+            </a:solidFill>
+          </a:ln>
+        </p:spPr>
+        <p:style>
+          <a:lnRef idx="1">
+            <a:schemeClr val="accent1"/>
+          </a:lnRef>
+          <a:fillRef idx="3">
+            <a:schemeClr val="accent1"/>
+          </a:fillRef>
+          <a:effectRef idx="2">
+            <a:schemeClr val="accent1"/>
+          </a:effectRef>
+          <a:fontRef idx="minor">
+            <a:schemeClr val="lt1"/>
+          </a:fontRef>
+        </p:style>
+        <p:txBody>
+          <a:bodyPr wrap="square" lIns="54864" tIns="36576" rIns="54864" bIns="36576" rtlCol="0" anchor="ctr"/>
+          <a:lstStyle/>
+          <a:p>
+            <a:pPr algn="ctr"/>
+            <a:r>
+              <a:rPr sz="869" b="1">
+                <a:solidFill>
+                  <a:srgbClr val="121212"/>
+                </a:solidFill>
+                <a:latin typeface="Arial"/>
+              </a:rPr>
+              <a:t>Focal loss</a:t>
+            </a:r>
+          </a:p>
+        </p:txBody>
+      </p:sp>
+      <p:sp>
+        <p:nvSpPr>
+          <p:cNvPr id="18" name="Rounded Rectangle 17"/>
+          <p:cNvSpPr/>
+          <p:nvPr/>
+        </p:nvSpPr>
+        <p:spPr>
+          <a:xfrm>
+            <a:off x="731520" y="3483864"/>
+            <a:ext cx="1261872" cy="320040"/>
+          </a:xfrm>
+          <a:prstGeom prst="roundRect">
+            <a:avLst/>
+          </a:prstGeom>
+          <a:solidFill>
+            <a:srgbClr val="FFFFFF"/>
+          </a:solidFill>
+          <a:ln w="9525">
+            <a:solidFill>
+              <a:srgbClr val="CDD2D7"/>
+            </a:solidFill>
+          </a:ln>
+        </p:spPr>
+        <p:style>
+          <a:lnRef idx="1">
+            <a:schemeClr val="accent1"/>
+          </a:lnRef>
+          <a:fillRef idx="3">
+            <a:schemeClr val="accent1"/>
+          </a:fillRef>
+          <a:effectRef idx="2">
+            <a:schemeClr val="accent1"/>
+          </a:effectRef>
+          <a:fontRef idx="minor">
+            <a:schemeClr val="lt1"/>
+          </a:fontRef>
+        </p:style>
+        <p:txBody>
+          <a:bodyPr wrap="square" lIns="54864" tIns="36576" rIns="54864" bIns="36576" rtlCol="0" anchor="ctr"/>
+          <a:lstStyle/>
+          <a:p>
+            <a:pPr algn="ctr"/>
+            <a:r>
+              <a:rPr sz="869" b="1">
+                <a:solidFill>
+                  <a:srgbClr val="121212"/>
+                </a:solidFill>
+                <a:latin typeface="Arial"/>
+              </a:rPr>
+              <a:t>Strong augmentation</a:t>
+            </a:r>
+          </a:p>
+        </p:txBody>
+      </p:sp>
+      <p:sp>
+        <p:nvSpPr>
+          <p:cNvPr id="19" name="Rounded Rectangle 18"/>
+          <p:cNvSpPr/>
+          <p:nvPr/>
+        </p:nvSpPr>
+        <p:spPr>
+          <a:xfrm>
+            <a:off x="2130552" y="3483864"/>
+            <a:ext cx="1261872" cy="320040"/>
+          </a:xfrm>
+          <a:prstGeom prst="roundRect">
+            <a:avLst/>
+          </a:prstGeom>
+          <a:solidFill>
+            <a:srgbClr val="FFFFFF"/>
+          </a:solidFill>
+          <a:ln w="9525">
+            <a:solidFill>
+              <a:srgbClr val="CDD2D7"/>
+            </a:solidFill>
+          </a:ln>
+        </p:spPr>
+        <p:style>
+          <a:lnRef idx="1">
+            <a:schemeClr val="accent1"/>
+          </a:lnRef>
+          <a:fillRef idx="3">
+            <a:schemeClr val="accent1"/>
+          </a:fillRef>
+          <a:effectRef idx="2">
+            <a:schemeClr val="accent1"/>
+          </a:effectRef>
+          <a:fontRef idx="minor">
+            <a:schemeClr val="lt1"/>
+          </a:fontRef>
+        </p:style>
+        <p:txBody>
+          <a:bodyPr wrap="square" lIns="54864" tIns="36576" rIns="54864" bIns="36576" rtlCol="0" anchor="ctr"/>
+          <a:lstStyle/>
+          <a:p>
+            <a:pPr algn="ctr"/>
+            <a:r>
+              <a:rPr sz="869" b="1">
+                <a:solidFill>
+                  <a:srgbClr val="121212"/>
+                </a:solidFill>
+                <a:latin typeface="Arial"/>
+              </a:rPr>
+              <a:t>Augmentation control</a:t>
+            </a:r>
+          </a:p>
+        </p:txBody>
+      </p:sp>
+      <p:sp>
+        <p:nvSpPr>
+          <p:cNvPr id="20" name="TextBox 19"/>
+          <p:cNvSpPr txBox="1"/>
+          <p:nvPr/>
+        </p:nvSpPr>
+        <p:spPr>
+          <a:xfrm>
+            <a:off x="5010912" y="2743200"/>
+            <a:ext cx="2926080" cy="201168"/>
+          </a:xfrm>
+          <a:prstGeom prst="rect">
+            <a:avLst/>
+          </a:prstGeom>
+          <a:noFill/>
+        </p:spPr>
+        <p:txBody>
+          <a:bodyPr wrap="square" lIns="27432" tIns="18288" rIns="27432" bIns="18288" anchor="t">
+            <a:spAutoFit/>
+          </a:bodyPr>
+          <a:lstStyle/>
+          <a:p>
+            <a:pPr algn="l"/>
+            <a:r>
+              <a:rPr sz="1220" b="1" i="0">
+                <a:solidFill>
+                  <a:srgbClr val="3D5F84"/>
+                </a:solidFill>
+                <a:latin typeface="Arial"/>
+              </a:rPr>
+              <a:t>The three arms</a:t>
+            </a:r>
+          </a:p>
+        </p:txBody>
+      </p:sp>
+      <p:sp>
+        <p:nvSpPr>
+          <p:cNvPr id="21" name="TextBox 20"/>
+          <p:cNvSpPr txBox="1"/>
+          <p:nvPr/>
+        </p:nvSpPr>
+        <p:spPr>
+          <a:xfrm>
+            <a:off x="5029200" y="2999232"/>
+            <a:ext cx="3520440" cy="960120"/>
+          </a:xfrm>
+          <a:prstGeom prst="rect">
+            <a:avLst/>
+          </a:prstGeom>
+          <a:noFill/>
+        </p:spPr>
+        <p:txBody>
+          <a:bodyPr wrap="square" lIns="18288" tIns="18288" rIns="18288" bIns="18288">
+            <a:spAutoFit/>
+          </a:bodyPr>
+          <a:lstStyle/>
+          <a:p>
+            <a:pPr algn="l">
+              <a:lnSpc>
+                <a:spcPct val="105000"/>
+              </a:lnSpc>
+              <a:spcAft>
+                <a:spcPts val="400"/>
+              </a:spcAft>
+            </a:pPr>
+            <a:r>
+              <a:rPr sz="1000">
+                <a:solidFill>
+                  <a:srgbClr val="121212"/>
+                </a:solidFill>
+                <a:latin typeface="Arial"/>
+              </a:rPr>
+              <a:t>• A: DDR only (clean baseline)</a:t>
+            </a:r>
+          </a:p>
+          <a:p>
+            <a:pPr algn="l">
+              <a:lnSpc>
+                <a:spcPct val="105000"/>
+              </a:lnSpc>
+              <a:spcAft>
+                <a:spcPts val="400"/>
+              </a:spcAft>
+            </a:pPr>
+            <a:r>
+              <a:rPr sz="1000">
+                <a:solidFill>
+                  <a:srgbClr val="121212"/>
+                </a:solidFill>
+                <a:latin typeface="Arial"/>
+              </a:rPr>
+              <a:t>• B: DDR + EyePACS, source-balanced</a:t>
+            </a:r>
+          </a:p>
+          <a:p>
+            <a:pPr algn="l">
+              <a:lnSpc>
+                <a:spcPct val="105000"/>
+              </a:lnSpc>
+              <a:spcAft>
+                <a:spcPts val="400"/>
+              </a:spcAft>
+            </a:pPr>
+            <a:r>
+              <a:rPr sz="1000">
+                <a:solidFill>
+                  <a:srgbClr val="121212"/>
+                </a:solidFill>
+                <a:latin typeface="Arial"/>
+              </a:rPr>
+              <a:t>• C: version 1 merge (negative control)</a:t>
+            </a:r>
+          </a:p>
+          <a:p>
+            <a:pPr algn="l">
+              <a:lnSpc>
+                <a:spcPct val="105000"/>
+              </a:lnSpc>
+              <a:spcAft>
+                <a:spcPts val="400"/>
+              </a:spcAft>
+            </a:pPr>
+            <a:r>
+              <a:rPr sz="1000">
+                <a:solidFill>
+                  <a:srgbClr val="121212"/>
+                </a:solidFill>
+                <a:latin typeface="Arial"/>
+              </a:rPr>
+              <a:t>• The question: does the merge help, or teach the source?</a:t>
+            </a:r>
+          </a:p>
+        </p:txBody>
+      </p:sp>
+      <p:sp>
+        <p:nvSpPr>
+          <p:cNvPr id="22" name="Rounded Rectangle 21"/>
+          <p:cNvSpPr/>
+          <p:nvPr/>
+        </p:nvSpPr>
+        <p:spPr>
+          <a:xfrm>
+            <a:off x="1097280" y="4160520"/>
+            <a:ext cx="6903720" cy="329184"/>
+          </a:xfrm>
+          <a:prstGeom prst="roundRect">
+            <a:avLst/>
+          </a:prstGeom>
+          <a:solidFill>
+            <a:srgbClr val="F2F5F8"/>
+          </a:solidFill>
+          <a:ln w="9525">
+            <a:solidFill>
+              <a:srgbClr val="CDD2D7"/>
+            </a:solidFill>
+          </a:ln>
+        </p:spPr>
+        <p:style>
+          <a:lnRef idx="1">
+            <a:schemeClr val="accent1"/>
+          </a:lnRef>
+          <a:fillRef idx="3">
+            <a:schemeClr val="accent1"/>
+          </a:fillRef>
+          <a:effectRef idx="2">
+            <a:schemeClr val="accent1"/>
+          </a:effectRef>
+          <a:fontRef idx="minor">
+            <a:schemeClr val="lt1"/>
+          </a:fontRef>
+        </p:style>
+        <p:txBody>
+          <a:bodyPr wrap="square" lIns="54864" tIns="36576" rIns="54864" bIns="36576" rtlCol="0" anchor="ctr"/>
+          <a:lstStyle/>
+          <a:p>
+            <a:pPr algn="ctr"/>
+            <a:r>
+              <a:rPr sz="980" b="1">
+                <a:solidFill>
+                  <a:srgbClr val="121212"/>
+                </a:solidFill>
+                <a:latin typeface="Arial"/>
+              </a:rPr>
+              <a:t>Not a new network: the value is the design, the controls and the evidence.</a:t>
             </a:r>
           </a:p>
         </p:txBody>
@@ -29154,1027 +28619,149 @@
       </p:sp>
       <p:sp>
         <p:nvSpPr>
-          <p:cNvPr id="201" name="H0"/>
+          <p:cNvPr id="27" name="Shape 8">
+            <a:extLst>
+              <a:ext uri="{FF2B5EF4-FFF2-40B4-BE49-F238E27FC236}">
+                <a16:creationId xmlns:a16="http://schemas.microsoft.com/office/drawing/2014/main" id="{D3022105-94A7-5198-D6E2-77CC59383713}"/>
+              </a:ext>
+            </a:extLst>
+          </p:cNvPr>
           <p:cNvSpPr/>
           <p:nvPr/>
         </p:nvSpPr>
         <p:spPr>
-          <a:xfrm>
-            <a:off x="502920" y="1280160"/>
-            <a:ext cx="1188720" cy="292608"/>
-          </a:xfrm>
-          <a:prstGeom prst="roundRect">
+          <a:xfrm flipV="1">
+            <a:off x="2059718" y="2057015"/>
+            <a:ext cx="141667" cy="0"/>
+          </a:xfrm>
+          <a:prstGeom prst="line">
             <a:avLst/>
           </a:prstGeom>
-          <a:solidFill>
-            <a:srgbClr val="FFFFFF"/>
-          </a:solidFill>
-          <a:ln w="9525">
+          <a:noFill/>
+          <a:ln w="25400">
             <a:solidFill>
-              <a:srgbClr val="FFFFFF"/>
+              <a:srgbClr val="555555"/>
             </a:solidFill>
+            <a:prstDash val="solid"/>
+            <a:tailEnd type="triangle"/>
           </a:ln>
         </p:spPr>
-        <p:style>
-          <a:lnRef idx="1">
-            <a:schemeClr val="accent1"/>
-          </a:lnRef>
-          <a:fillRef idx="3">
-            <a:schemeClr val="accent1"/>
-          </a:fillRef>
-          <a:effectRef idx="2">
-            <a:schemeClr val="accent1"/>
-          </a:effectRef>
-          <a:fontRef idx="minor">
-            <a:schemeClr val="lt1"/>
-          </a:fontRef>
-        </p:style>
         <p:txBody>
-          <a:bodyPr wrap="square" lIns="91440" tIns="36576" rIns="91440" bIns="36576" rtlCol="0" anchor="ctr"/>
+          <a:bodyPr/>
           <a:lstStyle/>
           <a:p>
-            <a:pPr algn="l"/>
-            <a:r>
-              <a:rPr sz="1000" b="1">
-                <a:solidFill>
-                  <a:srgbClr val="121212"/>
-                </a:solidFill>
-                <a:latin typeface="Arial"/>
-              </a:rPr>
-              <a:t/>
-            </a:r>
+            <a:endParaRPr sz="1050"/>
           </a:p>
         </p:txBody>
       </p:sp>
       <p:sp>
         <p:nvSpPr>
-          <p:cNvPr id="202" name="H1"/>
+          <p:cNvPr id="29" name="Shape 8">
+            <a:extLst>
+              <a:ext uri="{FF2B5EF4-FFF2-40B4-BE49-F238E27FC236}">
+                <a16:creationId xmlns:a16="http://schemas.microsoft.com/office/drawing/2014/main" id="{582591C4-F68D-4A15-B6B9-5FEB08D109EA}"/>
+              </a:ext>
+            </a:extLst>
+          </p:cNvPr>
           <p:cNvSpPr/>
           <p:nvPr/>
         </p:nvSpPr>
         <p:spPr>
-          <a:xfrm>
-            <a:off x="1783080" y="1280160"/>
-            <a:ext cx="3246120" cy="292608"/>
-          </a:xfrm>
-          <a:prstGeom prst="roundRect">
+          <a:xfrm flipV="1">
+            <a:off x="3660991" y="2074875"/>
+            <a:ext cx="141667" cy="0"/>
+          </a:xfrm>
+          <a:prstGeom prst="line">
             <a:avLst/>
           </a:prstGeom>
-          <a:solidFill>
-            <a:srgbClr val="3D5F84"/>
-          </a:solidFill>
-          <a:ln w="9525">
+          <a:noFill/>
+          <a:ln w="25400">
             <a:solidFill>
-              <a:srgbClr val="3D5F84"/>
+              <a:srgbClr val="555555"/>
             </a:solidFill>
+            <a:prstDash val="solid"/>
+            <a:tailEnd type="triangle"/>
           </a:ln>
         </p:spPr>
-        <p:style>
-          <a:lnRef idx="1">
-            <a:schemeClr val="accent1"/>
-          </a:lnRef>
-          <a:fillRef idx="3">
-            <a:schemeClr val="accent1"/>
-          </a:fillRef>
-          <a:effectRef idx="2">
-            <a:schemeClr val="accent1"/>
-          </a:effectRef>
-          <a:fontRef idx="minor">
-            <a:schemeClr val="lt1"/>
-          </a:fontRef>
-        </p:style>
         <p:txBody>
-          <a:bodyPr wrap="square" lIns="91440" tIns="36576" rIns="91440" bIns="36576" rtlCol="0" anchor="ctr"/>
+          <a:bodyPr/>
           <a:lstStyle/>
           <a:p>
-            <a:pPr algn="l"/>
-            <a:r>
-              <a:rPr sz="1050" b="1">
-                <a:solidFill>
-                  <a:srgbClr val="FFFFFF"/>
-                </a:solidFill>
-                <a:latin typeface="Arial"/>
-              </a:rPr>
-              <a:t>Common in existing work (to verify)</a:t>
-            </a:r>
+            <a:endParaRPr sz="1050"/>
           </a:p>
         </p:txBody>
       </p:sp>
       <p:sp>
         <p:nvSpPr>
-          <p:cNvPr id="203" name="H2"/>
+          <p:cNvPr id="31" name="Shape 8">
+            <a:extLst>
+              <a:ext uri="{FF2B5EF4-FFF2-40B4-BE49-F238E27FC236}">
+                <a16:creationId xmlns:a16="http://schemas.microsoft.com/office/drawing/2014/main" id="{856019FD-6159-C16E-82A6-31C9B8A4135D}"/>
+              </a:ext>
+            </a:extLst>
+          </p:cNvPr>
           <p:cNvSpPr/>
           <p:nvPr/>
         </p:nvSpPr>
         <p:spPr>
-          <a:xfrm>
-            <a:off x="5120640" y="1280160"/>
-            <a:ext cx="3566160" cy="292608"/>
-          </a:xfrm>
-          <a:prstGeom prst="roundRect">
+          <a:xfrm flipV="1">
+            <a:off x="5262264" y="2074875"/>
+            <a:ext cx="141667" cy="0"/>
+          </a:xfrm>
+          <a:prstGeom prst="line">
             <a:avLst/>
           </a:prstGeom>
-          <a:solidFill>
-            <a:srgbClr val="1E7A5A"/>
-          </a:solidFill>
-          <a:ln w="9525">
+          <a:noFill/>
+          <a:ln w="25400">
             <a:solidFill>
-              <a:srgbClr val="1E7A5A"/>
+              <a:srgbClr val="555555"/>
             </a:solidFill>
+            <a:prstDash val="solid"/>
+            <a:tailEnd type="triangle"/>
           </a:ln>
         </p:spPr>
-        <p:style>
-          <a:lnRef idx="1">
-            <a:schemeClr val="accent1"/>
-          </a:lnRef>
-          <a:fillRef idx="3">
-            <a:schemeClr val="accent1"/>
-          </a:fillRef>
-          <a:effectRef idx="2">
-            <a:schemeClr val="accent1"/>
-          </a:effectRef>
-          <a:fontRef idx="minor">
-            <a:schemeClr val="lt1"/>
-          </a:fontRef>
-        </p:style>
         <p:txBody>
-          <a:bodyPr wrap="square" lIns="91440" tIns="36576" rIns="91440" bIns="36576" rtlCol="0" anchor="ctr"/>
+          <a:bodyPr/>
           <a:lstStyle/>
           <a:p>
-            <a:pPr algn="l"/>
-            <a:r>
-              <a:rPr sz="1050" b="1">
-                <a:solidFill>
-                  <a:srgbClr val="FFFFFF"/>
-                </a:solidFill>
-                <a:latin typeface="Arial"/>
-              </a:rPr>
-              <a:t>This project</a:t>
-            </a:r>
+            <a:endParaRPr sz="1050"/>
           </a:p>
         </p:txBody>
       </p:sp>
       <p:sp>
         <p:nvSpPr>
-          <p:cNvPr id="204" name="L0"/>
+          <p:cNvPr id="33" name="Shape 8">
+            <a:extLst>
+              <a:ext uri="{FF2B5EF4-FFF2-40B4-BE49-F238E27FC236}">
+                <a16:creationId xmlns:a16="http://schemas.microsoft.com/office/drawing/2014/main" id="{6B13386C-625D-A28B-390E-14BA0411E195}"/>
+              </a:ext>
+            </a:extLst>
+          </p:cNvPr>
           <p:cNvSpPr/>
           <p:nvPr/>
         </p:nvSpPr>
         <p:spPr>
-          <a:xfrm>
-            <a:off x="502920" y="1645920"/>
-            <a:ext cx="1188720" cy="457200"/>
-          </a:xfrm>
-          <a:prstGeom prst="roundRect">
+          <a:xfrm flipV="1">
+            <a:off x="6876416" y="2059850"/>
+            <a:ext cx="141667" cy="0"/>
+          </a:xfrm>
+          <a:prstGeom prst="line">
             <a:avLst/>
           </a:prstGeom>
-          <a:solidFill>
-            <a:srgbClr val="E4ECF6"/>
-          </a:solidFill>
-          <a:ln w="9525">
+          <a:noFill/>
+          <a:ln w="25400">
             <a:solidFill>
-              <a:srgbClr val="BCCFE4"/>
+              <a:srgbClr val="555555"/>
             </a:solidFill>
+            <a:prstDash val="solid"/>
+            <a:tailEnd type="triangle"/>
           </a:ln>
         </p:spPr>
-        <p:style>
-          <a:lnRef idx="1">
-            <a:schemeClr val="accent1"/>
-          </a:lnRef>
-          <a:fillRef idx="3">
-            <a:schemeClr val="accent1"/>
-          </a:fillRef>
-          <a:effectRef idx="2">
-            <a:schemeClr val="accent1"/>
-          </a:effectRef>
-          <a:fontRef idx="minor">
-            <a:schemeClr val="lt1"/>
-          </a:fontRef>
-        </p:style>
         <p:txBody>
-          <a:bodyPr wrap="square" lIns="91440" tIns="36576" rIns="91440" bIns="36576" rtlCol="0" anchor="ctr"/>
+          <a:bodyPr/>
           <a:lstStyle/>
           <a:p>
-            <a:pPr algn="l"/>
-            <a:r>
-              <a:rPr sz="1100" b="1">
-                <a:solidFill>
-                  <a:srgbClr val="121212"/>
-                </a:solidFill>
-                <a:latin typeface="Arial"/>
-              </a:rPr>
-              <a:t>Target</a:t>
-            </a:r>
-          </a:p>
-        </p:txBody>
-      </p:sp>
-      <p:sp>
-        <p:nvSpPr>
-          <p:cNvPr id="205" name="C0"/>
-          <p:cNvSpPr/>
-          <p:nvPr/>
-        </p:nvSpPr>
-        <p:spPr>
-          <a:xfrm>
-            <a:off x="1783080" y="1645920"/>
-            <a:ext cx="3246120" cy="457200"/>
-          </a:xfrm>
-          <a:prstGeom prst="roundRect">
-            <a:avLst/>
-          </a:prstGeom>
-          <a:solidFill>
-            <a:srgbClr val="FFFFFF"/>
-          </a:solidFill>
-          <a:ln w="9525">
-            <a:solidFill>
-              <a:srgbClr val="CDD2D7"/>
-            </a:solidFill>
-          </a:ln>
-        </p:spPr>
-        <p:style>
-          <a:lnRef idx="1">
-            <a:schemeClr val="accent1"/>
-          </a:lnRef>
-          <a:fillRef idx="3">
-            <a:schemeClr val="accent1"/>
-          </a:fillRef>
-          <a:effectRef idx="2">
-            <a:schemeClr val="accent1"/>
-          </a:effectRef>
-          <a:fontRef idx="minor">
-            <a:schemeClr val="lt1"/>
-          </a:fontRef>
-        </p:style>
-        <p:txBody>
-          <a:bodyPr wrap="square" lIns="91440" tIns="36576" rIns="91440" bIns="36576" rtlCol="0" anchor="ctr"/>
-          <a:lstStyle/>
-          <a:p>
-            <a:pPr algn="l"/>
-            <a:r>
-              <a:rPr sz="1050" b="0">
-                <a:solidFill>
-                  <a:srgbClr val="3a3a3a"/>
-                </a:solidFill>
-                <a:latin typeface="Arial"/>
-              </a:rPr>
-              <a:t>Referable DR (moderate or worse)</a:t>
-            </a:r>
-          </a:p>
-        </p:txBody>
-      </p:sp>
-      <p:sp>
-        <p:nvSpPr>
-          <p:cNvPr id="206" name="D0"/>
-          <p:cNvSpPr/>
-          <p:nvPr/>
-        </p:nvSpPr>
-        <p:spPr>
-          <a:xfrm>
-            <a:off x="5120640" y="1645920"/>
-            <a:ext cx="3566160" cy="457200"/>
-          </a:xfrm>
-          <a:prstGeom prst="roundRect">
-            <a:avLst/>
-          </a:prstGeom>
-          <a:solidFill>
-            <a:srgbClr val="E3F2EA"/>
-          </a:solidFill>
-          <a:ln w="9525">
-            <a:solidFill>
-              <a:srgbClr val="1E7A5A"/>
-            </a:solidFill>
-          </a:ln>
-        </p:spPr>
-        <p:style>
-          <a:lnRef idx="1">
-            <a:schemeClr val="accent1"/>
-          </a:lnRef>
-          <a:fillRef idx="3">
-            <a:schemeClr val="accent1"/>
-          </a:fillRef>
-          <a:effectRef idx="2">
-            <a:schemeClr val="accent1"/>
-          </a:effectRef>
-          <a:fontRef idx="minor">
-            <a:schemeClr val="lt1"/>
-          </a:fontRef>
-        </p:style>
-        <p:txBody>
-          <a:bodyPr wrap="square" lIns="91440" tIns="36576" rIns="91440" bIns="36576" rtlCol="0" anchor="ctr"/>
-          <a:lstStyle/>
-          <a:p>
-            <a:pPr algn="l"/>
-            <a:r>
-              <a:rPr sz="1050" b="0">
-                <a:solidFill>
-                  <a:srgbClr val="121212"/>
-                </a:solidFill>
-                <a:latin typeface="Arial"/>
-              </a:rPr>
-              <a:t>Early DR (grades 1-2) at a fixed specificity</a:t>
-            </a:r>
-          </a:p>
-        </p:txBody>
-      </p:sp>
-      <p:sp>
-        <p:nvSpPr>
-          <p:cNvPr id="207" name="L1"/>
-          <p:cNvSpPr/>
-          <p:nvPr/>
-        </p:nvSpPr>
-        <p:spPr>
-          <a:xfrm>
-            <a:off x="502920" y="2167128"/>
-            <a:ext cx="1188720" cy="457200"/>
-          </a:xfrm>
-          <a:prstGeom prst="roundRect">
-            <a:avLst/>
-          </a:prstGeom>
-          <a:solidFill>
-            <a:srgbClr val="E4ECF6"/>
-          </a:solidFill>
-          <a:ln w="9525">
-            <a:solidFill>
-              <a:srgbClr val="BCCFE4"/>
-            </a:solidFill>
-          </a:ln>
-        </p:spPr>
-        <p:style>
-          <a:lnRef idx="1">
-            <a:schemeClr val="accent1"/>
-          </a:lnRef>
-          <a:fillRef idx="3">
-            <a:schemeClr val="accent1"/>
-          </a:fillRef>
-          <a:effectRef idx="2">
-            <a:schemeClr val="accent1"/>
-          </a:effectRef>
-          <a:fontRef idx="minor">
-            <a:schemeClr val="lt1"/>
-          </a:fontRef>
-        </p:style>
-        <p:txBody>
-          <a:bodyPr wrap="square" lIns="91440" tIns="36576" rIns="91440" bIns="36576" rtlCol="0" anchor="ctr"/>
-          <a:lstStyle/>
-          <a:p>
-            <a:pPr algn="l"/>
-            <a:r>
-              <a:rPr sz="1100" b="1">
-                <a:solidFill>
-                  <a:srgbClr val="121212"/>
-                </a:solidFill>
-                <a:latin typeface="Arial"/>
-              </a:rPr>
-              <a:t>Data</a:t>
-            </a:r>
-          </a:p>
-        </p:txBody>
-      </p:sp>
-      <p:sp>
-        <p:nvSpPr>
-          <p:cNvPr id="208" name="C1"/>
-          <p:cNvSpPr/>
-          <p:nvPr/>
-        </p:nvSpPr>
-        <p:spPr>
-          <a:xfrm>
-            <a:off x="1783080" y="2167128"/>
-            <a:ext cx="3246120" cy="457200"/>
-          </a:xfrm>
-          <a:prstGeom prst="roundRect">
-            <a:avLst/>
-          </a:prstGeom>
-          <a:solidFill>
-            <a:srgbClr val="FFFFFF"/>
-          </a:solidFill>
-          <a:ln w="9525">
-            <a:solidFill>
-              <a:srgbClr val="CDD2D7"/>
-            </a:solidFill>
-          </a:ln>
-        </p:spPr>
-        <p:style>
-          <a:lnRef idx="1">
-            <a:schemeClr val="accent1"/>
-          </a:lnRef>
-          <a:fillRef idx="3">
-            <a:schemeClr val="accent1"/>
-          </a:fillRef>
-          <a:effectRef idx="2">
-            <a:schemeClr val="accent1"/>
-          </a:effectRef>
-          <a:fontRef idx="minor">
-            <a:schemeClr val="lt1"/>
-          </a:fontRef>
-        </p:style>
-        <p:txBody>
-          <a:bodyPr wrap="square" lIns="91440" tIns="36576" rIns="91440" bIns="36576" rtlCol="0" anchor="ctr"/>
-          <a:lstStyle/>
-          <a:p>
-            <a:pPr algn="l"/>
-            <a:r>
-              <a:rPr sz="1050" b="0">
-                <a:solidFill>
-                  <a:srgbClr val="3a3a3a"/>
-                </a:solidFill>
-                <a:latin typeface="Arial"/>
-              </a:rPr>
-              <a:t>One dataset, or merged without testing the merge</a:t>
-            </a:r>
-          </a:p>
-        </p:txBody>
-      </p:sp>
-      <p:sp>
-        <p:nvSpPr>
-          <p:cNvPr id="209" name="D1"/>
-          <p:cNvSpPr/>
-          <p:nvPr/>
-        </p:nvSpPr>
-        <p:spPr>
-          <a:xfrm>
-            <a:off x="5120640" y="2167128"/>
-            <a:ext cx="3566160" cy="457200"/>
-          </a:xfrm>
-          <a:prstGeom prst="roundRect">
-            <a:avLst/>
-          </a:prstGeom>
-          <a:solidFill>
-            <a:srgbClr val="E3F2EA"/>
-          </a:solidFill>
-          <a:ln w="9525">
-            <a:solidFill>
-              <a:srgbClr val="1E7A5A"/>
-            </a:solidFill>
-          </a:ln>
-        </p:spPr>
-        <p:style>
-          <a:lnRef idx="1">
-            <a:schemeClr val="accent1"/>
-          </a:lnRef>
-          <a:fillRef idx="3">
-            <a:schemeClr val="accent1"/>
-          </a:fillRef>
-          <a:effectRef idx="2">
-            <a:schemeClr val="accent1"/>
-          </a:effectRef>
-          <a:fontRef idx="minor">
-            <a:schemeClr val="lt1"/>
-          </a:fontRef>
-        </p:style>
-        <p:txBody>
-          <a:bodyPr wrap="square" lIns="91440" tIns="36576" rIns="91440" bIns="36576" rtlCol="0" anchor="ctr"/>
-          <a:lstStyle/>
-          <a:p>
-            <a:pPr algn="l"/>
-            <a:r>
-              <a:rPr sz="1050" b="0">
-                <a:solidFill>
-                  <a:srgbClr val="121212"/>
-                </a:solidFill>
-                <a:latin typeface="Arial"/>
-              </a:rPr>
-              <a:t>The merge is tested: DDR only, source-balanced, and the old merge as a control</a:t>
-            </a:r>
-          </a:p>
-        </p:txBody>
-      </p:sp>
-      <p:sp>
-        <p:nvSpPr>
-          <p:cNvPr id="210" name="L2"/>
-          <p:cNvSpPr/>
-          <p:nvPr/>
-        </p:nvSpPr>
-        <p:spPr>
-          <a:xfrm>
-            <a:off x="502920" y="2688336"/>
-            <a:ext cx="1188720" cy="457200"/>
-          </a:xfrm>
-          <a:prstGeom prst="roundRect">
-            <a:avLst/>
-          </a:prstGeom>
-          <a:solidFill>
-            <a:srgbClr val="E4ECF6"/>
-          </a:solidFill>
-          <a:ln w="9525">
-            <a:solidFill>
-              <a:srgbClr val="BCCFE4"/>
-            </a:solidFill>
-          </a:ln>
-        </p:spPr>
-        <p:style>
-          <a:lnRef idx="1">
-            <a:schemeClr val="accent1"/>
-          </a:lnRef>
-          <a:fillRef idx="3">
-            <a:schemeClr val="accent1"/>
-          </a:fillRef>
-          <a:effectRef idx="2">
-            <a:schemeClr val="accent1"/>
-          </a:effectRef>
-          <a:fontRef idx="minor">
-            <a:schemeClr val="lt1"/>
-          </a:fontRef>
-        </p:style>
-        <p:txBody>
-          <a:bodyPr wrap="square" lIns="91440" tIns="36576" rIns="91440" bIns="36576" rtlCol="0" anchor="ctr"/>
-          <a:lstStyle/>
-          <a:p>
-            <a:pPr algn="l"/>
-            <a:r>
-              <a:rPr sz="1100" b="1">
-                <a:solidFill>
-                  <a:srgbClr val="121212"/>
-                </a:solidFill>
-                <a:latin typeface="Arial"/>
-              </a:rPr>
-              <a:t>Imbalance</a:t>
-            </a:r>
-          </a:p>
-        </p:txBody>
-      </p:sp>
-      <p:sp>
-        <p:nvSpPr>
-          <p:cNvPr id="211" name="C2"/>
-          <p:cNvSpPr/>
-          <p:nvPr/>
-        </p:nvSpPr>
-        <p:spPr>
-          <a:xfrm>
-            <a:off x="1783080" y="2688336"/>
-            <a:ext cx="3246120" cy="457200"/>
-          </a:xfrm>
-          <a:prstGeom prst="roundRect">
-            <a:avLst/>
-          </a:prstGeom>
-          <a:solidFill>
-            <a:srgbClr val="FFFFFF"/>
-          </a:solidFill>
-          <a:ln w="9525">
-            <a:solidFill>
-              <a:srgbClr val="CDD2D7"/>
-            </a:solidFill>
-          </a:ln>
-        </p:spPr>
-        <p:style>
-          <a:lnRef idx="1">
-            <a:schemeClr val="accent1"/>
-          </a:lnRef>
-          <a:fillRef idx="3">
-            <a:schemeClr val="accent1"/>
-          </a:fillRef>
-          <a:effectRef idx="2">
-            <a:schemeClr val="accent1"/>
-          </a:effectRef>
-          <a:fontRef idx="minor">
-            <a:schemeClr val="lt1"/>
-          </a:fontRef>
-        </p:style>
-        <p:txBody>
-          <a:bodyPr wrap="square" lIns="91440" tIns="36576" rIns="91440" bIns="36576" rtlCol="0" anchor="ctr"/>
-          <a:lstStyle/>
-          <a:p>
-            <a:pPr algn="l"/>
-            <a:r>
-              <a:rPr sz="1050" b="0">
-                <a:solidFill>
-                  <a:srgbClr val="3a3a3a"/>
-                </a:solidFill>
-                <a:latin typeface="Arial"/>
-              </a:rPr>
-              <a:t>A new method against a few baselines</a:t>
-            </a:r>
-          </a:p>
-        </p:txBody>
-      </p:sp>
-      <p:sp>
-        <p:nvSpPr>
-          <p:cNvPr id="212" name="D2"/>
-          <p:cNvSpPr/>
-          <p:nvPr/>
-        </p:nvSpPr>
-        <p:spPr>
-          <a:xfrm>
-            <a:off x="5120640" y="2688336"/>
-            <a:ext cx="3566160" cy="457200"/>
-          </a:xfrm>
-          <a:prstGeom prst="roundRect">
-            <a:avLst/>
-          </a:prstGeom>
-          <a:solidFill>
-            <a:srgbClr val="E3F2EA"/>
-          </a:solidFill>
-          <a:ln w="9525">
-            <a:solidFill>
-              <a:srgbClr val="1E7A5A"/>
-            </a:solidFill>
-          </a:ln>
-        </p:spPr>
-        <p:style>
-          <a:lnRef idx="1">
-            <a:schemeClr val="accent1"/>
-          </a:lnRef>
-          <a:fillRef idx="3">
-            <a:schemeClr val="accent1"/>
-          </a:fillRef>
-          <a:effectRef idx="2">
-            <a:schemeClr val="accent1"/>
-          </a:effectRef>
-          <a:fontRef idx="minor">
-            <a:schemeClr val="lt1"/>
-          </a:fontRef>
-        </p:style>
-        <p:txBody>
-          <a:bodyPr wrap="square" lIns="91440" tIns="36576" rIns="91440" bIns="36576" rtlCol="0" anchor="ctr"/>
-          <a:lstStyle/>
-          <a:p>
-            <a:pPr algn="l"/>
-            <a:r>
-              <a:rPr sz="1050" b="0">
-                <a:solidFill>
-                  <a:srgbClr val="121212"/>
-                </a:solidFill>
-                <a:latin typeface="Arial"/>
-              </a:rPr>
-              <a:t>Sampler, loss and augmentation one at a time, with a control</a:t>
-            </a:r>
-          </a:p>
-        </p:txBody>
-      </p:sp>
-      <p:sp>
-        <p:nvSpPr>
-          <p:cNvPr id="213" name="L3"/>
-          <p:cNvSpPr/>
-          <p:nvPr/>
-        </p:nvSpPr>
-        <p:spPr>
-          <a:xfrm>
-            <a:off x="502920" y="3209544"/>
-            <a:ext cx="1188720" cy="457200"/>
-          </a:xfrm>
-          <a:prstGeom prst="roundRect">
-            <a:avLst/>
-          </a:prstGeom>
-          <a:solidFill>
-            <a:srgbClr val="E4ECF6"/>
-          </a:solidFill>
-          <a:ln w="9525">
-            <a:solidFill>
-              <a:srgbClr val="BCCFE4"/>
-            </a:solidFill>
-          </a:ln>
-        </p:spPr>
-        <p:style>
-          <a:lnRef idx="1">
-            <a:schemeClr val="accent1"/>
-          </a:lnRef>
-          <a:fillRef idx="3">
-            <a:schemeClr val="accent1"/>
-          </a:fillRef>
-          <a:effectRef idx="2">
-            <a:schemeClr val="accent1"/>
-          </a:effectRef>
-          <a:fontRef idx="minor">
-            <a:schemeClr val="lt1"/>
-          </a:fontRef>
-        </p:style>
-        <p:txBody>
-          <a:bodyPr wrap="square" lIns="91440" tIns="36576" rIns="91440" bIns="36576" rtlCol="0" anchor="ctr"/>
-          <a:lstStyle/>
-          <a:p>
-            <a:pPr algn="l"/>
-            <a:r>
-              <a:rPr sz="1100" b="1">
-                <a:solidFill>
-                  <a:srgbClr val="121212"/>
-                </a:solidFill>
-                <a:latin typeface="Arial"/>
-              </a:rPr>
-              <a:t>Transfer</a:t>
-            </a:r>
-          </a:p>
-        </p:txBody>
-      </p:sp>
-      <p:sp>
-        <p:nvSpPr>
-          <p:cNvPr id="214" name="C3"/>
-          <p:cNvSpPr/>
-          <p:nvPr/>
-        </p:nvSpPr>
-        <p:spPr>
-          <a:xfrm>
-            <a:off x="1783080" y="3209544"/>
-            <a:ext cx="3246120" cy="457200"/>
-          </a:xfrm>
-          <a:prstGeom prst="roundRect">
-            <a:avLst/>
-          </a:prstGeom>
-          <a:solidFill>
-            <a:srgbClr val="FFFFFF"/>
-          </a:solidFill>
-          <a:ln w="9525">
-            <a:solidFill>
-              <a:srgbClr val="CDD2D7"/>
-            </a:solidFill>
-          </a:ln>
-        </p:spPr>
-        <p:style>
-          <a:lnRef idx="1">
-            <a:schemeClr val="accent1"/>
-          </a:lnRef>
-          <a:fillRef idx="3">
-            <a:schemeClr val="accent1"/>
-          </a:fillRef>
-          <a:effectRef idx="2">
-            <a:schemeClr val="accent1"/>
-          </a:effectRef>
-          <a:fontRef idx="minor">
-            <a:schemeClr val="lt1"/>
-          </a:fontRef>
-        </p:style>
-        <p:txBody>
-          <a:bodyPr wrap="square" lIns="91440" tIns="36576" rIns="91440" bIns="36576" rtlCol="0" anchor="ctr"/>
-          <a:lstStyle/>
-          <a:p>
-            <a:pPr algn="l"/>
-            <a:r>
-              <a:rPr sz="1050" b="0">
-                <a:solidFill>
-                  <a:srgbClr val="3a3a3a"/>
-                </a:solidFill>
-                <a:latin typeface="Arial"/>
-              </a:rPr>
-              <a:t>Internal splits or one external set</a:t>
-            </a:r>
-          </a:p>
-        </p:txBody>
-      </p:sp>
-      <p:sp>
-        <p:nvSpPr>
-          <p:cNvPr id="215" name="D3"/>
-          <p:cNvSpPr/>
-          <p:nvPr/>
-        </p:nvSpPr>
-        <p:spPr>
-          <a:xfrm>
-            <a:off x="5120640" y="3209544"/>
-            <a:ext cx="3566160" cy="457200"/>
-          </a:xfrm>
-          <a:prstGeom prst="roundRect">
-            <a:avLst/>
-          </a:prstGeom>
-          <a:solidFill>
-            <a:srgbClr val="E3F2EA"/>
-          </a:solidFill>
-          <a:ln w="9525">
-            <a:solidFill>
-              <a:srgbClr val="1E7A5A"/>
-            </a:solidFill>
-          </a:ln>
-        </p:spPr>
-        <p:style>
-          <a:lnRef idx="1">
-            <a:schemeClr val="accent1"/>
-          </a:lnRef>
-          <a:fillRef idx="3">
-            <a:schemeClr val="accent1"/>
-          </a:fillRef>
-          <a:effectRef idx="2">
-            <a:schemeClr val="accent1"/>
-          </a:effectRef>
-          <a:fontRef idx="minor">
-            <a:schemeClr val="lt1"/>
-          </a:fontRef>
-        </p:style>
-        <p:txBody>
-          <a:bodyPr wrap="square" lIns="91440" tIns="36576" rIns="91440" bIns="36576" rtlCol="0" anchor="ctr"/>
-          <a:lstStyle/>
-          <a:p>
-            <a:pPr algn="l"/>
-            <a:r>
-              <a:rPr sz="1050" b="0">
-                <a:solidFill>
-                  <a:srgbClr val="121212"/>
-                </a:solidFill>
-                <a:latin typeface="Arial"/>
-              </a:rPr>
-              <a:t>Held-out EyePACS patients plus APTOS, reported per source</a:t>
-            </a:r>
-          </a:p>
-        </p:txBody>
-      </p:sp>
-      <p:sp>
-        <p:nvSpPr>
-          <p:cNvPr id="216" name="L4"/>
-          <p:cNvSpPr/>
-          <p:nvPr/>
-        </p:nvSpPr>
-        <p:spPr>
-          <a:xfrm>
-            <a:off x="502920" y="3730752"/>
-            <a:ext cx="1188720" cy="457200"/>
-          </a:xfrm>
-          <a:prstGeom prst="roundRect">
-            <a:avLst/>
-          </a:prstGeom>
-          <a:solidFill>
-            <a:srgbClr val="E4ECF6"/>
-          </a:solidFill>
-          <a:ln w="9525">
-            <a:solidFill>
-              <a:srgbClr val="BCCFE4"/>
-            </a:solidFill>
-          </a:ln>
-        </p:spPr>
-        <p:style>
-          <a:lnRef idx="1">
-            <a:schemeClr val="accent1"/>
-          </a:lnRef>
-          <a:fillRef idx="3">
-            <a:schemeClr val="accent1"/>
-          </a:fillRef>
-          <a:effectRef idx="2">
-            <a:schemeClr val="accent1"/>
-          </a:effectRef>
-          <a:fontRef idx="minor">
-            <a:schemeClr val="lt1"/>
-          </a:fontRef>
-        </p:style>
-        <p:txBody>
-          <a:bodyPr wrap="square" lIns="91440" tIns="36576" rIns="91440" bIns="36576" rtlCol="0" anchor="ctr"/>
-          <a:lstStyle/>
-          <a:p>
-            <a:pPr algn="l"/>
-            <a:r>
-              <a:rPr sz="1100" b="1">
-                <a:solidFill>
-                  <a:srgbClr val="121212"/>
-                </a:solidFill>
-                <a:latin typeface="Arial"/>
-              </a:rPr>
-              <a:t>Probabilities</a:t>
-            </a:r>
-          </a:p>
-        </p:txBody>
-      </p:sp>
-      <p:sp>
-        <p:nvSpPr>
-          <p:cNvPr id="217" name="C4"/>
-          <p:cNvSpPr/>
-          <p:nvPr/>
-        </p:nvSpPr>
-        <p:spPr>
-          <a:xfrm>
-            <a:off x="1783080" y="3730752"/>
-            <a:ext cx="3246120" cy="457200"/>
-          </a:xfrm>
-          <a:prstGeom prst="roundRect">
-            <a:avLst/>
-          </a:prstGeom>
-          <a:solidFill>
-            <a:srgbClr val="FFFFFF"/>
-          </a:solidFill>
-          <a:ln w="9525">
-            <a:solidFill>
-              <a:srgbClr val="CDD2D7"/>
-            </a:solidFill>
-          </a:ln>
-        </p:spPr>
-        <p:style>
-          <a:lnRef idx="1">
-            <a:schemeClr val="accent1"/>
-          </a:lnRef>
-          <a:fillRef idx="3">
-            <a:schemeClr val="accent1"/>
-          </a:fillRef>
-          <a:effectRef idx="2">
-            <a:schemeClr val="accent1"/>
-          </a:effectRef>
-          <a:fontRef idx="minor">
-            <a:schemeClr val="lt1"/>
-          </a:fontRef>
-        </p:style>
-        <p:txBody>
-          <a:bodyPr wrap="square" lIns="91440" tIns="36576" rIns="91440" bIns="36576" rtlCol="0" anchor="ctr"/>
-          <a:lstStyle/>
-          <a:p>
-            <a:pPr algn="l"/>
-            <a:r>
-              <a:rPr sz="1050" b="0">
-                <a:solidFill>
-                  <a:srgbClr val="3a3a3a"/>
-                </a:solidFill>
-                <a:latin typeface="Arial"/>
-              </a:rPr>
-              <a:t>Accuracy or AUC</a:t>
-            </a:r>
-          </a:p>
-        </p:txBody>
-      </p:sp>
-      <p:sp>
-        <p:nvSpPr>
-          <p:cNvPr id="218" name="D4"/>
-          <p:cNvSpPr/>
-          <p:nvPr/>
-        </p:nvSpPr>
-        <p:spPr>
-          <a:xfrm>
-            <a:off x="5120640" y="3730752"/>
-            <a:ext cx="3566160" cy="457200"/>
-          </a:xfrm>
-          <a:prstGeom prst="roundRect">
-            <a:avLst/>
-          </a:prstGeom>
-          <a:solidFill>
-            <a:srgbClr val="E3F2EA"/>
-          </a:solidFill>
-          <a:ln w="9525">
-            <a:solidFill>
-              <a:srgbClr val="1E7A5A"/>
-            </a:solidFill>
-          </a:ln>
-        </p:spPr>
-        <p:style>
-          <a:lnRef idx="1">
-            <a:schemeClr val="accent1"/>
-          </a:lnRef>
-          <a:fillRef idx="3">
-            <a:schemeClr val="accent1"/>
-          </a:fillRef>
-          <a:effectRef idx="2">
-            <a:schemeClr val="accent1"/>
-          </a:effectRef>
-          <a:fontRef idx="minor">
-            <a:schemeClr val="lt1"/>
-          </a:fontRef>
-        </p:style>
-        <p:txBody>
-          <a:bodyPr wrap="square" lIns="91440" tIns="36576" rIns="91440" bIns="36576" rtlCol="0" anchor="ctr"/>
-          <a:lstStyle/>
-          <a:p>
-            <a:pPr algn="l"/>
-            <a:r>
-              <a:rPr sz="1050" b="0">
-                <a:solidFill>
-                  <a:srgbClr val="121212"/>
-                </a:solidFill>
-                <a:latin typeface="Arial"/>
-              </a:rPr>
-              <a:t>Calibrated, prior-shift-corrected, with reliability curves</a:t>
-            </a:r>
-          </a:p>
-        </p:txBody>
-      </p:sp>
-      <p:sp>
-        <p:nvSpPr>
-          <p:cNvPr id="219" name="Banner"/>
-          <p:cNvSpPr/>
-          <p:nvPr/>
-        </p:nvSpPr>
-        <p:spPr>
-          <a:xfrm>
-            <a:off x="502920" y="4315968"/>
-            <a:ext cx="8138160" cy="365760"/>
-          </a:xfrm>
-          <a:prstGeom prst="roundRect">
-            <a:avLst/>
-          </a:prstGeom>
-          <a:solidFill>
-            <a:srgbClr val="F2F5F8"/>
-          </a:solidFill>
-          <a:ln w="9525">
-            <a:solidFill>
-              <a:srgbClr val="CDD2D7"/>
-            </a:solidFill>
-          </a:ln>
-        </p:spPr>
-        <p:style>
-          <a:lnRef idx="1">
-            <a:schemeClr val="accent1"/>
-          </a:lnRef>
-          <a:fillRef idx="3">
-            <a:schemeClr val="accent1"/>
-          </a:fillRef>
-          <a:effectRef idx="2">
-            <a:schemeClr val="accent1"/>
-          </a:effectRef>
-          <a:fontRef idx="minor">
-            <a:schemeClr val="lt1"/>
-          </a:fontRef>
-        </p:style>
-        <p:txBody>
-          <a:bodyPr wrap="square" lIns="91440" tIns="36576" rIns="91440" bIns="36576" rtlCol="0" anchor="ctr"/>
-          <a:lstStyle/>
-          <a:p>
-            <a:pPr algn="ctr"/>
-            <a:r>
-              <a:rPr sz="1100" b="1">
-                <a:solidFill>
-                  <a:srgbClr val="121212"/>
-                </a:solidFill>
-                <a:latin typeface="Arial"/>
-              </a:rPr>
-              <a:t>Not a new network: the value is the design and the evidence. Novelty claims wait for the literature search.</a:t>
-            </a:r>
+            <a:endParaRPr sz="1050"/>
           </a:p>
         </p:txBody>
       </p:sp>
@@ -30231,7 +28818,7 @@
                 </a:solidFill>
                 <a:latin typeface="Arial"/>
               </a:rPr>
-              <a:t>Proposed Methods</a:t>
+              <a:t>Model Architecture</a:t>
             </a:r>
           </a:p>
         </p:txBody>
@@ -30245,7 +28832,7 @@
         <p:spPr>
           <a:xfrm>
             <a:off x="566928" y="932688"/>
-            <a:ext cx="5486400" cy="256032"/>
+            <a:ext cx="8138160" cy="256032"/>
           </a:xfrm>
           <a:prstGeom prst="rect">
             <a:avLst/>
@@ -30266,890 +28853,7 @@
                 </a:solidFill>
                 <a:latin typeface="Arial"/>
               </a:rPr>
-              <a:t>Three data arms, one change at a time</a:t>
-            </a:r>
-          </a:p>
-        </p:txBody>
-      </p:sp>
-      <p:sp>
-        <p:nvSpPr>
-          <p:cNvPr id="4" name="TextBox 3"/>
-          <p:cNvSpPr txBox="1"/>
-          <p:nvPr/>
-        </p:nvSpPr>
-        <p:spPr>
-          <a:xfrm>
-            <a:off x="566928" y="1207008"/>
-            <a:ext cx="7315200" cy="274320"/>
-          </a:xfrm>
-          <a:prstGeom prst="rect">
-            <a:avLst/>
-          </a:prstGeom>
-          <a:noFill/>
-        </p:spPr>
-        <p:txBody>
-          <a:bodyPr wrap="square" lIns="27432" tIns="18288" rIns="27432" bIns="18288" anchor="t">
-            <a:spAutoFit/>
-          </a:bodyPr>
-          <a:lstStyle/>
-          <a:p>
-            <a:pPr algn="l"/>
-            <a:r>
-              <a:rPr sz="1120" b="0" i="0">
-                <a:solidFill>
-                  <a:srgbClr val="121212"/>
-                </a:solidFill>
-                <a:latin typeface="Arial"/>
-              </a:rPr>
-              <a:t>Same model, image size and epochs; frozen patient-level splits; test sets opened once.</a:t>
-            </a:r>
-          </a:p>
-        </p:txBody>
-      </p:sp>
-      <p:sp>
-        <p:nvSpPr>
-          <p:cNvPr id="9" name="Rounded Rectangle 8"/>
-          <p:cNvSpPr/>
-          <p:nvPr/>
-        </p:nvSpPr>
-        <p:spPr>
-          <a:xfrm>
-            <a:off x="640080" y="1737360"/>
-            <a:ext cx="1335024" cy="640080"/>
-          </a:xfrm>
-          <a:prstGeom prst="roundRect">
-            <a:avLst/>
-          </a:prstGeom>
-          <a:solidFill>
-            <a:srgbClr val="BCCFE4"/>
-          </a:solidFill>
-          <a:ln w="9525">
-            <a:solidFill>
-              <a:srgbClr val="BCCFE4"/>
-            </a:solidFill>
-          </a:ln>
-        </p:spPr>
-        <p:style>
-          <a:lnRef idx="1">
-            <a:schemeClr val="accent1"/>
-          </a:lnRef>
-          <a:fillRef idx="3">
-            <a:schemeClr val="accent1"/>
-          </a:fillRef>
-          <a:effectRef idx="2">
-            <a:schemeClr val="accent1"/>
-          </a:effectRef>
-          <a:fontRef idx="minor">
-            <a:schemeClr val="lt1"/>
-          </a:fontRef>
-        </p:style>
-        <p:txBody>
-          <a:bodyPr wrap="square" lIns="54864" tIns="36576" rIns="54864" bIns="36576" rtlCol="0" anchor="ctr"/>
-          <a:lstStyle/>
-          <a:p>
-            <a:pPr algn="ctr"/>
-            <a:r>
-              <a:rPr sz="880" b="1">
-                <a:solidFill>
-                  <a:srgbClr val="121212"/>
-                </a:solidFill>
-                <a:latin typeface="Arial"/>
-              </a:rPr>
-              <a:t>Data</a:t>
-            </a:r>
-            <a:br>
-              <a:rPr sz="880" b="1">
-                <a:solidFill>
-                  <a:srgbClr val="121212"/>
-                </a:solidFill>
-                <a:latin typeface="Arial"/>
-              </a:rPr>
-            </a:br>
-            <a:r>
-              <a:rPr sz="880" b="1">
-                <a:solidFill>
-                  <a:srgbClr val="121212"/>
-                </a:solidFill>
-                <a:latin typeface="Arial"/>
-              </a:rPr>
-              <a:t>DDR, EyePACS, APTOS</a:t>
-            </a:r>
-          </a:p>
-        </p:txBody>
-      </p:sp>
-      <p:sp>
-        <p:nvSpPr>
-          <p:cNvPr id="10" name="Rounded Rectangle 9"/>
-          <p:cNvSpPr/>
-          <p:nvPr/>
-        </p:nvSpPr>
-        <p:spPr>
-          <a:xfrm>
-            <a:off x="2249424" y="1737360"/>
-            <a:ext cx="1335024" cy="640080"/>
-          </a:xfrm>
-          <a:prstGeom prst="roundRect">
-            <a:avLst/>
-          </a:prstGeom>
-          <a:solidFill>
-            <a:srgbClr val="BCCFE4"/>
-          </a:solidFill>
-          <a:ln w="9525">
-            <a:solidFill>
-              <a:srgbClr val="BCCFE4"/>
-            </a:solidFill>
-          </a:ln>
-        </p:spPr>
-        <p:style>
-          <a:lnRef idx="1">
-            <a:schemeClr val="accent1"/>
-          </a:lnRef>
-          <a:fillRef idx="3">
-            <a:schemeClr val="accent1"/>
-          </a:fillRef>
-          <a:effectRef idx="2">
-            <a:schemeClr val="accent1"/>
-          </a:effectRef>
-          <a:fontRef idx="minor">
-            <a:schemeClr val="lt1"/>
-          </a:fontRef>
-        </p:style>
-        <p:txBody>
-          <a:bodyPr wrap="square" lIns="54864" tIns="36576" rIns="54864" bIns="36576" rtlCol="0" anchor="ctr"/>
-          <a:lstStyle/>
-          <a:p>
-            <a:pPr algn="ctr"/>
-            <a:r>
-              <a:rPr sz="880" b="1">
-                <a:solidFill>
-                  <a:srgbClr val="121212"/>
-                </a:solidFill>
-                <a:latin typeface="Arial"/>
-              </a:rPr>
-              <a:t>Prepare</a:t>
-            </a:r>
-            <a:br>
-              <a:rPr sz="880" b="1">
-                <a:solidFill>
-                  <a:srgbClr val="121212"/>
-                </a:solidFill>
-                <a:latin typeface="Arial"/>
-              </a:rPr>
-            </a:br>
-            <a:r>
-              <a:rPr sz="880" b="1">
-                <a:solidFill>
-                  <a:srgbClr val="121212"/>
-                </a:solidFill>
-                <a:latin typeface="Arial"/>
-              </a:rPr>
-              <a:t>Crop, pad, 512 px</a:t>
-            </a:r>
-          </a:p>
-        </p:txBody>
-      </p:sp>
-      <p:sp>
-        <p:nvSpPr>
-          <p:cNvPr id="11" name="Rounded Rectangle 10"/>
-          <p:cNvSpPr/>
-          <p:nvPr/>
-        </p:nvSpPr>
-        <p:spPr>
-          <a:xfrm>
-            <a:off x="3858768" y="1737360"/>
-            <a:ext cx="1335024" cy="640080"/>
-          </a:xfrm>
-          <a:prstGeom prst="roundRect">
-            <a:avLst/>
-          </a:prstGeom>
-          <a:solidFill>
-            <a:srgbClr val="BCCFE4"/>
-          </a:solidFill>
-          <a:ln w="9525">
-            <a:solidFill>
-              <a:srgbClr val="BCCFE4"/>
-            </a:solidFill>
-          </a:ln>
-        </p:spPr>
-        <p:style>
-          <a:lnRef idx="1">
-            <a:schemeClr val="accent1"/>
-          </a:lnRef>
-          <a:fillRef idx="3">
-            <a:schemeClr val="accent1"/>
-          </a:fillRef>
-          <a:effectRef idx="2">
-            <a:schemeClr val="accent1"/>
-          </a:effectRef>
-          <a:fontRef idx="minor">
-            <a:schemeClr val="lt1"/>
-          </a:fontRef>
-        </p:style>
-        <p:txBody>
-          <a:bodyPr wrap="square" lIns="54864" tIns="36576" rIns="54864" bIns="36576" rtlCol="0" anchor="ctr"/>
-          <a:lstStyle/>
-          <a:p>
-            <a:pPr algn="ctr"/>
-            <a:r>
-              <a:rPr sz="880" b="1">
-                <a:solidFill>
-                  <a:srgbClr val="121212"/>
-                </a:solidFill>
-                <a:latin typeface="Arial"/>
-              </a:rPr>
-              <a:t>Merge arms</a:t>
-            </a:r>
-            <a:br>
-              <a:rPr sz="880" b="1">
-                <a:solidFill>
-                  <a:srgbClr val="121212"/>
-                </a:solidFill>
-                <a:latin typeface="Arial"/>
-              </a:rPr>
-            </a:br>
-            <a:r>
-              <a:rPr sz="880" b="1">
-                <a:solidFill>
-                  <a:srgbClr val="121212"/>
-                </a:solidFill>
-                <a:latin typeface="Arial"/>
-              </a:rPr>
-              <a:t>A, B, C</a:t>
-            </a:r>
-          </a:p>
-        </p:txBody>
-      </p:sp>
-      <p:sp>
-        <p:nvSpPr>
-          <p:cNvPr id="12" name="Rounded Rectangle 11"/>
-          <p:cNvSpPr/>
-          <p:nvPr/>
-        </p:nvSpPr>
-        <p:spPr>
-          <a:xfrm>
-            <a:off x="5468112" y="1737360"/>
-            <a:ext cx="1335024" cy="640080"/>
-          </a:xfrm>
-          <a:prstGeom prst="roundRect">
-            <a:avLst/>
-          </a:prstGeom>
-          <a:solidFill>
-            <a:srgbClr val="E0F1EB"/>
-          </a:solidFill>
-          <a:ln w="9525">
-            <a:solidFill>
-              <a:srgbClr val="00634A"/>
-            </a:solidFill>
-          </a:ln>
-        </p:spPr>
-        <p:style>
-          <a:lnRef idx="1">
-            <a:schemeClr val="accent1"/>
-          </a:lnRef>
-          <a:fillRef idx="3">
-            <a:schemeClr val="accent1"/>
-          </a:fillRef>
-          <a:effectRef idx="2">
-            <a:schemeClr val="accent1"/>
-          </a:effectRef>
-          <a:fontRef idx="minor">
-            <a:schemeClr val="lt1"/>
-          </a:fontRef>
-        </p:style>
-        <p:txBody>
-          <a:bodyPr wrap="square" lIns="54864" tIns="36576" rIns="54864" bIns="36576" rtlCol="0" anchor="ctr"/>
-          <a:lstStyle/>
-          <a:p>
-            <a:pPr algn="ctr"/>
-            <a:r>
-              <a:rPr sz="880" b="1">
-                <a:solidFill>
-                  <a:srgbClr val="121212"/>
-                </a:solidFill>
-                <a:latin typeface="Arial"/>
-              </a:rPr>
-              <a:t>Model</a:t>
-            </a:r>
-            <a:br>
-              <a:rPr sz="880" b="1">
-                <a:solidFill>
-                  <a:srgbClr val="121212"/>
-                </a:solidFill>
-                <a:latin typeface="Arial"/>
-              </a:rPr>
-            </a:br>
-            <a:r>
-              <a:rPr sz="880" b="1">
-                <a:solidFill>
-                  <a:srgbClr val="121212"/>
-                </a:solidFill>
-                <a:latin typeface="Arial"/>
-              </a:rPr>
-              <a:t>EfficientNet-B0</a:t>
-            </a:r>
-          </a:p>
-        </p:txBody>
-      </p:sp>
-      <p:sp>
-        <p:nvSpPr>
-          <p:cNvPr id="13" name="Rounded Rectangle 12"/>
-          <p:cNvSpPr/>
-          <p:nvPr/>
-        </p:nvSpPr>
-        <p:spPr>
-          <a:xfrm>
-            <a:off x="7077456" y="1737360"/>
-            <a:ext cx="1335024" cy="640080"/>
-          </a:xfrm>
-          <a:prstGeom prst="roundRect">
-            <a:avLst/>
-          </a:prstGeom>
-          <a:solidFill>
-            <a:srgbClr val="E0F1EB"/>
-          </a:solidFill>
-          <a:ln w="9525">
-            <a:solidFill>
-              <a:srgbClr val="00634A"/>
-            </a:solidFill>
-          </a:ln>
-        </p:spPr>
-        <p:style>
-          <a:lnRef idx="1">
-            <a:schemeClr val="accent1"/>
-          </a:lnRef>
-          <a:fillRef idx="3">
-            <a:schemeClr val="accent1"/>
-          </a:fillRef>
-          <a:effectRef idx="2">
-            <a:schemeClr val="accent1"/>
-          </a:effectRef>
-          <a:fontRef idx="minor">
-            <a:schemeClr val="lt1"/>
-          </a:fontRef>
-        </p:style>
-        <p:txBody>
-          <a:bodyPr wrap="square" lIns="54864" tIns="36576" rIns="54864" bIns="36576" rtlCol="0" anchor="ctr"/>
-          <a:lstStyle/>
-          <a:p>
-            <a:pPr algn="ctr"/>
-            <a:r>
-              <a:rPr sz="880" b="1">
-                <a:solidFill>
-                  <a:srgbClr val="121212"/>
-                </a:solidFill>
-                <a:latin typeface="Arial"/>
-              </a:rPr>
-              <a:t>Output</a:t>
-            </a:r>
-            <a:br>
-              <a:rPr sz="880" b="1">
-                <a:solidFill>
-                  <a:srgbClr val="121212"/>
-                </a:solidFill>
-                <a:latin typeface="Arial"/>
-              </a:rPr>
-            </a:br>
-            <a:r>
-              <a:rPr sz="880" b="1">
-                <a:solidFill>
-                  <a:srgbClr val="121212"/>
-                </a:solidFill>
-                <a:latin typeface="Arial"/>
-              </a:rPr>
-              <a:t>Calibrated, 95% CI</a:t>
-            </a:r>
-          </a:p>
-        </p:txBody>
-      </p:sp>
-      <p:sp>
-        <p:nvSpPr>
-          <p:cNvPr id="14" name="TextBox 13"/>
-          <p:cNvSpPr txBox="1"/>
-          <p:nvPr/>
-        </p:nvSpPr>
-        <p:spPr>
-          <a:xfrm>
-            <a:off x="694944" y="2743200"/>
-            <a:ext cx="2514600" cy="201168"/>
-          </a:xfrm>
-          <a:prstGeom prst="rect">
-            <a:avLst/>
-          </a:prstGeom>
-          <a:noFill/>
-        </p:spPr>
-        <p:txBody>
-          <a:bodyPr wrap="square" lIns="27432" tIns="18288" rIns="27432" bIns="18288" anchor="t">
-            <a:spAutoFit/>
-          </a:bodyPr>
-          <a:lstStyle/>
-          <a:p>
-            <a:pPr algn="l"/>
-            <a:r>
-              <a:rPr sz="1220" b="1" i="0">
-                <a:solidFill>
-                  <a:srgbClr val="3D5F84"/>
-                </a:solidFill>
-                <a:latin typeface="Arial"/>
-              </a:rPr>
-              <a:t>Imbalance methods tested</a:t>
-            </a:r>
-          </a:p>
-        </p:txBody>
-      </p:sp>
-      <p:sp>
-        <p:nvSpPr>
-          <p:cNvPr id="15" name="Rounded Rectangle 14"/>
-          <p:cNvSpPr/>
-          <p:nvPr/>
-        </p:nvSpPr>
-        <p:spPr>
-          <a:xfrm>
-            <a:off x="731520" y="3044952"/>
-            <a:ext cx="1261872" cy="320040"/>
-          </a:xfrm>
-          <a:prstGeom prst="roundRect">
-            <a:avLst/>
-          </a:prstGeom>
-          <a:solidFill>
-            <a:srgbClr val="FFFFFF"/>
-          </a:solidFill>
-          <a:ln w="9525">
-            <a:solidFill>
-              <a:srgbClr val="CDD2D7"/>
-            </a:solidFill>
-          </a:ln>
-        </p:spPr>
-        <p:style>
-          <a:lnRef idx="1">
-            <a:schemeClr val="accent1"/>
-          </a:lnRef>
-          <a:fillRef idx="3">
-            <a:schemeClr val="accent1"/>
-          </a:fillRef>
-          <a:effectRef idx="2">
-            <a:schemeClr val="accent1"/>
-          </a:effectRef>
-          <a:fontRef idx="minor">
-            <a:schemeClr val="lt1"/>
-          </a:fontRef>
-        </p:style>
-        <p:txBody>
-          <a:bodyPr wrap="square" lIns="54864" tIns="36576" rIns="54864" bIns="36576" rtlCol="0" anchor="ctr"/>
-          <a:lstStyle/>
-          <a:p>
-            <a:pPr algn="ctr"/>
-            <a:r>
-              <a:rPr sz="869" b="1">
-                <a:solidFill>
-                  <a:srgbClr val="121212"/>
-                </a:solidFill>
-                <a:latin typeface="Arial"/>
-              </a:rPr>
-              <a:t>Weighted sampler</a:t>
-            </a:r>
-          </a:p>
-        </p:txBody>
-      </p:sp>
-      <p:sp>
-        <p:nvSpPr>
-          <p:cNvPr id="16" name="Rounded Rectangle 15"/>
-          <p:cNvSpPr/>
-          <p:nvPr/>
-        </p:nvSpPr>
-        <p:spPr>
-          <a:xfrm>
-            <a:off x="2130552" y="3044952"/>
-            <a:ext cx="1261872" cy="320040"/>
-          </a:xfrm>
-          <a:prstGeom prst="roundRect">
-            <a:avLst/>
-          </a:prstGeom>
-          <a:solidFill>
-            <a:srgbClr val="FFFFFF"/>
-          </a:solidFill>
-          <a:ln w="9525">
-            <a:solidFill>
-              <a:srgbClr val="CDD2D7"/>
-            </a:solidFill>
-          </a:ln>
-        </p:spPr>
-        <p:style>
-          <a:lnRef idx="1">
-            <a:schemeClr val="accent1"/>
-          </a:lnRef>
-          <a:fillRef idx="3">
-            <a:schemeClr val="accent1"/>
-          </a:fillRef>
-          <a:effectRef idx="2">
-            <a:schemeClr val="accent1"/>
-          </a:effectRef>
-          <a:fontRef idx="minor">
-            <a:schemeClr val="lt1"/>
-          </a:fontRef>
-        </p:style>
-        <p:txBody>
-          <a:bodyPr wrap="square" lIns="54864" tIns="36576" rIns="54864" bIns="36576" rtlCol="0" anchor="ctr"/>
-          <a:lstStyle/>
-          <a:p>
-            <a:pPr algn="ctr"/>
-            <a:r>
-              <a:rPr sz="869" b="1">
-                <a:solidFill>
-                  <a:srgbClr val="121212"/>
-                </a:solidFill>
-                <a:latin typeface="Arial"/>
-              </a:rPr>
-              <a:t>Class-balanced loss</a:t>
-            </a:r>
-          </a:p>
-        </p:txBody>
-      </p:sp>
-      <p:sp>
-        <p:nvSpPr>
-          <p:cNvPr id="17" name="Rounded Rectangle 16"/>
-          <p:cNvSpPr/>
-          <p:nvPr/>
-        </p:nvSpPr>
-        <p:spPr>
-          <a:xfrm>
-            <a:off x="3529584" y="3044952"/>
-            <a:ext cx="1261872" cy="320040"/>
-          </a:xfrm>
-          <a:prstGeom prst="roundRect">
-            <a:avLst/>
-          </a:prstGeom>
-          <a:solidFill>
-            <a:srgbClr val="FFFFFF"/>
-          </a:solidFill>
-          <a:ln w="9525">
-            <a:solidFill>
-              <a:srgbClr val="CDD2D7"/>
-            </a:solidFill>
-          </a:ln>
-        </p:spPr>
-        <p:style>
-          <a:lnRef idx="1">
-            <a:schemeClr val="accent1"/>
-          </a:lnRef>
-          <a:fillRef idx="3">
-            <a:schemeClr val="accent1"/>
-          </a:fillRef>
-          <a:effectRef idx="2">
-            <a:schemeClr val="accent1"/>
-          </a:effectRef>
-          <a:fontRef idx="minor">
-            <a:schemeClr val="lt1"/>
-          </a:fontRef>
-        </p:style>
-        <p:txBody>
-          <a:bodyPr wrap="square" lIns="54864" tIns="36576" rIns="54864" bIns="36576" rtlCol="0" anchor="ctr"/>
-          <a:lstStyle/>
-          <a:p>
-            <a:pPr algn="ctr"/>
-            <a:r>
-              <a:rPr sz="869" b="1">
-                <a:solidFill>
-                  <a:srgbClr val="121212"/>
-                </a:solidFill>
-                <a:latin typeface="Arial"/>
-              </a:rPr>
-              <a:t>Focal loss</a:t>
-            </a:r>
-          </a:p>
-        </p:txBody>
-      </p:sp>
-      <p:sp>
-        <p:nvSpPr>
-          <p:cNvPr id="18" name="Rounded Rectangle 17"/>
-          <p:cNvSpPr/>
-          <p:nvPr/>
-        </p:nvSpPr>
-        <p:spPr>
-          <a:xfrm>
-            <a:off x="731520" y="3483864"/>
-            <a:ext cx="1261872" cy="320040"/>
-          </a:xfrm>
-          <a:prstGeom prst="roundRect">
-            <a:avLst/>
-          </a:prstGeom>
-          <a:solidFill>
-            <a:srgbClr val="FFFFFF"/>
-          </a:solidFill>
-          <a:ln w="9525">
-            <a:solidFill>
-              <a:srgbClr val="CDD2D7"/>
-            </a:solidFill>
-          </a:ln>
-        </p:spPr>
-        <p:style>
-          <a:lnRef idx="1">
-            <a:schemeClr val="accent1"/>
-          </a:lnRef>
-          <a:fillRef idx="3">
-            <a:schemeClr val="accent1"/>
-          </a:fillRef>
-          <a:effectRef idx="2">
-            <a:schemeClr val="accent1"/>
-          </a:effectRef>
-          <a:fontRef idx="minor">
-            <a:schemeClr val="lt1"/>
-          </a:fontRef>
-        </p:style>
-        <p:txBody>
-          <a:bodyPr wrap="square" lIns="54864" tIns="36576" rIns="54864" bIns="36576" rtlCol="0" anchor="ctr"/>
-          <a:lstStyle/>
-          <a:p>
-            <a:pPr algn="ctr"/>
-            <a:r>
-              <a:rPr sz="869" b="1">
-                <a:solidFill>
-                  <a:srgbClr val="121212"/>
-                </a:solidFill>
-                <a:latin typeface="Arial"/>
-              </a:rPr>
-              <a:t>Strong augmentation</a:t>
-            </a:r>
-          </a:p>
-        </p:txBody>
-      </p:sp>
-      <p:sp>
-        <p:nvSpPr>
-          <p:cNvPr id="19" name="Rounded Rectangle 18"/>
-          <p:cNvSpPr/>
-          <p:nvPr/>
-        </p:nvSpPr>
-        <p:spPr>
-          <a:xfrm>
-            <a:off x="2130552" y="3483864"/>
-            <a:ext cx="1261872" cy="320040"/>
-          </a:xfrm>
-          <a:prstGeom prst="roundRect">
-            <a:avLst/>
-          </a:prstGeom>
-          <a:solidFill>
-            <a:srgbClr val="FFFFFF"/>
-          </a:solidFill>
-          <a:ln w="9525">
-            <a:solidFill>
-              <a:srgbClr val="CDD2D7"/>
-            </a:solidFill>
-          </a:ln>
-        </p:spPr>
-        <p:style>
-          <a:lnRef idx="1">
-            <a:schemeClr val="accent1"/>
-          </a:lnRef>
-          <a:fillRef idx="3">
-            <a:schemeClr val="accent1"/>
-          </a:fillRef>
-          <a:effectRef idx="2">
-            <a:schemeClr val="accent1"/>
-          </a:effectRef>
-          <a:fontRef idx="minor">
-            <a:schemeClr val="lt1"/>
-          </a:fontRef>
-        </p:style>
-        <p:txBody>
-          <a:bodyPr wrap="square" lIns="54864" tIns="36576" rIns="54864" bIns="36576" rtlCol="0" anchor="ctr"/>
-          <a:lstStyle/>
-          <a:p>
-            <a:pPr algn="ctr"/>
-            <a:r>
-              <a:rPr sz="869" b="1">
-                <a:solidFill>
-                  <a:srgbClr val="121212"/>
-                </a:solidFill>
-                <a:latin typeface="Arial"/>
-              </a:rPr>
-              <a:t>Augmentation control</a:t>
-            </a:r>
-          </a:p>
-        </p:txBody>
-      </p:sp>
-      <p:sp>
-        <p:nvSpPr>
-          <p:cNvPr id="20" name="TextBox 19"/>
-          <p:cNvSpPr txBox="1"/>
-          <p:nvPr/>
-        </p:nvSpPr>
-        <p:spPr>
-          <a:xfrm>
-            <a:off x="5010912" y="2743200"/>
-            <a:ext cx="2926080" cy="201168"/>
-          </a:xfrm>
-          <a:prstGeom prst="rect">
-            <a:avLst/>
-          </a:prstGeom>
-          <a:noFill/>
-        </p:spPr>
-        <p:txBody>
-          <a:bodyPr wrap="square" lIns="27432" tIns="18288" rIns="27432" bIns="18288" anchor="t">
-            <a:spAutoFit/>
-          </a:bodyPr>
-          <a:lstStyle/>
-          <a:p>
-            <a:pPr algn="l"/>
-            <a:r>
-              <a:rPr sz="1220" b="1" i="0">
-                <a:solidFill>
-                  <a:srgbClr val="3D5F84"/>
-                </a:solidFill>
-                <a:latin typeface="Arial"/>
-              </a:rPr>
-              <a:t>The three arms</a:t>
-            </a:r>
-          </a:p>
-        </p:txBody>
-      </p:sp>
-      <p:sp>
-        <p:nvSpPr>
-          <p:cNvPr id="21" name="TextBox 20"/>
-          <p:cNvSpPr txBox="1"/>
-          <p:nvPr/>
-        </p:nvSpPr>
-        <p:spPr>
-          <a:xfrm>
-            <a:off x="5029200" y="2999232"/>
-            <a:ext cx="3520440" cy="960120"/>
-          </a:xfrm>
-          <a:prstGeom prst="rect">
-            <a:avLst/>
-          </a:prstGeom>
-          <a:noFill/>
-        </p:spPr>
-        <p:txBody>
-          <a:bodyPr wrap="square" lIns="18288" tIns="18288" rIns="18288" bIns="18288">
-            <a:spAutoFit/>
-          </a:bodyPr>
-          <a:lstStyle/>
-          <a:p>
-            <a:pPr algn="l">
-              <a:lnSpc>
-                <a:spcPct val="105000"/>
-              </a:lnSpc>
-              <a:spcAft>
-                <a:spcPts val="400"/>
-              </a:spcAft>
-            </a:pPr>
-            <a:r>
-              <a:rPr sz="1000">
-                <a:solidFill>
-                  <a:srgbClr val="121212"/>
-                </a:solidFill>
-                <a:latin typeface="Arial"/>
-              </a:rPr>
-              <a:t>• A: DDR only (clean baseline)</a:t>
-            </a:r>
-          </a:p>
-          <a:p>
-            <a:pPr algn="l">
-              <a:lnSpc>
-                <a:spcPct val="105000"/>
-              </a:lnSpc>
-              <a:spcAft>
-                <a:spcPts val="400"/>
-              </a:spcAft>
-            </a:pPr>
-            <a:r>
-              <a:rPr sz="1000">
-                <a:solidFill>
-                  <a:srgbClr val="121212"/>
-                </a:solidFill>
-                <a:latin typeface="Arial"/>
-              </a:rPr>
-              <a:t>• B: DDR + EyePACS, source-balanced</a:t>
-            </a:r>
-          </a:p>
-          <a:p>
-            <a:pPr algn="l">
-              <a:lnSpc>
-                <a:spcPct val="105000"/>
-              </a:lnSpc>
-              <a:spcAft>
-                <a:spcPts val="400"/>
-              </a:spcAft>
-            </a:pPr>
-            <a:r>
-              <a:rPr sz="1000">
-                <a:solidFill>
-                  <a:srgbClr val="121212"/>
-                </a:solidFill>
-                <a:latin typeface="Arial"/>
-              </a:rPr>
-              <a:t>• C: version 1 merge (negative control)</a:t>
-            </a:r>
-          </a:p>
-          <a:p>
-            <a:pPr algn="l">
-              <a:lnSpc>
-                <a:spcPct val="105000"/>
-              </a:lnSpc>
-              <a:spcAft>
-                <a:spcPts val="400"/>
-              </a:spcAft>
-            </a:pPr>
-            <a:r>
-              <a:rPr sz="1000">
-                <a:solidFill>
-                  <a:srgbClr val="121212"/>
-                </a:solidFill>
-                <a:latin typeface="Arial"/>
-              </a:rPr>
-              <a:t>• C wins on its own test but not on APTOS = it learned the source</a:t>
-            </a:r>
-          </a:p>
-        </p:txBody>
-      </p:sp>
-      <p:sp>
-        <p:nvSpPr>
-          <p:cNvPr id="22" name="Rounded Rectangle 21"/>
-          <p:cNvSpPr/>
-          <p:nvPr/>
-        </p:nvSpPr>
-        <p:spPr>
-          <a:xfrm>
-            <a:off x="1097280" y="4160520"/>
-            <a:ext cx="6903720" cy="329184"/>
-          </a:xfrm>
-          <a:prstGeom prst="roundRect">
-            <a:avLst/>
-          </a:prstGeom>
-          <a:solidFill>
-            <a:srgbClr val="F2F5F8"/>
-          </a:solidFill>
-          <a:ln w="9525">
-            <a:solidFill>
-              <a:srgbClr val="CDD2D7"/>
-            </a:solidFill>
-          </a:ln>
-        </p:spPr>
-        <p:style>
-          <a:lnRef idx="1">
-            <a:schemeClr val="accent1"/>
-          </a:lnRef>
-          <a:fillRef idx="3">
-            <a:schemeClr val="accent1"/>
-          </a:fillRef>
-          <a:effectRef idx="2">
-            <a:schemeClr val="accent1"/>
-          </a:effectRef>
-          <a:fontRef idx="minor">
-            <a:schemeClr val="lt1"/>
-          </a:fontRef>
-        </p:style>
-        <p:txBody>
-          <a:bodyPr wrap="square" lIns="54864" tIns="36576" rIns="54864" bIns="36576" rtlCol="0" anchor="ctr"/>
-          <a:lstStyle/>
-          <a:p>
-            <a:pPr algn="ctr"/>
-            <a:r>
-              <a:rPr sz="980" b="1">
-                <a:solidFill>
-                  <a:srgbClr val="121212"/>
-                </a:solidFill>
-                <a:latin typeface="Arial"/>
-              </a:rPr>
-              <a:t>Not a new network: the value is the design, the controls and the evidence.</a:t>
+              <a:t>From fundus image to a calibrated early-DR flag</a:t>
             </a:r>
           </a:p>
         </p:txBody>
@@ -31191,20 +28895,80 @@
       </p:sp>
       <p:sp>
         <p:nvSpPr>
-          <p:cNvPr id="27" name="Shape 8">
-            <a:extLst>
-              <a:ext uri="{FF2B5EF4-FFF2-40B4-BE49-F238E27FC236}">
-                <a16:creationId xmlns:a16="http://schemas.microsoft.com/office/drawing/2014/main" id="{D3022105-94A7-5198-D6E2-77CC59383713}"/>
-              </a:ext>
-            </a:extLst>
-          </p:cNvPr>
+          <p:cNvPr id="201" name="Stage 1"/>
           <p:cNvSpPr/>
           <p:nvPr/>
         </p:nvSpPr>
         <p:spPr>
-          <a:xfrm flipV="1">
-            <a:off x="2059718" y="2057015"/>
-            <a:ext cx="141667" cy="0"/>
+          <a:xfrm>
+            <a:off x="502920" y="1554480"/>
+            <a:ext cx="1417320" cy="1371600"/>
+          </a:xfrm>
+          <a:prstGeom prst="roundRect">
+            <a:avLst/>
+          </a:prstGeom>
+          <a:solidFill>
+            <a:srgbClr val="E4ECF6"/>
+          </a:solidFill>
+          <a:ln w="9525">
+            <a:solidFill>
+              <a:srgbClr val="BCCFE4"/>
+            </a:solidFill>
+          </a:ln>
+        </p:spPr>
+        <p:style>
+          <a:lnRef idx="1">
+            <a:schemeClr val="accent1"/>
+          </a:lnRef>
+          <a:fillRef idx="3">
+            <a:schemeClr val="accent1"/>
+          </a:fillRef>
+          <a:effectRef idx="2">
+            <a:schemeClr val="accent1"/>
+          </a:effectRef>
+          <a:fontRef idx="minor">
+            <a:schemeClr val="lt1"/>
+          </a:fontRef>
+        </p:style>
+        <p:txBody>
+          <a:bodyPr wrap="square" lIns="91440" tIns="36576" rIns="91440" bIns="36576" rtlCol="0" anchor="ctr"/>
+          <a:lstStyle/>
+          <a:p>
+            <a:pPr algn="ctr"/>
+            <a:r>
+              <a:rPr sz="1150" b="1">
+                <a:solidFill>
+                  <a:srgbClr val="121212"/>
+                </a:solidFill>
+                <a:latin typeface="Arial"/>
+              </a:rPr>
+              <a:t>Fundus image</a:t>
+            </a:r>
+          </a:p>
+          <a:p>
+            <a:pPr algn="ctr"/>
+            <a:r>
+              <a:rPr sz="1000" b="0">
+                <a:solidFill>
+                  <a:srgbClr val="3a3a3a"/>
+                </a:solidFill>
+                <a:latin typeface="Arial"/>
+              </a:rPr>
+              <a:t>DDR, EyePACS, APTOS</a:t>
+            </a:r>
+          </a:p>
+        </p:txBody>
+      </p:sp>
+      <p:sp>
+        <p:nvSpPr>
+          <p:cNvPr id="202" name="Flow arrow 1"/>
+          <p:cNvSpPr/>
+          <p:nvPr/>
+        </p:nvSpPr>
+        <p:spPr>
+          <a:xfrm>
+            <a:off x="1938528" y="2148840"/>
+            <a:ext cx="228600" cy="0"/>
           </a:xfrm>
           <a:prstGeom prst="line">
             <a:avLst/>
@@ -31228,20 +28992,80 @@
       </p:sp>
       <p:sp>
         <p:nvSpPr>
-          <p:cNvPr id="29" name="Shape 8">
-            <a:extLst>
-              <a:ext uri="{FF2B5EF4-FFF2-40B4-BE49-F238E27FC236}">
-                <a16:creationId xmlns:a16="http://schemas.microsoft.com/office/drawing/2014/main" id="{582591C4-F68D-4A15-B6B9-5FEB08D109EA}"/>
-              </a:ext>
-            </a:extLst>
-          </p:cNvPr>
+          <p:cNvPr id="203" name="Stage 2"/>
           <p:cNvSpPr/>
           <p:nvPr/>
         </p:nvSpPr>
         <p:spPr>
-          <a:xfrm flipV="1">
-            <a:off x="3660991" y="2074875"/>
-            <a:ext cx="141667" cy="0"/>
+          <a:xfrm>
+            <a:off x="2185416" y="1554480"/>
+            <a:ext cx="1417320" cy="1371600"/>
+          </a:xfrm>
+          <a:prstGeom prst="roundRect">
+            <a:avLst/>
+          </a:prstGeom>
+          <a:solidFill>
+            <a:srgbClr val="E4ECF6"/>
+          </a:solidFill>
+          <a:ln w="9525">
+            <a:solidFill>
+              <a:srgbClr val="BCCFE4"/>
+            </a:solidFill>
+          </a:ln>
+        </p:spPr>
+        <p:style>
+          <a:lnRef idx="1">
+            <a:schemeClr val="accent1"/>
+          </a:lnRef>
+          <a:fillRef idx="3">
+            <a:schemeClr val="accent1"/>
+          </a:fillRef>
+          <a:effectRef idx="2">
+            <a:schemeClr val="accent1"/>
+          </a:effectRef>
+          <a:fontRef idx="minor">
+            <a:schemeClr val="lt1"/>
+          </a:fontRef>
+        </p:style>
+        <p:txBody>
+          <a:bodyPr wrap="square" lIns="91440" tIns="36576" rIns="91440" bIns="36576" rtlCol="0" anchor="ctr"/>
+          <a:lstStyle/>
+          <a:p>
+            <a:pPr algn="ctr"/>
+            <a:r>
+              <a:rPr sz="1150" b="1">
+                <a:solidFill>
+                  <a:srgbClr val="121212"/>
+                </a:solidFill>
+                <a:latin typeface="Arial"/>
+              </a:rPr>
+              <a:t>Preprocess</a:t>
+            </a:r>
+          </a:p>
+          <a:p>
+            <a:pPr algn="ctr"/>
+            <a:r>
+              <a:rPr sz="1000" b="0">
+                <a:solidFill>
+                  <a:srgbClr val="3a3a3a"/>
+                </a:solidFill>
+                <a:latin typeface="Arial"/>
+              </a:rPr>
+              <a:t>Crop, pad, resize to 512 px</a:t>
+            </a:r>
+          </a:p>
+        </p:txBody>
+      </p:sp>
+      <p:sp>
+        <p:nvSpPr>
+          <p:cNvPr id="204" name="Flow arrow 2"/>
+          <p:cNvSpPr/>
+          <p:nvPr/>
+        </p:nvSpPr>
+        <p:spPr>
+          <a:xfrm>
+            <a:off x="3621024" y="2148840"/>
+            <a:ext cx="228600" cy="0"/>
           </a:xfrm>
           <a:prstGeom prst="line">
             <a:avLst/>
@@ -31265,20 +29089,80 @@
       </p:sp>
       <p:sp>
         <p:nvSpPr>
-          <p:cNvPr id="31" name="Shape 8">
-            <a:extLst>
-              <a:ext uri="{FF2B5EF4-FFF2-40B4-BE49-F238E27FC236}">
-                <a16:creationId xmlns:a16="http://schemas.microsoft.com/office/drawing/2014/main" id="{856019FD-6159-C16E-82A6-31C9B8A4135D}"/>
-              </a:ext>
-            </a:extLst>
-          </p:cNvPr>
+          <p:cNvPr id="205" name="Stage 3"/>
           <p:cNvSpPr/>
           <p:nvPr/>
         </p:nvSpPr>
         <p:spPr>
-          <a:xfrm flipV="1">
-            <a:off x="5262264" y="2074875"/>
-            <a:ext cx="141667" cy="0"/>
+          <a:xfrm>
+            <a:off x="3867912" y="1554480"/>
+            <a:ext cx="1417320" cy="1371600"/>
+          </a:xfrm>
+          <a:prstGeom prst="roundRect">
+            <a:avLst/>
+          </a:prstGeom>
+          <a:solidFill>
+            <a:srgbClr val="E3F2EA"/>
+          </a:solidFill>
+          <a:ln w="9525">
+            <a:solidFill>
+              <a:srgbClr val="1E7A5A"/>
+            </a:solidFill>
+          </a:ln>
+        </p:spPr>
+        <p:style>
+          <a:lnRef idx="1">
+            <a:schemeClr val="accent1"/>
+          </a:lnRef>
+          <a:fillRef idx="3">
+            <a:schemeClr val="accent1"/>
+          </a:fillRef>
+          <a:effectRef idx="2">
+            <a:schemeClr val="accent1"/>
+          </a:effectRef>
+          <a:fontRef idx="minor">
+            <a:schemeClr val="lt1"/>
+          </a:fontRef>
+        </p:style>
+        <p:txBody>
+          <a:bodyPr wrap="square" lIns="91440" tIns="36576" rIns="91440" bIns="36576" rtlCol="0" anchor="ctr"/>
+          <a:lstStyle/>
+          <a:p>
+            <a:pPr algn="ctr"/>
+            <a:r>
+              <a:rPr sz="1150" b="1">
+                <a:solidFill>
+                  <a:srgbClr val="121212"/>
+                </a:solidFill>
+                <a:latin typeface="Arial"/>
+              </a:rPr>
+              <a:t>EfficientNet-B0</a:t>
+            </a:r>
+          </a:p>
+          <a:p>
+            <a:pPr algn="ctr"/>
+            <a:r>
+              <a:rPr sz="1000" b="0">
+                <a:solidFill>
+                  <a:srgbClr val="3a3a3a"/>
+                </a:solidFill>
+                <a:latin typeface="Arial"/>
+              </a:rPr>
+              <a:t>ImageNet weights, one output head</a:t>
+            </a:r>
+          </a:p>
+        </p:txBody>
+      </p:sp>
+      <p:sp>
+        <p:nvSpPr>
+          <p:cNvPr id="206" name="Flow arrow 3"/>
+          <p:cNvSpPr/>
+          <p:nvPr/>
+        </p:nvSpPr>
+        <p:spPr>
+          <a:xfrm>
+            <a:off x="5303520" y="2148840"/>
+            <a:ext cx="228600" cy="0"/>
           </a:xfrm>
           <a:prstGeom prst="line">
             <a:avLst/>
@@ -31302,20 +29186,80 @@
       </p:sp>
       <p:sp>
         <p:nvSpPr>
-          <p:cNvPr id="33" name="Shape 8">
-            <a:extLst>
-              <a:ext uri="{FF2B5EF4-FFF2-40B4-BE49-F238E27FC236}">
-                <a16:creationId xmlns:a16="http://schemas.microsoft.com/office/drawing/2014/main" id="{6B13386C-625D-A28B-390E-14BA0411E195}"/>
-              </a:ext>
-            </a:extLst>
-          </p:cNvPr>
+          <p:cNvPr id="207" name="Stage 4"/>
           <p:cNvSpPr/>
           <p:nvPr/>
         </p:nvSpPr>
         <p:spPr>
-          <a:xfrm flipV="1">
-            <a:off x="6876416" y="2059850"/>
-            <a:ext cx="141667" cy="0"/>
+          <a:xfrm>
+            <a:off x="5550408" y="1554480"/>
+            <a:ext cx="1417320" cy="1371600"/>
+          </a:xfrm>
+          <a:prstGeom prst="roundRect">
+            <a:avLst/>
+          </a:prstGeom>
+          <a:solidFill>
+            <a:srgbClr val="E4ECF6"/>
+          </a:solidFill>
+          <a:ln w="9525">
+            <a:solidFill>
+              <a:srgbClr val="BCCFE4"/>
+            </a:solidFill>
+          </a:ln>
+        </p:spPr>
+        <p:style>
+          <a:lnRef idx="1">
+            <a:schemeClr val="accent1"/>
+          </a:lnRef>
+          <a:fillRef idx="3">
+            <a:schemeClr val="accent1"/>
+          </a:fillRef>
+          <a:effectRef idx="2">
+            <a:schemeClr val="accent1"/>
+          </a:effectRef>
+          <a:fontRef idx="minor">
+            <a:schemeClr val="lt1"/>
+          </a:fontRef>
+        </p:style>
+        <p:txBody>
+          <a:bodyPr wrap="square" lIns="91440" tIns="36576" rIns="91440" bIns="36576" rtlCol="0" anchor="ctr"/>
+          <a:lstStyle/>
+          <a:p>
+            <a:pPr algn="ctr"/>
+            <a:r>
+              <a:rPr sz="1150" b="1">
+                <a:solidFill>
+                  <a:srgbClr val="121212"/>
+                </a:solidFill>
+                <a:latin typeface="Arial"/>
+              </a:rPr>
+              <a:t>Calibration</a:t>
+            </a:r>
+          </a:p>
+          <a:p>
+            <a:pPr algn="ctr"/>
+            <a:r>
+              <a:rPr sz="1000" b="0">
+                <a:solidFill>
+                  <a:srgbClr val="3a3a3a"/>
+                </a:solidFill>
+                <a:latin typeface="Arial"/>
+              </a:rPr>
+              <a:t>Temperature scaling and prior-shift correction</a:t>
+            </a:r>
+          </a:p>
+        </p:txBody>
+      </p:sp>
+      <p:sp>
+        <p:nvSpPr>
+          <p:cNvPr id="208" name="Flow arrow 4"/>
+          <p:cNvSpPr/>
+          <p:nvPr/>
+        </p:nvSpPr>
+        <p:spPr>
+          <a:xfrm>
+            <a:off x="6986016" y="2148840"/>
+            <a:ext cx="228600" cy="0"/>
           </a:xfrm>
           <a:prstGeom prst="line">
             <a:avLst/>
@@ -31334,6 +29278,180 @@
           <a:lstStyle/>
           <a:p>
             <a:endParaRPr sz="1050"/>
+          </a:p>
+        </p:txBody>
+      </p:sp>
+      <p:sp>
+        <p:nvSpPr>
+          <p:cNvPr id="209" name="Stage 5"/>
+          <p:cNvSpPr/>
+          <p:nvPr/>
+        </p:nvSpPr>
+        <p:spPr>
+          <a:xfrm>
+            <a:off x="7232904" y="1554480"/>
+            <a:ext cx="1417320" cy="1371600"/>
+          </a:xfrm>
+          <a:prstGeom prst="roundRect">
+            <a:avLst/>
+          </a:prstGeom>
+          <a:solidFill>
+            <a:srgbClr val="FFE9D9"/>
+          </a:solidFill>
+          <a:ln w="9525">
+            <a:solidFill>
+              <a:srgbClr val="EB6834"/>
+            </a:solidFill>
+          </a:ln>
+        </p:spPr>
+        <p:style>
+          <a:lnRef idx="1">
+            <a:schemeClr val="accent1"/>
+          </a:lnRef>
+          <a:fillRef idx="3">
+            <a:schemeClr val="accent1"/>
+          </a:fillRef>
+          <a:effectRef idx="2">
+            <a:schemeClr val="accent1"/>
+          </a:effectRef>
+          <a:fontRef idx="minor">
+            <a:schemeClr val="lt1"/>
+          </a:fontRef>
+        </p:style>
+        <p:txBody>
+          <a:bodyPr wrap="square" lIns="91440" tIns="36576" rIns="91440" bIns="36576" rtlCol="0" anchor="ctr"/>
+          <a:lstStyle/>
+          <a:p>
+            <a:pPr algn="ctr"/>
+            <a:r>
+              <a:rPr sz="1150" b="1">
+                <a:solidFill>
+                  <a:srgbClr val="121212"/>
+                </a:solidFill>
+                <a:latin typeface="Arial"/>
+              </a:rPr>
+              <a:t>Output</a:t>
+            </a:r>
+          </a:p>
+          <a:p>
+            <a:pPr algn="ctr"/>
+            <a:r>
+              <a:rPr sz="1000" b="0">
+                <a:solidFill>
+                  <a:srgbClr val="3a3a3a"/>
+                </a:solidFill>
+                <a:latin typeface="Arial"/>
+              </a:rPr>
+              <a:t>Early-DR probability and flag</a:t>
+            </a:r>
+          </a:p>
+        </p:txBody>
+      </p:sp>
+      <p:sp>
+        <p:nvSpPr>
+          <p:cNvPr id="210" name="Note"/>
+          <p:cNvSpPr/>
+          <p:nvPr/>
+        </p:nvSpPr>
+        <p:spPr>
+          <a:xfrm>
+            <a:off x="502920" y="3200400"/>
+            <a:ext cx="8138160" cy="822960"/>
+          </a:xfrm>
+          <a:prstGeom prst="roundRect">
+            <a:avLst/>
+          </a:prstGeom>
+          <a:solidFill>
+            <a:srgbClr val="FFFFFF"/>
+          </a:solidFill>
+          <a:ln w="9525">
+            <a:solidFill>
+              <a:srgbClr val="CDD2D7"/>
+            </a:solidFill>
+          </a:ln>
+        </p:spPr>
+        <p:style>
+          <a:lnRef idx="1">
+            <a:schemeClr val="accent1"/>
+          </a:lnRef>
+          <a:fillRef idx="3">
+            <a:schemeClr val="accent1"/>
+          </a:fillRef>
+          <a:effectRef idx="2">
+            <a:schemeClr val="accent1"/>
+          </a:effectRef>
+          <a:fontRef idx="minor">
+            <a:schemeClr val="lt1"/>
+          </a:fontRef>
+        </p:style>
+        <p:txBody>
+          <a:bodyPr wrap="square" lIns="91440" tIns="36576" rIns="91440" bIns="36576" rtlCol="0" anchor="ctr"/>
+          <a:lstStyle/>
+          <a:p>
+            <a:pPr algn="l"/>
+            <a:r>
+              <a:rPr sz="1100" b="0">
+                <a:solidFill>
+                  <a:srgbClr val="3a3a3a"/>
+                </a:solidFill>
+                <a:latin typeface="Arial"/>
+              </a:rPr>
+              <a:t>Trained on the training split. The best epoch, calibration and a threshold at specificity 0.90 are set on validation only; test sets are opened afterwards.</a:t>
+            </a:r>
+          </a:p>
+        </p:txBody>
+      </p:sp>
+      <p:sp>
+        <p:nvSpPr>
+          <p:cNvPr id="211" name="Banner"/>
+          <p:cNvSpPr/>
+          <p:nvPr/>
+        </p:nvSpPr>
+        <p:spPr>
+          <a:xfrm>
+            <a:off x="502920" y="4315968"/>
+            <a:ext cx="8138160" cy="365760"/>
+          </a:xfrm>
+          <a:prstGeom prst="roundRect">
+            <a:avLst/>
+          </a:prstGeom>
+          <a:solidFill>
+            <a:srgbClr val="F2F5F8"/>
+          </a:solidFill>
+          <a:ln w="9525">
+            <a:solidFill>
+              <a:srgbClr val="CDD2D7"/>
+            </a:solidFill>
+          </a:ln>
+        </p:spPr>
+        <p:style>
+          <a:lnRef idx="1">
+            <a:schemeClr val="accent1"/>
+          </a:lnRef>
+          <a:fillRef idx="3">
+            <a:schemeClr val="accent1"/>
+          </a:fillRef>
+          <a:effectRef idx="2">
+            <a:schemeClr val="accent1"/>
+          </a:effectRef>
+          <a:fontRef idx="minor">
+            <a:schemeClr val="lt1"/>
+          </a:fontRef>
+        </p:style>
+        <p:txBody>
+          <a:bodyPr wrap="square" lIns="91440" tIns="36576" rIns="91440" bIns="36576" rtlCol="0" anchor="ctr"/>
+          <a:lstStyle/>
+          <a:p>
+            <a:pPr algn="ctr"/>
+            <a:r>
+              <a:rPr sz="1100" b="1">
+                <a:solidFill>
+                  <a:srgbClr val="121212"/>
+                </a:solidFill>
+                <a:latin typeface="Arial"/>
+              </a:rPr>
+              <a:t>Not a new network: the design and the evidence are the contribution.</a:t>
+            </a:r>
           </a:p>
         </p:txBody>
       </p:sp>

--- a/DR_Final_5min.pptx
+++ b/DR_Final_5min.pptx
@@ -15,13 +15,14 @@
     <p:sldId id="258" r:id="rId3"/>
     <p:sldId id="303" r:id="rId29"/>
     <p:sldId id="304" r:id="rId30"/>
+    <p:sldId id="305" r:id="rId31"/>
+    <p:sldId id="306" r:id="rId32"/>
+    <p:sldId id="307" r:id="rId33"/>
     <p:sldId id="308" r:id="rId34"/>
     <p:sldId id="309" r:id="rId35"/>
-    <p:sldId id="305" r:id="rId31"/>
-    <p:sldId id="288" r:id="rId7"/>
-    <p:sldId id="312" r:id="rId38"/>
     <p:sldId id="310" r:id="rId36"/>
     <p:sldId id="311" r:id="rId37"/>
+    <p:sldId id="312" r:id="rId38"/>
     <p:sldId id="265" r:id="rId10"/>
     <p:sldId id="267" r:id="rId11"/>
   </p:sldIdLst>
@@ -2075,7 +2076,7 @@
           <a:lstStyle/>
           <a:p>
             <a:r>
-              <a:t>[0:30] The model is simple. A fundus image is cropped and resized, passed through an EfficientNet-B0, then calibrated with temperature scaling and a prior-shift correction. The output is a probability of early disease and a flag at a fixed specificity of 0.90, all set on validation data only.</a:t>
+              <a:t>[0:25] The method uses three arms: A is DDR only, B is DDR plus EyePACS source-balanced, and C is an earlier merge kept as a negative control. I add honest splits, a shortcut audit, and a frozen operating point at specificity 0.90 set on validation.</a:t>
             </a:r>
           </a:p>
         </p:txBody>
@@ -2145,7 +2146,7 @@
           <a:lstStyle/>
           <a:p>
             <a:r>
-              <a:t>[0:25] For data I use DDR, EyePACS split by patient, and APTOS as an external test only. The splits are frozen files, the model is EfficientNet-B0 at 512 pixels with three seeds on a Kaggle GPU, and test sets are opened only through a declared analysis.</a:t>
+              <a:t>[0:25] The model is simple: a fundus image is cropped and resized, passed through an EfficientNet-B0, then calibrated with temperature scaling and a prior-shift correction. The output is a probability of early disease and a flag, all set on validation data only.</a:t>
             </a:r>
           </a:p>
         </p:txBody>
@@ -2215,7 +2216,7 @@
           <a:lstStyle/>
           <a:p>
             <a:r>
-              <a:t>[0:25] Next steps: train the three arms with several seeds, compare the imbalance methods one at a time, test on held-out EyePACS patients and APTOS with confidence intervals, calibrate and report sensitivity at a fixed specificity, and finish the literature search and thesis.</a:t>
+              <a:t>[0:20] For data I use DDR, EyePACS split by patient, and APTOS as an external test only. The splits are frozen files, and test sets are opened only through a declared analysis.</a:t>
             </a:r>
           </a:p>
         </p:txBody>
@@ -2241,6 +2242,76 @@
 </file>
 
 <file path=ppt/notesSlides/notesSlide13.xml><?xml version="1.0" encoding="utf-8"?>
+<p:notes xmlns:a="http://schemas.openxmlformats.org/drawingml/2006/main" xmlns:p="http://schemas.openxmlformats.org/presentationml/2006/main" xmlns:r="http://schemas.openxmlformats.org/officeDocument/2006/relationships">
+  <p:cSld>
+    <p:spTree>
+      <p:nvGrpSpPr>
+        <p:cNvPr id="1" name=""/>
+        <p:cNvGrpSpPr/>
+        <p:nvPr/>
+      </p:nvGrpSpPr>
+      <p:grpSpPr>
+        <a:xfrm>
+          <a:off x="0" y="0"/>
+          <a:ext cx="0" cy="0"/>
+          <a:chOff x="0" y="0"/>
+          <a:chExt cx="0" cy="0"/>
+        </a:xfrm>
+      </p:grpSpPr>
+      <p:sp>
+        <p:nvSpPr>
+          <p:cNvPr id="2" name="Slide Image Placeholder 1"/>
+          <p:cNvSpPr>
+            <a:spLocks noGrp="1"/>
+          </p:cNvSpPr>
+          <p:nvPr>
+            <p:ph type="sldImg" idx="3"/>
+          </p:nvPr>
+        </p:nvSpPr>
+        <p:spPr/>
+      </p:sp>
+      <p:sp>
+        <p:nvSpPr>
+          <p:cNvPr id="3" name="Notes Placeholder 2"/>
+          <p:cNvSpPr>
+            <a:spLocks noGrp="1"/>
+          </p:cNvSpPr>
+          <p:nvPr>
+            <p:ph type="body" idx="1"/>
+          </p:nvPr>
+        </p:nvSpPr>
+        <p:spPr/>
+        <p:txBody>
+          <a:bodyPr/>
+          <a:lstStyle/>
+          <a:p>
+            <a:r>
+              <a:t>[0:15] Next steps: train the arms with several seeds, compare the imbalance methods, test on unseen sources with confidence intervals, and finish the literature search and thesis.</a:t>
+            </a:r>
+          </a:p>
+        </p:txBody>
+      </p:sp>
+      <p:sp>
+        <p:nvSpPr>
+          <p:cNvPr id="4" name="Slide Number Placeholder 3"/>
+          <p:cNvSpPr>
+            <a:spLocks noGrp="1"/>
+          </p:cNvSpPr>
+          <p:nvPr>
+            <p:ph type="sldNum" idx="12"/>
+          </p:nvPr>
+        </p:nvSpPr>
+        <p:spPr/>
+      </p:sp>
+    </p:spTree>
+  </p:cSld>
+  <p:clrMapOvr>
+    <a:masterClrMapping/>
+  </p:clrMapOvr>
+</p:notes>
+</file>
+
+<file path=ppt/notesSlides/notesSlide14.xml><?xml version="1.0" encoding="utf-8"?>
 <p:notes xmlns:a="http://schemas.openxmlformats.org/drawingml/2006/main" xmlns:p="http://schemas.openxmlformats.org/presentationml/2006/main" xmlns:r="http://schemas.openxmlformats.org/officeDocument/2006/relationships">
   <p:cSld>
     <p:spTree>
@@ -2466,7 +2537,7 @@
           <a:lstStyle/>
           <a:p>
             <a:r>
-              <a:t>[0:22] Let me start with why I chose this. The number of adults living with diabetes grew from 151 million in 2000 to 589 million in 2024. Each of them needs regular retinal screening, so the number of fundus images to grade keeps growing.</a:t>
+              <a:t>[0:22] Let me start with why. The number of adults living with diabetes grew from 151 million in 2000 to 589 million in 2024. Each of them needs regular retinal screening, so the number of fundus images to grade keeps growing.</a:t>
             </a:r>
           </a:p>
         </p:txBody>
@@ -2536,7 +2607,7 @@
           <a:lstStyle/>
           <a:p>
             <a:r>
-              <a:t>[0:25] The screening pathway breaks down before an image is graded. About 60 percent of patients do not get an annual eye exam, grading takes specialist time, and early disease has no symptoms, so late detection lets preventable vision loss progress.</a:t>
+              <a:t>[0:20] The screening pathway breaks down before an image is graded. About 60 percent of patients skip the annual exam, grading takes specialist time, and early disease has no symptoms. We need rapid, consistent triage right after the image is captured.</a:t>
             </a:r>
           </a:p>
         </p:txBody>
@@ -2606,7 +2677,7 @@
           <a:lstStyle/>
           <a:p>
             <a:r>
-              <a:t>[0:25] So the goal is a triage aid for the ophthalmologist, not a replacement. The model reads a fundus image and gives a calibrated probability of early disease, grades 1 and 2, at a fixed specificity, so high-risk images are seen first.</a:t>
+              <a:t>[0:30] Early disease, grades 1 and 2, is where AI could help most. It is silent, so patients do not seek care. Much well-known work, such as Gulshan and colleagues, targets referable DR, and I found no study reporting early-DR sensitivity at a pre-set specificity. My tool is a triage aid, not a replacement.</a:t>
             </a:r>
           </a:p>
         </p:txBody>
@@ -2676,7 +2747,7 @@
           <a:lstStyle/>
           <a:p>
             <a:r>
-              <a:t>[0:35] My research question is: does merging datasets help early detection, or does the model only learn which dataset an image came from? RQ1: does adding EyePACS to DDR improve sensitivity at a fixed specificity on sources the model has not seen? RQ2: do calibrated probabilities and a frozen threshold still hold on unseen data?</a:t>
+              <a:t>[0:35] Here is the gap. Public datasets like DDR, EyePACS and APTOS are often pooled to get more data. A recent review notes that multi-dataset training can mask poor external generalization, and I found no study testing whether a merged model learns the disease or the source. Accuracy can look excellent while the model over-flags or uses camera cues. An over-flagging tool overloads graders; an under-flagging one misses early disease.</a:t>
             </a:r>
           </a:p>
         </p:txBody>
@@ -2746,7 +2817,7 @@
           <a:lstStyle/>
           <a:p>
             <a:r>
-              <a:t>[0:30] This work builds on a few key pieces. Gulshan and colleagues showed deep learning for referable DR. DDR, EyePACS and APTOS are my data sources, and temperature scaling gives calibrated outputs. What I still need to do is a literature search for early-DR and merged-data studies.</a:t>
+              <a:t>[0:30] So my main question is: when datasets are merged for early-DR detection, does the model learn the disease or the source? RQ1 tests the merge with a negative control. RQ2 asks whether a threshold frozen on validation survives a change of source. RQ3 asks whether external benchmarks carry capture cues like image size.</a:t>
             </a:r>
           </a:p>
         </p:txBody>
@@ -2816,7 +2887,7 @@
           <a:lstStyle/>
           <a:p>
             <a:r>
-              <a:t>[0:35] How is this different? The common target is referable DR; mine is early DR at a fixed specificity. I test the merge instead of assuming it helps, I compare imbalance methods one at a time with a control, I test on held-out patients and an external set, and I report calibrated probabilities. It is not a new network: the value is the design and the evidence.</a:t>
+              <a:t>[0:30] This builds on a few pieces. Gulshan and colleagues showed deep learning for referable DR. DDR, EyePACS and APTOS are my data sources, and temperature scaling gives calibrated outputs. A recent review and a cross-camera study describe dataset and camera effects, but for referable DR. I still need a systematic literature search.</a:t>
             </a:r>
           </a:p>
         </p:txBody>
@@ -2886,7 +2957,7 @@
           <a:lstStyle/>
           <a:p>
             <a:r>
-              <a:t>[0:30] The method has three arms with everything else the same. A is DDR only, B is DDR plus EyePACS source-balanced, and C is an earlier merge kept as a negative control. I also test a weighted sampler, class-balanced and focal loss, and augmentation, one at a time.</a:t>
+              <a:t>[0:30] How is this different? My target is early DR at a fixed specificity. I test the merge itself, compare imbalance methods one at a time with a control, test on held-out patients and an external set, and report shortcut audits and calibrated probabilities. It is not a new network: the value is the design and the evidence.</a:t>
             </a:r>
           </a:p>
         </p:txBody>
@@ -20954,7 +21025,7 @@
                 </a:solidFill>
                 <a:latin typeface="Arial"/>
               </a:rPr>
-              <a:t>Datasets and Experimental Setup</a:t>
+              <a:t>Model Architecture</a:t>
             </a:r>
           </a:p>
         </p:txBody>
@@ -20989,7 +21060,7 @@
                 </a:solidFill>
                 <a:latin typeface="Arial"/>
               </a:rPr>
-              <a:t>Three sources, frozen splits</a:t>
+              <a:t>From fundus image to a calibrated early-DR flag</a:t>
             </a:r>
           </a:p>
         </p:txBody>
@@ -21031,24 +21102,24 @@
       </p:sp>
       <p:sp>
         <p:nvSpPr>
-          <p:cNvPr id="201" name="H Dataset"/>
+          <p:cNvPr id="201" name="Stage 1"/>
           <p:cNvSpPr/>
           <p:nvPr/>
         </p:nvSpPr>
         <p:spPr>
           <a:xfrm>
-            <a:off x="502920" y="1280160"/>
-            <a:ext cx="1371600" cy="292608"/>
+            <a:off x="502920" y="1554480"/>
+            <a:ext cx="1417320" cy="1371600"/>
           </a:xfrm>
           <a:prstGeom prst="roundRect">
             <a:avLst/>
           </a:prstGeom>
           <a:solidFill>
-            <a:srgbClr val="3D5F84"/>
+            <a:srgbClr val="E4ECF6"/>
           </a:solidFill>
           <a:ln w="9525">
             <a:solidFill>
-              <a:srgbClr val="3D5F84"/>
+              <a:srgbClr val="BCCFE4"/>
             </a:solidFill>
           </a:ln>
         </p:spPr>
@@ -21070,39 +21141,82 @@
           <a:bodyPr wrap="square" lIns="91440" tIns="36576" rIns="91440" bIns="36576" rtlCol="0" anchor="ctr"/>
           <a:lstStyle/>
           <a:p>
-            <a:pPr algn="l"/>
+            <a:pPr algn="ctr"/>
             <a:r>
-              <a:rPr sz="1050" b="1">
-                <a:solidFill>
-                  <a:srgbClr val="FFFFFF"/>
+              <a:rPr sz="1150" b="1">
+                <a:solidFill>
+                  <a:srgbClr val="121212"/>
                 </a:solidFill>
                 <a:latin typeface="Arial"/>
               </a:rPr>
-              <a:t>Dataset</a:t>
+              <a:t>Fundus image</a:t>
+            </a:r>
+          </a:p>
+          <a:p>
+            <a:pPr algn="ctr"/>
+            <a:r>
+              <a:rPr sz="1000" b="0">
+                <a:solidFill>
+                  <a:srgbClr val="3a3a3a"/>
+                </a:solidFill>
+                <a:latin typeface="Arial"/>
+              </a:rPr>
+              <a:t>DDR, EyePACS, APTOS</a:t>
             </a:r>
           </a:p>
         </p:txBody>
       </p:sp>
       <p:sp>
         <p:nvSpPr>
-          <p:cNvPr id="202" name="H Role"/>
+          <p:cNvPr id="202" name="Flow arrow 1"/>
           <p:cNvSpPr/>
           <p:nvPr/>
         </p:nvSpPr>
         <p:spPr>
           <a:xfrm>
-            <a:off x="1965960" y="1280160"/>
-            <a:ext cx="2377440" cy="292608"/>
+            <a:off x="1938528" y="2148840"/>
+            <a:ext cx="228600" cy="0"/>
+          </a:xfrm>
+          <a:prstGeom prst="line">
+            <a:avLst/>
+          </a:prstGeom>
+          <a:noFill/>
+          <a:ln w="25400">
+            <a:solidFill>
+              <a:srgbClr val="555555"/>
+            </a:solidFill>
+            <a:prstDash val="solid"/>
+            <a:tailEnd type="triangle"/>
+          </a:ln>
+        </p:spPr>
+        <p:txBody>
+          <a:bodyPr/>
+          <a:lstStyle/>
+          <a:p>
+            <a:endParaRPr sz="1050"/>
+          </a:p>
+        </p:txBody>
+      </p:sp>
+      <p:sp>
+        <p:nvSpPr>
+          <p:cNvPr id="203" name="Stage 2"/>
+          <p:cNvSpPr/>
+          <p:nvPr/>
+        </p:nvSpPr>
+        <p:spPr>
+          <a:xfrm>
+            <a:off x="2185416" y="1554480"/>
+            <a:ext cx="1417320" cy="1371600"/>
           </a:xfrm>
           <a:prstGeom prst="roundRect">
             <a:avLst/>
           </a:prstGeom>
           <a:solidFill>
-            <a:srgbClr val="3D5F84"/>
+            <a:srgbClr val="E4ECF6"/>
           </a:solidFill>
           <a:ln w="9525">
             <a:solidFill>
-              <a:srgbClr val="3D5F84"/>
+              <a:srgbClr val="BCCFE4"/>
             </a:solidFill>
           </a:ln>
         </p:spPr>
@@ -21124,39 +21238,82 @@
           <a:bodyPr wrap="square" lIns="91440" tIns="36576" rIns="91440" bIns="36576" rtlCol="0" anchor="ctr"/>
           <a:lstStyle/>
           <a:p>
-            <a:pPr algn="l"/>
+            <a:pPr algn="ctr"/>
             <a:r>
-              <a:rPr sz="1050" b="1">
-                <a:solidFill>
-                  <a:srgbClr val="FFFFFF"/>
+              <a:rPr sz="1150" b="1">
+                <a:solidFill>
+                  <a:srgbClr val="121212"/>
                 </a:solidFill>
                 <a:latin typeface="Arial"/>
               </a:rPr>
-              <a:t>Role</a:t>
+              <a:t>Preprocess</a:t>
+            </a:r>
+          </a:p>
+          <a:p>
+            <a:pPr algn="ctr"/>
+            <a:r>
+              <a:rPr sz="1000" b="0">
+                <a:solidFill>
+                  <a:srgbClr val="3a3a3a"/>
+                </a:solidFill>
+                <a:latin typeface="Arial"/>
+              </a:rPr>
+              <a:t>Crop, pad, resize to 512 px</a:t>
             </a:r>
           </a:p>
         </p:txBody>
       </p:sp>
       <p:sp>
         <p:nvSpPr>
-          <p:cNvPr id="203" name="H Images"/>
+          <p:cNvPr id="204" name="Flow arrow 2"/>
           <p:cNvSpPr/>
           <p:nvPr/>
         </p:nvSpPr>
         <p:spPr>
           <a:xfrm>
-            <a:off x="4434840" y="1280160"/>
-            <a:ext cx="1737360" cy="292608"/>
+            <a:off x="3621024" y="2148840"/>
+            <a:ext cx="228600" cy="0"/>
+          </a:xfrm>
+          <a:prstGeom prst="line">
+            <a:avLst/>
+          </a:prstGeom>
+          <a:noFill/>
+          <a:ln w="25400">
+            <a:solidFill>
+              <a:srgbClr val="555555"/>
+            </a:solidFill>
+            <a:prstDash val="solid"/>
+            <a:tailEnd type="triangle"/>
+          </a:ln>
+        </p:spPr>
+        <p:txBody>
+          <a:bodyPr/>
+          <a:lstStyle/>
+          <a:p>
+            <a:endParaRPr sz="1050"/>
+          </a:p>
+        </p:txBody>
+      </p:sp>
+      <p:sp>
+        <p:nvSpPr>
+          <p:cNvPr id="205" name="Stage 3"/>
+          <p:cNvSpPr/>
+          <p:nvPr/>
+        </p:nvSpPr>
+        <p:spPr>
+          <a:xfrm>
+            <a:off x="3867912" y="1554480"/>
+            <a:ext cx="1417320" cy="1371600"/>
           </a:xfrm>
           <a:prstGeom prst="roundRect">
             <a:avLst/>
           </a:prstGeom>
           <a:solidFill>
-            <a:srgbClr val="3D5F84"/>
+            <a:srgbClr val="E3F2EA"/>
           </a:solidFill>
           <a:ln w="9525">
             <a:solidFill>
-              <a:srgbClr val="3D5F84"/>
+              <a:srgbClr val="1E7A5A"/>
             </a:solidFill>
           </a:ln>
         </p:spPr>
@@ -21178,39 +21335,82 @@
           <a:bodyPr wrap="square" lIns="91440" tIns="36576" rIns="91440" bIns="36576" rtlCol="0" anchor="ctr"/>
           <a:lstStyle/>
           <a:p>
-            <a:pPr algn="l"/>
+            <a:pPr algn="ctr"/>
             <a:r>
-              <a:rPr sz="1050" b="1">
-                <a:solidFill>
-                  <a:srgbClr val="FFFFFF"/>
+              <a:rPr sz="1150" b="1">
+                <a:solidFill>
+                  <a:srgbClr val="121212"/>
                 </a:solidFill>
                 <a:latin typeface="Arial"/>
               </a:rPr>
-              <a:t>Images</a:t>
+              <a:t>EfficientNet-B0</a:t>
+            </a:r>
+          </a:p>
+          <a:p>
+            <a:pPr algn="ctr"/>
+            <a:r>
+              <a:rPr sz="1000" b="0">
+                <a:solidFill>
+                  <a:srgbClr val="3a3a3a"/>
+                </a:solidFill>
+                <a:latin typeface="Arial"/>
+              </a:rPr>
+              <a:t>ImageNet weights, one output head</a:t>
             </a:r>
           </a:p>
         </p:txBody>
       </p:sp>
       <p:sp>
         <p:nvSpPr>
-          <p:cNvPr id="204" name="H Split"/>
+          <p:cNvPr id="206" name="Flow arrow 3"/>
           <p:cNvSpPr/>
           <p:nvPr/>
         </p:nvSpPr>
         <p:spPr>
           <a:xfrm>
-            <a:off x="6263640" y="1280160"/>
-            <a:ext cx="2377440" cy="292608"/>
+            <a:off x="5303520" y="2148840"/>
+            <a:ext cx="228600" cy="0"/>
+          </a:xfrm>
+          <a:prstGeom prst="line">
+            <a:avLst/>
+          </a:prstGeom>
+          <a:noFill/>
+          <a:ln w="25400">
+            <a:solidFill>
+              <a:srgbClr val="555555"/>
+            </a:solidFill>
+            <a:prstDash val="solid"/>
+            <a:tailEnd type="triangle"/>
+          </a:ln>
+        </p:spPr>
+        <p:txBody>
+          <a:bodyPr/>
+          <a:lstStyle/>
+          <a:p>
+            <a:endParaRPr sz="1050"/>
+          </a:p>
+        </p:txBody>
+      </p:sp>
+      <p:sp>
+        <p:nvSpPr>
+          <p:cNvPr id="207" name="Stage 4"/>
+          <p:cNvSpPr/>
+          <p:nvPr/>
+        </p:nvSpPr>
+        <p:spPr>
+          <a:xfrm>
+            <a:off x="5550408" y="1554480"/>
+            <a:ext cx="1417320" cy="1371600"/>
           </a:xfrm>
           <a:prstGeom prst="roundRect">
             <a:avLst/>
           </a:prstGeom>
           <a:solidFill>
-            <a:srgbClr val="3D5F84"/>
+            <a:srgbClr val="E4ECF6"/>
           </a:solidFill>
           <a:ln w="9525">
             <a:solidFill>
-              <a:srgbClr val="3D5F84"/>
+              <a:srgbClr val="BCCFE4"/>
             </a:solidFill>
           </a:ln>
         </p:spPr>
@@ -21232,29 +21432,138 @@
           <a:bodyPr wrap="square" lIns="91440" tIns="36576" rIns="91440" bIns="36576" rtlCol="0" anchor="ctr"/>
           <a:lstStyle/>
           <a:p>
-            <a:pPr algn="l"/>
+            <a:pPr algn="ctr"/>
             <a:r>
-              <a:rPr sz="1050" b="1">
-                <a:solidFill>
-                  <a:srgbClr val="FFFFFF"/>
+              <a:rPr sz="1150" b="1">
+                <a:solidFill>
+                  <a:srgbClr val="121212"/>
                 </a:solidFill>
                 <a:latin typeface="Arial"/>
               </a:rPr>
-              <a:t>Split</a:t>
+              <a:t>Calibration</a:t>
+            </a:r>
+          </a:p>
+          <a:p>
+            <a:pPr algn="ctr"/>
+            <a:r>
+              <a:rPr sz="1000" b="0">
+                <a:solidFill>
+                  <a:srgbClr val="3a3a3a"/>
+                </a:solidFill>
+                <a:latin typeface="Arial"/>
+              </a:rPr>
+              <a:t>Temperature scaling and prior-shift correction</a:t>
             </a:r>
           </a:p>
         </p:txBody>
       </p:sp>
       <p:sp>
         <p:nvSpPr>
-          <p:cNvPr id="205" name="D00.55"/>
+          <p:cNvPr id="208" name="Flow arrow 4"/>
           <p:cNvSpPr/>
           <p:nvPr/>
         </p:nvSpPr>
         <p:spPr>
           <a:xfrm>
-            <a:off x="502920" y="1627632"/>
-            <a:ext cx="1371600" cy="512064"/>
+            <a:off x="6986016" y="2148840"/>
+            <a:ext cx="228600" cy="0"/>
+          </a:xfrm>
+          <a:prstGeom prst="line">
+            <a:avLst/>
+          </a:prstGeom>
+          <a:noFill/>
+          <a:ln w="25400">
+            <a:solidFill>
+              <a:srgbClr val="555555"/>
+            </a:solidFill>
+            <a:prstDash val="solid"/>
+            <a:tailEnd type="triangle"/>
+          </a:ln>
+        </p:spPr>
+        <p:txBody>
+          <a:bodyPr/>
+          <a:lstStyle/>
+          <a:p>
+            <a:endParaRPr sz="1050"/>
+          </a:p>
+        </p:txBody>
+      </p:sp>
+      <p:sp>
+        <p:nvSpPr>
+          <p:cNvPr id="209" name="Stage 5"/>
+          <p:cNvSpPr/>
+          <p:nvPr/>
+        </p:nvSpPr>
+        <p:spPr>
+          <a:xfrm>
+            <a:off x="7232904" y="1554480"/>
+            <a:ext cx="1417320" cy="1371600"/>
+          </a:xfrm>
+          <a:prstGeom prst="roundRect">
+            <a:avLst/>
+          </a:prstGeom>
+          <a:solidFill>
+            <a:srgbClr val="FFE9D9"/>
+          </a:solidFill>
+          <a:ln w="9525">
+            <a:solidFill>
+              <a:srgbClr val="EB6834"/>
+            </a:solidFill>
+          </a:ln>
+        </p:spPr>
+        <p:style>
+          <a:lnRef idx="1">
+            <a:schemeClr val="accent1"/>
+          </a:lnRef>
+          <a:fillRef idx="3">
+            <a:schemeClr val="accent1"/>
+          </a:fillRef>
+          <a:effectRef idx="2">
+            <a:schemeClr val="accent1"/>
+          </a:effectRef>
+          <a:fontRef idx="minor">
+            <a:schemeClr val="lt1"/>
+          </a:fontRef>
+        </p:style>
+        <p:txBody>
+          <a:bodyPr wrap="square" lIns="91440" tIns="36576" rIns="91440" bIns="36576" rtlCol="0" anchor="ctr"/>
+          <a:lstStyle/>
+          <a:p>
+            <a:pPr algn="ctr"/>
+            <a:r>
+              <a:rPr sz="1150" b="1">
+                <a:solidFill>
+                  <a:srgbClr val="121212"/>
+                </a:solidFill>
+                <a:latin typeface="Arial"/>
+              </a:rPr>
+              <a:t>Output</a:t>
+            </a:r>
+          </a:p>
+          <a:p>
+            <a:pPr algn="ctr"/>
+            <a:r>
+              <a:rPr sz="1000" b="0">
+                <a:solidFill>
+                  <a:srgbClr val="3a3a3a"/>
+                </a:solidFill>
+                <a:latin typeface="Arial"/>
+              </a:rPr>
+              <a:t>Early-DR probability and flag</a:t>
+            </a:r>
+          </a:p>
+        </p:txBody>
+      </p:sp>
+      <p:sp>
+        <p:nvSpPr>
+          <p:cNvPr id="210" name="Note"/>
+          <p:cNvSpPr/>
+          <p:nvPr/>
+        </p:nvSpPr>
+        <p:spPr>
+          <a:xfrm>
+            <a:off x="502920" y="3200400"/>
+            <a:ext cx="8138160" cy="822960"/>
           </a:xfrm>
           <a:prstGeom prst="roundRect">
             <a:avLst/>
@@ -21288,746 +21597,20 @@
           <a:p>
             <a:pPr algn="l"/>
             <a:r>
-              <a:rPr sz="1050" b="1">
+              <a:rPr sz="1100" b="0">
                 <a:solidFill>
                   <a:srgbClr val="3a3a3a"/>
                 </a:solidFill>
                 <a:latin typeface="Arial"/>
               </a:rPr>
-              <a:t>DDR</a:t>
+              <a:t>Trained on the training split. The best epoch, calibration and a threshold at specificity 0.90 are set on validation only; test sets are opened afterwards.</a:t>
             </a:r>
           </a:p>
         </p:txBody>
       </p:sp>
       <p:sp>
         <p:nvSpPr>
-          <p:cNvPr id="206" name="D02.15"/>
-          <p:cNvSpPr/>
-          <p:nvPr/>
-        </p:nvSpPr>
-        <p:spPr>
-          <a:xfrm>
-            <a:off x="1965960" y="1627632"/>
-            <a:ext cx="2377440" cy="512064"/>
-          </a:xfrm>
-          <a:prstGeom prst="roundRect">
-            <a:avLst/>
-          </a:prstGeom>
-          <a:solidFill>
-            <a:srgbClr val="FFFFFF"/>
-          </a:solidFill>
-          <a:ln w="9525">
-            <a:solidFill>
-              <a:srgbClr val="CDD2D7"/>
-            </a:solidFill>
-          </a:ln>
-        </p:spPr>
-        <p:style>
-          <a:lnRef idx="1">
-            <a:schemeClr val="accent1"/>
-          </a:lnRef>
-          <a:fillRef idx="3">
-            <a:schemeClr val="accent1"/>
-          </a:fillRef>
-          <a:effectRef idx="2">
-            <a:schemeClr val="accent1"/>
-          </a:effectRef>
-          <a:fontRef idx="minor">
-            <a:schemeClr val="lt1"/>
-          </a:fontRef>
-        </p:style>
-        <p:txBody>
-          <a:bodyPr wrap="square" lIns="91440" tIns="36576" rIns="91440" bIns="36576" rtlCol="0" anchor="ctr"/>
-          <a:lstStyle/>
-          <a:p>
-            <a:pPr algn="l"/>
-            <a:r>
-              <a:rPr sz="1050" b="0">
-                <a:solidFill>
-                  <a:srgbClr val="3a3a3a"/>
-                </a:solidFill>
-                <a:latin typeface="Arial"/>
-              </a:rPr>
-              <a:t>Training source and internal test</a:t>
-            </a:r>
-          </a:p>
-        </p:txBody>
-      </p:sp>
-      <p:sp>
-        <p:nvSpPr>
-          <p:cNvPr id="207" name="D04.85"/>
-          <p:cNvSpPr/>
-          <p:nvPr/>
-        </p:nvSpPr>
-        <p:spPr>
-          <a:xfrm>
-            <a:off x="4434840" y="1627632"/>
-            <a:ext cx="1737360" cy="512064"/>
-          </a:xfrm>
-          <a:prstGeom prst="roundRect">
-            <a:avLst/>
-          </a:prstGeom>
-          <a:solidFill>
-            <a:srgbClr val="FFFFFF"/>
-          </a:solidFill>
-          <a:ln w="9525">
-            <a:solidFill>
-              <a:srgbClr val="CDD2D7"/>
-            </a:solidFill>
-          </a:ln>
-        </p:spPr>
-        <p:style>
-          <a:lnRef idx="1">
-            <a:schemeClr val="accent1"/>
-          </a:lnRef>
-          <a:fillRef idx="3">
-            <a:schemeClr val="accent1"/>
-          </a:fillRef>
-          <a:effectRef idx="2">
-            <a:schemeClr val="accent1"/>
-          </a:effectRef>
-          <a:fontRef idx="minor">
-            <a:schemeClr val="lt1"/>
-          </a:fontRef>
-        </p:style>
-        <p:txBody>
-          <a:bodyPr wrap="square" lIns="91440" tIns="36576" rIns="91440" bIns="36576" rtlCol="0" anchor="ctr"/>
-          <a:lstStyle/>
-          <a:p>
-            <a:pPr algn="l"/>
-            <a:r>
-              <a:rPr sz="1050" b="0">
-                <a:solidFill>
-                  <a:srgbClr val="3a3a3a"/>
-                </a:solidFill>
-                <a:latin typeface="Arial"/>
-              </a:rPr>
-              <a:t>12,522</a:t>
-            </a:r>
-          </a:p>
-        </p:txBody>
-      </p:sp>
-      <p:sp>
-        <p:nvSpPr>
-          <p:cNvPr id="208" name="D06.85"/>
-          <p:cNvSpPr/>
-          <p:nvPr/>
-        </p:nvSpPr>
-        <p:spPr>
-          <a:xfrm>
-            <a:off x="6263640" y="1627632"/>
-            <a:ext cx="2377440" cy="512064"/>
-          </a:xfrm>
-          <a:prstGeom prst="roundRect">
-            <a:avLst/>
-          </a:prstGeom>
-          <a:solidFill>
-            <a:srgbClr val="FFFFFF"/>
-          </a:solidFill>
-          <a:ln w="9525">
-            <a:solidFill>
-              <a:srgbClr val="CDD2D7"/>
-            </a:solidFill>
-          </a:ln>
-        </p:spPr>
-        <p:style>
-          <a:lnRef idx="1">
-            <a:schemeClr val="accent1"/>
-          </a:lnRef>
-          <a:fillRef idx="3">
-            <a:schemeClr val="accent1"/>
-          </a:fillRef>
-          <a:effectRef idx="2">
-            <a:schemeClr val="accent1"/>
-          </a:effectRef>
-          <a:fontRef idx="minor">
-            <a:schemeClr val="lt1"/>
-          </a:fontRef>
-        </p:style>
-        <p:txBody>
-          <a:bodyPr wrap="square" lIns="91440" tIns="36576" rIns="91440" bIns="36576" rtlCol="0" anchor="ctr"/>
-          <a:lstStyle/>
-          <a:p>
-            <a:pPr algn="l"/>
-            <a:r>
-              <a:rPr sz="1050" b="0">
-                <a:solidFill>
-                  <a:srgbClr val="3a3a3a"/>
-                </a:solidFill>
-                <a:latin typeface="Arial"/>
-              </a:rPr>
-              <a:t>Random 60/20/20 (patient IDs not available)</a:t>
-            </a:r>
-          </a:p>
-        </p:txBody>
-      </p:sp>
-      <p:sp>
-        <p:nvSpPr>
-          <p:cNvPr id="209" name="D10.55"/>
-          <p:cNvSpPr/>
-          <p:nvPr/>
-        </p:nvSpPr>
-        <p:spPr>
-          <a:xfrm>
-            <a:off x="502920" y="2194560"/>
-            <a:ext cx="1371600" cy="512064"/>
-          </a:xfrm>
-          <a:prstGeom prst="roundRect">
-            <a:avLst/>
-          </a:prstGeom>
-          <a:solidFill>
-            <a:srgbClr val="FFFFFF"/>
-          </a:solidFill>
-          <a:ln w="9525">
-            <a:solidFill>
-              <a:srgbClr val="CDD2D7"/>
-            </a:solidFill>
-          </a:ln>
-        </p:spPr>
-        <p:style>
-          <a:lnRef idx="1">
-            <a:schemeClr val="accent1"/>
-          </a:lnRef>
-          <a:fillRef idx="3">
-            <a:schemeClr val="accent1"/>
-          </a:fillRef>
-          <a:effectRef idx="2">
-            <a:schemeClr val="accent1"/>
-          </a:effectRef>
-          <a:fontRef idx="minor">
-            <a:schemeClr val="lt1"/>
-          </a:fontRef>
-        </p:style>
-        <p:txBody>
-          <a:bodyPr wrap="square" lIns="91440" tIns="36576" rIns="91440" bIns="36576" rtlCol="0" anchor="ctr"/>
-          <a:lstStyle/>
-          <a:p>
-            <a:pPr algn="l"/>
-            <a:r>
-              <a:rPr sz="1050" b="1">
-                <a:solidFill>
-                  <a:srgbClr val="3a3a3a"/>
-                </a:solidFill>
-                <a:latin typeface="Arial"/>
-              </a:rPr>
-              <a:t>EyePACS</a:t>
-            </a:r>
-          </a:p>
-        </p:txBody>
-      </p:sp>
-      <p:sp>
-        <p:nvSpPr>
-          <p:cNvPr id="210" name="D12.15"/>
-          <p:cNvSpPr/>
-          <p:nvPr/>
-        </p:nvSpPr>
-        <p:spPr>
-          <a:xfrm>
-            <a:off x="1965960" y="2194560"/>
-            <a:ext cx="2377440" cy="512064"/>
-          </a:xfrm>
-          <a:prstGeom prst="roundRect">
-            <a:avLst/>
-          </a:prstGeom>
-          <a:solidFill>
-            <a:srgbClr val="FFFFFF"/>
-          </a:solidFill>
-          <a:ln w="9525">
-            <a:solidFill>
-              <a:srgbClr val="CDD2D7"/>
-            </a:solidFill>
-          </a:ln>
-        </p:spPr>
-        <p:style>
-          <a:lnRef idx="1">
-            <a:schemeClr val="accent1"/>
-          </a:lnRef>
-          <a:fillRef idx="3">
-            <a:schemeClr val="accent1"/>
-          </a:fillRef>
-          <a:effectRef idx="2">
-            <a:schemeClr val="accent1"/>
-          </a:effectRef>
-          <a:fontRef idx="minor">
-            <a:schemeClr val="lt1"/>
-          </a:fontRef>
-        </p:style>
-        <p:txBody>
-          <a:bodyPr wrap="square" lIns="91440" tIns="36576" rIns="91440" bIns="36576" rtlCol="0" anchor="ctr"/>
-          <a:lstStyle/>
-          <a:p>
-            <a:pPr algn="l"/>
-            <a:r>
-              <a:rPr sz="1050" b="0">
-                <a:solidFill>
-                  <a:srgbClr val="3a3a3a"/>
-                </a:solidFill>
-                <a:latin typeface="Arial"/>
-              </a:rPr>
-              <a:t>Second source; held-out test</a:t>
-            </a:r>
-          </a:p>
-        </p:txBody>
-      </p:sp>
-      <p:sp>
-        <p:nvSpPr>
-          <p:cNvPr id="211" name="D14.85"/>
-          <p:cNvSpPr/>
-          <p:nvPr/>
-        </p:nvSpPr>
-        <p:spPr>
-          <a:xfrm>
-            <a:off x="4434840" y="2194560"/>
-            <a:ext cx="1737360" cy="512064"/>
-          </a:xfrm>
-          <a:prstGeom prst="roundRect">
-            <a:avLst/>
-          </a:prstGeom>
-          <a:solidFill>
-            <a:srgbClr val="FFFFFF"/>
-          </a:solidFill>
-          <a:ln w="9525">
-            <a:solidFill>
-              <a:srgbClr val="CDD2D7"/>
-            </a:solidFill>
-          </a:ln>
-        </p:spPr>
-        <p:style>
-          <a:lnRef idx="1">
-            <a:schemeClr val="accent1"/>
-          </a:lnRef>
-          <a:fillRef idx="3">
-            <a:schemeClr val="accent1"/>
-          </a:fillRef>
-          <a:effectRef idx="2">
-            <a:schemeClr val="accent1"/>
-          </a:effectRef>
-          <a:fontRef idx="minor">
-            <a:schemeClr val="lt1"/>
-          </a:fontRef>
-        </p:style>
-        <p:txBody>
-          <a:bodyPr wrap="square" lIns="91440" tIns="36576" rIns="91440" bIns="36576" rtlCol="0" anchor="ctr"/>
-          <a:lstStyle/>
-          <a:p>
-            <a:pPr algn="l"/>
-            <a:r>
-              <a:rPr sz="1050" b="0">
-                <a:solidFill>
-                  <a:srgbClr val="3a3a3a"/>
-                </a:solidFill>
-                <a:latin typeface="Arial"/>
-              </a:rPr>
-              <a:t>35,108</a:t>
-            </a:r>
-          </a:p>
-        </p:txBody>
-      </p:sp>
-      <p:sp>
-        <p:nvSpPr>
-          <p:cNvPr id="212" name="D16.85"/>
-          <p:cNvSpPr/>
-          <p:nvPr/>
-        </p:nvSpPr>
-        <p:spPr>
-          <a:xfrm>
-            <a:off x="6263640" y="2194560"/>
-            <a:ext cx="2377440" cy="512064"/>
-          </a:xfrm>
-          <a:prstGeom prst="roundRect">
-            <a:avLst/>
-          </a:prstGeom>
-          <a:solidFill>
-            <a:srgbClr val="FFFFFF"/>
-          </a:solidFill>
-          <a:ln w="9525">
-            <a:solidFill>
-              <a:srgbClr val="CDD2D7"/>
-            </a:solidFill>
-          </a:ln>
-        </p:spPr>
-        <p:style>
-          <a:lnRef idx="1">
-            <a:schemeClr val="accent1"/>
-          </a:lnRef>
-          <a:fillRef idx="3">
-            <a:schemeClr val="accent1"/>
-          </a:fillRef>
-          <a:effectRef idx="2">
-            <a:schemeClr val="accent1"/>
-          </a:effectRef>
-          <a:fontRef idx="minor">
-            <a:schemeClr val="lt1"/>
-          </a:fontRef>
-        </p:style>
-        <p:txBody>
-          <a:bodyPr wrap="square" lIns="91440" tIns="36576" rIns="91440" bIns="36576" rtlCol="0" anchor="ctr"/>
-          <a:lstStyle/>
-          <a:p>
-            <a:pPr algn="l"/>
-            <a:r>
-              <a:rPr sz="1050" b="0">
-                <a:solidFill>
-                  <a:srgbClr val="3a3a3a"/>
-                </a:solidFill>
-                <a:latin typeface="Arial"/>
-              </a:rPr>
-              <a:t>By patient, 70/15/15</a:t>
-            </a:r>
-          </a:p>
-        </p:txBody>
-      </p:sp>
-      <p:sp>
-        <p:nvSpPr>
-          <p:cNvPr id="213" name="D20.55"/>
-          <p:cNvSpPr/>
-          <p:nvPr/>
-        </p:nvSpPr>
-        <p:spPr>
-          <a:xfrm>
-            <a:off x="502920" y="2761488"/>
-            <a:ext cx="1371600" cy="512064"/>
-          </a:xfrm>
-          <a:prstGeom prst="roundRect">
-            <a:avLst/>
-          </a:prstGeom>
-          <a:solidFill>
-            <a:srgbClr val="FFFFFF"/>
-          </a:solidFill>
-          <a:ln w="9525">
-            <a:solidFill>
-              <a:srgbClr val="CDD2D7"/>
-            </a:solidFill>
-          </a:ln>
-        </p:spPr>
-        <p:style>
-          <a:lnRef idx="1">
-            <a:schemeClr val="accent1"/>
-          </a:lnRef>
-          <a:fillRef idx="3">
-            <a:schemeClr val="accent1"/>
-          </a:fillRef>
-          <a:effectRef idx="2">
-            <a:schemeClr val="accent1"/>
-          </a:effectRef>
-          <a:fontRef idx="minor">
-            <a:schemeClr val="lt1"/>
-          </a:fontRef>
-        </p:style>
-        <p:txBody>
-          <a:bodyPr wrap="square" lIns="91440" tIns="36576" rIns="91440" bIns="36576" rtlCol="0" anchor="ctr"/>
-          <a:lstStyle/>
-          <a:p>
-            <a:pPr algn="l"/>
-            <a:r>
-              <a:rPr sz="1050" b="1">
-                <a:solidFill>
-                  <a:srgbClr val="3a3a3a"/>
-                </a:solidFill>
-                <a:latin typeface="Arial"/>
-              </a:rPr>
-              <a:t>APTOS</a:t>
-            </a:r>
-          </a:p>
-        </p:txBody>
-      </p:sp>
-      <p:sp>
-        <p:nvSpPr>
-          <p:cNvPr id="214" name="D22.15"/>
-          <p:cNvSpPr/>
-          <p:nvPr/>
-        </p:nvSpPr>
-        <p:spPr>
-          <a:xfrm>
-            <a:off x="1965960" y="2761488"/>
-            <a:ext cx="2377440" cy="512064"/>
-          </a:xfrm>
-          <a:prstGeom prst="roundRect">
-            <a:avLst/>
-          </a:prstGeom>
-          <a:solidFill>
-            <a:srgbClr val="FFFFFF"/>
-          </a:solidFill>
-          <a:ln w="9525">
-            <a:solidFill>
-              <a:srgbClr val="CDD2D7"/>
-            </a:solidFill>
-          </a:ln>
-        </p:spPr>
-        <p:style>
-          <a:lnRef idx="1">
-            <a:schemeClr val="accent1"/>
-          </a:lnRef>
-          <a:fillRef idx="3">
-            <a:schemeClr val="accent1"/>
-          </a:fillRef>
-          <a:effectRef idx="2">
-            <a:schemeClr val="accent1"/>
-          </a:effectRef>
-          <a:fontRef idx="minor">
-            <a:schemeClr val="lt1"/>
-          </a:fontRef>
-        </p:style>
-        <p:txBody>
-          <a:bodyPr wrap="square" lIns="91440" tIns="36576" rIns="91440" bIns="36576" rtlCol="0" anchor="ctr"/>
-          <a:lstStyle/>
-          <a:p>
-            <a:pPr algn="l"/>
-            <a:r>
-              <a:rPr sz="1050" b="0">
-                <a:solidFill>
-                  <a:srgbClr val="3a3a3a"/>
-                </a:solidFill>
-                <a:latin typeface="Arial"/>
-              </a:rPr>
-              <a:t>External test only</a:t>
-            </a:r>
-          </a:p>
-        </p:txBody>
-      </p:sp>
-      <p:sp>
-        <p:nvSpPr>
-          <p:cNvPr id="215" name="D24.85"/>
-          <p:cNvSpPr/>
-          <p:nvPr/>
-        </p:nvSpPr>
-        <p:spPr>
-          <a:xfrm>
-            <a:off x="4434840" y="2761488"/>
-            <a:ext cx="1737360" cy="512064"/>
-          </a:xfrm>
-          <a:prstGeom prst="roundRect">
-            <a:avLst/>
-          </a:prstGeom>
-          <a:solidFill>
-            <a:srgbClr val="FFFFFF"/>
-          </a:solidFill>
-          <a:ln w="9525">
-            <a:solidFill>
-              <a:srgbClr val="CDD2D7"/>
-            </a:solidFill>
-          </a:ln>
-        </p:spPr>
-        <p:style>
-          <a:lnRef idx="1">
-            <a:schemeClr val="accent1"/>
-          </a:lnRef>
-          <a:fillRef idx="3">
-            <a:schemeClr val="accent1"/>
-          </a:fillRef>
-          <a:effectRef idx="2">
-            <a:schemeClr val="accent1"/>
-          </a:effectRef>
-          <a:fontRef idx="minor">
-            <a:schemeClr val="lt1"/>
-          </a:fontRef>
-        </p:style>
-        <p:txBody>
-          <a:bodyPr wrap="square" lIns="91440" tIns="36576" rIns="91440" bIns="36576" rtlCol="0" anchor="ctr"/>
-          <a:lstStyle/>
-          <a:p>
-            <a:pPr algn="l"/>
-            <a:r>
-              <a:rPr sz="1050" b="0">
-                <a:solidFill>
-                  <a:srgbClr val="3a3a3a"/>
-                </a:solidFill>
-                <a:latin typeface="Arial"/>
-              </a:rPr>
-              <a:t>3,662</a:t>
-            </a:r>
-          </a:p>
-        </p:txBody>
-      </p:sp>
-      <p:sp>
-        <p:nvSpPr>
-          <p:cNvPr id="216" name="D26.85"/>
-          <p:cNvSpPr/>
-          <p:nvPr/>
-        </p:nvSpPr>
-        <p:spPr>
-          <a:xfrm>
-            <a:off x="6263640" y="2761488"/>
-            <a:ext cx="2377440" cy="512064"/>
-          </a:xfrm>
-          <a:prstGeom prst="roundRect">
-            <a:avLst/>
-          </a:prstGeom>
-          <a:solidFill>
-            <a:srgbClr val="FFFFFF"/>
-          </a:solidFill>
-          <a:ln w="9525">
-            <a:solidFill>
-              <a:srgbClr val="CDD2D7"/>
-            </a:solidFill>
-          </a:ln>
-        </p:spPr>
-        <p:style>
-          <a:lnRef idx="1">
-            <a:schemeClr val="accent1"/>
-          </a:lnRef>
-          <a:fillRef idx="3">
-            <a:schemeClr val="accent1"/>
-          </a:fillRef>
-          <a:effectRef idx="2">
-            <a:schemeClr val="accent1"/>
-          </a:effectRef>
-          <a:fontRef idx="minor">
-            <a:schemeClr val="lt1"/>
-          </a:fontRef>
-        </p:style>
-        <p:txBody>
-          <a:bodyPr wrap="square" lIns="91440" tIns="36576" rIns="91440" bIns="36576" rtlCol="0" anchor="ctr"/>
-          <a:lstStyle/>
-          <a:p>
-            <a:pPr algn="l"/>
-            <a:r>
-              <a:rPr sz="1050" b="0">
-                <a:solidFill>
-                  <a:srgbClr val="3a3a3a"/>
-                </a:solidFill>
-                <a:latin typeface="Arial"/>
-              </a:rPr>
-              <a:t>Never used for training or selection</a:t>
-            </a:r>
-          </a:p>
-        </p:txBody>
-      </p:sp>
-      <p:sp>
-        <p:nvSpPr>
-          <p:cNvPr id="217" name="Model"/>
-          <p:cNvSpPr/>
-          <p:nvPr/>
-        </p:nvSpPr>
-        <p:spPr>
-          <a:xfrm>
-            <a:off x="502920" y="3429000"/>
-            <a:ext cx="3977639" cy="777240"/>
-          </a:xfrm>
-          <a:prstGeom prst="roundRect">
-            <a:avLst/>
-          </a:prstGeom>
-          <a:solidFill>
-            <a:srgbClr val="E4ECF6"/>
-          </a:solidFill>
-          <a:ln w="9525">
-            <a:solidFill>
-              <a:srgbClr val="BCCFE4"/>
-            </a:solidFill>
-          </a:ln>
-        </p:spPr>
-        <p:style>
-          <a:lnRef idx="1">
-            <a:schemeClr val="accent1"/>
-          </a:lnRef>
-          <a:fillRef idx="3">
-            <a:schemeClr val="accent1"/>
-          </a:fillRef>
-          <a:effectRef idx="2">
-            <a:schemeClr val="accent1"/>
-          </a:effectRef>
-          <a:fontRef idx="minor">
-            <a:schemeClr val="lt1"/>
-          </a:fontRef>
-        </p:style>
-        <p:txBody>
-          <a:bodyPr wrap="square" lIns="91440" tIns="36576" rIns="91440" bIns="36576" rtlCol="0" anchor="ctr"/>
-          <a:lstStyle/>
-          <a:p>
-            <a:pPr algn="l"/>
-            <a:r>
-              <a:rPr sz="1100" b="1">
-                <a:solidFill>
-                  <a:srgbClr val="121212"/>
-                </a:solidFill>
-                <a:latin typeface="Arial"/>
-              </a:rPr>
-              <a:t>Model and training</a:t>
-            </a:r>
-          </a:p>
-          <a:p>
-            <a:pPr algn="l"/>
-            <a:r>
-              <a:rPr sz="1050" b="0">
-                <a:solidFill>
-                  <a:srgbClr val="3a3a3a"/>
-                </a:solidFill>
-                <a:latin typeface="Arial"/>
-              </a:rPr>
-              <a:t>EfficientNet-B0, 512 px, 3 seeds, Kaggle GPU</a:t>
-            </a:r>
-          </a:p>
-        </p:txBody>
-      </p:sp>
-      <p:sp>
-        <p:nvSpPr>
-          <p:cNvPr id="218" name="Calib"/>
-          <p:cNvSpPr/>
-          <p:nvPr/>
-        </p:nvSpPr>
-        <p:spPr>
-          <a:xfrm>
-            <a:off x="4663440" y="3429000"/>
-            <a:ext cx="3977639" cy="777240"/>
-          </a:xfrm>
-          <a:prstGeom prst="roundRect">
-            <a:avLst/>
-          </a:prstGeom>
-          <a:solidFill>
-            <a:srgbClr val="E4ECF6"/>
-          </a:solidFill>
-          <a:ln w="9525">
-            <a:solidFill>
-              <a:srgbClr val="BCCFE4"/>
-            </a:solidFill>
-          </a:ln>
-        </p:spPr>
-        <p:style>
-          <a:lnRef idx="1">
-            <a:schemeClr val="accent1"/>
-          </a:lnRef>
-          <a:fillRef idx="3">
-            <a:schemeClr val="accent1"/>
-          </a:fillRef>
-          <a:effectRef idx="2">
-            <a:schemeClr val="accent1"/>
-          </a:effectRef>
-          <a:fontRef idx="minor">
-            <a:schemeClr val="lt1"/>
-          </a:fontRef>
-        </p:style>
-        <p:txBody>
-          <a:bodyPr wrap="square" lIns="91440" tIns="36576" rIns="91440" bIns="36576" rtlCol="0" anchor="ctr"/>
-          <a:lstStyle/>
-          <a:p>
-            <a:pPr algn="l"/>
-            <a:r>
-              <a:rPr sz="1100" b="1">
-                <a:solidFill>
-                  <a:srgbClr val="121212"/>
-                </a:solidFill>
-                <a:latin typeface="Arial"/>
-              </a:rPr>
-              <a:t>Calibration</a:t>
-            </a:r>
-          </a:p>
-          <a:p>
-            <a:pPr algn="l"/>
-            <a:r>
-              <a:rPr sz="1050" b="0">
-                <a:solidFill>
-                  <a:srgbClr val="3a3a3a"/>
-                </a:solidFill>
-                <a:latin typeface="Arial"/>
-              </a:rPr>
-              <a:t>Temperature and prior shift on validation; threshold at specificity 0.90</a:t>
-            </a:r>
-          </a:p>
-        </p:txBody>
-      </p:sp>
-      <p:sp>
-        <p:nvSpPr>
-          <p:cNvPr id="219" name="Banner"/>
+          <p:cNvPr id="211" name="Banner"/>
           <p:cNvSpPr/>
           <p:nvPr/>
         </p:nvSpPr>
@@ -22074,7 +21657,7 @@
                 </a:solidFill>
                 <a:latin typeface="Arial"/>
               </a:rPr>
-              <a:t>Splits are frozen files; test sets are opened only through a declared analysis.</a:t>
+              <a:t>Not a new network: the design and the evidence are the contribution.</a:t>
             </a:r>
           </a:p>
         </p:txBody>
@@ -22132,7 +21715,7 @@
                 </a:solidFill>
                 <a:latin typeface="Arial"/>
               </a:rPr>
-              <a:t>Next Steps</a:t>
+              <a:t>Datasets and Experimental Setup</a:t>
             </a:r>
           </a:p>
         </p:txBody>
@@ -22167,7 +21750,7 @@
                 </a:solidFill>
                 <a:latin typeface="Arial"/>
               </a:rPr>
-              <a:t>What is planned</a:t>
+              <a:t>Three sources, frozen splits</a:t>
             </a:r>
           </a:p>
         </p:txBody>
@@ -22209,14 +21792,14 @@
       </p:sp>
       <p:sp>
         <p:nvSpPr>
-          <p:cNvPr id="201" name="Steps"/>
+          <p:cNvPr id="201" name="Bullets"/>
           <p:cNvSpPr/>
           <p:nvPr/>
         </p:nvSpPr>
         <p:spPr>
           <a:xfrm>
             <a:off x="502920" y="1280160"/>
-            <a:ext cx="8138160" cy="2377440"/>
+            <a:ext cx="8138160" cy="2926080"/>
           </a:xfrm>
           <a:prstGeom prst="roundRect">
             <a:avLst>
@@ -22250,117 +21833,128 @@
           <a:bodyPr wrap="square" lIns="91440" tIns="36576" rIns="91440" bIns="36576" rtlCol="0" anchor="ctr"/>
           <a:lstStyle/>
           <a:p>
-            <a:pPr algn="l"/>
+            <a:pPr algn="l">
+              <a:spcAft>
+                <a:spcPts val="900"/>
+              </a:spcAft>
+            </a:pPr>
             <a:r>
-              <a:rPr sz="1600" b="0">
-                <a:solidFill>
-                  <a:srgbClr val="3a3a3a"/>
+              <a:rPr sz="1500" b="1">
+                <a:solidFill>
+                  <a:srgbClr val="121212"/>
                 </a:solidFill>
                 <a:latin typeface="Arial"/>
               </a:rPr>
-              <a:t>• Train the three data arms with several seeds on frozen patient-level splits</a:t>
+              <a:t>• DDR: </a:t>
+            </a:r>
+            <a:r>
+              <a:rPr sz="1400" b="0">
+                <a:solidFill>
+                  <a:srgbClr val="3a3a3a"/>
+                </a:solidFill>
+                <a:latin typeface="Arial"/>
+              </a:rPr>
+              <a:t>12,522 images, random 60/20/20 split (patient IDs not available)</a:t>
             </a:r>
           </a:p>
           <a:p>
-            <a:pPr algn="l"/>
+            <a:pPr algn="l">
+              <a:spcAft>
+                <a:spcPts val="900"/>
+              </a:spcAft>
+            </a:pPr>
             <a:r>
-              <a:rPr sz="1600" b="0">
-                <a:solidFill>
-                  <a:srgbClr val="3a3a3a"/>
+              <a:rPr sz="1500" b="1">
+                <a:solidFill>
+                  <a:srgbClr val="121212"/>
                 </a:solidFill>
                 <a:latin typeface="Arial"/>
               </a:rPr>
-              <a:t>• Compare sampler, loss and augmentation methods one at a time</a:t>
+              <a:t>• EyePACS: </a:t>
+            </a:r>
+            <a:r>
+              <a:rPr sz="1400" b="0">
+                <a:solidFill>
+                  <a:srgbClr val="3a3a3a"/>
+                </a:solidFill>
+                <a:latin typeface="Arial"/>
+              </a:rPr>
+              <a:t>35,108 images, split by patient 70/15/15; held-out test</a:t>
             </a:r>
           </a:p>
           <a:p>
-            <a:pPr algn="l"/>
+            <a:pPr algn="l">
+              <a:spcAft>
+                <a:spcPts val="900"/>
+              </a:spcAft>
+            </a:pPr>
             <a:r>
-              <a:rPr sz="1600" b="0">
-                <a:solidFill>
-                  <a:srgbClr val="3a3a3a"/>
+              <a:rPr sz="1500" b="1">
+                <a:solidFill>
+                  <a:srgbClr val="121212"/>
                 </a:solidFill>
                 <a:latin typeface="Arial"/>
               </a:rPr>
-              <a:t>• Test on held-out EyePACS patients and APTOS, with 95% confidence intervals</a:t>
+              <a:t>• APTOS: </a:t>
+            </a:r>
+            <a:r>
+              <a:rPr sz="1400" b="0">
+                <a:solidFill>
+                  <a:srgbClr val="3a3a3a"/>
+                </a:solidFill>
+                <a:latin typeface="Arial"/>
+              </a:rPr>
+              <a:t>3,662 images, external test only, never used for training or selection</a:t>
             </a:r>
           </a:p>
           <a:p>
-            <a:pPr algn="l"/>
+            <a:pPr algn="l">
+              <a:spcAft>
+                <a:spcPts val="900"/>
+              </a:spcAft>
+            </a:pPr>
             <a:r>
-              <a:rPr sz="1600" b="0">
-                <a:solidFill>
-                  <a:srgbClr val="3a3a3a"/>
+              <a:rPr sz="1500" b="1">
+                <a:solidFill>
+                  <a:srgbClr val="121212"/>
                 </a:solidFill>
                 <a:latin typeface="Arial"/>
               </a:rPr>
-              <a:t>• Calibrate probabilities and report sensitivity at a fixed specificity</a:t>
+              <a:t>• Model: </a:t>
+            </a:r>
+            <a:r>
+              <a:rPr sz="1400" b="0">
+                <a:solidFill>
+                  <a:srgbClr val="3a3a3a"/>
+                </a:solidFill>
+                <a:latin typeface="Arial"/>
+              </a:rPr>
+              <a:t>EfficientNet-B0 at 512 px, three seeds, Kaggle GPU</a:t>
             </a:r>
           </a:p>
           <a:p>
-            <a:pPr algn="l"/>
+            <a:pPr algn="l">
+              <a:spcAft>
+                <a:spcPts val="900"/>
+              </a:spcAft>
+            </a:pPr>
             <a:r>
-              <a:rPr sz="1600" b="0">
-                <a:solidFill>
-                  <a:srgbClr val="3a3a3a"/>
+              <a:rPr sz="1500" b="1">
+                <a:solidFill>
+                  <a:srgbClr val="121212"/>
                 </a:solidFill>
                 <a:latin typeface="Arial"/>
               </a:rPr>
-              <a:t>• Finish the literature search and write the thesis</a:t>
+              <a:t>• Rules: </a:t>
             </a:r>
-          </a:p>
-        </p:txBody>
-      </p:sp>
-      <p:sp>
-        <p:nvSpPr>
-          <p:cNvPr id="202" name="Later"/>
-          <p:cNvSpPr/>
-          <p:nvPr/>
-        </p:nvSpPr>
-        <p:spPr>
-          <a:xfrm>
-            <a:off x="502920" y="3703320"/>
-            <a:ext cx="8138160" cy="502920"/>
-          </a:xfrm>
-          <a:prstGeom prst="roundRect">
-            <a:avLst/>
-          </a:prstGeom>
-          <a:solidFill>
-            <a:srgbClr val="E4ECF6"/>
-          </a:solidFill>
-          <a:ln w="9525">
-            <a:solidFill>
-              <a:srgbClr val="BCCFE4"/>
-            </a:solidFill>
-          </a:ln>
-        </p:spPr>
-        <p:style>
-          <a:lnRef idx="1">
-            <a:schemeClr val="accent1"/>
-          </a:lnRef>
-          <a:fillRef idx="3">
-            <a:schemeClr val="accent1"/>
-          </a:fillRef>
-          <a:effectRef idx="2">
-            <a:schemeClr val="accent1"/>
-          </a:effectRef>
-          <a:fontRef idx="minor">
-            <a:schemeClr val="lt1"/>
-          </a:fontRef>
-        </p:style>
-        <p:txBody>
-          <a:bodyPr wrap="square" lIns="91440" tIns="36576" rIns="91440" bIns="36576" rtlCol="0" anchor="ctr"/>
-          <a:lstStyle/>
-          <a:p>
-            <a:pPr algn="l"/>
             <a:r>
-              <a:rPr sz="1100" b="0">
+              <a:rPr sz="1400" b="0">
                 <a:solidFill>
                   <a:srgbClr val="3a3a3a"/>
                 </a:solidFill>
                 <a:latin typeface="Arial"/>
               </a:rPr>
-              <a:t>Later, as an extension: an external check on IDRiD.</a:t>
+              <a:t>splits are frozen files; test sets are opened only through a declared analysis</a:t>
             </a:r>
           </a:p>
         </p:txBody>
@@ -22418,6 +22012,303 @@
                 </a:solidFill>
                 <a:latin typeface="Arial"/>
               </a:rPr>
+              <a:t>Next Steps</a:t>
+            </a:r>
+          </a:p>
+        </p:txBody>
+      </p:sp>
+      <p:sp>
+        <p:nvSpPr>
+          <p:cNvPr id="3" name="TextBox 2"/>
+          <p:cNvSpPr txBox="1"/>
+          <p:nvPr/>
+        </p:nvSpPr>
+        <p:spPr>
+          <a:xfrm>
+            <a:off x="566928" y="932688"/>
+            <a:ext cx="8138160" cy="256032"/>
+          </a:xfrm>
+          <a:prstGeom prst="rect">
+            <a:avLst/>
+          </a:prstGeom>
+          <a:noFill/>
+        </p:spPr>
+        <p:txBody>
+          <a:bodyPr wrap="square" lIns="27432" tIns="18288" rIns="27432" bIns="18288" anchor="t">
+            <a:spAutoFit/>
+          </a:bodyPr>
+          <a:lstStyle/>
+          <a:p>
+            <a:pPr algn="l"/>
+            <a:r>
+              <a:rPr sz="1480" b="1" i="0">
+                <a:solidFill>
+                  <a:srgbClr val="121212"/>
+                </a:solidFill>
+                <a:latin typeface="Arial"/>
+              </a:rPr>
+              <a:t>What is planned</a:t>
+            </a:r>
+          </a:p>
+        </p:txBody>
+      </p:sp>
+      <p:sp>
+        <p:nvSpPr>
+          <p:cNvPr id="25" name="TextBox 24">
+            <a:extLst>
+              <a:ext uri="{FF2B5EF4-FFF2-40B4-BE49-F238E27FC236}">
+                <a16:creationId xmlns:a16="http://schemas.microsoft.com/office/drawing/2014/main" id="{6AB72007-F5D0-AF78-B89C-794457398D1F}"/>
+              </a:ext>
+            </a:extLst>
+          </p:cNvPr>
+          <p:cNvSpPr txBox="1"/>
+          <p:nvPr/>
+        </p:nvSpPr>
+        <p:spPr>
+          <a:xfrm>
+            <a:off x="8801100" y="4792436"/>
+            <a:ext cx="342900" cy="261610"/>
+          </a:xfrm>
+          <a:prstGeom prst="rect">
+            <a:avLst/>
+          </a:prstGeom>
+          <a:noFill/>
+        </p:spPr>
+        <p:txBody>
+          <a:bodyPr wrap="square" rtlCol="0">
+            <a:spAutoFit/>
+          </a:bodyPr>
+          <a:lstStyle/>
+          <a:p>
+            <a:r>
+              <a:rPr lang="en-US" sz="1100" dirty="0"/>
+              <a:t>12</a:t>
+            </a:r>
+          </a:p>
+        </p:txBody>
+      </p:sp>
+      <p:sp>
+        <p:nvSpPr>
+          <p:cNvPr id="201" name="Bullets"/>
+          <p:cNvSpPr/>
+          <p:nvPr/>
+        </p:nvSpPr>
+        <p:spPr>
+          <a:xfrm>
+            <a:off x="502920" y="1280160"/>
+            <a:ext cx="8138160" cy="2926080"/>
+          </a:xfrm>
+          <a:prstGeom prst="roundRect">
+            <a:avLst>
+              <a:gd name="adj" fmla="val 6000"/>
+            </a:avLst>
+          </a:prstGeom>
+          <a:solidFill>
+            <a:srgbClr val="FFFFFF"/>
+          </a:solidFill>
+          <a:ln w="9525">
+            <a:solidFill>
+              <a:srgbClr val="FFFFFF"/>
+            </a:solidFill>
+          </a:ln>
+        </p:spPr>
+        <p:style>
+          <a:lnRef idx="1">
+            <a:schemeClr val="accent1"/>
+          </a:lnRef>
+          <a:fillRef idx="3">
+            <a:schemeClr val="accent1"/>
+          </a:fillRef>
+          <a:effectRef idx="2">
+            <a:schemeClr val="accent1"/>
+          </a:effectRef>
+          <a:fontRef idx="minor">
+            <a:schemeClr val="lt1"/>
+          </a:fontRef>
+        </p:style>
+        <p:txBody>
+          <a:bodyPr wrap="square" lIns="91440" tIns="36576" rIns="91440" bIns="36576" rtlCol="0" anchor="ctr"/>
+          <a:lstStyle/>
+          <a:p>
+            <a:pPr algn="l">
+              <a:spcAft>
+                <a:spcPts val="900"/>
+              </a:spcAft>
+            </a:pPr>
+            <a:r>
+              <a:rPr sz="1500" b="1">
+                <a:solidFill>
+                  <a:srgbClr val="121212"/>
+                </a:solidFill>
+                <a:latin typeface="Arial"/>
+              </a:rPr>
+              <a:t>• Train the three arms: </a:t>
+            </a:r>
+            <a:r>
+              <a:rPr sz="1400" b="0">
+                <a:solidFill>
+                  <a:srgbClr val="3a3a3a"/>
+                </a:solidFill>
+                <a:latin typeface="Arial"/>
+              </a:rPr>
+              <a:t>several seeds on frozen patient-level splits</a:t>
+            </a:r>
+          </a:p>
+          <a:p>
+            <a:pPr algn="l">
+              <a:spcAft>
+                <a:spcPts val="900"/>
+              </a:spcAft>
+            </a:pPr>
+            <a:r>
+              <a:rPr sz="1500" b="1">
+                <a:solidFill>
+                  <a:srgbClr val="121212"/>
+                </a:solidFill>
+                <a:latin typeface="Arial"/>
+              </a:rPr>
+              <a:t>• Compare imbalance methods: </a:t>
+            </a:r>
+            <a:r>
+              <a:rPr sz="1400" b="0">
+                <a:solidFill>
+                  <a:srgbClr val="3a3a3a"/>
+                </a:solidFill>
+                <a:latin typeface="Arial"/>
+              </a:rPr>
+              <a:t>sampler, loss and augmentation, one at a time</a:t>
+            </a:r>
+          </a:p>
+          <a:p>
+            <a:pPr algn="l">
+              <a:spcAft>
+                <a:spcPts val="900"/>
+              </a:spcAft>
+            </a:pPr>
+            <a:r>
+              <a:rPr sz="1500" b="1">
+                <a:solidFill>
+                  <a:srgbClr val="121212"/>
+                </a:solidFill>
+                <a:latin typeface="Arial"/>
+              </a:rPr>
+              <a:t>• Test on unseen sources: </a:t>
+            </a:r>
+            <a:r>
+              <a:rPr sz="1400" b="0">
+                <a:solidFill>
+                  <a:srgbClr val="3a3a3a"/>
+                </a:solidFill>
+                <a:latin typeface="Arial"/>
+              </a:rPr>
+              <a:t>held-out EyePACS patients and APTOS, with 95% confidence intervals</a:t>
+            </a:r>
+          </a:p>
+          <a:p>
+            <a:pPr algn="l">
+              <a:spcAft>
+                <a:spcPts val="900"/>
+              </a:spcAft>
+            </a:pPr>
+            <a:r>
+              <a:rPr sz="1500" b="1">
+                <a:solidFill>
+                  <a:srgbClr val="121212"/>
+                </a:solidFill>
+                <a:latin typeface="Arial"/>
+              </a:rPr>
+              <a:t>• Calibrate and report: </a:t>
+            </a:r>
+            <a:r>
+              <a:rPr sz="1400" b="0">
+                <a:solidFill>
+                  <a:srgbClr val="3a3a3a"/>
+                </a:solidFill>
+                <a:latin typeface="Arial"/>
+              </a:rPr>
+              <a:t>sensitivity at a fixed specificity, per source</a:t>
+            </a:r>
+          </a:p>
+          <a:p>
+            <a:pPr algn="l">
+              <a:spcAft>
+                <a:spcPts val="900"/>
+              </a:spcAft>
+            </a:pPr>
+            <a:r>
+              <a:rPr sz="1500" b="1">
+                <a:solidFill>
+                  <a:srgbClr val="121212"/>
+                </a:solidFill>
+                <a:latin typeface="Arial"/>
+              </a:rPr>
+              <a:t>• Write up: </a:t>
+            </a:r>
+            <a:r>
+              <a:rPr sz="1400" b="0">
+                <a:solidFill>
+                  <a:srgbClr val="3a3a3a"/>
+                </a:solidFill>
+                <a:latin typeface="Arial"/>
+              </a:rPr>
+              <a:t>finish the literature search and the thesis; an IDRiD check is a later extension</a:t>
+            </a:r>
+          </a:p>
+        </p:txBody>
+      </p:sp>
+    </p:spTree>
+  </p:cSld>
+  <p:clrMapOvr>
+    <a:masterClrMapping/>
+  </p:clrMapOvr>
+</p:sld>
+</file>
+
+<file path=ppt/slides/slide13.xml><?xml version="1.0" encoding="utf-8"?>
+<p:sld xmlns:a="http://schemas.openxmlformats.org/drawingml/2006/main" xmlns:r="http://schemas.openxmlformats.org/officeDocument/2006/relationships" xmlns:p="http://schemas.openxmlformats.org/presentationml/2006/main">
+  <p:cSld>
+    <p:spTree>
+      <p:nvGrpSpPr>
+        <p:cNvPr id="1" name=""/>
+        <p:cNvGrpSpPr/>
+        <p:nvPr/>
+      </p:nvGrpSpPr>
+      <p:grpSpPr>
+        <a:xfrm>
+          <a:off x="0" y="0"/>
+          <a:ext cx="0" cy="0"/>
+          <a:chOff x="0" y="0"/>
+          <a:chExt cx="0" cy="0"/>
+        </a:xfrm>
+      </p:grpSpPr>
+      <p:sp>
+        <p:nvSpPr>
+          <p:cNvPr id="2" name="Title 1"/>
+          <p:cNvSpPr>
+            <a:spLocks noGrp="1"/>
+          </p:cNvSpPr>
+          <p:nvPr>
+            <p:ph type="title"/>
+          </p:nvPr>
+        </p:nvSpPr>
+        <p:spPr>
+          <a:xfrm>
+            <a:off x="713232" y="283464"/>
+            <a:ext cx="7909560" cy="502920"/>
+          </a:xfrm>
+        </p:spPr>
+        <p:txBody>
+          <a:bodyPr/>
+          <a:lstStyle/>
+          <a:p>
+            <a:pPr algn="l"/>
+            <a:r>
+              <a:rPr sz="2200" b="1">
+                <a:solidFill>
+                  <a:srgbClr val="121212"/>
+                </a:solidFill>
+                <a:latin typeface="Arial"/>
+              </a:rPr>
               <a:t>References</a:t>
             </a:r>
           </a:p>
@@ -22651,6 +22542,44 @@
                 <a:latin typeface="Arial"/>
               </a:rPr>
               <a:t>• Tan, M., &amp; Le, Q. EfficientNet: Rethinking model scaling for convolutional neural networks. ICML, 2019.</a:t>
+            </a:r>
+          </a:p>
+          <a:p>
+            <a:pPr algn="l">
+              <a:lnSpc>
+                <a:spcPct val="105000"/>
+              </a:lnSpc>
+              <a:spcAft>
+                <a:spcPts val="400"/>
+              </a:spcAft>
+            </a:pPr>
+            <a:r>
+              <a:rPr sz="919" dirty="0">
+                <a:solidFill>
+                  <a:srgbClr val="121212"/>
+                </a:solidFill>
+                <a:latin typeface="Arial"/>
+              </a:rPr>
+              <a:t>• From Retinal Pixels to Patients: Evolution of Deep Learning Research in Diabetic Retinopathy Screening. arXiv:2511.11065, 2025.</a:t>
+            </a:r>
+          </a:p>
+          <a:p>
+            <a:pPr algn="l">
+              <a:lnSpc>
+                <a:spcPct val="105000"/>
+              </a:lnSpc>
+              <a:spcAft>
+                <a:spcPts val="400"/>
+              </a:spcAft>
+            </a:pPr>
+            <a:r>
+              <a:rPr sz="919" dirty="0">
+                <a:solidFill>
+                  <a:srgbClr val="121212"/>
+                </a:solidFill>
+                <a:latin typeface="Arial"/>
+              </a:rPr>
+              <a:t>• Cross-camera external validation for artificial intelligence software in diagnosis of diabetic retinopathy. PMC8926465, 2022.</a:t>
             </a:r>
           </a:p>
         </p:txBody>
@@ -22685,7 +22614,7 @@
           <a:p>
             <a:r>
               <a:rPr lang="en-US" sz="1100" dirty="0"/>
-              <a:t>12</a:t>
+              <a:t>13</a:t>
             </a:r>
           </a:p>
         </p:txBody>
@@ -22698,7 +22627,7 @@
 </p:sld>
 </file>
 
-<file path=ppt/slides/slide13.xml><?xml version="1.0" encoding="utf-8"?>
+<file path=ppt/slides/slide14.xml><?xml version="1.0" encoding="utf-8"?>
 <p:sld xmlns:a="http://schemas.openxmlformats.org/drawingml/2006/main" xmlns:r="http://schemas.openxmlformats.org/officeDocument/2006/relationships" xmlns:p="http://schemas.openxmlformats.org/presentationml/2006/main">
   <p:cSld>
     <p:spTree>
@@ -23683,24 +23612,26 @@
       </p:sp>
       <p:sp>
         <p:nvSpPr>
-          <p:cNvPr id="201" name="Path 1"/>
+          <p:cNvPr id="201" name="Bullets"/>
           <p:cNvSpPr/>
           <p:nvPr/>
         </p:nvSpPr>
         <p:spPr>
           <a:xfrm>
-            <a:off x="640080" y="1325880"/>
-            <a:ext cx="1737360" cy="685800"/>
+            <a:off x="502920" y="1280160"/>
+            <a:ext cx="8138160" cy="2926080"/>
           </a:xfrm>
           <a:prstGeom prst="roundRect">
-            <a:avLst/>
+            <a:avLst>
+              <a:gd name="adj" fmla="val 6000"/>
+            </a:avLst>
           </a:prstGeom>
           <a:solidFill>
-            <a:srgbClr val="BCCFE4"/>
+            <a:srgbClr val="FFFFFF"/>
           </a:solidFill>
           <a:ln w="9525">
             <a:solidFill>
-              <a:srgbClr val="BCCFE4"/>
+              <a:srgbClr val="FFFFFF"/>
             </a:solidFill>
           </a:ln>
         </p:spPr>
@@ -23722,570 +23653,103 @@
           <a:bodyPr wrap="square" lIns="91440" tIns="36576" rIns="91440" bIns="36576" rtlCol="0" anchor="ctr"/>
           <a:lstStyle/>
           <a:p>
-            <a:pPr algn="ctr"/>
+            <a:pPr algn="l">
+              <a:spcAft>
+                <a:spcPts val="900"/>
+              </a:spcAft>
+            </a:pPr>
             <a:r>
-              <a:rPr sz="1100" b="1">
+              <a:rPr sz="1500" b="1">
                 <a:solidFill>
                   <a:srgbClr val="121212"/>
                 </a:solidFill>
                 <a:latin typeface="Arial"/>
               </a:rPr>
-              <a:t>Diabetes</a:t>
+              <a:t>• Coverage gap: </a:t>
+            </a:r>
+            <a:r>
+              <a:rPr sz="1400" b="0">
+                <a:solidFill>
+                  <a:srgbClr val="3a3a3a"/>
+                </a:solidFill>
+                <a:latin typeface="Arial"/>
+              </a:rPr>
+              <a:t>about 60% of people with diabetes do not get an annual eye exam</a:t>
             </a:r>
           </a:p>
           <a:p>
-            <a:pPr algn="ctr"/>
+            <a:pPr algn="l">
+              <a:spcAft>
+                <a:spcPts val="900"/>
+              </a:spcAft>
+            </a:pPr>
             <a:r>
-              <a:rPr sz="1100" b="1">
+              <a:rPr sz="1500" b="1">
                 <a:solidFill>
                   <a:srgbClr val="121212"/>
                 </a:solidFill>
                 <a:latin typeface="Arial"/>
               </a:rPr>
-              <a:t>patient</a:t>
+              <a:t>• Capacity gap: </a:t>
             </a:r>
-          </a:p>
-        </p:txBody>
-      </p:sp>
-      <p:sp>
-        <p:nvSpPr>
-          <p:cNvPr id="202" name="Path arrow 1"/>
-          <p:cNvSpPr/>
-          <p:nvPr/>
-        </p:nvSpPr>
-        <p:spPr>
-          <a:xfrm>
-            <a:off x="2404872" y="1673352"/>
-            <a:ext cx="219456" cy="0"/>
-          </a:xfrm>
-          <a:prstGeom prst="line">
-            <a:avLst/>
-          </a:prstGeom>
-          <a:noFill/>
-          <a:ln w="25400">
-            <a:solidFill>
-              <a:srgbClr val="555555"/>
-            </a:solidFill>
-            <a:prstDash val="solid"/>
-            <a:tailEnd type="triangle"/>
-          </a:ln>
-        </p:spPr>
-        <p:txBody>
-          <a:bodyPr/>
-          <a:lstStyle/>
-          <a:p>
-            <a:endParaRPr sz="1050"/>
-          </a:p>
-        </p:txBody>
-      </p:sp>
-      <p:sp>
-        <p:nvSpPr>
-          <p:cNvPr id="203" name="Path 2"/>
-          <p:cNvSpPr/>
-          <p:nvPr/>
-        </p:nvSpPr>
-        <p:spPr>
-          <a:xfrm>
-            <a:off x="2651760" y="1325880"/>
-            <a:ext cx="1737360" cy="685800"/>
-          </a:xfrm>
-          <a:prstGeom prst="roundRect">
-            <a:avLst/>
-          </a:prstGeom>
-          <a:solidFill>
-            <a:srgbClr val="BCCFE4"/>
-          </a:solidFill>
-          <a:ln w="9525">
-            <a:solidFill>
-              <a:srgbClr val="BCCFE4"/>
-            </a:solidFill>
-          </a:ln>
-        </p:spPr>
-        <p:style>
-          <a:lnRef idx="1">
-            <a:schemeClr val="accent1"/>
-          </a:lnRef>
-          <a:fillRef idx="3">
-            <a:schemeClr val="accent1"/>
-          </a:fillRef>
-          <a:effectRef idx="2">
-            <a:schemeClr val="accent1"/>
-          </a:effectRef>
-          <a:fontRef idx="minor">
-            <a:schemeClr val="lt1"/>
-          </a:fontRef>
-        </p:style>
-        <p:txBody>
-          <a:bodyPr wrap="square" lIns="91440" tIns="36576" rIns="91440" bIns="36576" rtlCol="0" anchor="ctr"/>
-          <a:lstStyle/>
-          <a:p>
-            <a:pPr algn="ctr"/>
             <a:r>
-              <a:rPr sz="1100" b="1">
-                <a:solidFill>
-                  <a:srgbClr val="121212"/>
+              <a:rPr sz="1400" b="0">
+                <a:solidFill>
+                  <a:srgbClr val="3a3a3a"/>
                 </a:solidFill>
                 <a:latin typeface="Arial"/>
               </a:rPr>
-              <a:t>Annual eye</a:t>
+              <a:t>more images need more grading time and specialist review</a:t>
             </a:r>
           </a:p>
           <a:p>
-            <a:pPr algn="ctr"/>
+            <a:pPr algn="l">
+              <a:spcAft>
+                <a:spcPts val="900"/>
+              </a:spcAft>
+            </a:pPr>
             <a:r>
-              <a:rPr sz="1100" b="1">
+              <a:rPr sz="1500" b="1">
                 <a:solidFill>
                   <a:srgbClr val="121212"/>
                 </a:solidFill>
                 <a:latin typeface="Arial"/>
               </a:rPr>
-              <a:t>exam / photo</a:t>
+              <a:t>• Safety gap: </a:t>
             </a:r>
-          </a:p>
-        </p:txBody>
-      </p:sp>
-      <p:sp>
-        <p:nvSpPr>
-          <p:cNvPr id="204" name="Path arrow 2"/>
-          <p:cNvSpPr/>
-          <p:nvPr/>
-        </p:nvSpPr>
-        <p:spPr>
-          <a:xfrm>
-            <a:off x="4416552" y="1673352"/>
-            <a:ext cx="219456" cy="0"/>
-          </a:xfrm>
-          <a:prstGeom prst="line">
-            <a:avLst/>
-          </a:prstGeom>
-          <a:noFill/>
-          <a:ln w="25400">
-            <a:solidFill>
-              <a:srgbClr val="555555"/>
-            </a:solidFill>
-            <a:prstDash val="solid"/>
-            <a:tailEnd type="triangle"/>
-          </a:ln>
-        </p:spPr>
-        <p:txBody>
-          <a:bodyPr/>
-          <a:lstStyle/>
-          <a:p>
-            <a:endParaRPr sz="1050"/>
-          </a:p>
-        </p:txBody>
-      </p:sp>
-      <p:sp>
-        <p:nvSpPr>
-          <p:cNvPr id="205" name="Path 3"/>
-          <p:cNvSpPr/>
-          <p:nvPr/>
-        </p:nvSpPr>
-        <p:spPr>
-          <a:xfrm>
-            <a:off x="4663440" y="1325880"/>
-            <a:ext cx="1737360" cy="685800"/>
-          </a:xfrm>
-          <a:prstGeom prst="roundRect">
-            <a:avLst/>
-          </a:prstGeom>
-          <a:solidFill>
-            <a:srgbClr val="BCCFE4"/>
-          </a:solidFill>
-          <a:ln w="9525">
-            <a:solidFill>
-              <a:srgbClr val="BCCFE4"/>
-            </a:solidFill>
-          </a:ln>
-        </p:spPr>
-        <p:style>
-          <a:lnRef idx="1">
-            <a:schemeClr val="accent1"/>
-          </a:lnRef>
-          <a:fillRef idx="3">
-            <a:schemeClr val="accent1"/>
-          </a:fillRef>
-          <a:effectRef idx="2">
-            <a:schemeClr val="accent1"/>
-          </a:effectRef>
-          <a:fontRef idx="minor">
-            <a:schemeClr val="lt1"/>
-          </a:fontRef>
-        </p:style>
-        <p:txBody>
-          <a:bodyPr wrap="square" lIns="91440" tIns="36576" rIns="91440" bIns="36576" rtlCol="0" anchor="ctr"/>
-          <a:lstStyle/>
-          <a:p>
-            <a:pPr algn="ctr"/>
             <a:r>
-              <a:rPr sz="1100" b="1">
-                <a:solidFill>
-                  <a:srgbClr val="121212"/>
+              <a:rPr sz="1400" b="0">
+                <a:solidFill>
+                  <a:srgbClr val="3a3a3a"/>
                 </a:solidFill>
                 <a:latin typeface="Arial"/>
               </a:rPr>
-              <a:t>Human grading</a:t>
+              <a:t>early disease has no symptoms, so late detection lets preventable vision loss progress</a:t>
             </a:r>
           </a:p>
           <a:p>
-            <a:pPr algn="ctr"/>
+            <a:pPr algn="l">
+              <a:spcAft>
+                <a:spcPts val="900"/>
+              </a:spcAft>
+            </a:pPr>
             <a:r>
-              <a:rPr sz="1100" b="1">
+              <a:rPr sz="1500" b="1">
                 <a:solidFill>
                   <a:srgbClr val="121212"/>
                 </a:solidFill>
                 <a:latin typeface="Arial"/>
               </a:rPr>
-              <a:t>queue</a:t>
+              <a:t>• The need: </a:t>
             </a:r>
-          </a:p>
-        </p:txBody>
-      </p:sp>
-      <p:sp>
-        <p:nvSpPr>
-          <p:cNvPr id="206" name="Path arrow 3"/>
-          <p:cNvSpPr/>
-          <p:nvPr/>
-        </p:nvSpPr>
-        <p:spPr>
-          <a:xfrm>
-            <a:off x="6428231" y="1673352"/>
-            <a:ext cx="219456" cy="0"/>
-          </a:xfrm>
-          <a:prstGeom prst="line">
-            <a:avLst/>
-          </a:prstGeom>
-          <a:noFill/>
-          <a:ln w="25400">
-            <a:solidFill>
-              <a:srgbClr val="555555"/>
-            </a:solidFill>
-            <a:prstDash val="solid"/>
-            <a:tailEnd type="triangle"/>
-          </a:ln>
-        </p:spPr>
-        <p:txBody>
-          <a:bodyPr/>
-          <a:lstStyle/>
-          <a:p>
-            <a:endParaRPr sz="1050"/>
-          </a:p>
-        </p:txBody>
-      </p:sp>
-      <p:sp>
-        <p:nvSpPr>
-          <p:cNvPr id="207" name="Path 4"/>
-          <p:cNvSpPr/>
-          <p:nvPr/>
-        </p:nvSpPr>
-        <p:spPr>
-          <a:xfrm>
-            <a:off x="6675120" y="1325880"/>
-            <a:ext cx="1737360" cy="685800"/>
-          </a:xfrm>
-          <a:prstGeom prst="roundRect">
-            <a:avLst/>
-          </a:prstGeom>
-          <a:solidFill>
-            <a:srgbClr val="BCCFE4"/>
-          </a:solidFill>
-          <a:ln w="9525">
-            <a:solidFill>
-              <a:srgbClr val="BCCFE4"/>
-            </a:solidFill>
-          </a:ln>
-        </p:spPr>
-        <p:style>
-          <a:lnRef idx="1">
-            <a:schemeClr val="accent1"/>
-          </a:lnRef>
-          <a:fillRef idx="3">
-            <a:schemeClr val="accent1"/>
-          </a:fillRef>
-          <a:effectRef idx="2">
-            <a:schemeClr val="accent1"/>
-          </a:effectRef>
-          <a:fontRef idx="minor">
-            <a:schemeClr val="lt1"/>
-          </a:fontRef>
-        </p:style>
-        <p:txBody>
-          <a:bodyPr wrap="square" lIns="91440" tIns="36576" rIns="91440" bIns="36576" rtlCol="0" anchor="ctr"/>
-          <a:lstStyle/>
-          <a:p>
-            <a:pPr algn="ctr"/>
             <a:r>
-              <a:rPr sz="1100" b="1">
-                <a:solidFill>
-                  <a:srgbClr val="121212"/>
+              <a:rPr sz="1400" b="0">
+                <a:solidFill>
+                  <a:srgbClr val="3a3a3a"/>
                 </a:solidFill>
                 <a:latin typeface="Arial"/>
               </a:rPr>
-              <a:t>Referral /</a:t>
-            </a:r>
-          </a:p>
-          <a:p>
-            <a:pPr algn="ctr"/>
-            <a:r>
-              <a:rPr sz="1100" b="1">
-                <a:solidFill>
-                  <a:srgbClr val="121212"/>
-                </a:solidFill>
-                <a:latin typeface="Arial"/>
-              </a:rPr>
-              <a:t>treatment</a:t>
-            </a:r>
-          </a:p>
-        </p:txBody>
-      </p:sp>
-      <p:sp>
-        <p:nvSpPr>
-          <p:cNvPr id="208" name="Gap 1"/>
-          <p:cNvSpPr/>
-          <p:nvPr/>
-        </p:nvSpPr>
-        <p:spPr>
-          <a:xfrm>
-            <a:off x="502920" y="2331720"/>
-            <a:ext cx="2606040" cy="1554480"/>
-          </a:xfrm>
-          <a:prstGeom prst="roundRect">
-            <a:avLst/>
-          </a:prstGeom>
-          <a:solidFill>
-            <a:srgbClr val="FFE9D9"/>
-          </a:solidFill>
-          <a:ln w="9525">
-            <a:solidFill>
-              <a:srgbClr val="EB6834"/>
-            </a:solidFill>
-          </a:ln>
-        </p:spPr>
-        <p:style>
-          <a:lnRef idx="1">
-            <a:schemeClr val="accent1"/>
-          </a:lnRef>
-          <a:fillRef idx="3">
-            <a:schemeClr val="accent1"/>
-          </a:fillRef>
-          <a:effectRef idx="2">
-            <a:schemeClr val="accent1"/>
-          </a:effectRef>
-          <a:fontRef idx="minor">
-            <a:schemeClr val="lt1"/>
-          </a:fontRef>
-        </p:style>
-        <p:txBody>
-          <a:bodyPr wrap="square" lIns="91440" tIns="36576" rIns="91440" bIns="36576" rtlCol="0" anchor="ctr"/>
-          <a:lstStyle/>
-          <a:p>
-            <a:pPr algn="l"/>
-            <a:r>
-              <a:rPr sz="1200" b="1">
-                <a:solidFill>
-                  <a:srgbClr val="121212"/>
-                </a:solidFill>
-                <a:latin typeface="Arial"/>
-              </a:rPr>
-              <a:t>Coverage gap</a:t>
-            </a:r>
-          </a:p>
-          <a:p>
-            <a:pPr algn="l"/>
-            <a:r>
-              <a:rPr sz="1100" b="0">
-                <a:solidFill>
-                  <a:srgbClr val="3a3a3a"/>
-                </a:solidFill>
-                <a:latin typeface="Arial"/>
-              </a:rPr>
-              <a:t>60% do not get annual eye exams.</a:t>
-            </a:r>
-          </a:p>
-        </p:txBody>
-      </p:sp>
-      <p:sp>
-        <p:nvSpPr>
-          <p:cNvPr id="209" name="Gap 2"/>
-          <p:cNvSpPr/>
-          <p:nvPr/>
-        </p:nvSpPr>
-        <p:spPr>
-          <a:xfrm>
-            <a:off x="3273552" y="2331720"/>
-            <a:ext cx="2606040" cy="1554480"/>
-          </a:xfrm>
-          <a:prstGeom prst="roundRect">
-            <a:avLst/>
-          </a:prstGeom>
-          <a:solidFill>
-            <a:srgbClr val="FFE9D9"/>
-          </a:solidFill>
-          <a:ln w="9525">
-            <a:solidFill>
-              <a:srgbClr val="EB6834"/>
-            </a:solidFill>
-          </a:ln>
-        </p:spPr>
-        <p:style>
-          <a:lnRef idx="1">
-            <a:schemeClr val="accent1"/>
-          </a:lnRef>
-          <a:fillRef idx="3">
-            <a:schemeClr val="accent1"/>
-          </a:fillRef>
-          <a:effectRef idx="2">
-            <a:schemeClr val="accent1"/>
-          </a:effectRef>
-          <a:fontRef idx="minor">
-            <a:schemeClr val="lt1"/>
-          </a:fontRef>
-        </p:style>
-        <p:txBody>
-          <a:bodyPr wrap="square" lIns="91440" tIns="36576" rIns="91440" bIns="36576" rtlCol="0" anchor="ctr"/>
-          <a:lstStyle/>
-          <a:p>
-            <a:pPr algn="l"/>
-            <a:r>
-              <a:rPr sz="1200" b="1">
-                <a:solidFill>
-                  <a:srgbClr val="121212"/>
-                </a:solidFill>
-                <a:latin typeface="Arial"/>
-              </a:rPr>
-              <a:t>Capacity gap</a:t>
-            </a:r>
-          </a:p>
-          <a:p>
-            <a:pPr algn="l"/>
-            <a:r>
-              <a:rPr sz="1100" b="0">
-                <a:solidFill>
-                  <a:srgbClr val="3a3a3a"/>
-                </a:solidFill>
-                <a:latin typeface="Arial"/>
-              </a:rPr>
-              <a:t>More images need more grading time and specialist review.</a:t>
-            </a:r>
-          </a:p>
-        </p:txBody>
-      </p:sp>
-      <p:sp>
-        <p:nvSpPr>
-          <p:cNvPr id="210" name="Gap 3"/>
-          <p:cNvSpPr/>
-          <p:nvPr/>
-        </p:nvSpPr>
-        <p:spPr>
-          <a:xfrm>
-            <a:off x="6044183" y="2331720"/>
-            <a:ext cx="2606040" cy="1554480"/>
-          </a:xfrm>
-          <a:prstGeom prst="roundRect">
-            <a:avLst/>
-          </a:prstGeom>
-          <a:solidFill>
-            <a:srgbClr val="FFE9D9"/>
-          </a:solidFill>
-          <a:ln w="9525">
-            <a:solidFill>
-              <a:srgbClr val="EB6834"/>
-            </a:solidFill>
-          </a:ln>
-        </p:spPr>
-        <p:style>
-          <a:lnRef idx="1">
-            <a:schemeClr val="accent1"/>
-          </a:lnRef>
-          <a:fillRef idx="3">
-            <a:schemeClr val="accent1"/>
-          </a:fillRef>
-          <a:effectRef idx="2">
-            <a:schemeClr val="accent1"/>
-          </a:effectRef>
-          <a:fontRef idx="minor">
-            <a:schemeClr val="lt1"/>
-          </a:fontRef>
-        </p:style>
-        <p:txBody>
-          <a:bodyPr wrap="square" lIns="91440" tIns="36576" rIns="91440" bIns="36576" rtlCol="0" anchor="ctr"/>
-          <a:lstStyle/>
-          <a:p>
-            <a:pPr algn="l"/>
-            <a:r>
-              <a:rPr sz="1200" b="1">
-                <a:solidFill>
-                  <a:srgbClr val="121212"/>
-                </a:solidFill>
-                <a:latin typeface="Arial"/>
-              </a:rPr>
-              <a:t>Safety gap</a:t>
-            </a:r>
-          </a:p>
-          <a:p>
-            <a:pPr algn="l"/>
-            <a:r>
-              <a:rPr sz="1100" b="0">
-                <a:solidFill>
-                  <a:srgbClr val="3a3a3a"/>
-                </a:solidFill>
-                <a:latin typeface="Arial"/>
-              </a:rPr>
-              <a:t>Early disease often has no symptoms; late detection lets preventable vision loss progress.</a:t>
-            </a:r>
-          </a:p>
-        </p:txBody>
-      </p:sp>
-      <p:sp>
-        <p:nvSpPr>
-          <p:cNvPr id="211" name="Banner"/>
-          <p:cNvSpPr/>
-          <p:nvPr/>
-        </p:nvSpPr>
-        <p:spPr>
-          <a:xfrm>
-            <a:off x="502920" y="4315968"/>
-            <a:ext cx="8138160" cy="365760"/>
-          </a:xfrm>
-          <a:prstGeom prst="roundRect">
-            <a:avLst/>
-          </a:prstGeom>
-          <a:solidFill>
-            <a:srgbClr val="F2F5F8"/>
-          </a:solidFill>
-          <a:ln w="9525">
-            <a:solidFill>
-              <a:srgbClr val="CDD2D7"/>
-            </a:solidFill>
-          </a:ln>
-        </p:spPr>
-        <p:style>
-          <a:lnRef idx="1">
-            <a:schemeClr val="accent1"/>
-          </a:lnRef>
-          <a:fillRef idx="3">
-            <a:schemeClr val="accent1"/>
-          </a:fillRef>
-          <a:effectRef idx="2">
-            <a:schemeClr val="accent1"/>
-          </a:effectRef>
-          <a:fontRef idx="minor">
-            <a:schemeClr val="lt1"/>
-          </a:fontRef>
-        </p:style>
-        <p:txBody>
-          <a:bodyPr wrap="square" lIns="91440" tIns="36576" rIns="91440" bIns="36576" rtlCol="0" anchor="ctr"/>
-          <a:lstStyle/>
-          <a:p>
-            <a:pPr algn="ctr"/>
-            <a:r>
-              <a:rPr sz="1100" b="1">
-                <a:solidFill>
-                  <a:srgbClr val="121212"/>
-                </a:solidFill>
-                <a:latin typeface="Arial"/>
-              </a:rPr>
-              <a:t>Need: rapid, consistent triage immediately after fundus image capture.</a:t>
+              <a:t>rapid, consistent triage right after the fundus image is captured</a:t>
             </a:r>
           </a:p>
         </p:txBody>
@@ -24343,7 +23807,7 @@
                 </a:solidFill>
                 <a:latin typeface="Arial"/>
               </a:rPr>
-              <a:t>What It Can Do</a:t>
+              <a:t>Early DR: Where AI Can Help Most</a:t>
             </a:r>
           </a:p>
         </p:txBody>
@@ -24378,7 +23842,7 @@
                 </a:solidFill>
                 <a:latin typeface="Arial"/>
               </a:rPr>
-              <a:t>A triage aid for the ophthalmologist, not a replacement</a:t>
+              <a:t>Grades 1-2, before symptoms appear</a:t>
             </a:r>
           </a:p>
         </p:txBody>
@@ -24418,43 +23882,21 @@
           </a:p>
         </p:txBody>
       </p:sp>
-      <p:pic>
-        <p:nvPicPr>
-          <p:cNvPr id="201" name="Chart 1" descr="Retinal fundus photograph"/>
-          <p:cNvPicPr>
-            <a:picLocks noChangeAspect="1"/>
-          </p:cNvPicPr>
-          <p:nvPr/>
-        </p:nvPicPr>
-        <p:blipFill>
-          <a:blip r:embed="rIdImg1"/>
-          <a:stretch>
-            <a:fillRect/>
-          </a:stretch>
-        </p:blipFill>
-        <p:spPr>
-          <a:xfrm>
-            <a:off x="502920" y="1463040"/>
-            <a:ext cx="2194560" cy="1505102"/>
-          </a:xfrm>
-          <a:prstGeom prst="rect">
-            <a:avLst/>
-          </a:prstGeom>
-        </p:spPr>
-      </p:pic>
       <p:sp>
         <p:nvSpPr>
-          <p:cNvPr id="202" name="Input label"/>
+          <p:cNvPr id="201" name="Bullets"/>
           <p:cNvSpPr/>
           <p:nvPr/>
         </p:nvSpPr>
         <p:spPr>
           <a:xfrm>
-            <a:off x="502920" y="3017520"/>
-            <a:ext cx="2194560" cy="365760"/>
+            <a:off x="502920" y="1280160"/>
+            <a:ext cx="8138160" cy="2926080"/>
           </a:xfrm>
           <a:prstGeom prst="roundRect">
-            <a:avLst/>
+            <a:avLst>
+              <a:gd name="adj" fmla="val 6000"/>
+            </a:avLst>
           </a:prstGeom>
           <a:solidFill>
             <a:srgbClr val="FFFFFF"/>
@@ -24483,395 +23925,103 @@
           <a:bodyPr wrap="square" lIns="91440" tIns="36576" rIns="91440" bIns="36576" rtlCol="0" anchor="ctr"/>
           <a:lstStyle/>
           <a:p>
-            <a:pPr algn="ctr"/>
+            <a:pPr algn="l">
+              <a:spcAft>
+                <a:spcPts val="900"/>
+              </a:spcAft>
+            </a:pPr>
             <a:r>
-              <a:rPr sz="1100" b="1">
+              <a:rPr sz="1500" b="1">
                 <a:solidFill>
                   <a:srgbClr val="121212"/>
                 </a:solidFill>
                 <a:latin typeface="Arial"/>
               </a:rPr>
-              <a:t>Fundus image</a:t>
+              <a:t>• Silent stage: </a:t>
             </a:r>
-          </a:p>
-        </p:txBody>
-      </p:sp>
-      <p:sp>
-        <p:nvSpPr>
-          <p:cNvPr id="203" name="Arrow 1"/>
-          <p:cNvSpPr/>
-          <p:nvPr/>
-        </p:nvSpPr>
-        <p:spPr>
-          <a:xfrm>
-            <a:off x="2788920" y="2286000"/>
-            <a:ext cx="365760" cy="0"/>
-          </a:xfrm>
-          <a:prstGeom prst="line">
-            <a:avLst/>
-          </a:prstGeom>
-          <a:noFill/>
-          <a:ln w="25400">
-            <a:solidFill>
-              <a:srgbClr val="555555"/>
-            </a:solidFill>
-            <a:prstDash val="solid"/>
-            <a:tailEnd type="triangle"/>
-          </a:ln>
-        </p:spPr>
-        <p:txBody>
-          <a:bodyPr/>
-          <a:lstStyle/>
-          <a:p>
-            <a:endParaRPr sz="1050"/>
-          </a:p>
-        </p:txBody>
-      </p:sp>
-      <p:sp>
-        <p:nvSpPr>
-          <p:cNvPr id="204" name="Model"/>
-          <p:cNvSpPr/>
-          <p:nvPr/>
-        </p:nvSpPr>
-        <p:spPr>
-          <a:xfrm>
-            <a:off x="3246120" y="1600200"/>
-            <a:ext cx="1737360" cy="1371600"/>
-          </a:xfrm>
-          <a:prstGeom prst="roundRect">
-            <a:avLst/>
-          </a:prstGeom>
-          <a:solidFill>
-            <a:srgbClr val="E3F2EA"/>
-          </a:solidFill>
-          <a:ln w="9525">
-            <a:solidFill>
-              <a:srgbClr val="1E7A5A"/>
-            </a:solidFill>
-          </a:ln>
-        </p:spPr>
-        <p:style>
-          <a:lnRef idx="1">
-            <a:schemeClr val="accent1"/>
-          </a:lnRef>
-          <a:fillRef idx="3">
-            <a:schemeClr val="accent1"/>
-          </a:fillRef>
-          <a:effectRef idx="2">
-            <a:schemeClr val="accent1"/>
-          </a:effectRef>
-          <a:fontRef idx="minor">
-            <a:schemeClr val="lt1"/>
-          </a:fontRef>
-        </p:style>
-        <p:txBody>
-          <a:bodyPr wrap="square" lIns="91440" tIns="36576" rIns="91440" bIns="36576" rtlCol="0" anchor="ctr"/>
-          <a:lstStyle/>
-          <a:p>
-            <a:pPr algn="ctr"/>
             <a:r>
-              <a:rPr sz="1200" b="1">
-                <a:solidFill>
-                  <a:srgbClr val="121212"/>
+              <a:rPr sz="1400" b="0">
+                <a:solidFill>
+                  <a:srgbClr val="3a3a3a"/>
                 </a:solidFill>
                 <a:latin typeface="Arial"/>
               </a:rPr>
-              <a:t>Early-DR model</a:t>
+              <a:t>grades 1-2 cause no symptoms, so patients rarely seek care until later</a:t>
             </a:r>
           </a:p>
           <a:p>
-            <a:pPr algn="ctr"/>
+            <a:pPr algn="l">
+              <a:spcAft>
+                <a:spcPts val="900"/>
+              </a:spcAft>
+            </a:pPr>
             <a:r>
-              <a:rPr sz="1050" b="0">
-                <a:solidFill>
-                  <a:srgbClr val="3a3a3a"/>
+              <a:rPr sz="1500" b="1">
+                <a:solidFill>
+                  <a:srgbClr val="121212"/>
                 </a:solidFill>
                 <a:latin typeface="Arial"/>
               </a:rPr>
-              <a:t>EfficientNet-B0 with calibrated probabilities</a:t>
+              <a:t>• Under-studied target: </a:t>
             </a:r>
-          </a:p>
-        </p:txBody>
-      </p:sp>
-      <p:sp>
-        <p:nvSpPr>
-          <p:cNvPr id="205" name="Arrow 2"/>
-          <p:cNvSpPr/>
-          <p:nvPr/>
-        </p:nvSpPr>
-        <p:spPr>
-          <a:xfrm>
-            <a:off x="5074920" y="2286000"/>
-            <a:ext cx="365760" cy="0"/>
-          </a:xfrm>
-          <a:prstGeom prst="line">
-            <a:avLst/>
-          </a:prstGeom>
-          <a:noFill/>
-          <a:ln w="25400">
-            <a:solidFill>
-              <a:srgbClr val="555555"/>
-            </a:solidFill>
-            <a:prstDash val="solid"/>
-            <a:tailEnd type="triangle"/>
-          </a:ln>
-        </p:spPr>
-        <p:txBody>
-          <a:bodyPr/>
-          <a:lstStyle/>
-          <a:p>
-            <a:endParaRPr sz="1050"/>
-          </a:p>
-        </p:txBody>
-      </p:sp>
-      <p:sp>
-        <p:nvSpPr>
-          <p:cNvPr id="206" name="Output 1"/>
-          <p:cNvSpPr/>
-          <p:nvPr/>
-        </p:nvSpPr>
-        <p:spPr>
-          <a:xfrm>
-            <a:off x="5532120" y="1280160"/>
-            <a:ext cx="3108960" cy="868680"/>
-          </a:xfrm>
-          <a:prstGeom prst="roundRect">
-            <a:avLst/>
-          </a:prstGeom>
-          <a:solidFill>
-            <a:srgbClr val="FFFFFF"/>
-          </a:solidFill>
-          <a:ln w="9525">
-            <a:solidFill>
-              <a:srgbClr val="CDD2D7"/>
-            </a:solidFill>
-          </a:ln>
-        </p:spPr>
-        <p:style>
-          <a:lnRef idx="1">
-            <a:schemeClr val="accent1"/>
-          </a:lnRef>
-          <a:fillRef idx="3">
-            <a:schemeClr val="accent1"/>
-          </a:fillRef>
-          <a:effectRef idx="2">
-            <a:schemeClr val="accent1"/>
-          </a:effectRef>
-          <a:fontRef idx="minor">
-            <a:schemeClr val="lt1"/>
-          </a:fontRef>
-        </p:style>
-        <p:txBody>
-          <a:bodyPr wrap="square" lIns="91440" tIns="36576" rIns="91440" bIns="36576" rtlCol="0" anchor="ctr"/>
-          <a:lstStyle/>
-          <a:p>
-            <a:pPr algn="l"/>
             <a:r>
-              <a:rPr sz="1150" b="1">
-                <a:solidFill>
-                  <a:srgbClr val="121212"/>
+              <a:rPr sz="1400" b="0">
+                <a:solidFill>
+                  <a:srgbClr val="3a3a3a"/>
                 </a:solidFill>
                 <a:latin typeface="Arial"/>
               </a:rPr>
-              <a:t>Early-DR flag</a:t>
+              <a:t>much well-known work, such as Gulshan et al. (2016), targets referable DR (moderate or worse)</a:t>
             </a:r>
           </a:p>
           <a:p>
-            <a:pPr algn="l"/>
+            <a:pPr algn="l">
+              <a:spcAft>
+                <a:spcPts val="900"/>
+              </a:spcAft>
+            </a:pPr>
             <a:r>
-              <a:rPr sz="1050" b="0">
-                <a:solidFill>
-                  <a:srgbClr val="3a3a3a"/>
+              <a:rPr sz="1500" b="1">
+                <a:solidFill>
+                  <a:srgbClr val="121212"/>
                 </a:solidFill>
                 <a:latin typeface="Arial"/>
               </a:rPr>
-              <a:t>Grades 1-2 vs No DR at a fixed specificity</a:t>
+              <a:t>• A gap in the evidence: </a:t>
             </a:r>
-          </a:p>
-        </p:txBody>
-      </p:sp>
-      <p:sp>
-        <p:nvSpPr>
-          <p:cNvPr id="207" name="Output 2"/>
-          <p:cNvSpPr/>
-          <p:nvPr/>
-        </p:nvSpPr>
-        <p:spPr>
-          <a:xfrm>
-            <a:off x="5532120" y="2240280"/>
-            <a:ext cx="3108960" cy="868680"/>
-          </a:xfrm>
-          <a:prstGeom prst="roundRect">
-            <a:avLst/>
-          </a:prstGeom>
-          <a:solidFill>
-            <a:srgbClr val="FFFFFF"/>
-          </a:solidFill>
-          <a:ln w="9525">
-            <a:solidFill>
-              <a:srgbClr val="CDD2D7"/>
-            </a:solidFill>
-          </a:ln>
-        </p:spPr>
-        <p:style>
-          <a:lnRef idx="1">
-            <a:schemeClr val="accent1"/>
-          </a:lnRef>
-          <a:fillRef idx="3">
-            <a:schemeClr val="accent1"/>
-          </a:fillRef>
-          <a:effectRef idx="2">
-            <a:schemeClr val="accent1"/>
-          </a:effectRef>
-          <a:fontRef idx="minor">
-            <a:schemeClr val="lt1"/>
-          </a:fontRef>
-        </p:style>
-        <p:txBody>
-          <a:bodyPr wrap="square" lIns="91440" tIns="36576" rIns="91440" bIns="36576" rtlCol="0" anchor="ctr"/>
-          <a:lstStyle/>
-          <a:p>
-            <a:pPr algn="l"/>
             <a:r>
-              <a:rPr sz="1150" b="1">
-                <a:solidFill>
-                  <a:srgbClr val="121212"/>
+              <a:rPr sz="1400" b="0">
+                <a:solidFill>
+                  <a:srgbClr val="3a3a3a"/>
                 </a:solidFill>
                 <a:latin typeface="Arial"/>
               </a:rPr>
-              <a:t>Early vs late</a:t>
+              <a:t>I found no study reporting early-DR sensitivity at a pre-set specificity</a:t>
             </a:r>
           </a:p>
           <a:p>
-            <a:pPr algn="l"/>
+            <a:pPr algn="l">
+              <a:spcAft>
+                <a:spcPts val="900"/>
+              </a:spcAft>
+            </a:pPr>
             <a:r>
-              <a:rPr sz="1050" b="0">
-                <a:solidFill>
-                  <a:srgbClr val="3a3a3a"/>
+              <a:rPr sz="1500" b="1">
+                <a:solidFill>
+                  <a:srgbClr val="121212"/>
                 </a:solidFill>
                 <a:latin typeface="Arial"/>
               </a:rPr>
-              <a:t>Separates early from late disease to set priority</a:t>
+              <a:t>• The tool: </a:t>
             </a:r>
-          </a:p>
-        </p:txBody>
-      </p:sp>
-      <p:sp>
-        <p:nvSpPr>
-          <p:cNvPr id="208" name="Output 3"/>
-          <p:cNvSpPr/>
-          <p:nvPr/>
-        </p:nvSpPr>
-        <p:spPr>
-          <a:xfrm>
-            <a:off x="5532120" y="3200400"/>
-            <a:ext cx="3108960" cy="868680"/>
-          </a:xfrm>
-          <a:prstGeom prst="roundRect">
-            <a:avLst/>
-          </a:prstGeom>
-          <a:solidFill>
-            <a:srgbClr val="FFFFFF"/>
-          </a:solidFill>
-          <a:ln w="9525">
-            <a:solidFill>
-              <a:srgbClr val="CDD2D7"/>
-            </a:solidFill>
-          </a:ln>
-        </p:spPr>
-        <p:style>
-          <a:lnRef idx="1">
-            <a:schemeClr val="accent1"/>
-          </a:lnRef>
-          <a:fillRef idx="3">
-            <a:schemeClr val="accent1"/>
-          </a:fillRef>
-          <a:effectRef idx="2">
-            <a:schemeClr val="accent1"/>
-          </a:effectRef>
-          <a:fontRef idx="minor">
-            <a:schemeClr val="lt1"/>
-          </a:fontRef>
-        </p:style>
-        <p:txBody>
-          <a:bodyPr wrap="square" lIns="91440" tIns="36576" rIns="91440" bIns="36576" rtlCol="0" anchor="ctr"/>
-          <a:lstStyle/>
-          <a:p>
-            <a:pPr algn="l"/>
             <a:r>
-              <a:rPr sz="1150" b="1">
-                <a:solidFill>
-                  <a:srgbClr val="121212"/>
+              <a:rPr sz="1400" b="0">
+                <a:solidFill>
+                  <a:srgbClr val="3a3a3a"/>
                 </a:solidFill>
                 <a:latin typeface="Arial"/>
               </a:rPr>
-              <a:t>Calibrated probability</a:t>
-            </a:r>
-          </a:p>
-          <a:p>
-            <a:pPr algn="l"/>
-            <a:r>
-              <a:rPr sz="1050" b="0">
-                <a:solidFill>
-                  <a:srgbClr val="3a3a3a"/>
-                </a:solidFill>
-                <a:latin typeface="Arial"/>
-              </a:rPr>
-              <a:t>A score clinicians can trust, tested on unseen datasets</a:t>
-            </a:r>
-          </a:p>
-        </p:txBody>
-      </p:sp>
-      <p:sp>
-        <p:nvSpPr>
-          <p:cNvPr id="209" name="Banner"/>
-          <p:cNvSpPr/>
-          <p:nvPr/>
-        </p:nvSpPr>
-        <p:spPr>
-          <a:xfrm>
-            <a:off x="502920" y="4315968"/>
-            <a:ext cx="8138160" cy="365760"/>
-          </a:xfrm>
-          <a:prstGeom prst="roundRect">
-            <a:avLst/>
-          </a:prstGeom>
-          <a:solidFill>
-            <a:srgbClr val="F2F5F8"/>
-          </a:solidFill>
-          <a:ln w="9525">
-            <a:solidFill>
-              <a:srgbClr val="CDD2D7"/>
-            </a:solidFill>
-          </a:ln>
-        </p:spPr>
-        <p:style>
-          <a:lnRef idx="1">
-            <a:schemeClr val="accent1"/>
-          </a:lnRef>
-          <a:fillRef idx="3">
-            <a:schemeClr val="accent1"/>
-          </a:fillRef>
-          <a:effectRef idx="2">
-            <a:schemeClr val="accent1"/>
-          </a:effectRef>
-          <a:fontRef idx="minor">
-            <a:schemeClr val="lt1"/>
-          </a:fontRef>
-        </p:style>
-        <p:txBody>
-          <a:bodyPr wrap="square" lIns="91440" tIns="36576" rIns="91440" bIns="36576" rtlCol="0" anchor="ctr"/>
-          <a:lstStyle/>
-          <a:p>
-            <a:pPr algn="ctr"/>
-            <a:r>
-              <a:rPr sz="1100" b="1">
-                <a:solidFill>
-                  <a:srgbClr val="121212"/>
-                </a:solidFill>
-                <a:latin typeface="Arial"/>
-              </a:rPr>
-              <a:t>The model supports the ophthalmologist: faster prioritization of high-risk images.</a:t>
+              <a:t>a triage aid, not a replacement: a calibrated early-DR probability so the ophthalmologist sees high-risk images first</a:t>
             </a:r>
           </a:p>
         </p:txBody>
@@ -24929,7 +24079,7 @@
                 </a:solidFill>
                 <a:latin typeface="Arial"/>
               </a:rPr>
-              <a:t>Research Question</a:t>
+              <a:t>The Gap: Merged Datasets Are Not Tested</a:t>
             </a:r>
           </a:p>
         </p:txBody>
@@ -24964,7 +24114,7 @@
                 </a:solidFill>
                 <a:latin typeface="Arial"/>
               </a:rPr>
-              <a:t>What this project asks</a:t>
+              <a:t>Why this project is needed</a:t>
             </a:r>
           </a:p>
         </p:txBody>
@@ -25006,24 +24156,26 @@
       </p:sp>
       <p:sp>
         <p:nvSpPr>
-          <p:cNvPr id="201" name="Question"/>
+          <p:cNvPr id="201" name="Bullets"/>
           <p:cNvSpPr/>
           <p:nvPr/>
         </p:nvSpPr>
         <p:spPr>
           <a:xfrm>
             <a:off x="502920" y="1280160"/>
-            <a:ext cx="8138160" cy="731520"/>
+            <a:ext cx="8138160" cy="2926080"/>
           </a:xfrm>
           <a:prstGeom prst="roundRect">
-            <a:avLst/>
+            <a:avLst>
+              <a:gd name="adj" fmla="val 6000"/>
+            </a:avLst>
           </a:prstGeom>
           <a:solidFill>
-            <a:srgbClr val="E4ECF6"/>
+            <a:srgbClr val="FFFFFF"/>
           </a:solidFill>
           <a:ln w="9525">
             <a:solidFill>
-              <a:srgbClr val="BCCFE4"/>
+              <a:srgbClr val="FFFFFF"/>
             </a:solidFill>
           </a:ln>
         </p:spPr>
@@ -25045,255 +24197,128 @@
           <a:bodyPr wrap="square" lIns="91440" tIns="36576" rIns="91440" bIns="36576" rtlCol="0" anchor="ctr"/>
           <a:lstStyle/>
           <a:p>
-            <a:pPr algn="ctr"/>
+            <a:pPr algn="l">
+              <a:spcAft>
+                <a:spcPts val="900"/>
+              </a:spcAft>
+            </a:pPr>
             <a:r>
-              <a:rPr sz="1300" b="1">
+              <a:rPr sz="1400" b="1">
                 <a:solidFill>
                   <a:srgbClr val="121212"/>
                 </a:solidFill>
                 <a:latin typeface="Arial"/>
               </a:rPr>
-              <a:t>Does merging datasets help early-DR detection, or does the model only learn which dataset an image came from?</a:t>
+              <a:t>• Pooling is common: </a:t>
             </a:r>
-          </a:p>
-        </p:txBody>
-      </p:sp>
-      <p:sp>
-        <p:nvSpPr>
-          <p:cNvPr id="202" name="RQ1"/>
-          <p:cNvSpPr/>
-          <p:nvPr/>
-        </p:nvSpPr>
-        <p:spPr>
-          <a:xfrm>
-            <a:off x="502920" y="2148840"/>
-            <a:ext cx="3977639" cy="1371600"/>
-          </a:xfrm>
-          <a:prstGeom prst="roundRect">
-            <a:avLst/>
-          </a:prstGeom>
-          <a:solidFill>
-            <a:srgbClr val="E3F2EA"/>
-          </a:solidFill>
-          <a:ln w="9525">
-            <a:solidFill>
-              <a:srgbClr val="1E7A5A"/>
-            </a:solidFill>
-          </a:ln>
-        </p:spPr>
-        <p:style>
-          <a:lnRef idx="1">
-            <a:schemeClr val="accent1"/>
-          </a:lnRef>
-          <a:fillRef idx="3">
-            <a:schemeClr val="accent1"/>
-          </a:fillRef>
-          <a:effectRef idx="2">
-            <a:schemeClr val="accent1"/>
-          </a:effectRef>
-          <a:fontRef idx="minor">
-            <a:schemeClr val="lt1"/>
-          </a:fontRef>
-        </p:style>
-        <p:txBody>
-          <a:bodyPr wrap="square" lIns="91440" tIns="36576" rIns="91440" bIns="36576" rtlCol="0" anchor="ctr"/>
-          <a:lstStyle/>
-          <a:p>
-            <a:pPr algn="l"/>
             <a:r>
-              <a:rPr sz="1200" b="1">
-                <a:solidFill>
-                  <a:srgbClr val="121212"/>
+              <a:rPr sz="1300" b="0">
+                <a:solidFill>
+                  <a:srgbClr val="3a3a3a"/>
                 </a:solidFill>
                 <a:latin typeface="Arial"/>
               </a:rPr>
-              <a:t>RQ1</a:t>
+              <a:t>public datasets (DDR, EyePACS, APTOS) are combined to get more training data</a:t>
             </a:r>
           </a:p>
           <a:p>
-            <a:pPr algn="l"/>
+            <a:pPr algn="l">
+              <a:spcAft>
+                <a:spcPts val="900"/>
+              </a:spcAft>
+            </a:pPr>
             <a:r>
-              <a:rPr sz="1100" b="0">
-                <a:solidFill>
-                  <a:srgbClr val="3a3a3a"/>
+              <a:rPr sz="1400" b="1">
+                <a:solidFill>
+                  <a:srgbClr val="121212"/>
                 </a:solidFill>
                 <a:latin typeface="Arial"/>
               </a:rPr>
-              <a:t>Does adding EyePACS to DDR improve early-DR sensitivity at a fixed specificity on sources the model has not seen?</a:t>
+              <a:t>• An untested assumption: </a:t>
             </a:r>
-          </a:p>
-        </p:txBody>
-      </p:sp>
-      <p:sp>
-        <p:nvSpPr>
-          <p:cNvPr id="203" name="RQ2"/>
-          <p:cNvSpPr/>
-          <p:nvPr/>
-        </p:nvSpPr>
-        <p:spPr>
-          <a:xfrm>
-            <a:off x="4663440" y="2148840"/>
-            <a:ext cx="3977639" cy="1371600"/>
-          </a:xfrm>
-          <a:prstGeom prst="roundRect">
-            <a:avLst/>
-          </a:prstGeom>
-          <a:solidFill>
-            <a:srgbClr val="E3F2EA"/>
-          </a:solidFill>
-          <a:ln w="9525">
-            <a:solidFill>
-              <a:srgbClr val="1E7A5A"/>
-            </a:solidFill>
-          </a:ln>
-        </p:spPr>
-        <p:style>
-          <a:lnRef idx="1">
-            <a:schemeClr val="accent1"/>
-          </a:lnRef>
-          <a:fillRef idx="3">
-            <a:schemeClr val="accent1"/>
-          </a:fillRef>
-          <a:effectRef idx="2">
-            <a:schemeClr val="accent1"/>
-          </a:effectRef>
-          <a:fontRef idx="minor">
-            <a:schemeClr val="lt1"/>
-          </a:fontRef>
-        </p:style>
-        <p:txBody>
-          <a:bodyPr wrap="square" lIns="91440" tIns="36576" rIns="91440" bIns="36576" rtlCol="0" anchor="ctr"/>
-          <a:lstStyle/>
-          <a:p>
-            <a:pPr algn="l"/>
             <a:r>
-              <a:rPr sz="1200" b="1">
-                <a:solidFill>
-                  <a:srgbClr val="121212"/>
+              <a:rPr sz="1300" b="0">
+                <a:solidFill>
+                  <a:srgbClr val="3a3a3a"/>
                 </a:solidFill>
                 <a:latin typeface="Arial"/>
               </a:rPr>
-              <a:t>RQ2</a:t>
+              <a:t>a 2025 review notes that multi-dataset training can mask poor external generalization</a:t>
             </a:r>
           </a:p>
           <a:p>
-            <a:pPr algn="l"/>
+            <a:pPr algn="l">
+              <a:spcAft>
+                <a:spcPts val="900"/>
+              </a:spcAft>
+            </a:pPr>
             <a:r>
-              <a:rPr sz="1100" b="0">
-                <a:solidFill>
-                  <a:srgbClr val="3a3a3a"/>
+              <a:rPr sz="1400" b="1">
+                <a:solidFill>
+                  <a:srgbClr val="121212"/>
                 </a:solidFill>
                 <a:latin typeface="Arial"/>
               </a:rPr>
-              <a:t>Do calibrated probabilities and a threshold frozen on validation still hold on unseen data?</a:t>
+              <a:t>• Not found: </a:t>
+            </a:r>
+            <a:r>
+              <a:rPr sz="1300" b="0">
+                <a:solidFill>
+                  <a:srgbClr val="3a3a3a"/>
+                </a:solidFill>
+                <a:latin typeface="Arial"/>
+              </a:rPr>
+              <a:t>a study testing whether a merged model learns the disease or the source dataset</a:t>
             </a:r>
           </a:p>
-        </p:txBody>
-      </p:sp>
-      <p:sp>
-        <p:nvSpPr>
-          <p:cNvPr id="204" name="Signal"/>
-          <p:cNvSpPr/>
-          <p:nvPr/>
-        </p:nvSpPr>
-        <p:spPr>
-          <a:xfrm>
-            <a:off x="502920" y="3657600"/>
-            <a:ext cx="8138160" cy="548640"/>
-          </a:xfrm>
-          <a:prstGeom prst="roundRect">
-            <a:avLst/>
-          </a:prstGeom>
-          <a:solidFill>
-            <a:srgbClr val="FFFFFF"/>
-          </a:solidFill>
-          <a:ln w="9525">
-            <a:solidFill>
-              <a:srgbClr val="CDD2D7"/>
-            </a:solidFill>
-          </a:ln>
-        </p:spPr>
-        <p:style>
-          <a:lnRef idx="1">
-            <a:schemeClr val="accent1"/>
-          </a:lnRef>
-          <a:fillRef idx="3">
-            <a:schemeClr val="accent1"/>
-          </a:fillRef>
-          <a:effectRef idx="2">
-            <a:schemeClr val="accent1"/>
-          </a:effectRef>
-          <a:fontRef idx="minor">
-            <a:schemeClr val="lt1"/>
-          </a:fontRef>
-        </p:style>
-        <p:txBody>
-          <a:bodyPr wrap="square" lIns="91440" tIns="36576" rIns="91440" bIns="36576" rtlCol="0" anchor="ctr"/>
-          <a:lstStyle/>
           <a:p>
-            <a:pPr algn="l"/>
+            <a:pPr algn="l">
+              <a:spcAft>
+                <a:spcPts val="900"/>
+              </a:spcAft>
+            </a:pPr>
             <a:r>
-              <a:rPr sz="1100" b="0">
-                <a:solidFill>
-                  <a:srgbClr val="3a3a3a"/>
+              <a:rPr sz="1400" b="1">
+                <a:solidFill>
+                  <a:srgbClr val="121212"/>
                 </a:solidFill>
                 <a:latin typeface="Arial"/>
               </a:rPr>
-              <a:t>Measure: sensitivity at specificity 0.90 for grades 1-2 vs No DR, on held-out EyePACS patients and APTOS.</a:t>
+              <a:t>• Hidden failures: </a:t>
+            </a:r>
+            <a:r>
+              <a:rPr sz="1300" b="0">
+                <a:solidFill>
+                  <a:srgbClr val="3a3a3a"/>
+                </a:solidFill>
+                <a:latin typeface="Arial"/>
+              </a:rPr>
+              <a:t>in-domain accuracy or AUROC can look excellent while a model over-flags, uses camera cues or misses its target at a new site</a:t>
             </a:r>
           </a:p>
-        </p:txBody>
-      </p:sp>
-      <p:sp>
-        <p:nvSpPr>
-          <p:cNvPr id="205" name="Banner"/>
-          <p:cNvSpPr/>
-          <p:nvPr/>
-        </p:nvSpPr>
-        <p:spPr>
-          <a:xfrm>
-            <a:off x="502920" y="4315968"/>
-            <a:ext cx="8138160" cy="365760"/>
-          </a:xfrm>
-          <a:prstGeom prst="roundRect">
-            <a:avLst/>
-          </a:prstGeom>
-          <a:solidFill>
-            <a:srgbClr val="F2F5F8"/>
-          </a:solidFill>
-          <a:ln w="9525">
-            <a:solidFill>
-              <a:srgbClr val="CDD2D7"/>
-            </a:solidFill>
-          </a:ln>
-        </p:spPr>
-        <p:style>
-          <a:lnRef idx="1">
-            <a:schemeClr val="accent1"/>
-          </a:lnRef>
-          <a:fillRef idx="3">
-            <a:schemeClr val="accent1"/>
-          </a:fillRef>
-          <a:effectRef idx="2">
-            <a:schemeClr val="accent1"/>
-          </a:effectRef>
-          <a:fontRef idx="minor">
-            <a:schemeClr val="lt1"/>
-          </a:fontRef>
-        </p:style>
-        <p:txBody>
-          <a:bodyPr wrap="square" lIns="91440" tIns="36576" rIns="91440" bIns="36576" rtlCol="0" anchor="ctr"/>
-          <a:lstStyle/>
           <a:p>
-            <a:pPr algn="ctr"/>
+            <a:pPr algn="l">
+              <a:spcAft>
+                <a:spcPts val="900"/>
+              </a:spcAft>
+            </a:pPr>
             <a:r>
-              <a:rPr sz="1100" b="1">
+              <a:rPr sz="1400" b="1">
                 <a:solidFill>
                   <a:srgbClr val="121212"/>
                 </a:solidFill>
                 <a:latin typeface="Arial"/>
               </a:rPr>
-              <a:t>Three data arms, one change at a time, with a negative control.</a:t>
+              <a:t>• Why it matters: </a:t>
+            </a:r>
+            <a:r>
+              <a:rPr sz="1300" b="0">
+                <a:solidFill>
+                  <a:srgbClr val="3a3a3a"/>
+                </a:solidFill>
+                <a:latin typeface="Arial"/>
+              </a:rPr>
+              <a:t>an over-flagging tool overloads graders; an under-flagging one misses early disease</a:t>
             </a:r>
           </a:p>
         </p:txBody>
@@ -25351,7 +24376,7 @@
                 </a:solidFill>
                 <a:latin typeface="Arial"/>
               </a:rPr>
-              <a:t>Relevant Works</a:t>
+              <a:t>Research Question</a:t>
             </a:r>
           </a:p>
         </p:txBody>
@@ -25386,7 +24411,7 @@
                 </a:solidFill>
                 <a:latin typeface="Arial"/>
               </a:rPr>
-              <a:t>Data and methods this project builds on</a:t>
+              <a:t>What this project asks</a:t>
             </a:r>
           </a:p>
         </p:txBody>
@@ -25428,24 +24453,26 @@
       </p:sp>
       <p:sp>
         <p:nvSpPr>
-          <p:cNvPr id="201" name="H Work"/>
+          <p:cNvPr id="201" name="Bullets"/>
           <p:cNvSpPr/>
           <p:nvPr/>
         </p:nvSpPr>
         <p:spPr>
           <a:xfrm>
             <a:off x="502920" y="1280160"/>
-            <a:ext cx="2377440" cy="292608"/>
+            <a:ext cx="8138160" cy="2926080"/>
           </a:xfrm>
           <a:prstGeom prst="roundRect">
-            <a:avLst/>
+            <a:avLst>
+              <a:gd name="adj" fmla="val 6000"/>
+            </a:avLst>
           </a:prstGeom>
           <a:solidFill>
-            <a:srgbClr val="3D5F84"/>
+            <a:srgbClr val="FFFFFF"/>
           </a:solidFill>
           <a:ln w="9525">
             <a:solidFill>
-              <a:srgbClr val="3D5F84"/>
+              <a:srgbClr val="FFFFFF"/>
             </a:solidFill>
           </a:ln>
         </p:spPr>
@@ -25467,987 +24494,103 @@
           <a:bodyPr wrap="square" lIns="91440" tIns="36576" rIns="91440" bIns="36576" rtlCol="0" anchor="ctr"/>
           <a:lstStyle/>
           <a:p>
-            <a:pPr algn="l"/>
+            <a:pPr algn="l">
+              <a:spcAft>
+                <a:spcPts val="900"/>
+              </a:spcAft>
+            </a:pPr>
             <a:r>
-              <a:rPr sz="1050" b="1">
-                <a:solidFill>
-                  <a:srgbClr val="FFFFFF"/>
+              <a:rPr sz="1500" b="1">
+                <a:solidFill>
+                  <a:srgbClr val="121212"/>
                 </a:solidFill>
                 <a:latin typeface="Arial"/>
               </a:rPr>
-              <a:t>Work</a:t>
+              <a:t>• Main question: </a:t>
+            </a:r>
+            <a:r>
+              <a:rPr sz="1400" b="0">
+                <a:solidFill>
+                  <a:srgbClr val="3a3a3a"/>
+                </a:solidFill>
+                <a:latin typeface="Arial"/>
+              </a:rPr>
+              <a:t>when datasets are merged for early-DR detection, does the model learn the disease or the source?</a:t>
             </a:r>
           </a:p>
-        </p:txBody>
-      </p:sp>
-      <p:sp>
-        <p:nvSpPr>
-          <p:cNvPr id="202" name="H What it provides"/>
-          <p:cNvSpPr/>
-          <p:nvPr/>
-        </p:nvSpPr>
-        <p:spPr>
-          <a:xfrm>
-            <a:off x="2971800" y="1280160"/>
-            <a:ext cx="3108960" cy="292608"/>
-          </a:xfrm>
-          <a:prstGeom prst="roundRect">
-            <a:avLst/>
-          </a:prstGeom>
-          <a:solidFill>
-            <a:srgbClr val="3D5F84"/>
-          </a:solidFill>
-          <a:ln w="9525">
-            <a:solidFill>
-              <a:srgbClr val="3D5F84"/>
-            </a:solidFill>
-          </a:ln>
-        </p:spPr>
-        <p:style>
-          <a:lnRef idx="1">
-            <a:schemeClr val="accent1"/>
-          </a:lnRef>
-          <a:fillRef idx="3">
-            <a:schemeClr val="accent1"/>
-          </a:fillRef>
-          <a:effectRef idx="2">
-            <a:schemeClr val="accent1"/>
-          </a:effectRef>
-          <a:fontRef idx="minor">
-            <a:schemeClr val="lt1"/>
-          </a:fontRef>
-        </p:style>
-        <p:txBody>
-          <a:bodyPr wrap="square" lIns="91440" tIns="36576" rIns="91440" bIns="36576" rtlCol="0" anchor="ctr"/>
-          <a:lstStyle/>
           <a:p>
-            <a:pPr algn="l"/>
+            <a:pPr algn="l">
+              <a:spcAft>
+                <a:spcPts val="900"/>
+              </a:spcAft>
+            </a:pPr>
             <a:r>
-              <a:rPr sz="1050" b="1">
-                <a:solidFill>
-                  <a:srgbClr val="FFFFFF"/>
+              <a:rPr sz="1500" b="1">
+                <a:solidFill>
+                  <a:srgbClr val="121212"/>
                 </a:solidFill>
                 <a:latin typeface="Arial"/>
               </a:rPr>
-              <a:t>What it provides</a:t>
+              <a:t>• RQ1: </a:t>
+            </a:r>
+            <a:r>
+              <a:rPr sz="1400" b="0">
+                <a:solidFill>
+                  <a:srgbClr val="3a3a3a"/>
+                </a:solidFill>
+                <a:latin typeface="Arial"/>
+              </a:rPr>
+              <a:t>does adding EyePACS to DDR improve early-DR sensitivity at a fixed specificity on sources it has not seen? A negative-control merge tests this</a:t>
             </a:r>
           </a:p>
-        </p:txBody>
-      </p:sp>
-      <p:sp>
-        <p:nvSpPr>
-          <p:cNvPr id="203" name="H Role in this project"/>
-          <p:cNvSpPr/>
-          <p:nvPr/>
-        </p:nvSpPr>
-        <p:spPr>
-          <a:xfrm>
-            <a:off x="6172200" y="1280160"/>
-            <a:ext cx="2468880" cy="292608"/>
-          </a:xfrm>
-          <a:prstGeom prst="roundRect">
-            <a:avLst/>
-          </a:prstGeom>
-          <a:solidFill>
-            <a:srgbClr val="3D5F84"/>
-          </a:solidFill>
-          <a:ln w="9525">
-            <a:solidFill>
-              <a:srgbClr val="3D5F84"/>
-            </a:solidFill>
-          </a:ln>
-        </p:spPr>
-        <p:style>
-          <a:lnRef idx="1">
-            <a:schemeClr val="accent1"/>
-          </a:lnRef>
-          <a:fillRef idx="3">
-            <a:schemeClr val="accent1"/>
-          </a:fillRef>
-          <a:effectRef idx="2">
-            <a:schemeClr val="accent1"/>
-          </a:effectRef>
-          <a:fontRef idx="minor">
-            <a:schemeClr val="lt1"/>
-          </a:fontRef>
-        </p:style>
-        <p:txBody>
-          <a:bodyPr wrap="square" lIns="91440" tIns="36576" rIns="91440" bIns="36576" rtlCol="0" anchor="ctr"/>
-          <a:lstStyle/>
           <a:p>
-            <a:pPr algn="l"/>
+            <a:pPr algn="l">
+              <a:spcAft>
+                <a:spcPts val="900"/>
+              </a:spcAft>
+            </a:pPr>
             <a:r>
-              <a:rPr sz="1050" b="1">
-                <a:solidFill>
-                  <a:srgbClr val="FFFFFF"/>
+              <a:rPr sz="1500" b="1">
+                <a:solidFill>
+                  <a:srgbClr val="121212"/>
                 </a:solidFill>
                 <a:latin typeface="Arial"/>
               </a:rPr>
-              <a:t>Role in this project</a:t>
+              <a:t>• RQ2: </a:t>
+            </a:r>
+            <a:r>
+              <a:rPr sz="1400" b="0">
+                <a:solidFill>
+                  <a:srgbClr val="3a3a3a"/>
+                </a:solidFill>
+                <a:latin typeface="Arial"/>
+              </a:rPr>
+              <a:t>does a threshold frozen on validation survive a change of source, and how much does own-source recalibration recover?</a:t>
             </a:r>
           </a:p>
-        </p:txBody>
-      </p:sp>
-      <p:sp>
-        <p:nvSpPr>
-          <p:cNvPr id="204" name="W00.55"/>
-          <p:cNvSpPr/>
-          <p:nvPr/>
-        </p:nvSpPr>
-        <p:spPr>
-          <a:xfrm>
-            <a:off x="502920" y="1627632"/>
-            <a:ext cx="2377440" cy="457200"/>
-          </a:xfrm>
-          <a:prstGeom prst="roundRect">
-            <a:avLst/>
-          </a:prstGeom>
-          <a:solidFill>
-            <a:srgbClr val="FFFFFF"/>
-          </a:solidFill>
-          <a:ln w="9525">
-            <a:solidFill>
-              <a:srgbClr val="CDD2D7"/>
-            </a:solidFill>
-          </a:ln>
-        </p:spPr>
-        <p:style>
-          <a:lnRef idx="1">
-            <a:schemeClr val="accent1"/>
-          </a:lnRef>
-          <a:fillRef idx="3">
-            <a:schemeClr val="accent1"/>
-          </a:fillRef>
-          <a:effectRef idx="2">
-            <a:schemeClr val="accent1"/>
-          </a:effectRef>
-          <a:fontRef idx="minor">
-            <a:schemeClr val="lt1"/>
-          </a:fontRef>
-        </p:style>
-        <p:txBody>
-          <a:bodyPr wrap="square" lIns="91440" tIns="36576" rIns="91440" bIns="36576" rtlCol="0" anchor="ctr"/>
-          <a:lstStyle/>
           <a:p>
-            <a:pPr algn="l"/>
+            <a:pPr algn="l">
+              <a:spcAft>
+                <a:spcPts val="900"/>
+              </a:spcAft>
+            </a:pPr>
             <a:r>
-              <a:rPr sz="1000" b="0">
-                <a:solidFill>
-                  <a:srgbClr val="3a3a3a"/>
+              <a:rPr sz="1500" b="1">
+                <a:solidFill>
+                  <a:srgbClr val="121212"/>
                 </a:solidFill>
                 <a:latin typeface="Arial"/>
               </a:rPr>
-              <a:t>Gulshan et al. (2016)</a:t>
+              <a:t>• RQ3: </a:t>
             </a:r>
-          </a:p>
-        </p:txBody>
-      </p:sp>
-      <p:sp>
-        <p:nvSpPr>
-          <p:cNvPr id="205" name="W03.25"/>
-          <p:cNvSpPr/>
-          <p:nvPr/>
-        </p:nvSpPr>
-        <p:spPr>
-          <a:xfrm>
-            <a:off x="2971800" y="1627632"/>
-            <a:ext cx="3108960" cy="457200"/>
-          </a:xfrm>
-          <a:prstGeom prst="roundRect">
-            <a:avLst/>
-          </a:prstGeom>
-          <a:solidFill>
-            <a:srgbClr val="FFFFFF"/>
-          </a:solidFill>
-          <a:ln w="9525">
-            <a:solidFill>
-              <a:srgbClr val="CDD2D7"/>
-            </a:solidFill>
-          </a:ln>
-        </p:spPr>
-        <p:style>
-          <a:lnRef idx="1">
-            <a:schemeClr val="accent1"/>
-          </a:lnRef>
-          <a:fillRef idx="3">
-            <a:schemeClr val="accent1"/>
-          </a:fillRef>
-          <a:effectRef idx="2">
-            <a:schemeClr val="accent1"/>
-          </a:effectRef>
-          <a:fontRef idx="minor">
-            <a:schemeClr val="lt1"/>
-          </a:fontRef>
-        </p:style>
-        <p:txBody>
-          <a:bodyPr wrap="square" lIns="91440" tIns="36576" rIns="91440" bIns="36576" rtlCol="0" anchor="ctr"/>
-          <a:lstStyle/>
-          <a:p>
-            <a:pPr algn="l"/>
             <a:r>
-              <a:rPr sz="1000" b="0">
+              <a:rPr sz="1400" b="0">
                 <a:solidFill>
                   <a:srgbClr val="3a3a3a"/>
                 </a:solidFill>
                 <a:latin typeface="Arial"/>
               </a:rPr>
-              <a:t>Deep learning for referable DR (moderate or worse) on retinal images</a:t>
-            </a:r>
-          </a:p>
-        </p:txBody>
-      </p:sp>
-      <p:sp>
-        <p:nvSpPr>
-          <p:cNvPr id="206" name="W06.75"/>
-          <p:cNvSpPr/>
-          <p:nvPr/>
-        </p:nvSpPr>
-        <p:spPr>
-          <a:xfrm>
-            <a:off x="6172200" y="1627632"/>
-            <a:ext cx="2468880" cy="457200"/>
-          </a:xfrm>
-          <a:prstGeom prst="roundRect">
-            <a:avLst/>
-          </a:prstGeom>
-          <a:solidFill>
-            <a:srgbClr val="E3F2EA"/>
-          </a:solidFill>
-          <a:ln w="9525">
-            <a:solidFill>
-              <a:srgbClr val="1E7A5A"/>
-            </a:solidFill>
-          </a:ln>
-        </p:spPr>
-        <p:style>
-          <a:lnRef idx="1">
-            <a:schemeClr val="accent1"/>
-          </a:lnRef>
-          <a:fillRef idx="3">
-            <a:schemeClr val="accent1"/>
-          </a:fillRef>
-          <a:effectRef idx="2">
-            <a:schemeClr val="accent1"/>
-          </a:effectRef>
-          <a:fontRef idx="minor">
-            <a:schemeClr val="lt1"/>
-          </a:fontRef>
-        </p:style>
-        <p:txBody>
-          <a:bodyPr wrap="square" lIns="91440" tIns="36576" rIns="91440" bIns="36576" rtlCol="0" anchor="ctr"/>
-          <a:lstStyle/>
-          <a:p>
-            <a:pPr algn="l"/>
-            <a:r>
-              <a:rPr sz="1000" b="0">
-                <a:solidFill>
-                  <a:srgbClr val="3a3a3a"/>
-                </a:solidFill>
-                <a:latin typeface="Arial"/>
-              </a:rPr>
-              <a:t>Reference point; I target early DR (grades 1-2)</a:t>
-            </a:r>
-          </a:p>
-        </p:txBody>
-      </p:sp>
-      <p:sp>
-        <p:nvSpPr>
-          <p:cNvPr id="207" name="W10.55"/>
-          <p:cNvSpPr/>
-          <p:nvPr/>
-        </p:nvSpPr>
-        <p:spPr>
-          <a:xfrm>
-            <a:off x="502920" y="2121408"/>
-            <a:ext cx="2377440" cy="457200"/>
-          </a:xfrm>
-          <a:prstGeom prst="roundRect">
-            <a:avLst/>
-          </a:prstGeom>
-          <a:solidFill>
-            <a:srgbClr val="FFFFFF"/>
-          </a:solidFill>
-          <a:ln w="9525">
-            <a:solidFill>
-              <a:srgbClr val="CDD2D7"/>
-            </a:solidFill>
-          </a:ln>
-        </p:spPr>
-        <p:style>
-          <a:lnRef idx="1">
-            <a:schemeClr val="accent1"/>
-          </a:lnRef>
-          <a:fillRef idx="3">
-            <a:schemeClr val="accent1"/>
-          </a:fillRef>
-          <a:effectRef idx="2">
-            <a:schemeClr val="accent1"/>
-          </a:effectRef>
-          <a:fontRef idx="minor">
-            <a:schemeClr val="lt1"/>
-          </a:fontRef>
-        </p:style>
-        <p:txBody>
-          <a:bodyPr wrap="square" lIns="91440" tIns="36576" rIns="91440" bIns="36576" rtlCol="0" anchor="ctr"/>
-          <a:lstStyle/>
-          <a:p>
-            <a:pPr algn="l"/>
-            <a:r>
-              <a:rPr sz="1000" b="0">
-                <a:solidFill>
-                  <a:srgbClr val="3a3a3a"/>
-                </a:solidFill>
-                <a:latin typeface="Arial"/>
-              </a:rPr>
-              <a:t>Li et al. (2019), DDR</a:t>
-            </a:r>
-          </a:p>
-        </p:txBody>
-      </p:sp>
-      <p:sp>
-        <p:nvSpPr>
-          <p:cNvPr id="208" name="W13.25"/>
-          <p:cNvSpPr/>
-          <p:nvPr/>
-        </p:nvSpPr>
-        <p:spPr>
-          <a:xfrm>
-            <a:off x="2971800" y="2121408"/>
-            <a:ext cx="3108960" cy="457200"/>
-          </a:xfrm>
-          <a:prstGeom prst="roundRect">
-            <a:avLst/>
-          </a:prstGeom>
-          <a:solidFill>
-            <a:srgbClr val="FFFFFF"/>
-          </a:solidFill>
-          <a:ln w="9525">
-            <a:solidFill>
-              <a:srgbClr val="CDD2D7"/>
-            </a:solidFill>
-          </a:ln>
-        </p:spPr>
-        <p:style>
-          <a:lnRef idx="1">
-            <a:schemeClr val="accent1"/>
-          </a:lnRef>
-          <a:fillRef idx="3">
-            <a:schemeClr val="accent1"/>
-          </a:fillRef>
-          <a:effectRef idx="2">
-            <a:schemeClr val="accent1"/>
-          </a:effectRef>
-          <a:fontRef idx="minor">
-            <a:schemeClr val="lt1"/>
-          </a:fontRef>
-        </p:style>
-        <p:txBody>
-          <a:bodyPr wrap="square" lIns="91440" tIns="36576" rIns="91440" bIns="36576" rtlCol="0" anchor="ctr"/>
-          <a:lstStyle/>
-          <a:p>
-            <a:pPr algn="l"/>
-            <a:r>
-              <a:rPr sz="1000" b="0">
-                <a:solidFill>
-                  <a:srgbClr val="3a3a3a"/>
-                </a:solidFill>
-                <a:latin typeface="Arial"/>
-              </a:rPr>
-              <a:t>Graded fundus image dataset (grades 0-4)</a:t>
-            </a:r>
-          </a:p>
-        </p:txBody>
-      </p:sp>
-      <p:sp>
-        <p:nvSpPr>
-          <p:cNvPr id="209" name="W16.75"/>
-          <p:cNvSpPr/>
-          <p:nvPr/>
-        </p:nvSpPr>
-        <p:spPr>
-          <a:xfrm>
-            <a:off x="6172200" y="2121408"/>
-            <a:ext cx="2468880" cy="457200"/>
-          </a:xfrm>
-          <a:prstGeom prst="roundRect">
-            <a:avLst/>
-          </a:prstGeom>
-          <a:solidFill>
-            <a:srgbClr val="E3F2EA"/>
-          </a:solidFill>
-          <a:ln w="9525">
-            <a:solidFill>
-              <a:srgbClr val="1E7A5A"/>
-            </a:solidFill>
-          </a:ln>
-        </p:spPr>
-        <p:style>
-          <a:lnRef idx="1">
-            <a:schemeClr val="accent1"/>
-          </a:lnRef>
-          <a:fillRef idx="3">
-            <a:schemeClr val="accent1"/>
-          </a:fillRef>
-          <a:effectRef idx="2">
-            <a:schemeClr val="accent1"/>
-          </a:effectRef>
-          <a:fontRef idx="minor">
-            <a:schemeClr val="lt1"/>
-          </a:fontRef>
-        </p:style>
-        <p:txBody>
-          <a:bodyPr wrap="square" lIns="91440" tIns="36576" rIns="91440" bIns="36576" rtlCol="0" anchor="ctr"/>
-          <a:lstStyle/>
-          <a:p>
-            <a:pPr algn="l"/>
-            <a:r>
-              <a:rPr sz="1000" b="0">
-                <a:solidFill>
-                  <a:srgbClr val="3a3a3a"/>
-                </a:solidFill>
-                <a:latin typeface="Arial"/>
-              </a:rPr>
-              <a:t>Training source and internal test</a:t>
-            </a:r>
-          </a:p>
-        </p:txBody>
-      </p:sp>
-      <p:sp>
-        <p:nvSpPr>
-          <p:cNvPr id="210" name="W20.55"/>
-          <p:cNvSpPr/>
-          <p:nvPr/>
-        </p:nvSpPr>
-        <p:spPr>
-          <a:xfrm>
-            <a:off x="502920" y="2615184"/>
-            <a:ext cx="2377440" cy="457200"/>
-          </a:xfrm>
-          <a:prstGeom prst="roundRect">
-            <a:avLst/>
-          </a:prstGeom>
-          <a:solidFill>
-            <a:srgbClr val="FFFFFF"/>
-          </a:solidFill>
-          <a:ln w="9525">
-            <a:solidFill>
-              <a:srgbClr val="CDD2D7"/>
-            </a:solidFill>
-          </a:ln>
-        </p:spPr>
-        <p:style>
-          <a:lnRef idx="1">
-            <a:schemeClr val="accent1"/>
-          </a:lnRef>
-          <a:fillRef idx="3">
-            <a:schemeClr val="accent1"/>
-          </a:fillRef>
-          <a:effectRef idx="2">
-            <a:schemeClr val="accent1"/>
-          </a:effectRef>
-          <a:fontRef idx="minor">
-            <a:schemeClr val="lt1"/>
-          </a:fontRef>
-        </p:style>
-        <p:txBody>
-          <a:bodyPr wrap="square" lIns="91440" tIns="36576" rIns="91440" bIns="36576" rtlCol="0" anchor="ctr"/>
-          <a:lstStyle/>
-          <a:p>
-            <a:pPr algn="l"/>
-            <a:r>
-              <a:rPr sz="1000" b="0">
-                <a:solidFill>
-                  <a:srgbClr val="3a3a3a"/>
-                </a:solidFill>
-                <a:latin typeface="Arial"/>
-              </a:rPr>
-              <a:t>Kaggle EyePACS (2015)</a:t>
-            </a:r>
-          </a:p>
-        </p:txBody>
-      </p:sp>
-      <p:sp>
-        <p:nvSpPr>
-          <p:cNvPr id="211" name="W23.25"/>
-          <p:cNvSpPr/>
-          <p:nvPr/>
-        </p:nvSpPr>
-        <p:spPr>
-          <a:xfrm>
-            <a:off x="2971800" y="2615184"/>
-            <a:ext cx="3108960" cy="457200"/>
-          </a:xfrm>
-          <a:prstGeom prst="roundRect">
-            <a:avLst/>
-          </a:prstGeom>
-          <a:solidFill>
-            <a:srgbClr val="FFFFFF"/>
-          </a:solidFill>
-          <a:ln w="9525">
-            <a:solidFill>
-              <a:srgbClr val="CDD2D7"/>
-            </a:solidFill>
-          </a:ln>
-        </p:spPr>
-        <p:style>
-          <a:lnRef idx="1">
-            <a:schemeClr val="accent1"/>
-          </a:lnRef>
-          <a:fillRef idx="3">
-            <a:schemeClr val="accent1"/>
-          </a:fillRef>
-          <a:effectRef idx="2">
-            <a:schemeClr val="accent1"/>
-          </a:effectRef>
-          <a:fontRef idx="minor">
-            <a:schemeClr val="lt1"/>
-          </a:fontRef>
-        </p:style>
-        <p:txBody>
-          <a:bodyPr wrap="square" lIns="91440" tIns="36576" rIns="91440" bIns="36576" rtlCol="0" anchor="ctr"/>
-          <a:lstStyle/>
-          <a:p>
-            <a:pPr algn="l"/>
-            <a:r>
-              <a:rPr sz="1000" b="0">
-                <a:solidFill>
-                  <a:srgbClr val="3a3a3a"/>
-                </a:solidFill>
-                <a:latin typeface="Arial"/>
-              </a:rPr>
-              <a:t>Large graded fundus image set</a:t>
-            </a:r>
-          </a:p>
-        </p:txBody>
-      </p:sp>
-      <p:sp>
-        <p:nvSpPr>
-          <p:cNvPr id="212" name="W26.75"/>
-          <p:cNvSpPr/>
-          <p:nvPr/>
-        </p:nvSpPr>
-        <p:spPr>
-          <a:xfrm>
-            <a:off x="6172200" y="2615184"/>
-            <a:ext cx="2468880" cy="457200"/>
-          </a:xfrm>
-          <a:prstGeom prst="roundRect">
-            <a:avLst/>
-          </a:prstGeom>
-          <a:solidFill>
-            <a:srgbClr val="E3F2EA"/>
-          </a:solidFill>
-          <a:ln w="9525">
-            <a:solidFill>
-              <a:srgbClr val="1E7A5A"/>
-            </a:solidFill>
-          </a:ln>
-        </p:spPr>
-        <p:style>
-          <a:lnRef idx="1">
-            <a:schemeClr val="accent1"/>
-          </a:lnRef>
-          <a:fillRef idx="3">
-            <a:schemeClr val="accent1"/>
-          </a:fillRef>
-          <a:effectRef idx="2">
-            <a:schemeClr val="accent1"/>
-          </a:effectRef>
-          <a:fontRef idx="minor">
-            <a:schemeClr val="lt1"/>
-          </a:fontRef>
-        </p:style>
-        <p:txBody>
-          <a:bodyPr wrap="square" lIns="91440" tIns="36576" rIns="91440" bIns="36576" rtlCol="0" anchor="ctr"/>
-          <a:lstStyle/>
-          <a:p>
-            <a:pPr algn="l"/>
-            <a:r>
-              <a:rPr sz="1000" b="0">
-                <a:solidFill>
-                  <a:srgbClr val="3a3a3a"/>
-                </a:solidFill>
-                <a:latin typeface="Arial"/>
-              </a:rPr>
-              <a:t>Second source; held-out patients as test</a:t>
-            </a:r>
-          </a:p>
-        </p:txBody>
-      </p:sp>
-      <p:sp>
-        <p:nvSpPr>
-          <p:cNvPr id="213" name="W30.55"/>
-          <p:cNvSpPr/>
-          <p:nvPr/>
-        </p:nvSpPr>
-        <p:spPr>
-          <a:xfrm>
-            <a:off x="502920" y="3108960"/>
-            <a:ext cx="2377440" cy="457200"/>
-          </a:xfrm>
-          <a:prstGeom prst="roundRect">
-            <a:avLst/>
-          </a:prstGeom>
-          <a:solidFill>
-            <a:srgbClr val="FFFFFF"/>
-          </a:solidFill>
-          <a:ln w="9525">
-            <a:solidFill>
-              <a:srgbClr val="CDD2D7"/>
-            </a:solidFill>
-          </a:ln>
-        </p:spPr>
-        <p:style>
-          <a:lnRef idx="1">
-            <a:schemeClr val="accent1"/>
-          </a:lnRef>
-          <a:fillRef idx="3">
-            <a:schemeClr val="accent1"/>
-          </a:fillRef>
-          <a:effectRef idx="2">
-            <a:schemeClr val="accent1"/>
-          </a:effectRef>
-          <a:fontRef idx="minor">
-            <a:schemeClr val="lt1"/>
-          </a:fontRef>
-        </p:style>
-        <p:txBody>
-          <a:bodyPr wrap="square" lIns="91440" tIns="36576" rIns="91440" bIns="36576" rtlCol="0" anchor="ctr"/>
-          <a:lstStyle/>
-          <a:p>
-            <a:pPr algn="l"/>
-            <a:r>
-              <a:rPr sz="1000" b="0">
-                <a:solidFill>
-                  <a:srgbClr val="3a3a3a"/>
-                </a:solidFill>
-                <a:latin typeface="Arial"/>
-              </a:rPr>
-              <a:t>APTOS 2019</a:t>
-            </a:r>
-          </a:p>
-        </p:txBody>
-      </p:sp>
-      <p:sp>
-        <p:nvSpPr>
-          <p:cNvPr id="214" name="W33.25"/>
-          <p:cNvSpPr/>
-          <p:nvPr/>
-        </p:nvSpPr>
-        <p:spPr>
-          <a:xfrm>
-            <a:off x="2971800" y="3108960"/>
-            <a:ext cx="3108960" cy="457200"/>
-          </a:xfrm>
-          <a:prstGeom prst="roundRect">
-            <a:avLst/>
-          </a:prstGeom>
-          <a:solidFill>
-            <a:srgbClr val="FFFFFF"/>
-          </a:solidFill>
-          <a:ln w="9525">
-            <a:solidFill>
-              <a:srgbClr val="CDD2D7"/>
-            </a:solidFill>
-          </a:ln>
-        </p:spPr>
-        <p:style>
-          <a:lnRef idx="1">
-            <a:schemeClr val="accent1"/>
-          </a:lnRef>
-          <a:fillRef idx="3">
-            <a:schemeClr val="accent1"/>
-          </a:fillRef>
-          <a:effectRef idx="2">
-            <a:schemeClr val="accent1"/>
-          </a:effectRef>
-          <a:fontRef idx="minor">
-            <a:schemeClr val="lt1"/>
-          </a:fontRef>
-        </p:style>
-        <p:txBody>
-          <a:bodyPr wrap="square" lIns="91440" tIns="36576" rIns="91440" bIns="36576" rtlCol="0" anchor="ctr"/>
-          <a:lstStyle/>
-          <a:p>
-            <a:pPr algn="l"/>
-            <a:r>
-              <a:rPr sz="1000" b="0">
-                <a:solidFill>
-                  <a:srgbClr val="3a3a3a"/>
-                </a:solidFill>
-                <a:latin typeface="Arial"/>
-              </a:rPr>
-              <a:t>Graded images from a separate source</a:t>
-            </a:r>
-          </a:p>
-        </p:txBody>
-      </p:sp>
-      <p:sp>
-        <p:nvSpPr>
-          <p:cNvPr id="215" name="W36.75"/>
-          <p:cNvSpPr/>
-          <p:nvPr/>
-        </p:nvSpPr>
-        <p:spPr>
-          <a:xfrm>
-            <a:off x="6172200" y="3108960"/>
-            <a:ext cx="2468880" cy="457200"/>
-          </a:xfrm>
-          <a:prstGeom prst="roundRect">
-            <a:avLst/>
-          </a:prstGeom>
-          <a:solidFill>
-            <a:srgbClr val="E3F2EA"/>
-          </a:solidFill>
-          <a:ln w="9525">
-            <a:solidFill>
-              <a:srgbClr val="1E7A5A"/>
-            </a:solidFill>
-          </a:ln>
-        </p:spPr>
-        <p:style>
-          <a:lnRef idx="1">
-            <a:schemeClr val="accent1"/>
-          </a:lnRef>
-          <a:fillRef idx="3">
-            <a:schemeClr val="accent1"/>
-          </a:fillRef>
-          <a:effectRef idx="2">
-            <a:schemeClr val="accent1"/>
-          </a:effectRef>
-          <a:fontRef idx="minor">
-            <a:schemeClr val="lt1"/>
-          </a:fontRef>
-        </p:style>
-        <p:txBody>
-          <a:bodyPr wrap="square" lIns="91440" tIns="36576" rIns="91440" bIns="36576" rtlCol="0" anchor="ctr"/>
-          <a:lstStyle/>
-          <a:p>
-            <a:pPr algn="l"/>
-            <a:r>
-              <a:rPr sz="1000" b="0">
-                <a:solidFill>
-                  <a:srgbClr val="3a3a3a"/>
-                </a:solidFill>
-                <a:latin typeface="Arial"/>
-              </a:rPr>
-              <a:t>External test only, never trained on</a:t>
-            </a:r>
-          </a:p>
-        </p:txBody>
-      </p:sp>
-      <p:sp>
-        <p:nvSpPr>
-          <p:cNvPr id="216" name="W40.55"/>
-          <p:cNvSpPr/>
-          <p:nvPr/>
-        </p:nvSpPr>
-        <p:spPr>
-          <a:xfrm>
-            <a:off x="502920" y="3602736"/>
-            <a:ext cx="2377440" cy="457200"/>
-          </a:xfrm>
-          <a:prstGeom prst="roundRect">
-            <a:avLst/>
-          </a:prstGeom>
-          <a:solidFill>
-            <a:srgbClr val="FFFFFF"/>
-          </a:solidFill>
-          <a:ln w="9525">
-            <a:solidFill>
-              <a:srgbClr val="CDD2D7"/>
-            </a:solidFill>
-          </a:ln>
-        </p:spPr>
-        <p:style>
-          <a:lnRef idx="1">
-            <a:schemeClr val="accent1"/>
-          </a:lnRef>
-          <a:fillRef idx="3">
-            <a:schemeClr val="accent1"/>
-          </a:fillRef>
-          <a:effectRef idx="2">
-            <a:schemeClr val="accent1"/>
-          </a:effectRef>
-          <a:fontRef idx="minor">
-            <a:schemeClr val="lt1"/>
-          </a:fontRef>
-        </p:style>
-        <p:txBody>
-          <a:bodyPr wrap="square" lIns="91440" tIns="36576" rIns="91440" bIns="36576" rtlCol="0" anchor="ctr"/>
-          <a:lstStyle/>
-          <a:p>
-            <a:pPr algn="l"/>
-            <a:r>
-              <a:rPr sz="1000" b="0">
-                <a:solidFill>
-                  <a:srgbClr val="3a3a3a"/>
-                </a:solidFill>
-                <a:latin typeface="Arial"/>
-              </a:rPr>
-              <a:t>Guo et al. (2017)</a:t>
-            </a:r>
-          </a:p>
-        </p:txBody>
-      </p:sp>
-      <p:sp>
-        <p:nvSpPr>
-          <p:cNvPr id="217" name="W43.25"/>
-          <p:cNvSpPr/>
-          <p:nvPr/>
-        </p:nvSpPr>
-        <p:spPr>
-          <a:xfrm>
-            <a:off x="2971800" y="3602736"/>
-            <a:ext cx="3108960" cy="457200"/>
-          </a:xfrm>
-          <a:prstGeom prst="roundRect">
-            <a:avLst/>
-          </a:prstGeom>
-          <a:solidFill>
-            <a:srgbClr val="FFFFFF"/>
-          </a:solidFill>
-          <a:ln w="9525">
-            <a:solidFill>
-              <a:srgbClr val="CDD2D7"/>
-            </a:solidFill>
-          </a:ln>
-        </p:spPr>
-        <p:style>
-          <a:lnRef idx="1">
-            <a:schemeClr val="accent1"/>
-          </a:lnRef>
-          <a:fillRef idx="3">
-            <a:schemeClr val="accent1"/>
-          </a:fillRef>
-          <a:effectRef idx="2">
-            <a:schemeClr val="accent1"/>
-          </a:effectRef>
-          <a:fontRef idx="minor">
-            <a:schemeClr val="lt1"/>
-          </a:fontRef>
-        </p:style>
-        <p:txBody>
-          <a:bodyPr wrap="square" lIns="91440" tIns="36576" rIns="91440" bIns="36576" rtlCol="0" anchor="ctr"/>
-          <a:lstStyle/>
-          <a:p>
-            <a:pPr algn="l"/>
-            <a:r>
-              <a:rPr sz="1000" b="0">
-                <a:solidFill>
-                  <a:srgbClr val="3a3a3a"/>
-                </a:solidFill>
-                <a:latin typeface="Arial"/>
-              </a:rPr>
-              <a:t>Temperature scaling for calibrated outputs</a:t>
-            </a:r>
-          </a:p>
-        </p:txBody>
-      </p:sp>
-      <p:sp>
-        <p:nvSpPr>
-          <p:cNvPr id="218" name="W46.75"/>
-          <p:cNvSpPr/>
-          <p:nvPr/>
-        </p:nvSpPr>
-        <p:spPr>
-          <a:xfrm>
-            <a:off x="6172200" y="3602736"/>
-            <a:ext cx="2468880" cy="457200"/>
-          </a:xfrm>
-          <a:prstGeom prst="roundRect">
-            <a:avLst/>
-          </a:prstGeom>
-          <a:solidFill>
-            <a:srgbClr val="E3F2EA"/>
-          </a:solidFill>
-          <a:ln w="9525">
-            <a:solidFill>
-              <a:srgbClr val="1E7A5A"/>
-            </a:solidFill>
-          </a:ln>
-        </p:spPr>
-        <p:style>
-          <a:lnRef idx="1">
-            <a:schemeClr val="accent1"/>
-          </a:lnRef>
-          <a:fillRef idx="3">
-            <a:schemeClr val="accent1"/>
-          </a:fillRef>
-          <a:effectRef idx="2">
-            <a:schemeClr val="accent1"/>
-          </a:effectRef>
-          <a:fontRef idx="minor">
-            <a:schemeClr val="lt1"/>
-          </a:fontRef>
-        </p:style>
-        <p:txBody>
-          <a:bodyPr wrap="square" lIns="91440" tIns="36576" rIns="91440" bIns="36576" rtlCol="0" anchor="ctr"/>
-          <a:lstStyle/>
-          <a:p>
-            <a:pPr algn="l"/>
-            <a:r>
-              <a:rPr sz="1000" b="0">
-                <a:solidFill>
-                  <a:srgbClr val="3a3a3a"/>
-                </a:solidFill>
-                <a:latin typeface="Arial"/>
-              </a:rPr>
-              <a:t>Used to calibrate probabilities</a:t>
-            </a:r>
-          </a:p>
-        </p:txBody>
-      </p:sp>
-      <p:sp>
-        <p:nvSpPr>
-          <p:cNvPr id="219" name="Banner"/>
-          <p:cNvSpPr/>
-          <p:nvPr/>
-        </p:nvSpPr>
-        <p:spPr>
-          <a:xfrm>
-            <a:off x="502920" y="4315968"/>
-            <a:ext cx="8138160" cy="365760"/>
-          </a:xfrm>
-          <a:prstGeom prst="roundRect">
-            <a:avLst/>
-          </a:prstGeom>
-          <a:solidFill>
-            <a:srgbClr val="F2F5F8"/>
-          </a:solidFill>
-          <a:ln w="9525">
-            <a:solidFill>
-              <a:srgbClr val="CDD2D7"/>
-            </a:solidFill>
-          </a:ln>
-        </p:spPr>
-        <p:style>
-          <a:lnRef idx="1">
-            <a:schemeClr val="accent1"/>
-          </a:lnRef>
-          <a:fillRef idx="3">
-            <a:schemeClr val="accent1"/>
-          </a:fillRef>
-          <a:effectRef idx="2">
-            <a:schemeClr val="accent1"/>
-          </a:effectRef>
-          <a:fontRef idx="minor">
-            <a:schemeClr val="lt1"/>
-          </a:fontRef>
-        </p:style>
-        <p:txBody>
-          <a:bodyPr wrap="square" lIns="91440" tIns="36576" rIns="91440" bIns="36576" rtlCol="0" anchor="ctr"/>
-          <a:lstStyle/>
-          <a:p>
-            <a:pPr algn="ctr"/>
-            <a:r>
-              <a:rPr sz="1100" b="1">
-                <a:solidFill>
-                  <a:srgbClr val="121212"/>
-                </a:solidFill>
-                <a:latin typeface="Arial"/>
-              </a:rPr>
-              <a:t>Still to do: a literature search for early-DR and merged-data studies.</a:t>
+              <a:t>do external benchmarks carry capture cues, such as image size, that a model could use instead of disease?</a:t>
             </a:r>
           </a:p>
         </p:txBody>
@@ -26505,7 +24648,7 @@
                 </a:solidFill>
                 <a:latin typeface="Arial"/>
               </a:rPr>
-              <a:t>How It Is Different</a:t>
+              <a:t>Relevant Works</a:t>
             </a:r>
           </a:p>
         </p:txBody>
@@ -26540,7 +24683,7 @@
                 </a:solidFill>
                 <a:latin typeface="Arial"/>
               </a:rPr>
-              <a:t>Common practice as I understand it, to be checked in the literature review</a:t>
+              <a:t>Data and methods this project builds on</a:t>
             </a:r>
           </a:p>
         </p:txBody>
@@ -26582,17 +24725,19 @@
       </p:sp>
       <p:sp>
         <p:nvSpPr>
-          <p:cNvPr id="201" name="H0"/>
+          <p:cNvPr id="201" name="Bullets"/>
           <p:cNvSpPr/>
           <p:nvPr/>
         </p:nvSpPr>
         <p:spPr>
           <a:xfrm>
             <a:off x="502920" y="1280160"/>
-            <a:ext cx="1188720" cy="292608"/>
+            <a:ext cx="8138160" cy="2971800"/>
           </a:xfrm>
           <a:prstGeom prst="roundRect">
-            <a:avLst/>
+            <a:avLst>
+              <a:gd name="adj" fmla="val 6000"/>
+            </a:avLst>
           </a:prstGeom>
           <a:solidFill>
             <a:srgbClr val="FFFFFF"/>
@@ -26621,940 +24766,135 @@
           <a:bodyPr wrap="square" lIns="91440" tIns="36576" rIns="91440" bIns="36576" rtlCol="0" anchor="ctr"/>
           <a:lstStyle/>
           <a:p>
-            <a:pPr algn="l"/>
+            <a:pPr algn="l">
+              <a:spcAft>
+                <a:spcPts val="900"/>
+              </a:spcAft>
+            </a:pPr>
             <a:r>
-              <a:rPr sz="1000" b="1">
+              <a:rPr sz="1400" b="1">
                 <a:solidFill>
                   <a:srgbClr val="121212"/>
                 </a:solidFill>
                 <a:latin typeface="Arial"/>
               </a:rPr>
-              <a:t/>
+              <a:t>• Gulshan et al. (2016): </a:t>
+            </a:r>
+            <a:r>
+              <a:rPr sz="1300" b="0">
+                <a:solidFill>
+                  <a:srgbClr val="3a3a3a"/>
+                </a:solidFill>
+                <a:latin typeface="Arial"/>
+              </a:rPr>
+              <a:t>deep learning for referable DR; this project targets early DR</a:t>
+            </a:r>
+          </a:p>
+          <a:p>
+            <a:pPr algn="l">
+              <a:spcAft>
+                <a:spcPts val="900"/>
+              </a:spcAft>
+            </a:pPr>
+            <a:r>
+              <a:rPr sz="1400" b="1">
+                <a:solidFill>
+                  <a:srgbClr val="121212"/>
+                </a:solidFill>
+                <a:latin typeface="Arial"/>
+              </a:rPr>
+              <a:t>• DDR (Li et al., 2019), EyePACS (Kaggle, 2015), APTOS 2019: </a:t>
+            </a:r>
+            <a:r>
+              <a:rPr sz="1300" b="0">
+                <a:solidFill>
+                  <a:srgbClr val="3a3a3a"/>
+                </a:solidFill>
+                <a:latin typeface="Arial"/>
+              </a:rPr>
+              <a:t>my three data sources, used for training, held-out and external testing</a:t>
+            </a:r>
+          </a:p>
+          <a:p>
+            <a:pPr algn="l">
+              <a:spcAft>
+                <a:spcPts val="900"/>
+              </a:spcAft>
+            </a:pPr>
+            <a:r>
+              <a:rPr sz="1400" b="1">
+                <a:solidFill>
+                  <a:srgbClr val="121212"/>
+                </a:solidFill>
+                <a:latin typeface="Arial"/>
+              </a:rPr>
+              <a:t>• Guo et al. (2017): </a:t>
+            </a:r>
+            <a:r>
+              <a:rPr sz="1300" b="0">
+                <a:solidFill>
+                  <a:srgbClr val="3a3a3a"/>
+                </a:solidFill>
+                <a:latin typeface="Arial"/>
+              </a:rPr>
+              <a:t>temperature scaling, used for calibrated probabilities</a:t>
+            </a:r>
+          </a:p>
+          <a:p>
+            <a:pPr algn="l">
+              <a:spcAft>
+                <a:spcPts val="900"/>
+              </a:spcAft>
+            </a:pPr>
+            <a:r>
+              <a:rPr sz="1400" b="1">
+                <a:solidFill>
+                  <a:srgbClr val="121212"/>
+                </a:solidFill>
+                <a:latin typeface="Arial"/>
+              </a:rPr>
+              <a:t>• Recent review (arXiv, 2025): </a:t>
+            </a:r>
+            <a:r>
+              <a:rPr sz="1300" b="0">
+                <a:solidFill>
+                  <a:srgbClr val="3a3a3a"/>
+                </a:solidFill>
+                <a:latin typeface="Arial"/>
+              </a:rPr>
+              <a:t>describes cross-dataset degradation and the need for external test sets</a:t>
+            </a:r>
+          </a:p>
+          <a:p>
+            <a:pPr algn="l">
+              <a:spcAft>
+                <a:spcPts val="900"/>
+              </a:spcAft>
+            </a:pPr>
+            <a:r>
+              <a:rPr sz="1400" b="1">
+                <a:solidFill>
+                  <a:srgbClr val="121212"/>
+                </a:solidFill>
+                <a:latin typeface="Arial"/>
+              </a:rPr>
+              <a:t>• Cross-camera validation (2022): </a:t>
+            </a:r>
+            <a:r>
+              <a:rPr sz="1300" b="0">
+                <a:solidFill>
+                  <a:srgbClr val="3a3a3a"/>
+                </a:solidFill>
+                <a:latin typeface="Arial"/>
+              </a:rPr>
+              <a:t>one DR software tested across camera models, for referable DR only</a:t>
             </a:r>
           </a:p>
         </p:txBody>
       </p:sp>
       <p:sp>
         <p:nvSpPr>
-          <p:cNvPr id="202" name="H1"/>
-          <p:cNvSpPr/>
-          <p:nvPr/>
-        </p:nvSpPr>
-        <p:spPr>
-          <a:xfrm>
-            <a:off x="1783080" y="1280160"/>
-            <a:ext cx="3246120" cy="292608"/>
-          </a:xfrm>
-          <a:prstGeom prst="roundRect">
-            <a:avLst/>
-          </a:prstGeom>
-          <a:solidFill>
-            <a:srgbClr val="3D5F84"/>
-          </a:solidFill>
-          <a:ln w="9525">
-            <a:solidFill>
-              <a:srgbClr val="3D5F84"/>
-            </a:solidFill>
-          </a:ln>
-        </p:spPr>
-        <p:style>
-          <a:lnRef idx="1">
-            <a:schemeClr val="accent1"/>
-          </a:lnRef>
-          <a:fillRef idx="3">
-            <a:schemeClr val="accent1"/>
-          </a:fillRef>
-          <a:effectRef idx="2">
-            <a:schemeClr val="accent1"/>
-          </a:effectRef>
-          <a:fontRef idx="minor">
-            <a:schemeClr val="lt1"/>
-          </a:fontRef>
-        </p:style>
-        <p:txBody>
-          <a:bodyPr wrap="square" lIns="91440" tIns="36576" rIns="91440" bIns="36576" rtlCol="0" anchor="ctr"/>
-          <a:lstStyle/>
-          <a:p>
-            <a:pPr algn="l"/>
-            <a:r>
-              <a:rPr sz="1050" b="1">
-                <a:solidFill>
-                  <a:srgbClr val="FFFFFF"/>
-                </a:solidFill>
-                <a:latin typeface="Arial"/>
-              </a:rPr>
-              <a:t>Common in existing work (to verify)</a:t>
-            </a:r>
-          </a:p>
-        </p:txBody>
-      </p:sp>
-      <p:sp>
-        <p:nvSpPr>
-          <p:cNvPr id="203" name="H2"/>
-          <p:cNvSpPr/>
-          <p:nvPr/>
-        </p:nvSpPr>
-        <p:spPr>
-          <a:xfrm>
-            <a:off x="5120640" y="1280160"/>
-            <a:ext cx="3566160" cy="292608"/>
-          </a:xfrm>
-          <a:prstGeom prst="roundRect">
-            <a:avLst/>
-          </a:prstGeom>
-          <a:solidFill>
-            <a:srgbClr val="1E7A5A"/>
-          </a:solidFill>
-          <a:ln w="9525">
-            <a:solidFill>
-              <a:srgbClr val="1E7A5A"/>
-            </a:solidFill>
-          </a:ln>
-        </p:spPr>
-        <p:style>
-          <a:lnRef idx="1">
-            <a:schemeClr val="accent1"/>
-          </a:lnRef>
-          <a:fillRef idx="3">
-            <a:schemeClr val="accent1"/>
-          </a:fillRef>
-          <a:effectRef idx="2">
-            <a:schemeClr val="accent1"/>
-          </a:effectRef>
-          <a:fontRef idx="minor">
-            <a:schemeClr val="lt1"/>
-          </a:fontRef>
-        </p:style>
-        <p:txBody>
-          <a:bodyPr wrap="square" lIns="91440" tIns="36576" rIns="91440" bIns="36576" rtlCol="0" anchor="ctr"/>
-          <a:lstStyle/>
-          <a:p>
-            <a:pPr algn="l"/>
-            <a:r>
-              <a:rPr sz="1050" b="1">
-                <a:solidFill>
-                  <a:srgbClr val="FFFFFF"/>
-                </a:solidFill>
-                <a:latin typeface="Arial"/>
-              </a:rPr>
-              <a:t>This project</a:t>
-            </a:r>
-          </a:p>
-        </p:txBody>
-      </p:sp>
-      <p:sp>
-        <p:nvSpPr>
-          <p:cNvPr id="204" name="L0"/>
-          <p:cNvSpPr/>
-          <p:nvPr/>
-        </p:nvSpPr>
-        <p:spPr>
-          <a:xfrm>
-            <a:off x="502920" y="1645920"/>
-            <a:ext cx="1188720" cy="457200"/>
-          </a:xfrm>
-          <a:prstGeom prst="roundRect">
-            <a:avLst/>
-          </a:prstGeom>
-          <a:solidFill>
-            <a:srgbClr val="E4ECF6"/>
-          </a:solidFill>
-          <a:ln w="9525">
-            <a:solidFill>
-              <a:srgbClr val="BCCFE4"/>
-            </a:solidFill>
-          </a:ln>
-        </p:spPr>
-        <p:style>
-          <a:lnRef idx="1">
-            <a:schemeClr val="accent1"/>
-          </a:lnRef>
-          <a:fillRef idx="3">
-            <a:schemeClr val="accent1"/>
-          </a:fillRef>
-          <a:effectRef idx="2">
-            <a:schemeClr val="accent1"/>
-          </a:effectRef>
-          <a:fontRef idx="minor">
-            <a:schemeClr val="lt1"/>
-          </a:fontRef>
-        </p:style>
-        <p:txBody>
-          <a:bodyPr wrap="square" lIns="91440" tIns="36576" rIns="91440" bIns="36576" rtlCol="0" anchor="ctr"/>
-          <a:lstStyle/>
-          <a:p>
-            <a:pPr algn="l"/>
-            <a:r>
-              <a:rPr sz="1100" b="1">
-                <a:solidFill>
-                  <a:srgbClr val="121212"/>
-                </a:solidFill>
-                <a:latin typeface="Arial"/>
-              </a:rPr>
-              <a:t>Target</a:t>
-            </a:r>
-          </a:p>
-        </p:txBody>
-      </p:sp>
-      <p:sp>
-        <p:nvSpPr>
-          <p:cNvPr id="205" name="C0"/>
-          <p:cNvSpPr/>
-          <p:nvPr/>
-        </p:nvSpPr>
-        <p:spPr>
-          <a:xfrm>
-            <a:off x="1783080" y="1645920"/>
-            <a:ext cx="3246120" cy="457200"/>
-          </a:xfrm>
-          <a:prstGeom prst="roundRect">
-            <a:avLst/>
-          </a:prstGeom>
-          <a:solidFill>
-            <a:srgbClr val="FFFFFF"/>
-          </a:solidFill>
-          <a:ln w="9525">
-            <a:solidFill>
-              <a:srgbClr val="CDD2D7"/>
-            </a:solidFill>
-          </a:ln>
-        </p:spPr>
-        <p:style>
-          <a:lnRef idx="1">
-            <a:schemeClr val="accent1"/>
-          </a:lnRef>
-          <a:fillRef idx="3">
-            <a:schemeClr val="accent1"/>
-          </a:fillRef>
-          <a:effectRef idx="2">
-            <a:schemeClr val="accent1"/>
-          </a:effectRef>
-          <a:fontRef idx="minor">
-            <a:schemeClr val="lt1"/>
-          </a:fontRef>
-        </p:style>
-        <p:txBody>
-          <a:bodyPr wrap="square" lIns="91440" tIns="36576" rIns="91440" bIns="36576" rtlCol="0" anchor="ctr"/>
-          <a:lstStyle/>
-          <a:p>
-            <a:pPr algn="l"/>
-            <a:r>
-              <a:rPr sz="1050" b="0">
-                <a:solidFill>
-                  <a:srgbClr val="3a3a3a"/>
-                </a:solidFill>
-                <a:latin typeface="Arial"/>
-              </a:rPr>
-              <a:t>Referable DR (moderate or worse)</a:t>
-            </a:r>
-          </a:p>
-        </p:txBody>
-      </p:sp>
-      <p:sp>
-        <p:nvSpPr>
-          <p:cNvPr id="206" name="D0"/>
-          <p:cNvSpPr/>
-          <p:nvPr/>
-        </p:nvSpPr>
-        <p:spPr>
-          <a:xfrm>
-            <a:off x="5120640" y="1645920"/>
-            <a:ext cx="3566160" cy="457200"/>
-          </a:xfrm>
-          <a:prstGeom prst="roundRect">
-            <a:avLst/>
-          </a:prstGeom>
-          <a:solidFill>
-            <a:srgbClr val="E3F2EA"/>
-          </a:solidFill>
-          <a:ln w="9525">
-            <a:solidFill>
-              <a:srgbClr val="1E7A5A"/>
-            </a:solidFill>
-          </a:ln>
-        </p:spPr>
-        <p:style>
-          <a:lnRef idx="1">
-            <a:schemeClr val="accent1"/>
-          </a:lnRef>
-          <a:fillRef idx="3">
-            <a:schemeClr val="accent1"/>
-          </a:fillRef>
-          <a:effectRef idx="2">
-            <a:schemeClr val="accent1"/>
-          </a:effectRef>
-          <a:fontRef idx="minor">
-            <a:schemeClr val="lt1"/>
-          </a:fontRef>
-        </p:style>
-        <p:txBody>
-          <a:bodyPr wrap="square" lIns="91440" tIns="36576" rIns="91440" bIns="36576" rtlCol="0" anchor="ctr"/>
-          <a:lstStyle/>
-          <a:p>
-            <a:pPr algn="l"/>
-            <a:r>
-              <a:rPr sz="1050" b="0">
-                <a:solidFill>
-                  <a:srgbClr val="121212"/>
-                </a:solidFill>
-                <a:latin typeface="Arial"/>
-              </a:rPr>
-              <a:t>Early DR (grades 1-2) at a fixed specificity</a:t>
-            </a:r>
-          </a:p>
-        </p:txBody>
-      </p:sp>
-      <p:sp>
-        <p:nvSpPr>
-          <p:cNvPr id="207" name="L1"/>
-          <p:cNvSpPr/>
-          <p:nvPr/>
-        </p:nvSpPr>
-        <p:spPr>
-          <a:xfrm>
-            <a:off x="502920" y="2167128"/>
-            <a:ext cx="1188720" cy="457200"/>
-          </a:xfrm>
-          <a:prstGeom prst="roundRect">
-            <a:avLst/>
-          </a:prstGeom>
-          <a:solidFill>
-            <a:srgbClr val="E4ECF6"/>
-          </a:solidFill>
-          <a:ln w="9525">
-            <a:solidFill>
-              <a:srgbClr val="BCCFE4"/>
-            </a:solidFill>
-          </a:ln>
-        </p:spPr>
-        <p:style>
-          <a:lnRef idx="1">
-            <a:schemeClr val="accent1"/>
-          </a:lnRef>
-          <a:fillRef idx="3">
-            <a:schemeClr val="accent1"/>
-          </a:fillRef>
-          <a:effectRef idx="2">
-            <a:schemeClr val="accent1"/>
-          </a:effectRef>
-          <a:fontRef idx="minor">
-            <a:schemeClr val="lt1"/>
-          </a:fontRef>
-        </p:style>
-        <p:txBody>
-          <a:bodyPr wrap="square" lIns="91440" tIns="36576" rIns="91440" bIns="36576" rtlCol="0" anchor="ctr"/>
-          <a:lstStyle/>
-          <a:p>
-            <a:pPr algn="l"/>
-            <a:r>
-              <a:rPr sz="1100" b="1">
-                <a:solidFill>
-                  <a:srgbClr val="121212"/>
-                </a:solidFill>
-                <a:latin typeface="Arial"/>
-              </a:rPr>
-              <a:t>Data</a:t>
-            </a:r>
-          </a:p>
-        </p:txBody>
-      </p:sp>
-      <p:sp>
-        <p:nvSpPr>
-          <p:cNvPr id="208" name="C1"/>
-          <p:cNvSpPr/>
-          <p:nvPr/>
-        </p:nvSpPr>
-        <p:spPr>
-          <a:xfrm>
-            <a:off x="1783080" y="2167128"/>
-            <a:ext cx="3246120" cy="457200"/>
-          </a:xfrm>
-          <a:prstGeom prst="roundRect">
-            <a:avLst/>
-          </a:prstGeom>
-          <a:solidFill>
-            <a:srgbClr val="FFFFFF"/>
-          </a:solidFill>
-          <a:ln w="9525">
-            <a:solidFill>
-              <a:srgbClr val="CDD2D7"/>
-            </a:solidFill>
-          </a:ln>
-        </p:spPr>
-        <p:style>
-          <a:lnRef idx="1">
-            <a:schemeClr val="accent1"/>
-          </a:lnRef>
-          <a:fillRef idx="3">
-            <a:schemeClr val="accent1"/>
-          </a:fillRef>
-          <a:effectRef idx="2">
-            <a:schemeClr val="accent1"/>
-          </a:effectRef>
-          <a:fontRef idx="minor">
-            <a:schemeClr val="lt1"/>
-          </a:fontRef>
-        </p:style>
-        <p:txBody>
-          <a:bodyPr wrap="square" lIns="91440" tIns="36576" rIns="91440" bIns="36576" rtlCol="0" anchor="ctr"/>
-          <a:lstStyle/>
-          <a:p>
-            <a:pPr algn="l"/>
-            <a:r>
-              <a:rPr sz="1050" b="0">
-                <a:solidFill>
-                  <a:srgbClr val="3a3a3a"/>
-                </a:solidFill>
-                <a:latin typeface="Arial"/>
-              </a:rPr>
-              <a:t>One dataset, or merged without testing the merge</a:t>
-            </a:r>
-          </a:p>
-        </p:txBody>
-      </p:sp>
-      <p:sp>
-        <p:nvSpPr>
-          <p:cNvPr id="209" name="D1"/>
-          <p:cNvSpPr/>
-          <p:nvPr/>
-        </p:nvSpPr>
-        <p:spPr>
-          <a:xfrm>
-            <a:off x="5120640" y="2167128"/>
-            <a:ext cx="3566160" cy="457200"/>
-          </a:xfrm>
-          <a:prstGeom prst="roundRect">
-            <a:avLst/>
-          </a:prstGeom>
-          <a:solidFill>
-            <a:srgbClr val="E3F2EA"/>
-          </a:solidFill>
-          <a:ln w="9525">
-            <a:solidFill>
-              <a:srgbClr val="1E7A5A"/>
-            </a:solidFill>
-          </a:ln>
-        </p:spPr>
-        <p:style>
-          <a:lnRef idx="1">
-            <a:schemeClr val="accent1"/>
-          </a:lnRef>
-          <a:fillRef idx="3">
-            <a:schemeClr val="accent1"/>
-          </a:fillRef>
-          <a:effectRef idx="2">
-            <a:schemeClr val="accent1"/>
-          </a:effectRef>
-          <a:fontRef idx="minor">
-            <a:schemeClr val="lt1"/>
-          </a:fontRef>
-        </p:style>
-        <p:txBody>
-          <a:bodyPr wrap="square" lIns="91440" tIns="36576" rIns="91440" bIns="36576" rtlCol="0" anchor="ctr"/>
-          <a:lstStyle/>
-          <a:p>
-            <a:pPr algn="l"/>
-            <a:r>
-              <a:rPr sz="1050" b="0">
-                <a:solidFill>
-                  <a:srgbClr val="121212"/>
-                </a:solidFill>
-                <a:latin typeface="Arial"/>
-              </a:rPr>
-              <a:t>The merge is tested: DDR only, source-balanced, and the old merge as a control</a:t>
-            </a:r>
-          </a:p>
-        </p:txBody>
-      </p:sp>
-      <p:sp>
-        <p:nvSpPr>
-          <p:cNvPr id="210" name="L2"/>
-          <p:cNvSpPr/>
-          <p:nvPr/>
-        </p:nvSpPr>
-        <p:spPr>
-          <a:xfrm>
-            <a:off x="502920" y="2688336"/>
-            <a:ext cx="1188720" cy="457200"/>
-          </a:xfrm>
-          <a:prstGeom prst="roundRect">
-            <a:avLst/>
-          </a:prstGeom>
-          <a:solidFill>
-            <a:srgbClr val="E4ECF6"/>
-          </a:solidFill>
-          <a:ln w="9525">
-            <a:solidFill>
-              <a:srgbClr val="BCCFE4"/>
-            </a:solidFill>
-          </a:ln>
-        </p:spPr>
-        <p:style>
-          <a:lnRef idx="1">
-            <a:schemeClr val="accent1"/>
-          </a:lnRef>
-          <a:fillRef idx="3">
-            <a:schemeClr val="accent1"/>
-          </a:fillRef>
-          <a:effectRef idx="2">
-            <a:schemeClr val="accent1"/>
-          </a:effectRef>
-          <a:fontRef idx="minor">
-            <a:schemeClr val="lt1"/>
-          </a:fontRef>
-        </p:style>
-        <p:txBody>
-          <a:bodyPr wrap="square" lIns="91440" tIns="36576" rIns="91440" bIns="36576" rtlCol="0" anchor="ctr"/>
-          <a:lstStyle/>
-          <a:p>
-            <a:pPr algn="l"/>
-            <a:r>
-              <a:rPr sz="1100" b="1">
-                <a:solidFill>
-                  <a:srgbClr val="121212"/>
-                </a:solidFill>
-                <a:latin typeface="Arial"/>
-              </a:rPr>
-              <a:t>Imbalance</a:t>
-            </a:r>
-          </a:p>
-        </p:txBody>
-      </p:sp>
-      <p:sp>
-        <p:nvSpPr>
-          <p:cNvPr id="211" name="C2"/>
-          <p:cNvSpPr/>
-          <p:nvPr/>
-        </p:nvSpPr>
-        <p:spPr>
-          <a:xfrm>
-            <a:off x="1783080" y="2688336"/>
-            <a:ext cx="3246120" cy="457200"/>
-          </a:xfrm>
-          <a:prstGeom prst="roundRect">
-            <a:avLst/>
-          </a:prstGeom>
-          <a:solidFill>
-            <a:srgbClr val="FFFFFF"/>
-          </a:solidFill>
-          <a:ln w="9525">
-            <a:solidFill>
-              <a:srgbClr val="CDD2D7"/>
-            </a:solidFill>
-          </a:ln>
-        </p:spPr>
-        <p:style>
-          <a:lnRef idx="1">
-            <a:schemeClr val="accent1"/>
-          </a:lnRef>
-          <a:fillRef idx="3">
-            <a:schemeClr val="accent1"/>
-          </a:fillRef>
-          <a:effectRef idx="2">
-            <a:schemeClr val="accent1"/>
-          </a:effectRef>
-          <a:fontRef idx="minor">
-            <a:schemeClr val="lt1"/>
-          </a:fontRef>
-        </p:style>
-        <p:txBody>
-          <a:bodyPr wrap="square" lIns="91440" tIns="36576" rIns="91440" bIns="36576" rtlCol="0" anchor="ctr"/>
-          <a:lstStyle/>
-          <a:p>
-            <a:pPr algn="l"/>
-            <a:r>
-              <a:rPr sz="1050" b="0">
-                <a:solidFill>
-                  <a:srgbClr val="3a3a3a"/>
-                </a:solidFill>
-                <a:latin typeface="Arial"/>
-              </a:rPr>
-              <a:t>A new method against a few baselines</a:t>
-            </a:r>
-          </a:p>
-        </p:txBody>
-      </p:sp>
-      <p:sp>
-        <p:nvSpPr>
-          <p:cNvPr id="212" name="D2"/>
-          <p:cNvSpPr/>
-          <p:nvPr/>
-        </p:nvSpPr>
-        <p:spPr>
-          <a:xfrm>
-            <a:off x="5120640" y="2688336"/>
-            <a:ext cx="3566160" cy="457200"/>
-          </a:xfrm>
-          <a:prstGeom prst="roundRect">
-            <a:avLst/>
-          </a:prstGeom>
-          <a:solidFill>
-            <a:srgbClr val="E3F2EA"/>
-          </a:solidFill>
-          <a:ln w="9525">
-            <a:solidFill>
-              <a:srgbClr val="1E7A5A"/>
-            </a:solidFill>
-          </a:ln>
-        </p:spPr>
-        <p:style>
-          <a:lnRef idx="1">
-            <a:schemeClr val="accent1"/>
-          </a:lnRef>
-          <a:fillRef idx="3">
-            <a:schemeClr val="accent1"/>
-          </a:fillRef>
-          <a:effectRef idx="2">
-            <a:schemeClr val="accent1"/>
-          </a:effectRef>
-          <a:fontRef idx="minor">
-            <a:schemeClr val="lt1"/>
-          </a:fontRef>
-        </p:style>
-        <p:txBody>
-          <a:bodyPr wrap="square" lIns="91440" tIns="36576" rIns="91440" bIns="36576" rtlCol="0" anchor="ctr"/>
-          <a:lstStyle/>
-          <a:p>
-            <a:pPr algn="l"/>
-            <a:r>
-              <a:rPr sz="1050" b="0">
-                <a:solidFill>
-                  <a:srgbClr val="121212"/>
-                </a:solidFill>
-                <a:latin typeface="Arial"/>
-              </a:rPr>
-              <a:t>Sampler, loss and augmentation one at a time, with a control</a:t>
-            </a:r>
-          </a:p>
-        </p:txBody>
-      </p:sp>
-      <p:sp>
-        <p:nvSpPr>
-          <p:cNvPr id="213" name="L3"/>
-          <p:cNvSpPr/>
-          <p:nvPr/>
-        </p:nvSpPr>
-        <p:spPr>
-          <a:xfrm>
-            <a:off x="502920" y="3209544"/>
-            <a:ext cx="1188720" cy="457200"/>
-          </a:xfrm>
-          <a:prstGeom prst="roundRect">
-            <a:avLst/>
-          </a:prstGeom>
-          <a:solidFill>
-            <a:srgbClr val="E4ECF6"/>
-          </a:solidFill>
-          <a:ln w="9525">
-            <a:solidFill>
-              <a:srgbClr val="BCCFE4"/>
-            </a:solidFill>
-          </a:ln>
-        </p:spPr>
-        <p:style>
-          <a:lnRef idx="1">
-            <a:schemeClr val="accent1"/>
-          </a:lnRef>
-          <a:fillRef idx="3">
-            <a:schemeClr val="accent1"/>
-          </a:fillRef>
-          <a:effectRef idx="2">
-            <a:schemeClr val="accent1"/>
-          </a:effectRef>
-          <a:fontRef idx="minor">
-            <a:schemeClr val="lt1"/>
-          </a:fontRef>
-        </p:style>
-        <p:txBody>
-          <a:bodyPr wrap="square" lIns="91440" tIns="36576" rIns="91440" bIns="36576" rtlCol="0" anchor="ctr"/>
-          <a:lstStyle/>
-          <a:p>
-            <a:pPr algn="l"/>
-            <a:r>
-              <a:rPr sz="1100" b="1">
-                <a:solidFill>
-                  <a:srgbClr val="121212"/>
-                </a:solidFill>
-                <a:latin typeface="Arial"/>
-              </a:rPr>
-              <a:t>Transfer</a:t>
-            </a:r>
-          </a:p>
-        </p:txBody>
-      </p:sp>
-      <p:sp>
-        <p:nvSpPr>
-          <p:cNvPr id="214" name="C3"/>
-          <p:cNvSpPr/>
-          <p:nvPr/>
-        </p:nvSpPr>
-        <p:spPr>
-          <a:xfrm>
-            <a:off x="1783080" y="3209544"/>
-            <a:ext cx="3246120" cy="457200"/>
-          </a:xfrm>
-          <a:prstGeom prst="roundRect">
-            <a:avLst/>
-          </a:prstGeom>
-          <a:solidFill>
-            <a:srgbClr val="FFFFFF"/>
-          </a:solidFill>
-          <a:ln w="9525">
-            <a:solidFill>
-              <a:srgbClr val="CDD2D7"/>
-            </a:solidFill>
-          </a:ln>
-        </p:spPr>
-        <p:style>
-          <a:lnRef idx="1">
-            <a:schemeClr val="accent1"/>
-          </a:lnRef>
-          <a:fillRef idx="3">
-            <a:schemeClr val="accent1"/>
-          </a:fillRef>
-          <a:effectRef idx="2">
-            <a:schemeClr val="accent1"/>
-          </a:effectRef>
-          <a:fontRef idx="minor">
-            <a:schemeClr val="lt1"/>
-          </a:fontRef>
-        </p:style>
-        <p:txBody>
-          <a:bodyPr wrap="square" lIns="91440" tIns="36576" rIns="91440" bIns="36576" rtlCol="0" anchor="ctr"/>
-          <a:lstStyle/>
-          <a:p>
-            <a:pPr algn="l"/>
-            <a:r>
-              <a:rPr sz="1050" b="0">
-                <a:solidFill>
-                  <a:srgbClr val="3a3a3a"/>
-                </a:solidFill>
-                <a:latin typeface="Arial"/>
-              </a:rPr>
-              <a:t>Internal splits or one external set</a:t>
-            </a:r>
-          </a:p>
-        </p:txBody>
-      </p:sp>
-      <p:sp>
-        <p:nvSpPr>
-          <p:cNvPr id="215" name="D3"/>
-          <p:cNvSpPr/>
-          <p:nvPr/>
-        </p:nvSpPr>
-        <p:spPr>
-          <a:xfrm>
-            <a:off x="5120640" y="3209544"/>
-            <a:ext cx="3566160" cy="457200"/>
-          </a:xfrm>
-          <a:prstGeom prst="roundRect">
-            <a:avLst/>
-          </a:prstGeom>
-          <a:solidFill>
-            <a:srgbClr val="E3F2EA"/>
-          </a:solidFill>
-          <a:ln w="9525">
-            <a:solidFill>
-              <a:srgbClr val="1E7A5A"/>
-            </a:solidFill>
-          </a:ln>
-        </p:spPr>
-        <p:style>
-          <a:lnRef idx="1">
-            <a:schemeClr val="accent1"/>
-          </a:lnRef>
-          <a:fillRef idx="3">
-            <a:schemeClr val="accent1"/>
-          </a:fillRef>
-          <a:effectRef idx="2">
-            <a:schemeClr val="accent1"/>
-          </a:effectRef>
-          <a:fontRef idx="minor">
-            <a:schemeClr val="lt1"/>
-          </a:fontRef>
-        </p:style>
-        <p:txBody>
-          <a:bodyPr wrap="square" lIns="91440" tIns="36576" rIns="91440" bIns="36576" rtlCol="0" anchor="ctr"/>
-          <a:lstStyle/>
-          <a:p>
-            <a:pPr algn="l"/>
-            <a:r>
-              <a:rPr sz="1050" b="0">
-                <a:solidFill>
-                  <a:srgbClr val="121212"/>
-                </a:solidFill>
-                <a:latin typeface="Arial"/>
-              </a:rPr>
-              <a:t>Held-out EyePACS patients plus APTOS, reported per source</a:t>
-            </a:r>
-          </a:p>
-        </p:txBody>
-      </p:sp>
-      <p:sp>
-        <p:nvSpPr>
-          <p:cNvPr id="216" name="L4"/>
-          <p:cNvSpPr/>
-          <p:nvPr/>
-        </p:nvSpPr>
-        <p:spPr>
-          <a:xfrm>
-            <a:off x="502920" y="3730752"/>
-            <a:ext cx="1188720" cy="457200"/>
-          </a:xfrm>
-          <a:prstGeom prst="roundRect">
-            <a:avLst/>
-          </a:prstGeom>
-          <a:solidFill>
-            <a:srgbClr val="E4ECF6"/>
-          </a:solidFill>
-          <a:ln w="9525">
-            <a:solidFill>
-              <a:srgbClr val="BCCFE4"/>
-            </a:solidFill>
-          </a:ln>
-        </p:spPr>
-        <p:style>
-          <a:lnRef idx="1">
-            <a:schemeClr val="accent1"/>
-          </a:lnRef>
-          <a:fillRef idx="3">
-            <a:schemeClr val="accent1"/>
-          </a:fillRef>
-          <a:effectRef idx="2">
-            <a:schemeClr val="accent1"/>
-          </a:effectRef>
-          <a:fontRef idx="minor">
-            <a:schemeClr val="lt1"/>
-          </a:fontRef>
-        </p:style>
-        <p:txBody>
-          <a:bodyPr wrap="square" lIns="91440" tIns="36576" rIns="91440" bIns="36576" rtlCol="0" anchor="ctr"/>
-          <a:lstStyle/>
-          <a:p>
-            <a:pPr algn="l"/>
-            <a:r>
-              <a:rPr sz="1100" b="1">
-                <a:solidFill>
-                  <a:srgbClr val="121212"/>
-                </a:solidFill>
-                <a:latin typeface="Arial"/>
-              </a:rPr>
-              <a:t>Probabilities</a:t>
-            </a:r>
-          </a:p>
-        </p:txBody>
-      </p:sp>
-      <p:sp>
-        <p:nvSpPr>
-          <p:cNvPr id="217" name="C4"/>
-          <p:cNvSpPr/>
-          <p:nvPr/>
-        </p:nvSpPr>
-        <p:spPr>
-          <a:xfrm>
-            <a:off x="1783080" y="3730752"/>
-            <a:ext cx="3246120" cy="457200"/>
-          </a:xfrm>
-          <a:prstGeom prst="roundRect">
-            <a:avLst/>
-          </a:prstGeom>
-          <a:solidFill>
-            <a:srgbClr val="FFFFFF"/>
-          </a:solidFill>
-          <a:ln w="9525">
-            <a:solidFill>
-              <a:srgbClr val="CDD2D7"/>
-            </a:solidFill>
-          </a:ln>
-        </p:spPr>
-        <p:style>
-          <a:lnRef idx="1">
-            <a:schemeClr val="accent1"/>
-          </a:lnRef>
-          <a:fillRef idx="3">
-            <a:schemeClr val="accent1"/>
-          </a:fillRef>
-          <a:effectRef idx="2">
-            <a:schemeClr val="accent1"/>
-          </a:effectRef>
-          <a:fontRef idx="minor">
-            <a:schemeClr val="lt1"/>
-          </a:fontRef>
-        </p:style>
-        <p:txBody>
-          <a:bodyPr wrap="square" lIns="91440" tIns="36576" rIns="91440" bIns="36576" rtlCol="0" anchor="ctr"/>
-          <a:lstStyle/>
-          <a:p>
-            <a:pPr algn="l"/>
-            <a:r>
-              <a:rPr sz="1050" b="0">
-                <a:solidFill>
-                  <a:srgbClr val="3a3a3a"/>
-                </a:solidFill>
-                <a:latin typeface="Arial"/>
-              </a:rPr>
-              <a:t>Accuracy or AUC</a:t>
-            </a:r>
-          </a:p>
-        </p:txBody>
-      </p:sp>
-      <p:sp>
-        <p:nvSpPr>
-          <p:cNvPr id="218" name="D4"/>
-          <p:cNvSpPr/>
-          <p:nvPr/>
-        </p:nvSpPr>
-        <p:spPr>
-          <a:xfrm>
-            <a:off x="5120640" y="3730752"/>
-            <a:ext cx="3566160" cy="457200"/>
-          </a:xfrm>
-          <a:prstGeom prst="roundRect">
-            <a:avLst/>
-          </a:prstGeom>
-          <a:solidFill>
-            <a:srgbClr val="E3F2EA"/>
-          </a:solidFill>
-          <a:ln w="9525">
-            <a:solidFill>
-              <a:srgbClr val="1E7A5A"/>
-            </a:solidFill>
-          </a:ln>
-        </p:spPr>
-        <p:style>
-          <a:lnRef idx="1">
-            <a:schemeClr val="accent1"/>
-          </a:lnRef>
-          <a:fillRef idx="3">
-            <a:schemeClr val="accent1"/>
-          </a:fillRef>
-          <a:effectRef idx="2">
-            <a:schemeClr val="accent1"/>
-          </a:effectRef>
-          <a:fontRef idx="minor">
-            <a:schemeClr val="lt1"/>
-          </a:fontRef>
-        </p:style>
-        <p:txBody>
-          <a:bodyPr wrap="square" lIns="91440" tIns="36576" rIns="91440" bIns="36576" rtlCol="0" anchor="ctr"/>
-          <a:lstStyle/>
-          <a:p>
-            <a:pPr algn="l"/>
-            <a:r>
-              <a:rPr sz="1050" b="0">
-                <a:solidFill>
-                  <a:srgbClr val="121212"/>
-                </a:solidFill>
-                <a:latin typeface="Arial"/>
-              </a:rPr>
-              <a:t>Calibrated, prior-shift-corrected, with reliability curves</a:t>
-            </a:r>
-          </a:p>
-        </p:txBody>
-      </p:sp>
-      <p:sp>
-        <p:nvSpPr>
-          <p:cNvPr id="219" name="Banner"/>
+          <p:cNvPr id="202" name="Banner"/>
           <p:cNvSpPr/>
           <p:nvPr/>
         </p:nvSpPr>
@@ -27601,7 +24941,7 @@
                 </a:solidFill>
                 <a:latin typeface="Arial"/>
               </a:rPr>
-              <a:t>Not a new network: the value is the design and the evidence. Novelty claims wait for the literature search.</a:t>
+              <a:t>Still to do: a systematic literature search for early-DR and merged-data studies.</a:t>
             </a:r>
           </a:p>
         </p:txBody>
@@ -27659,7 +24999,7 @@
                 </a:solidFill>
                 <a:latin typeface="Arial"/>
               </a:rPr>
-              <a:t>Proposed Methods</a:t>
+              <a:t>How It Is Different</a:t>
             </a:r>
           </a:p>
         </p:txBody>
@@ -27673,7 +25013,7 @@
         <p:spPr>
           <a:xfrm>
             <a:off x="566928" y="932688"/>
-            <a:ext cx="5486400" cy="256032"/>
+            <a:ext cx="8138160" cy="256032"/>
           </a:xfrm>
           <a:prstGeom prst="rect">
             <a:avLst/>
@@ -27694,890 +25034,7 @@
                 </a:solidFill>
                 <a:latin typeface="Arial"/>
               </a:rPr>
-              <a:t>Three data arms, one change at a time</a:t>
-            </a:r>
-          </a:p>
-        </p:txBody>
-      </p:sp>
-      <p:sp>
-        <p:nvSpPr>
-          <p:cNvPr id="4" name="TextBox 3"/>
-          <p:cNvSpPr txBox="1"/>
-          <p:nvPr/>
-        </p:nvSpPr>
-        <p:spPr>
-          <a:xfrm>
-            <a:off x="566928" y="1207008"/>
-            <a:ext cx="7315200" cy="274320"/>
-          </a:xfrm>
-          <a:prstGeom prst="rect">
-            <a:avLst/>
-          </a:prstGeom>
-          <a:noFill/>
-        </p:spPr>
-        <p:txBody>
-          <a:bodyPr wrap="square" lIns="27432" tIns="18288" rIns="27432" bIns="18288" anchor="t">
-            <a:spAutoFit/>
-          </a:bodyPr>
-          <a:lstStyle/>
-          <a:p>
-            <a:pPr algn="l"/>
-            <a:r>
-              <a:rPr sz="1120" b="0" i="0">
-                <a:solidFill>
-                  <a:srgbClr val="121212"/>
-                </a:solidFill>
-                <a:latin typeface="Arial"/>
-              </a:rPr>
-              <a:t>Same model, image size and epochs; frozen patient-level splits; test sets opened once.</a:t>
-            </a:r>
-          </a:p>
-        </p:txBody>
-      </p:sp>
-      <p:sp>
-        <p:nvSpPr>
-          <p:cNvPr id="9" name="Rounded Rectangle 8"/>
-          <p:cNvSpPr/>
-          <p:nvPr/>
-        </p:nvSpPr>
-        <p:spPr>
-          <a:xfrm>
-            <a:off x="640080" y="1737360"/>
-            <a:ext cx="1335024" cy="640080"/>
-          </a:xfrm>
-          <a:prstGeom prst="roundRect">
-            <a:avLst/>
-          </a:prstGeom>
-          <a:solidFill>
-            <a:srgbClr val="BCCFE4"/>
-          </a:solidFill>
-          <a:ln w="9525">
-            <a:solidFill>
-              <a:srgbClr val="BCCFE4"/>
-            </a:solidFill>
-          </a:ln>
-        </p:spPr>
-        <p:style>
-          <a:lnRef idx="1">
-            <a:schemeClr val="accent1"/>
-          </a:lnRef>
-          <a:fillRef idx="3">
-            <a:schemeClr val="accent1"/>
-          </a:fillRef>
-          <a:effectRef idx="2">
-            <a:schemeClr val="accent1"/>
-          </a:effectRef>
-          <a:fontRef idx="minor">
-            <a:schemeClr val="lt1"/>
-          </a:fontRef>
-        </p:style>
-        <p:txBody>
-          <a:bodyPr wrap="square" lIns="54864" tIns="36576" rIns="54864" bIns="36576" rtlCol="0" anchor="ctr"/>
-          <a:lstStyle/>
-          <a:p>
-            <a:pPr algn="ctr"/>
-            <a:r>
-              <a:rPr sz="880" b="1">
-                <a:solidFill>
-                  <a:srgbClr val="121212"/>
-                </a:solidFill>
-                <a:latin typeface="Arial"/>
-              </a:rPr>
-              <a:t>Data</a:t>
-            </a:r>
-            <a:br>
-              <a:rPr sz="880" b="1">
-                <a:solidFill>
-                  <a:srgbClr val="121212"/>
-                </a:solidFill>
-                <a:latin typeface="Arial"/>
-              </a:rPr>
-            </a:br>
-            <a:r>
-              <a:rPr sz="880" b="1">
-                <a:solidFill>
-                  <a:srgbClr val="121212"/>
-                </a:solidFill>
-                <a:latin typeface="Arial"/>
-              </a:rPr>
-              <a:t>DDR, EyePACS, APTOS</a:t>
-            </a:r>
-          </a:p>
-        </p:txBody>
-      </p:sp>
-      <p:sp>
-        <p:nvSpPr>
-          <p:cNvPr id="10" name="Rounded Rectangle 9"/>
-          <p:cNvSpPr/>
-          <p:nvPr/>
-        </p:nvSpPr>
-        <p:spPr>
-          <a:xfrm>
-            <a:off x="2249424" y="1737360"/>
-            <a:ext cx="1335024" cy="640080"/>
-          </a:xfrm>
-          <a:prstGeom prst="roundRect">
-            <a:avLst/>
-          </a:prstGeom>
-          <a:solidFill>
-            <a:srgbClr val="BCCFE4"/>
-          </a:solidFill>
-          <a:ln w="9525">
-            <a:solidFill>
-              <a:srgbClr val="BCCFE4"/>
-            </a:solidFill>
-          </a:ln>
-        </p:spPr>
-        <p:style>
-          <a:lnRef idx="1">
-            <a:schemeClr val="accent1"/>
-          </a:lnRef>
-          <a:fillRef idx="3">
-            <a:schemeClr val="accent1"/>
-          </a:fillRef>
-          <a:effectRef idx="2">
-            <a:schemeClr val="accent1"/>
-          </a:effectRef>
-          <a:fontRef idx="minor">
-            <a:schemeClr val="lt1"/>
-          </a:fontRef>
-        </p:style>
-        <p:txBody>
-          <a:bodyPr wrap="square" lIns="54864" tIns="36576" rIns="54864" bIns="36576" rtlCol="0" anchor="ctr"/>
-          <a:lstStyle/>
-          <a:p>
-            <a:pPr algn="ctr"/>
-            <a:r>
-              <a:rPr sz="880" b="1">
-                <a:solidFill>
-                  <a:srgbClr val="121212"/>
-                </a:solidFill>
-                <a:latin typeface="Arial"/>
-              </a:rPr>
-              <a:t>Prepare</a:t>
-            </a:r>
-            <a:br>
-              <a:rPr sz="880" b="1">
-                <a:solidFill>
-                  <a:srgbClr val="121212"/>
-                </a:solidFill>
-                <a:latin typeface="Arial"/>
-              </a:rPr>
-            </a:br>
-            <a:r>
-              <a:rPr sz="880" b="1">
-                <a:solidFill>
-                  <a:srgbClr val="121212"/>
-                </a:solidFill>
-                <a:latin typeface="Arial"/>
-              </a:rPr>
-              <a:t>Crop, pad, 512 px</a:t>
-            </a:r>
-          </a:p>
-        </p:txBody>
-      </p:sp>
-      <p:sp>
-        <p:nvSpPr>
-          <p:cNvPr id="11" name="Rounded Rectangle 10"/>
-          <p:cNvSpPr/>
-          <p:nvPr/>
-        </p:nvSpPr>
-        <p:spPr>
-          <a:xfrm>
-            <a:off x="3858768" y="1737360"/>
-            <a:ext cx="1335024" cy="640080"/>
-          </a:xfrm>
-          <a:prstGeom prst="roundRect">
-            <a:avLst/>
-          </a:prstGeom>
-          <a:solidFill>
-            <a:srgbClr val="BCCFE4"/>
-          </a:solidFill>
-          <a:ln w="9525">
-            <a:solidFill>
-              <a:srgbClr val="BCCFE4"/>
-            </a:solidFill>
-          </a:ln>
-        </p:spPr>
-        <p:style>
-          <a:lnRef idx="1">
-            <a:schemeClr val="accent1"/>
-          </a:lnRef>
-          <a:fillRef idx="3">
-            <a:schemeClr val="accent1"/>
-          </a:fillRef>
-          <a:effectRef idx="2">
-            <a:schemeClr val="accent1"/>
-          </a:effectRef>
-          <a:fontRef idx="minor">
-            <a:schemeClr val="lt1"/>
-          </a:fontRef>
-        </p:style>
-        <p:txBody>
-          <a:bodyPr wrap="square" lIns="54864" tIns="36576" rIns="54864" bIns="36576" rtlCol="0" anchor="ctr"/>
-          <a:lstStyle/>
-          <a:p>
-            <a:pPr algn="ctr"/>
-            <a:r>
-              <a:rPr sz="880" b="1">
-                <a:solidFill>
-                  <a:srgbClr val="121212"/>
-                </a:solidFill>
-                <a:latin typeface="Arial"/>
-              </a:rPr>
-              <a:t>Merge arms</a:t>
-            </a:r>
-            <a:br>
-              <a:rPr sz="880" b="1">
-                <a:solidFill>
-                  <a:srgbClr val="121212"/>
-                </a:solidFill>
-                <a:latin typeface="Arial"/>
-              </a:rPr>
-            </a:br>
-            <a:r>
-              <a:rPr sz="880" b="1">
-                <a:solidFill>
-                  <a:srgbClr val="121212"/>
-                </a:solidFill>
-                <a:latin typeface="Arial"/>
-              </a:rPr>
-              <a:t>A, B, C</a:t>
-            </a:r>
-          </a:p>
-        </p:txBody>
-      </p:sp>
-      <p:sp>
-        <p:nvSpPr>
-          <p:cNvPr id="12" name="Rounded Rectangle 11"/>
-          <p:cNvSpPr/>
-          <p:nvPr/>
-        </p:nvSpPr>
-        <p:spPr>
-          <a:xfrm>
-            <a:off x="5468112" y="1737360"/>
-            <a:ext cx="1335024" cy="640080"/>
-          </a:xfrm>
-          <a:prstGeom prst="roundRect">
-            <a:avLst/>
-          </a:prstGeom>
-          <a:solidFill>
-            <a:srgbClr val="E0F1EB"/>
-          </a:solidFill>
-          <a:ln w="9525">
-            <a:solidFill>
-              <a:srgbClr val="00634A"/>
-            </a:solidFill>
-          </a:ln>
-        </p:spPr>
-        <p:style>
-          <a:lnRef idx="1">
-            <a:schemeClr val="accent1"/>
-          </a:lnRef>
-          <a:fillRef idx="3">
-            <a:schemeClr val="accent1"/>
-          </a:fillRef>
-          <a:effectRef idx="2">
-            <a:schemeClr val="accent1"/>
-          </a:effectRef>
-          <a:fontRef idx="minor">
-            <a:schemeClr val="lt1"/>
-          </a:fontRef>
-        </p:style>
-        <p:txBody>
-          <a:bodyPr wrap="square" lIns="54864" tIns="36576" rIns="54864" bIns="36576" rtlCol="0" anchor="ctr"/>
-          <a:lstStyle/>
-          <a:p>
-            <a:pPr algn="ctr"/>
-            <a:r>
-              <a:rPr sz="880" b="1">
-                <a:solidFill>
-                  <a:srgbClr val="121212"/>
-                </a:solidFill>
-                <a:latin typeface="Arial"/>
-              </a:rPr>
-              <a:t>Model</a:t>
-            </a:r>
-            <a:br>
-              <a:rPr sz="880" b="1">
-                <a:solidFill>
-                  <a:srgbClr val="121212"/>
-                </a:solidFill>
-                <a:latin typeface="Arial"/>
-              </a:rPr>
-            </a:br>
-            <a:r>
-              <a:rPr sz="880" b="1">
-                <a:solidFill>
-                  <a:srgbClr val="121212"/>
-                </a:solidFill>
-                <a:latin typeface="Arial"/>
-              </a:rPr>
-              <a:t>EfficientNet-B0</a:t>
-            </a:r>
-          </a:p>
-        </p:txBody>
-      </p:sp>
-      <p:sp>
-        <p:nvSpPr>
-          <p:cNvPr id="13" name="Rounded Rectangle 12"/>
-          <p:cNvSpPr/>
-          <p:nvPr/>
-        </p:nvSpPr>
-        <p:spPr>
-          <a:xfrm>
-            <a:off x="7077456" y="1737360"/>
-            <a:ext cx="1335024" cy="640080"/>
-          </a:xfrm>
-          <a:prstGeom prst="roundRect">
-            <a:avLst/>
-          </a:prstGeom>
-          <a:solidFill>
-            <a:srgbClr val="E0F1EB"/>
-          </a:solidFill>
-          <a:ln w="9525">
-            <a:solidFill>
-              <a:srgbClr val="00634A"/>
-            </a:solidFill>
-          </a:ln>
-        </p:spPr>
-        <p:style>
-          <a:lnRef idx="1">
-            <a:schemeClr val="accent1"/>
-          </a:lnRef>
-          <a:fillRef idx="3">
-            <a:schemeClr val="accent1"/>
-          </a:fillRef>
-          <a:effectRef idx="2">
-            <a:schemeClr val="accent1"/>
-          </a:effectRef>
-          <a:fontRef idx="minor">
-            <a:schemeClr val="lt1"/>
-          </a:fontRef>
-        </p:style>
-        <p:txBody>
-          <a:bodyPr wrap="square" lIns="54864" tIns="36576" rIns="54864" bIns="36576" rtlCol="0" anchor="ctr"/>
-          <a:lstStyle/>
-          <a:p>
-            <a:pPr algn="ctr"/>
-            <a:r>
-              <a:rPr sz="880" b="1">
-                <a:solidFill>
-                  <a:srgbClr val="121212"/>
-                </a:solidFill>
-                <a:latin typeface="Arial"/>
-              </a:rPr>
-              <a:t>Output</a:t>
-            </a:r>
-            <a:br>
-              <a:rPr sz="880" b="1">
-                <a:solidFill>
-                  <a:srgbClr val="121212"/>
-                </a:solidFill>
-                <a:latin typeface="Arial"/>
-              </a:rPr>
-            </a:br>
-            <a:r>
-              <a:rPr sz="880" b="1">
-                <a:solidFill>
-                  <a:srgbClr val="121212"/>
-                </a:solidFill>
-                <a:latin typeface="Arial"/>
-              </a:rPr>
-              <a:t>Calibrated, 95% CI</a:t>
-            </a:r>
-          </a:p>
-        </p:txBody>
-      </p:sp>
-      <p:sp>
-        <p:nvSpPr>
-          <p:cNvPr id="14" name="TextBox 13"/>
-          <p:cNvSpPr txBox="1"/>
-          <p:nvPr/>
-        </p:nvSpPr>
-        <p:spPr>
-          <a:xfrm>
-            <a:off x="694944" y="2743200"/>
-            <a:ext cx="2514600" cy="201168"/>
-          </a:xfrm>
-          <a:prstGeom prst="rect">
-            <a:avLst/>
-          </a:prstGeom>
-          <a:noFill/>
-        </p:spPr>
-        <p:txBody>
-          <a:bodyPr wrap="square" lIns="27432" tIns="18288" rIns="27432" bIns="18288" anchor="t">
-            <a:spAutoFit/>
-          </a:bodyPr>
-          <a:lstStyle/>
-          <a:p>
-            <a:pPr algn="l"/>
-            <a:r>
-              <a:rPr sz="1220" b="1" i="0">
-                <a:solidFill>
-                  <a:srgbClr val="3D5F84"/>
-                </a:solidFill>
-                <a:latin typeface="Arial"/>
-              </a:rPr>
-              <a:t>Imbalance methods tested</a:t>
-            </a:r>
-          </a:p>
-        </p:txBody>
-      </p:sp>
-      <p:sp>
-        <p:nvSpPr>
-          <p:cNvPr id="15" name="Rounded Rectangle 14"/>
-          <p:cNvSpPr/>
-          <p:nvPr/>
-        </p:nvSpPr>
-        <p:spPr>
-          <a:xfrm>
-            <a:off x="731520" y="3044952"/>
-            <a:ext cx="1261872" cy="320040"/>
-          </a:xfrm>
-          <a:prstGeom prst="roundRect">
-            <a:avLst/>
-          </a:prstGeom>
-          <a:solidFill>
-            <a:srgbClr val="FFFFFF"/>
-          </a:solidFill>
-          <a:ln w="9525">
-            <a:solidFill>
-              <a:srgbClr val="CDD2D7"/>
-            </a:solidFill>
-          </a:ln>
-        </p:spPr>
-        <p:style>
-          <a:lnRef idx="1">
-            <a:schemeClr val="accent1"/>
-          </a:lnRef>
-          <a:fillRef idx="3">
-            <a:schemeClr val="accent1"/>
-          </a:fillRef>
-          <a:effectRef idx="2">
-            <a:schemeClr val="accent1"/>
-          </a:effectRef>
-          <a:fontRef idx="minor">
-            <a:schemeClr val="lt1"/>
-          </a:fontRef>
-        </p:style>
-        <p:txBody>
-          <a:bodyPr wrap="square" lIns="54864" tIns="36576" rIns="54864" bIns="36576" rtlCol="0" anchor="ctr"/>
-          <a:lstStyle/>
-          <a:p>
-            <a:pPr algn="ctr"/>
-            <a:r>
-              <a:rPr sz="869" b="1">
-                <a:solidFill>
-                  <a:srgbClr val="121212"/>
-                </a:solidFill>
-                <a:latin typeface="Arial"/>
-              </a:rPr>
-              <a:t>Weighted sampler</a:t>
-            </a:r>
-          </a:p>
-        </p:txBody>
-      </p:sp>
-      <p:sp>
-        <p:nvSpPr>
-          <p:cNvPr id="16" name="Rounded Rectangle 15"/>
-          <p:cNvSpPr/>
-          <p:nvPr/>
-        </p:nvSpPr>
-        <p:spPr>
-          <a:xfrm>
-            <a:off x="2130552" y="3044952"/>
-            <a:ext cx="1261872" cy="320040"/>
-          </a:xfrm>
-          <a:prstGeom prst="roundRect">
-            <a:avLst/>
-          </a:prstGeom>
-          <a:solidFill>
-            <a:srgbClr val="FFFFFF"/>
-          </a:solidFill>
-          <a:ln w="9525">
-            <a:solidFill>
-              <a:srgbClr val="CDD2D7"/>
-            </a:solidFill>
-          </a:ln>
-        </p:spPr>
-        <p:style>
-          <a:lnRef idx="1">
-            <a:schemeClr val="accent1"/>
-          </a:lnRef>
-          <a:fillRef idx="3">
-            <a:schemeClr val="accent1"/>
-          </a:fillRef>
-          <a:effectRef idx="2">
-            <a:schemeClr val="accent1"/>
-          </a:effectRef>
-          <a:fontRef idx="minor">
-            <a:schemeClr val="lt1"/>
-          </a:fontRef>
-        </p:style>
-        <p:txBody>
-          <a:bodyPr wrap="square" lIns="54864" tIns="36576" rIns="54864" bIns="36576" rtlCol="0" anchor="ctr"/>
-          <a:lstStyle/>
-          <a:p>
-            <a:pPr algn="ctr"/>
-            <a:r>
-              <a:rPr sz="869" b="1">
-                <a:solidFill>
-                  <a:srgbClr val="121212"/>
-                </a:solidFill>
-                <a:latin typeface="Arial"/>
-              </a:rPr>
-              <a:t>Class-balanced loss</a:t>
-            </a:r>
-          </a:p>
-        </p:txBody>
-      </p:sp>
-      <p:sp>
-        <p:nvSpPr>
-          <p:cNvPr id="17" name="Rounded Rectangle 16"/>
-          <p:cNvSpPr/>
-          <p:nvPr/>
-        </p:nvSpPr>
-        <p:spPr>
-          <a:xfrm>
-            <a:off x="3529584" y="3044952"/>
-            <a:ext cx="1261872" cy="320040"/>
-          </a:xfrm>
-          <a:prstGeom prst="roundRect">
-            <a:avLst/>
-          </a:prstGeom>
-          <a:solidFill>
-            <a:srgbClr val="FFFFFF"/>
-          </a:solidFill>
-          <a:ln w="9525">
-            <a:solidFill>
-              <a:srgbClr val="CDD2D7"/>
-            </a:solidFill>
-          </a:ln>
-        </p:spPr>
-        <p:style>
-          <a:lnRef idx="1">
-            <a:schemeClr val="accent1"/>
-          </a:lnRef>
-          <a:fillRef idx="3">
-            <a:schemeClr val="accent1"/>
-          </a:fillRef>
-          <a:effectRef idx="2">
-            <a:schemeClr val="accent1"/>
-          </a:effectRef>
-          <a:fontRef idx="minor">
-            <a:schemeClr val="lt1"/>
-          </a:fontRef>
-        </p:style>
-        <p:txBody>
-          <a:bodyPr wrap="square" lIns="54864" tIns="36576" rIns="54864" bIns="36576" rtlCol="0" anchor="ctr"/>
-          <a:lstStyle/>
-          <a:p>
-            <a:pPr algn="ctr"/>
-            <a:r>
-              <a:rPr sz="869" b="1">
-                <a:solidFill>
-                  <a:srgbClr val="121212"/>
-                </a:solidFill>
-                <a:latin typeface="Arial"/>
-              </a:rPr>
-              <a:t>Focal loss</a:t>
-            </a:r>
-          </a:p>
-        </p:txBody>
-      </p:sp>
-      <p:sp>
-        <p:nvSpPr>
-          <p:cNvPr id="18" name="Rounded Rectangle 17"/>
-          <p:cNvSpPr/>
-          <p:nvPr/>
-        </p:nvSpPr>
-        <p:spPr>
-          <a:xfrm>
-            <a:off x="731520" y="3483864"/>
-            <a:ext cx="1261872" cy="320040"/>
-          </a:xfrm>
-          <a:prstGeom prst="roundRect">
-            <a:avLst/>
-          </a:prstGeom>
-          <a:solidFill>
-            <a:srgbClr val="FFFFFF"/>
-          </a:solidFill>
-          <a:ln w="9525">
-            <a:solidFill>
-              <a:srgbClr val="CDD2D7"/>
-            </a:solidFill>
-          </a:ln>
-        </p:spPr>
-        <p:style>
-          <a:lnRef idx="1">
-            <a:schemeClr val="accent1"/>
-          </a:lnRef>
-          <a:fillRef idx="3">
-            <a:schemeClr val="accent1"/>
-          </a:fillRef>
-          <a:effectRef idx="2">
-            <a:schemeClr val="accent1"/>
-          </a:effectRef>
-          <a:fontRef idx="minor">
-            <a:schemeClr val="lt1"/>
-          </a:fontRef>
-        </p:style>
-        <p:txBody>
-          <a:bodyPr wrap="square" lIns="54864" tIns="36576" rIns="54864" bIns="36576" rtlCol="0" anchor="ctr"/>
-          <a:lstStyle/>
-          <a:p>
-            <a:pPr algn="ctr"/>
-            <a:r>
-              <a:rPr sz="869" b="1">
-                <a:solidFill>
-                  <a:srgbClr val="121212"/>
-                </a:solidFill>
-                <a:latin typeface="Arial"/>
-              </a:rPr>
-              <a:t>Strong augmentation</a:t>
-            </a:r>
-          </a:p>
-        </p:txBody>
-      </p:sp>
-      <p:sp>
-        <p:nvSpPr>
-          <p:cNvPr id="19" name="Rounded Rectangle 18"/>
-          <p:cNvSpPr/>
-          <p:nvPr/>
-        </p:nvSpPr>
-        <p:spPr>
-          <a:xfrm>
-            <a:off x="2130552" y="3483864"/>
-            <a:ext cx="1261872" cy="320040"/>
-          </a:xfrm>
-          <a:prstGeom prst="roundRect">
-            <a:avLst/>
-          </a:prstGeom>
-          <a:solidFill>
-            <a:srgbClr val="FFFFFF"/>
-          </a:solidFill>
-          <a:ln w="9525">
-            <a:solidFill>
-              <a:srgbClr val="CDD2D7"/>
-            </a:solidFill>
-          </a:ln>
-        </p:spPr>
-        <p:style>
-          <a:lnRef idx="1">
-            <a:schemeClr val="accent1"/>
-          </a:lnRef>
-          <a:fillRef idx="3">
-            <a:schemeClr val="accent1"/>
-          </a:fillRef>
-          <a:effectRef idx="2">
-            <a:schemeClr val="accent1"/>
-          </a:effectRef>
-          <a:fontRef idx="minor">
-            <a:schemeClr val="lt1"/>
-          </a:fontRef>
-        </p:style>
-        <p:txBody>
-          <a:bodyPr wrap="square" lIns="54864" tIns="36576" rIns="54864" bIns="36576" rtlCol="0" anchor="ctr"/>
-          <a:lstStyle/>
-          <a:p>
-            <a:pPr algn="ctr"/>
-            <a:r>
-              <a:rPr sz="869" b="1">
-                <a:solidFill>
-                  <a:srgbClr val="121212"/>
-                </a:solidFill>
-                <a:latin typeface="Arial"/>
-              </a:rPr>
-              <a:t>Augmentation control</a:t>
-            </a:r>
-          </a:p>
-        </p:txBody>
-      </p:sp>
-      <p:sp>
-        <p:nvSpPr>
-          <p:cNvPr id="20" name="TextBox 19"/>
-          <p:cNvSpPr txBox="1"/>
-          <p:nvPr/>
-        </p:nvSpPr>
-        <p:spPr>
-          <a:xfrm>
-            <a:off x="5010912" y="2743200"/>
-            <a:ext cx="2926080" cy="201168"/>
-          </a:xfrm>
-          <a:prstGeom prst="rect">
-            <a:avLst/>
-          </a:prstGeom>
-          <a:noFill/>
-        </p:spPr>
-        <p:txBody>
-          <a:bodyPr wrap="square" lIns="27432" tIns="18288" rIns="27432" bIns="18288" anchor="t">
-            <a:spAutoFit/>
-          </a:bodyPr>
-          <a:lstStyle/>
-          <a:p>
-            <a:pPr algn="l"/>
-            <a:r>
-              <a:rPr sz="1220" b="1" i="0">
-                <a:solidFill>
-                  <a:srgbClr val="3D5F84"/>
-                </a:solidFill>
-                <a:latin typeface="Arial"/>
-              </a:rPr>
-              <a:t>The three arms</a:t>
-            </a:r>
-          </a:p>
-        </p:txBody>
-      </p:sp>
-      <p:sp>
-        <p:nvSpPr>
-          <p:cNvPr id="21" name="TextBox 20"/>
-          <p:cNvSpPr txBox="1"/>
-          <p:nvPr/>
-        </p:nvSpPr>
-        <p:spPr>
-          <a:xfrm>
-            <a:off x="5029200" y="2999232"/>
-            <a:ext cx="3520440" cy="960120"/>
-          </a:xfrm>
-          <a:prstGeom prst="rect">
-            <a:avLst/>
-          </a:prstGeom>
-          <a:noFill/>
-        </p:spPr>
-        <p:txBody>
-          <a:bodyPr wrap="square" lIns="18288" tIns="18288" rIns="18288" bIns="18288">
-            <a:spAutoFit/>
-          </a:bodyPr>
-          <a:lstStyle/>
-          <a:p>
-            <a:pPr algn="l">
-              <a:lnSpc>
-                <a:spcPct val="105000"/>
-              </a:lnSpc>
-              <a:spcAft>
-                <a:spcPts val="400"/>
-              </a:spcAft>
-            </a:pPr>
-            <a:r>
-              <a:rPr sz="1000">
-                <a:solidFill>
-                  <a:srgbClr val="121212"/>
-                </a:solidFill>
-                <a:latin typeface="Arial"/>
-              </a:rPr>
-              <a:t>• A: DDR only (clean baseline)</a:t>
-            </a:r>
-          </a:p>
-          <a:p>
-            <a:pPr algn="l">
-              <a:lnSpc>
-                <a:spcPct val="105000"/>
-              </a:lnSpc>
-              <a:spcAft>
-                <a:spcPts val="400"/>
-              </a:spcAft>
-            </a:pPr>
-            <a:r>
-              <a:rPr sz="1000">
-                <a:solidFill>
-                  <a:srgbClr val="121212"/>
-                </a:solidFill>
-                <a:latin typeface="Arial"/>
-              </a:rPr>
-              <a:t>• B: DDR + EyePACS, source-balanced</a:t>
-            </a:r>
-          </a:p>
-          <a:p>
-            <a:pPr algn="l">
-              <a:lnSpc>
-                <a:spcPct val="105000"/>
-              </a:lnSpc>
-              <a:spcAft>
-                <a:spcPts val="400"/>
-              </a:spcAft>
-            </a:pPr>
-            <a:r>
-              <a:rPr sz="1000">
-                <a:solidFill>
-                  <a:srgbClr val="121212"/>
-                </a:solidFill>
-                <a:latin typeface="Arial"/>
-              </a:rPr>
-              <a:t>• C: version 1 merge (negative control)</a:t>
-            </a:r>
-          </a:p>
-          <a:p>
-            <a:pPr algn="l">
-              <a:lnSpc>
-                <a:spcPct val="105000"/>
-              </a:lnSpc>
-              <a:spcAft>
-                <a:spcPts val="400"/>
-              </a:spcAft>
-            </a:pPr>
-            <a:r>
-              <a:rPr sz="1000">
-                <a:solidFill>
-                  <a:srgbClr val="121212"/>
-                </a:solidFill>
-                <a:latin typeface="Arial"/>
-              </a:rPr>
-              <a:t>• The question: does the merge help, or teach the source?</a:t>
-            </a:r>
-          </a:p>
-        </p:txBody>
-      </p:sp>
-      <p:sp>
-        <p:nvSpPr>
-          <p:cNvPr id="22" name="Rounded Rectangle 21"/>
-          <p:cNvSpPr/>
-          <p:nvPr/>
-        </p:nvSpPr>
-        <p:spPr>
-          <a:xfrm>
-            <a:off x="1097280" y="4160520"/>
-            <a:ext cx="6903720" cy="329184"/>
-          </a:xfrm>
-          <a:prstGeom prst="roundRect">
-            <a:avLst/>
-          </a:prstGeom>
-          <a:solidFill>
-            <a:srgbClr val="F2F5F8"/>
-          </a:solidFill>
-          <a:ln w="9525">
-            <a:solidFill>
-              <a:srgbClr val="CDD2D7"/>
-            </a:solidFill>
-          </a:ln>
-        </p:spPr>
-        <p:style>
-          <a:lnRef idx="1">
-            <a:schemeClr val="accent1"/>
-          </a:lnRef>
-          <a:fillRef idx="3">
-            <a:schemeClr val="accent1"/>
-          </a:fillRef>
-          <a:effectRef idx="2">
-            <a:schemeClr val="accent1"/>
-          </a:effectRef>
-          <a:fontRef idx="minor">
-            <a:schemeClr val="lt1"/>
-          </a:fontRef>
-        </p:style>
-        <p:txBody>
-          <a:bodyPr wrap="square" lIns="54864" tIns="36576" rIns="54864" bIns="36576" rtlCol="0" anchor="ctr"/>
-          <a:lstStyle/>
-          <a:p>
-            <a:pPr algn="ctr"/>
-            <a:r>
-              <a:rPr sz="980" b="1">
-                <a:solidFill>
-                  <a:srgbClr val="121212"/>
-                </a:solidFill>
-                <a:latin typeface="Arial"/>
-              </a:rPr>
-              <a:t>Not a new network: the value is the design, the controls and the evidence.</a:t>
+              <a:t>Common practice as I understand it, to be checked in the literature review</a:t>
             </a:r>
           </a:p>
         </p:txBody>
@@ -28619,149 +25076,224 @@
       </p:sp>
       <p:sp>
         <p:nvSpPr>
-          <p:cNvPr id="27" name="Shape 8">
-            <a:extLst>
-              <a:ext uri="{FF2B5EF4-FFF2-40B4-BE49-F238E27FC236}">
-                <a16:creationId xmlns:a16="http://schemas.microsoft.com/office/drawing/2014/main" id="{D3022105-94A7-5198-D6E2-77CC59383713}"/>
-              </a:ext>
-            </a:extLst>
-          </p:cNvPr>
+          <p:cNvPr id="201" name="Bullets"/>
           <p:cNvSpPr/>
           <p:nvPr/>
         </p:nvSpPr>
         <p:spPr>
-          <a:xfrm flipV="1">
-            <a:off x="2059718" y="2057015"/>
-            <a:ext cx="141667" cy="0"/>
+          <a:xfrm>
+            <a:off x="502920" y="1280160"/>
+            <a:ext cx="8138160" cy="2971800"/>
           </a:xfrm>
-          <a:prstGeom prst="line">
-            <a:avLst/>
+          <a:prstGeom prst="roundRect">
+            <a:avLst>
+              <a:gd name="adj" fmla="val 6000"/>
+            </a:avLst>
           </a:prstGeom>
-          <a:noFill/>
-          <a:ln w="25400">
+          <a:solidFill>
+            <a:srgbClr val="FFFFFF"/>
+          </a:solidFill>
+          <a:ln w="9525">
             <a:solidFill>
-              <a:srgbClr val="555555"/>
+              <a:srgbClr val="FFFFFF"/>
             </a:solidFill>
-            <a:prstDash val="solid"/>
-            <a:tailEnd type="triangle"/>
           </a:ln>
         </p:spPr>
+        <p:style>
+          <a:lnRef idx="1">
+            <a:schemeClr val="accent1"/>
+          </a:lnRef>
+          <a:fillRef idx="3">
+            <a:schemeClr val="accent1"/>
+          </a:fillRef>
+          <a:effectRef idx="2">
+            <a:schemeClr val="accent1"/>
+          </a:effectRef>
+          <a:fontRef idx="minor">
+            <a:schemeClr val="lt1"/>
+          </a:fontRef>
+        </p:style>
         <p:txBody>
-          <a:bodyPr/>
+          <a:bodyPr wrap="square" lIns="91440" tIns="36576" rIns="91440" bIns="36576" rtlCol="0" anchor="ctr"/>
           <a:lstStyle/>
           <a:p>
-            <a:endParaRPr sz="1050"/>
+            <a:pPr algn="l">
+              <a:spcAft>
+                <a:spcPts val="900"/>
+              </a:spcAft>
+            </a:pPr>
+            <a:r>
+              <a:rPr sz="1500" b="1">
+                <a:solidFill>
+                  <a:srgbClr val="121212"/>
+                </a:solidFill>
+                <a:latin typeface="Arial"/>
+              </a:rPr>
+              <a:t>• Target: </a:t>
+            </a:r>
+            <a:r>
+              <a:rPr sz="1400" b="0">
+                <a:solidFill>
+                  <a:srgbClr val="3a3a3a"/>
+                </a:solidFill>
+                <a:latin typeface="Arial"/>
+              </a:rPr>
+              <a:t>early DR (grades 1-2) at a fixed specificity, not referable DR</a:t>
+            </a:r>
+          </a:p>
+          <a:p>
+            <a:pPr algn="l">
+              <a:spcAft>
+                <a:spcPts val="900"/>
+              </a:spcAft>
+            </a:pPr>
+            <a:r>
+              <a:rPr sz="1500" b="1">
+                <a:solidFill>
+                  <a:srgbClr val="121212"/>
+                </a:solidFill>
+                <a:latin typeface="Arial"/>
+              </a:rPr>
+              <a:t>• Data: </a:t>
+            </a:r>
+            <a:r>
+              <a:rPr sz="1400" b="0">
+                <a:solidFill>
+                  <a:srgbClr val="3a3a3a"/>
+                </a:solidFill>
+                <a:latin typeface="Arial"/>
+              </a:rPr>
+              <a:t>the merge itself is tested, with DDR only, source-balanced and old-merge arms</a:t>
+            </a:r>
+          </a:p>
+          <a:p>
+            <a:pPr algn="l">
+              <a:spcAft>
+                <a:spcPts val="900"/>
+              </a:spcAft>
+            </a:pPr>
+            <a:r>
+              <a:rPr sz="1500" b="1">
+                <a:solidFill>
+                  <a:srgbClr val="121212"/>
+                </a:solidFill>
+                <a:latin typeface="Arial"/>
+              </a:rPr>
+              <a:t>• Imbalance: </a:t>
+            </a:r>
+            <a:r>
+              <a:rPr sz="1400" b="0">
+                <a:solidFill>
+                  <a:srgbClr val="3a3a3a"/>
+                </a:solidFill>
+                <a:latin typeface="Arial"/>
+              </a:rPr>
+              <a:t>sampler, loss and augmentation compared one at a time, with a control</a:t>
+            </a:r>
+          </a:p>
+          <a:p>
+            <a:pPr algn="l">
+              <a:spcAft>
+                <a:spcPts val="900"/>
+              </a:spcAft>
+            </a:pPr>
+            <a:r>
+              <a:rPr sz="1500" b="1">
+                <a:solidFill>
+                  <a:srgbClr val="121212"/>
+                </a:solidFill>
+                <a:latin typeface="Arial"/>
+              </a:rPr>
+              <a:t>• Transfer: </a:t>
+            </a:r>
+            <a:r>
+              <a:rPr sz="1400" b="0">
+                <a:solidFill>
+                  <a:srgbClr val="3a3a3a"/>
+                </a:solidFill>
+                <a:latin typeface="Arial"/>
+              </a:rPr>
+              <a:t>held-out EyePACS patients plus APTOS, reported per source</a:t>
+            </a:r>
+          </a:p>
+          <a:p>
+            <a:pPr algn="l">
+              <a:spcAft>
+                <a:spcPts val="900"/>
+              </a:spcAft>
+            </a:pPr>
+            <a:r>
+              <a:rPr sz="1500" b="1">
+                <a:solidFill>
+                  <a:srgbClr val="121212"/>
+                </a:solidFill>
+                <a:latin typeface="Arial"/>
+              </a:rPr>
+              <a:t>• Evidence: </a:t>
+            </a:r>
+            <a:r>
+              <a:rPr sz="1400" b="0">
+                <a:solidFill>
+                  <a:srgbClr val="3a3a3a"/>
+                </a:solidFill>
+                <a:latin typeface="Arial"/>
+              </a:rPr>
+              <a:t>shortcut audits and calibrated probabilities, not just accuracy</a:t>
+            </a:r>
           </a:p>
         </p:txBody>
       </p:sp>
       <p:sp>
         <p:nvSpPr>
-          <p:cNvPr id="29" name="Shape 8">
-            <a:extLst>
-              <a:ext uri="{FF2B5EF4-FFF2-40B4-BE49-F238E27FC236}">
-                <a16:creationId xmlns:a16="http://schemas.microsoft.com/office/drawing/2014/main" id="{582591C4-F68D-4A15-B6B9-5FEB08D109EA}"/>
-              </a:ext>
-            </a:extLst>
-          </p:cNvPr>
+          <p:cNvPr id="202" name="Banner"/>
           <p:cNvSpPr/>
           <p:nvPr/>
         </p:nvSpPr>
         <p:spPr>
-          <a:xfrm flipV="1">
-            <a:off x="3660991" y="2074875"/>
-            <a:ext cx="141667" cy="0"/>
+          <a:xfrm>
+            <a:off x="502920" y="4315968"/>
+            <a:ext cx="8138160" cy="365760"/>
           </a:xfrm>
-          <a:prstGeom prst="line">
+          <a:prstGeom prst="roundRect">
             <a:avLst/>
           </a:prstGeom>
-          <a:noFill/>
-          <a:ln w="25400">
+          <a:solidFill>
+            <a:srgbClr val="F2F5F8"/>
+          </a:solidFill>
+          <a:ln w="9525">
             <a:solidFill>
-              <a:srgbClr val="555555"/>
+              <a:srgbClr val="CDD2D7"/>
             </a:solidFill>
-            <a:prstDash val="solid"/>
-            <a:tailEnd type="triangle"/>
           </a:ln>
         </p:spPr>
+        <p:style>
+          <a:lnRef idx="1">
+            <a:schemeClr val="accent1"/>
+          </a:lnRef>
+          <a:fillRef idx="3">
+            <a:schemeClr val="accent1"/>
+          </a:fillRef>
+          <a:effectRef idx="2">
+            <a:schemeClr val="accent1"/>
+          </a:effectRef>
+          <a:fontRef idx="minor">
+            <a:schemeClr val="lt1"/>
+          </a:fontRef>
+        </p:style>
         <p:txBody>
-          <a:bodyPr/>
+          <a:bodyPr wrap="square" lIns="91440" tIns="36576" rIns="91440" bIns="36576" rtlCol="0" anchor="ctr"/>
           <a:lstStyle/>
           <a:p>
-            <a:endParaRPr sz="1050"/>
-          </a:p>
-        </p:txBody>
-      </p:sp>
-      <p:sp>
-        <p:nvSpPr>
-          <p:cNvPr id="31" name="Shape 8">
-            <a:extLst>
-              <a:ext uri="{FF2B5EF4-FFF2-40B4-BE49-F238E27FC236}">
-                <a16:creationId xmlns:a16="http://schemas.microsoft.com/office/drawing/2014/main" id="{856019FD-6159-C16E-82A6-31C9B8A4135D}"/>
-              </a:ext>
-            </a:extLst>
-          </p:cNvPr>
-          <p:cNvSpPr/>
-          <p:nvPr/>
-        </p:nvSpPr>
-        <p:spPr>
-          <a:xfrm flipV="1">
-            <a:off x="5262264" y="2074875"/>
-            <a:ext cx="141667" cy="0"/>
-          </a:xfrm>
-          <a:prstGeom prst="line">
-            <a:avLst/>
-          </a:prstGeom>
-          <a:noFill/>
-          <a:ln w="25400">
-            <a:solidFill>
-              <a:srgbClr val="555555"/>
-            </a:solidFill>
-            <a:prstDash val="solid"/>
-            <a:tailEnd type="triangle"/>
-          </a:ln>
-        </p:spPr>
-        <p:txBody>
-          <a:bodyPr/>
-          <a:lstStyle/>
-          <a:p>
-            <a:endParaRPr sz="1050"/>
-          </a:p>
-        </p:txBody>
-      </p:sp>
-      <p:sp>
-        <p:nvSpPr>
-          <p:cNvPr id="33" name="Shape 8">
-            <a:extLst>
-              <a:ext uri="{FF2B5EF4-FFF2-40B4-BE49-F238E27FC236}">
-                <a16:creationId xmlns:a16="http://schemas.microsoft.com/office/drawing/2014/main" id="{6B13386C-625D-A28B-390E-14BA0411E195}"/>
-              </a:ext>
-            </a:extLst>
-          </p:cNvPr>
-          <p:cNvSpPr/>
-          <p:nvPr/>
-        </p:nvSpPr>
-        <p:spPr>
-          <a:xfrm flipV="1">
-            <a:off x="6876416" y="2059850"/>
-            <a:ext cx="141667" cy="0"/>
-          </a:xfrm>
-          <a:prstGeom prst="line">
-            <a:avLst/>
-          </a:prstGeom>
-          <a:noFill/>
-          <a:ln w="25400">
-            <a:solidFill>
-              <a:srgbClr val="555555"/>
-            </a:solidFill>
-            <a:prstDash val="solid"/>
-            <a:tailEnd type="triangle"/>
-          </a:ln>
-        </p:spPr>
-        <p:txBody>
-          <a:bodyPr/>
-          <a:lstStyle/>
-          <a:p>
-            <a:endParaRPr sz="1050"/>
+            <a:pPr algn="ctr"/>
+            <a:r>
+              <a:rPr sz="1100" b="1">
+                <a:solidFill>
+                  <a:srgbClr val="121212"/>
+                </a:solidFill>
+                <a:latin typeface="Arial"/>
+              </a:rPr>
+              <a:t>Not a new network: the value is the design and the evidence.</a:t>
+            </a:r>
           </a:p>
         </p:txBody>
       </p:sp>
@@ -28818,7 +25350,7 @@
                 </a:solidFill>
                 <a:latin typeface="Arial"/>
               </a:rPr>
-              <a:t>Model Architecture</a:t>
+              <a:t>Proposed Methods</a:t>
             </a:r>
           </a:p>
         </p:txBody>
@@ -28853,7 +25385,7 @@
                 </a:solidFill>
                 <a:latin typeface="Arial"/>
               </a:rPr>
-              <a:t>From fundus image to a calibrated early-DR flag</a:t>
+              <a:t>Three data arms, one change at a time</a:t>
             </a:r>
           </a:p>
         </p:txBody>
@@ -28895,24 +25427,26 @@
       </p:sp>
       <p:sp>
         <p:nvSpPr>
-          <p:cNvPr id="201" name="Stage 1"/>
+          <p:cNvPr id="201" name="Bullets"/>
           <p:cNvSpPr/>
           <p:nvPr/>
         </p:nvSpPr>
         <p:spPr>
           <a:xfrm>
-            <a:off x="502920" y="1554480"/>
-            <a:ext cx="1417320" cy="1371600"/>
+            <a:off x="502920" y="1280160"/>
+            <a:ext cx="8138160" cy="2926080"/>
           </a:xfrm>
           <a:prstGeom prst="roundRect">
-            <a:avLst/>
+            <a:avLst>
+              <a:gd name="adj" fmla="val 6000"/>
+            </a:avLst>
           </a:prstGeom>
           <a:solidFill>
-            <a:srgbClr val="E4ECF6"/>
+            <a:srgbClr val="FFFFFF"/>
           </a:solidFill>
           <a:ln w="9525">
             <a:solidFill>
-              <a:srgbClr val="BCCFE4"/>
+              <a:srgbClr val="FFFFFF"/>
             </a:solidFill>
           </a:ln>
         </p:spPr>
@@ -28934,523 +25468,128 @@
           <a:bodyPr wrap="square" lIns="91440" tIns="36576" rIns="91440" bIns="36576" rtlCol="0" anchor="ctr"/>
           <a:lstStyle/>
           <a:p>
-            <a:pPr algn="ctr"/>
+            <a:pPr algn="l">
+              <a:spcAft>
+                <a:spcPts val="900"/>
+              </a:spcAft>
+            </a:pPr>
             <a:r>
-              <a:rPr sz="1150" b="1">
+              <a:rPr sz="1400" b="1">
                 <a:solidFill>
                   <a:srgbClr val="121212"/>
                 </a:solidFill>
                 <a:latin typeface="Arial"/>
               </a:rPr>
-              <a:t>Fundus image</a:t>
+              <a:t>• Three data arms: </a:t>
+            </a:r>
+            <a:r>
+              <a:rPr sz="1300" b="0">
+                <a:solidFill>
+                  <a:srgbClr val="3a3a3a"/>
+                </a:solidFill>
+                <a:latin typeface="Arial"/>
+              </a:rPr>
+              <a:t>A: DDR only. B: DDR + EyePACS, source-balanced. C: an earlier merge kept as a negative control</a:t>
             </a:r>
           </a:p>
           <a:p>
-            <a:pPr algn="ctr"/>
+            <a:pPr algn="l">
+              <a:spcAft>
+                <a:spcPts val="900"/>
+              </a:spcAft>
+            </a:pPr>
             <a:r>
-              <a:rPr sz="1000" b="0">
-                <a:solidFill>
-                  <a:srgbClr val="3a3a3a"/>
+              <a:rPr sz="1400" b="1">
+                <a:solidFill>
+                  <a:srgbClr val="121212"/>
                 </a:solidFill>
                 <a:latin typeface="Arial"/>
               </a:rPr>
-              <a:t>DDR, EyePACS, APTOS</a:t>
+              <a:t>• Imbalance, one at a time: </a:t>
             </a:r>
-          </a:p>
-        </p:txBody>
-      </p:sp>
-      <p:sp>
-        <p:nvSpPr>
-          <p:cNvPr id="202" name="Flow arrow 1"/>
-          <p:cNvSpPr/>
-          <p:nvPr/>
-        </p:nvSpPr>
-        <p:spPr>
-          <a:xfrm>
-            <a:off x="1938528" y="2148840"/>
-            <a:ext cx="228600" cy="0"/>
-          </a:xfrm>
-          <a:prstGeom prst="line">
-            <a:avLst/>
-          </a:prstGeom>
-          <a:noFill/>
-          <a:ln w="25400">
-            <a:solidFill>
-              <a:srgbClr val="555555"/>
-            </a:solidFill>
-            <a:prstDash val="solid"/>
-            <a:tailEnd type="triangle"/>
-          </a:ln>
-        </p:spPr>
-        <p:txBody>
-          <a:bodyPr/>
-          <a:lstStyle/>
-          <a:p>
-            <a:endParaRPr sz="1050"/>
-          </a:p>
-        </p:txBody>
-      </p:sp>
-      <p:sp>
-        <p:nvSpPr>
-          <p:cNvPr id="203" name="Stage 2"/>
-          <p:cNvSpPr/>
-          <p:nvPr/>
-        </p:nvSpPr>
-        <p:spPr>
-          <a:xfrm>
-            <a:off x="2185416" y="1554480"/>
-            <a:ext cx="1417320" cy="1371600"/>
-          </a:xfrm>
-          <a:prstGeom prst="roundRect">
-            <a:avLst/>
-          </a:prstGeom>
-          <a:solidFill>
-            <a:srgbClr val="E4ECF6"/>
-          </a:solidFill>
-          <a:ln w="9525">
-            <a:solidFill>
-              <a:srgbClr val="BCCFE4"/>
-            </a:solidFill>
-          </a:ln>
-        </p:spPr>
-        <p:style>
-          <a:lnRef idx="1">
-            <a:schemeClr val="accent1"/>
-          </a:lnRef>
-          <a:fillRef idx="3">
-            <a:schemeClr val="accent1"/>
-          </a:fillRef>
-          <a:effectRef idx="2">
-            <a:schemeClr val="accent1"/>
-          </a:effectRef>
-          <a:fontRef idx="minor">
-            <a:schemeClr val="lt1"/>
-          </a:fontRef>
-        </p:style>
-        <p:txBody>
-          <a:bodyPr wrap="square" lIns="91440" tIns="36576" rIns="91440" bIns="36576" rtlCol="0" anchor="ctr"/>
-          <a:lstStyle/>
-          <a:p>
-            <a:pPr algn="ctr"/>
             <a:r>
-              <a:rPr sz="1150" b="1">
-                <a:solidFill>
-                  <a:srgbClr val="121212"/>
+              <a:rPr sz="1300" b="0">
+                <a:solidFill>
+                  <a:srgbClr val="3a3a3a"/>
                 </a:solidFill>
                 <a:latin typeface="Arial"/>
               </a:rPr>
-              <a:t>Preprocess</a:t>
+              <a:t>weighted sampler, class-balanced and focal loss, augmentation, each with a control</a:t>
             </a:r>
           </a:p>
           <a:p>
-            <a:pPr algn="ctr"/>
+            <a:pPr algn="l">
+              <a:spcAft>
+                <a:spcPts val="900"/>
+              </a:spcAft>
+            </a:pPr>
             <a:r>
-              <a:rPr sz="1000" b="0">
-                <a:solidFill>
-                  <a:srgbClr val="3a3a3a"/>
+              <a:rPr sz="1400" b="1">
+                <a:solidFill>
+                  <a:srgbClr val="121212"/>
                 </a:solidFill>
                 <a:latin typeface="Arial"/>
               </a:rPr>
-              <a:t>Crop, pad, resize to 512 px</a:t>
+              <a:t>• Honest splits: </a:t>
             </a:r>
-          </a:p>
-        </p:txBody>
-      </p:sp>
-      <p:sp>
-        <p:nvSpPr>
-          <p:cNvPr id="204" name="Flow arrow 2"/>
-          <p:cNvSpPr/>
-          <p:nvPr/>
-        </p:nvSpPr>
-        <p:spPr>
-          <a:xfrm>
-            <a:off x="3621024" y="2148840"/>
-            <a:ext cx="228600" cy="0"/>
-          </a:xfrm>
-          <a:prstGeom prst="line">
-            <a:avLst/>
-          </a:prstGeom>
-          <a:noFill/>
-          <a:ln w="25400">
-            <a:solidFill>
-              <a:srgbClr val="555555"/>
-            </a:solidFill>
-            <a:prstDash val="solid"/>
-            <a:tailEnd type="triangle"/>
-          </a:ln>
-        </p:spPr>
-        <p:txBody>
-          <a:bodyPr/>
-          <a:lstStyle/>
-          <a:p>
-            <a:endParaRPr sz="1050"/>
-          </a:p>
-        </p:txBody>
-      </p:sp>
-      <p:sp>
-        <p:nvSpPr>
-          <p:cNvPr id="205" name="Stage 3"/>
-          <p:cNvSpPr/>
-          <p:nvPr/>
-        </p:nvSpPr>
-        <p:spPr>
-          <a:xfrm>
-            <a:off x="3867912" y="1554480"/>
-            <a:ext cx="1417320" cy="1371600"/>
-          </a:xfrm>
-          <a:prstGeom prst="roundRect">
-            <a:avLst/>
-          </a:prstGeom>
-          <a:solidFill>
-            <a:srgbClr val="E3F2EA"/>
-          </a:solidFill>
-          <a:ln w="9525">
-            <a:solidFill>
-              <a:srgbClr val="1E7A5A"/>
-            </a:solidFill>
-          </a:ln>
-        </p:spPr>
-        <p:style>
-          <a:lnRef idx="1">
-            <a:schemeClr val="accent1"/>
-          </a:lnRef>
-          <a:fillRef idx="3">
-            <a:schemeClr val="accent1"/>
-          </a:fillRef>
-          <a:effectRef idx="2">
-            <a:schemeClr val="accent1"/>
-          </a:effectRef>
-          <a:fontRef idx="minor">
-            <a:schemeClr val="lt1"/>
-          </a:fontRef>
-        </p:style>
-        <p:txBody>
-          <a:bodyPr wrap="square" lIns="91440" tIns="36576" rIns="91440" bIns="36576" rtlCol="0" anchor="ctr"/>
-          <a:lstStyle/>
-          <a:p>
-            <a:pPr algn="ctr"/>
             <a:r>
-              <a:rPr sz="1150" b="1">
-                <a:solidFill>
-                  <a:srgbClr val="121212"/>
+              <a:rPr sz="1300" b="0">
+                <a:solidFill>
+                  <a:srgbClr val="3a3a3a"/>
                 </a:solidFill>
                 <a:latin typeface="Arial"/>
               </a:rPr>
-              <a:t>EfficientNet-B0</a:t>
+              <a:t>EyePACS split by patient, a group-aware DDR split, APTOS for external testing only</a:t>
             </a:r>
           </a:p>
           <a:p>
-            <a:pPr algn="ctr"/>
+            <a:pPr algn="l">
+              <a:spcAft>
+                <a:spcPts val="900"/>
+              </a:spcAft>
+            </a:pPr>
             <a:r>
-              <a:rPr sz="1000" b="0">
-                <a:solidFill>
-                  <a:srgbClr val="3a3a3a"/>
+              <a:rPr sz="1400" b="1">
+                <a:solidFill>
+                  <a:srgbClr val="121212"/>
                 </a:solidFill>
                 <a:latin typeface="Arial"/>
               </a:rPr>
-              <a:t>ImageNet weights, one output head</a:t>
+              <a:t>• Shortcut audit: </a:t>
             </a:r>
-          </a:p>
-        </p:txBody>
-      </p:sp>
-      <p:sp>
-        <p:nvSpPr>
-          <p:cNvPr id="206" name="Flow arrow 3"/>
-          <p:cNvSpPr/>
-          <p:nvPr/>
-        </p:nvSpPr>
-        <p:spPr>
-          <a:xfrm>
-            <a:off x="5303520" y="2148840"/>
-            <a:ext cx="228600" cy="0"/>
-          </a:xfrm>
-          <a:prstGeom prst="line">
-            <a:avLst/>
-          </a:prstGeom>
-          <a:noFill/>
-          <a:ln w="25400">
-            <a:solidFill>
-              <a:srgbClr val="555555"/>
-            </a:solidFill>
-            <a:prstDash val="solid"/>
-            <a:tailEnd type="triangle"/>
-          </a:ln>
-        </p:spPr>
-        <p:txBody>
-          <a:bodyPr/>
-          <a:lstStyle/>
-          <a:p>
-            <a:endParaRPr sz="1050"/>
-          </a:p>
-        </p:txBody>
-      </p:sp>
-      <p:sp>
-        <p:nvSpPr>
-          <p:cNvPr id="207" name="Stage 4"/>
-          <p:cNvSpPr/>
-          <p:nvPr/>
-        </p:nvSpPr>
-        <p:spPr>
-          <a:xfrm>
-            <a:off x="5550408" y="1554480"/>
-            <a:ext cx="1417320" cy="1371600"/>
-          </a:xfrm>
-          <a:prstGeom prst="roundRect">
-            <a:avLst/>
-          </a:prstGeom>
-          <a:solidFill>
-            <a:srgbClr val="E4ECF6"/>
-          </a:solidFill>
-          <a:ln w="9525">
-            <a:solidFill>
-              <a:srgbClr val="BCCFE4"/>
-            </a:solidFill>
-          </a:ln>
-        </p:spPr>
-        <p:style>
-          <a:lnRef idx="1">
-            <a:schemeClr val="accent1"/>
-          </a:lnRef>
-          <a:fillRef idx="3">
-            <a:schemeClr val="accent1"/>
-          </a:fillRef>
-          <a:effectRef idx="2">
-            <a:schemeClr val="accent1"/>
-          </a:effectRef>
-          <a:fontRef idx="minor">
-            <a:schemeClr val="lt1"/>
-          </a:fontRef>
-        </p:style>
-        <p:txBody>
-          <a:bodyPr wrap="square" lIns="91440" tIns="36576" rIns="91440" bIns="36576" rtlCol="0" anchor="ctr"/>
-          <a:lstStyle/>
-          <a:p>
-            <a:pPr algn="ctr"/>
             <a:r>
-              <a:rPr sz="1150" b="1">
-                <a:solidFill>
-                  <a:srgbClr val="121212"/>
+              <a:rPr sz="1300" b="0">
+                <a:solidFill>
+                  <a:srgbClr val="3a3a3a"/>
                 </a:solidFill>
                 <a:latin typeface="Arial"/>
               </a:rPr>
-              <a:t>Calibration</a:t>
+              <a:t>test whether image size, file size, colour or sharpness alone predict the label</a:t>
             </a:r>
           </a:p>
           <a:p>
-            <a:pPr algn="ctr"/>
+            <a:pPr algn="l">
+              <a:spcAft>
+                <a:spcPts val="900"/>
+              </a:spcAft>
+            </a:pPr>
             <a:r>
-              <a:rPr sz="1000" b="0">
-                <a:solidFill>
-                  <a:srgbClr val="3a3a3a"/>
+              <a:rPr sz="1400" b="1">
+                <a:solidFill>
+                  <a:srgbClr val="121212"/>
                 </a:solidFill>
                 <a:latin typeface="Arial"/>
               </a:rPr>
-              <a:t>Temperature scaling and prior-shift correction</a:t>
+              <a:t>• Frozen operating point: </a:t>
             </a:r>
-          </a:p>
-        </p:txBody>
-      </p:sp>
-      <p:sp>
-        <p:nvSpPr>
-          <p:cNvPr id="208" name="Flow arrow 4"/>
-          <p:cNvSpPr/>
-          <p:nvPr/>
-        </p:nvSpPr>
-        <p:spPr>
-          <a:xfrm>
-            <a:off x="6986016" y="2148840"/>
-            <a:ext cx="228600" cy="0"/>
-          </a:xfrm>
-          <a:prstGeom prst="line">
-            <a:avLst/>
-          </a:prstGeom>
-          <a:noFill/>
-          <a:ln w="25400">
-            <a:solidFill>
-              <a:srgbClr val="555555"/>
-            </a:solidFill>
-            <a:prstDash val="solid"/>
-            <a:tailEnd type="triangle"/>
-          </a:ln>
-        </p:spPr>
-        <p:txBody>
-          <a:bodyPr/>
-          <a:lstStyle/>
-          <a:p>
-            <a:endParaRPr sz="1050"/>
-          </a:p>
-        </p:txBody>
-      </p:sp>
-      <p:sp>
-        <p:nvSpPr>
-          <p:cNvPr id="209" name="Stage 5"/>
-          <p:cNvSpPr/>
-          <p:nvPr/>
-        </p:nvSpPr>
-        <p:spPr>
-          <a:xfrm>
-            <a:off x="7232904" y="1554480"/>
-            <a:ext cx="1417320" cy="1371600"/>
-          </a:xfrm>
-          <a:prstGeom prst="roundRect">
-            <a:avLst/>
-          </a:prstGeom>
-          <a:solidFill>
-            <a:srgbClr val="FFE9D9"/>
-          </a:solidFill>
-          <a:ln w="9525">
-            <a:solidFill>
-              <a:srgbClr val="EB6834"/>
-            </a:solidFill>
-          </a:ln>
-        </p:spPr>
-        <p:style>
-          <a:lnRef idx="1">
-            <a:schemeClr val="accent1"/>
-          </a:lnRef>
-          <a:fillRef idx="3">
-            <a:schemeClr val="accent1"/>
-          </a:fillRef>
-          <a:effectRef idx="2">
-            <a:schemeClr val="accent1"/>
-          </a:effectRef>
-          <a:fontRef idx="minor">
-            <a:schemeClr val="lt1"/>
-          </a:fontRef>
-        </p:style>
-        <p:txBody>
-          <a:bodyPr wrap="square" lIns="91440" tIns="36576" rIns="91440" bIns="36576" rtlCol="0" anchor="ctr"/>
-          <a:lstStyle/>
-          <a:p>
-            <a:pPr algn="ctr"/>
             <a:r>
-              <a:rPr sz="1150" b="1">
-                <a:solidFill>
-                  <a:srgbClr val="121212"/>
+              <a:rPr sz="1300" b="0">
+                <a:solidFill>
+                  <a:srgbClr val="3a3a3a"/>
                 </a:solidFill>
                 <a:latin typeface="Arial"/>
               </a:rPr>
-              <a:t>Output</a:t>
-            </a:r>
-          </a:p>
-          <a:p>
-            <a:pPr algn="ctr"/>
-            <a:r>
-              <a:rPr sz="1000" b="0">
-                <a:solidFill>
-                  <a:srgbClr val="3a3a3a"/>
-                </a:solidFill>
-                <a:latin typeface="Arial"/>
-              </a:rPr>
-              <a:t>Early-DR probability and flag</a:t>
-            </a:r>
-          </a:p>
-        </p:txBody>
-      </p:sp>
-      <p:sp>
-        <p:nvSpPr>
-          <p:cNvPr id="210" name="Note"/>
-          <p:cNvSpPr/>
-          <p:nvPr/>
-        </p:nvSpPr>
-        <p:spPr>
-          <a:xfrm>
-            <a:off x="502920" y="3200400"/>
-            <a:ext cx="8138160" cy="822960"/>
-          </a:xfrm>
-          <a:prstGeom prst="roundRect">
-            <a:avLst/>
-          </a:prstGeom>
-          <a:solidFill>
-            <a:srgbClr val="FFFFFF"/>
-          </a:solidFill>
-          <a:ln w="9525">
-            <a:solidFill>
-              <a:srgbClr val="CDD2D7"/>
-            </a:solidFill>
-          </a:ln>
-        </p:spPr>
-        <p:style>
-          <a:lnRef idx="1">
-            <a:schemeClr val="accent1"/>
-          </a:lnRef>
-          <a:fillRef idx="3">
-            <a:schemeClr val="accent1"/>
-          </a:fillRef>
-          <a:effectRef idx="2">
-            <a:schemeClr val="accent1"/>
-          </a:effectRef>
-          <a:fontRef idx="minor">
-            <a:schemeClr val="lt1"/>
-          </a:fontRef>
-        </p:style>
-        <p:txBody>
-          <a:bodyPr wrap="square" lIns="91440" tIns="36576" rIns="91440" bIns="36576" rtlCol="0" anchor="ctr"/>
-          <a:lstStyle/>
-          <a:p>
-            <a:pPr algn="l"/>
-            <a:r>
-              <a:rPr sz="1100" b="0">
-                <a:solidFill>
-                  <a:srgbClr val="3a3a3a"/>
-                </a:solidFill>
-                <a:latin typeface="Arial"/>
-              </a:rPr>
-              <a:t>Trained on the training split. The best epoch, calibration and a threshold at specificity 0.90 are set on validation only; test sets are opened afterwards.</a:t>
-            </a:r>
-          </a:p>
-        </p:txBody>
-      </p:sp>
-      <p:sp>
-        <p:nvSpPr>
-          <p:cNvPr id="211" name="Banner"/>
-          <p:cNvSpPr/>
-          <p:nvPr/>
-        </p:nvSpPr>
-        <p:spPr>
-          <a:xfrm>
-            <a:off x="502920" y="4315968"/>
-            <a:ext cx="8138160" cy="365760"/>
-          </a:xfrm>
-          <a:prstGeom prst="roundRect">
-            <a:avLst/>
-          </a:prstGeom>
-          <a:solidFill>
-            <a:srgbClr val="F2F5F8"/>
-          </a:solidFill>
-          <a:ln w="9525">
-            <a:solidFill>
-              <a:srgbClr val="CDD2D7"/>
-            </a:solidFill>
-          </a:ln>
-        </p:spPr>
-        <p:style>
-          <a:lnRef idx="1">
-            <a:schemeClr val="accent1"/>
-          </a:lnRef>
-          <a:fillRef idx="3">
-            <a:schemeClr val="accent1"/>
-          </a:fillRef>
-          <a:effectRef idx="2">
-            <a:schemeClr val="accent1"/>
-          </a:effectRef>
-          <a:fontRef idx="minor">
-            <a:schemeClr val="lt1"/>
-          </a:fontRef>
-        </p:style>
-        <p:txBody>
-          <a:bodyPr wrap="square" lIns="91440" tIns="36576" rIns="91440" bIns="36576" rtlCol="0" anchor="ctr"/>
-          <a:lstStyle/>
-          <a:p>
-            <a:pPr algn="ctr"/>
-            <a:r>
-              <a:rPr sz="1100" b="1">
-                <a:solidFill>
-                  <a:srgbClr val="121212"/>
-                </a:solidFill>
-                <a:latin typeface="Arial"/>
-              </a:rPr>
-              <a:t>Not a new network: the design and the evidence are the contribution.</a:t>
+              <a:t>calibrate and set specificity 0.90 on validation, then test per source</a:t>
             </a:r>
           </a:p>
         </p:txBody>

--- a/DR_Final_5min.pptx
+++ b/DR_Final_5min.pptx
@@ -2076,7 +2076,7 @@
           <a:lstStyle/>
           <a:p>
             <a:r>
-              <a:t>[0:25] The method uses three arms: A is DDR only, B is DDR plus EyePACS source-balanced, and C is an earlier merge kept as a negative control. I add honest splits, a shortcut audit, and a frozen operating point at specificity 0.90 set on validation.</a:t>
+              <a:t>[0:25] The method uses three arms: A is DDR only, B is DDR plus all EyePACS grades, source-balanced, and C is DDR plus only EyePACS grades 1, 3 and 4, an old merge kept as a negative control. I add honest splits, a shortcut audit, and a frozen operating point at specificity 0.90 set on validation.</a:t>
             </a:r>
           </a:p>
         </p:txBody>
@@ -25489,7 +25489,7 @@
                 </a:solidFill>
                 <a:latin typeface="Arial"/>
               </a:rPr>
-              <a:t>A: DDR only. B: DDR + EyePACS, source-balanced. C: an earlier merge kept as a negative control</a:t>
+              <a:t>A: DDR only. B: DDR + all EyePACS grades, source-balanced. C: DDR + EyePACS grades 1, 3, 4 only, an old merge kept as a negative control</a:t>
             </a:r>
           </a:p>
           <a:p>

--- a/DR_Final_5min.pptx
+++ b/DR_Final_5min.pptx
@@ -2817,7 +2817,7 @@
           <a:lstStyle/>
           <a:p>
             <a:r>
-              <a:t>[0:30] So my main question is: when datasets are merged for early-DR detection, does the model learn the disease or the source? RQ1 tests the merge with a negative control. RQ2 asks whether a threshold frozen on validation survives a change of source. RQ3 asks whether external benchmarks carry capture cues like image size.</a:t>
+              <a:t>[0:40] So my main question is: when datasets are merged for early-DR detection, does the model learn the disease or the source? Merging is common, yet I found no study testing it. RQ1 asks whether adding EyePACS really helps, using a negative-control merge. RQ2 asks whether a threshold frozen on validation survives a change of source, because AUROC can hide over-flagging or missed early cases. RQ3 asks whether capture cues like image size are predicting the label. The contribution is a protocol to test DR models before trusting them, not a new network.</a:t>
             </a:r>
           </a:p>
         </p:txBody>
@@ -2887,7 +2887,7 @@
           <a:lstStyle/>
           <a:p>
             <a:r>
-              <a:t>[0:30] This builds on a few pieces. Gulshan and colleagues showed deep learning for referable DR. DDR, EyePACS and APTOS are my data sources, and temperature scaling gives calibrated outputs. A recent review and a cross-camera study describe dataset and camera effects, but for referable DR. I still need a systematic literature search.</a:t>
+              <a:t>[0:25] This builds on a few pieces. Gulshan and colleagues showed deep learning for referable DR. DDR, EyePACS and APTOS are my data sources, and temperature scaling gives calibrated outputs. A recent review and a cross-camera study describe dataset and camera effects, but for referable DR. I still need a systematic literature search.</a:t>
             </a:r>
           </a:p>
         </p:txBody>
@@ -2957,7 +2957,7 @@
           <a:lstStyle/>
           <a:p>
             <a:r>
-              <a:t>[0:30] How is this different? My target is early DR at a fixed specificity. I test the merge itself, compare imbalance methods one at a time with a control, test on held-out patients and an external set, and report shortcut audits and calibrated probabilities. It is not a new network: the value is the design and the evidence.</a:t>
+              <a:t>[0:25] How is this different? My target is early DR at a fixed specificity. I test the merge itself, compare imbalance methods one at a time with a control, test on held-out patients and an external set, and report shortcut audits and calibrated probabilities. It is not a new network: the value is the design and the evidence.</a:t>
             </a:r>
           </a:p>
         </p:txBody>
@@ -24411,7 +24411,7 @@
                 </a:solidFill>
                 <a:latin typeface="Arial"/>
               </a:rPr>
-              <a:t>What this project asks</a:t>
+              <a:t>What this project asks, and why it matters</a:t>
             </a:r>
           </a:p>
         </p:txBody>
@@ -24460,7 +24460,7 @@
         <p:spPr>
           <a:xfrm>
             <a:off x="502920" y="1280160"/>
-            <a:ext cx="8138160" cy="2926080"/>
+            <a:ext cx="8138160" cy="2971800"/>
           </a:xfrm>
           <a:prstGeom prst="roundRect">
             <a:avLst>
@@ -24500,7 +24500,7 @@
               </a:spcAft>
             </a:pPr>
             <a:r>
-              <a:rPr sz="1500" b="1">
+              <a:rPr sz="1400" b="1">
                 <a:solidFill>
                   <a:srgbClr val="121212"/>
                 </a:solidFill>
@@ -24509,13 +24509,13 @@
               <a:t>• Main question: </a:t>
             </a:r>
             <a:r>
-              <a:rPr sz="1400" b="0">
+              <a:rPr sz="1300" b="0">
                 <a:solidFill>
                   <a:srgbClr val="3a3a3a"/>
                 </a:solidFill>
                 <a:latin typeface="Arial"/>
               </a:rPr>
-              <a:t>when datasets are merged for early-DR detection, does the model learn the disease or the source?</a:t>
+              <a:t>when datasets are merged for early-DR detection, does the model learn the disease or the source? Why: merging is common, yet I found no study testing it</a:t>
             </a:r>
           </a:p>
           <a:p>
@@ -24525,22 +24525,22 @@
               </a:spcAft>
             </a:pPr>
             <a:r>
-              <a:rPr sz="1500" b="1">
+              <a:rPr sz="1400" b="1">
                 <a:solidFill>
                   <a:srgbClr val="121212"/>
                 </a:solidFill>
                 <a:latin typeface="Arial"/>
               </a:rPr>
-              <a:t>• RQ1: </a:t>
+              <a:t>• RQ1 (the merge): </a:t>
             </a:r>
             <a:r>
-              <a:rPr sz="1400" b="0">
+              <a:rPr sz="1300" b="0">
                 <a:solidFill>
                   <a:srgbClr val="3a3a3a"/>
                 </a:solidFill>
                 <a:latin typeface="Arial"/>
               </a:rPr>
-              <a:t>does adding EyePACS to DDR improve early-DR sensitivity at a fixed specificity on sources it has not seen? A negative-control merge tests this</a:t>
+              <a:t>does adding EyePACS to DDR improve early-DR sensitivity on unseen sources? Why: more data is assumed to help; a negative-control merge tests it</a:t>
             </a:r>
           </a:p>
           <a:p>
@@ -24550,22 +24550,22 @@
               </a:spcAft>
             </a:pPr>
             <a:r>
-              <a:rPr sz="1500" b="1">
+              <a:rPr sz="1400" b="1">
                 <a:solidFill>
                   <a:srgbClr val="121212"/>
                 </a:solidFill>
                 <a:latin typeface="Arial"/>
               </a:rPr>
-              <a:t>• RQ2: </a:t>
+              <a:t>• RQ2 (the threshold): </a:t>
             </a:r>
             <a:r>
-              <a:rPr sz="1400" b="0">
+              <a:rPr sz="1300" b="0">
                 <a:solidFill>
                   <a:srgbClr val="3a3a3a"/>
                 </a:solidFill>
                 <a:latin typeface="Arial"/>
               </a:rPr>
-              <a:t>does a threshold frozen on validation survive a change of source, and how much does own-source recalibration recover?</a:t>
+              <a:t>does a threshold frozen on validation survive a change of source? Why: AUROC can hide over-flagging, which overloads graders, or missed early cases</a:t>
             </a:r>
           </a:p>
           <a:p>
@@ -24575,22 +24575,76 @@
               </a:spcAft>
             </a:pPr>
             <a:r>
-              <a:rPr sz="1500" b="1">
+              <a:rPr sz="1400" b="1">
                 <a:solidFill>
                   <a:srgbClr val="121212"/>
                 </a:solidFill>
                 <a:latin typeface="Arial"/>
               </a:rPr>
-              <a:t>• RQ3: </a:t>
+              <a:t>• RQ3 (shortcuts): </a:t>
             </a:r>
             <a:r>
-              <a:rPr sz="1400" b="0">
+              <a:rPr sz="1300" b="0">
                 <a:solidFill>
                   <a:srgbClr val="3a3a3a"/>
                 </a:solidFill>
                 <a:latin typeface="Arial"/>
               </a:rPr>
-              <a:t>do external benchmarks carry capture cues, such as image size, that a model could use instead of disease?</a:t>
+              <a:t>does image size or another capture cue predict the label? Why: a model could be rewarded for the camera instead of the disease</a:t>
+            </a:r>
+          </a:p>
+        </p:txBody>
+      </p:sp>
+      <p:sp>
+        <p:nvSpPr>
+          <p:cNvPr id="202" name="Banner"/>
+          <p:cNvSpPr/>
+          <p:nvPr/>
+        </p:nvSpPr>
+        <p:spPr>
+          <a:xfrm>
+            <a:off x="502920" y="4315968"/>
+            <a:ext cx="8138160" cy="365760"/>
+          </a:xfrm>
+          <a:prstGeom prst="roundRect">
+            <a:avLst/>
+          </a:prstGeom>
+          <a:solidFill>
+            <a:srgbClr val="F2F5F8"/>
+          </a:solidFill>
+          <a:ln w="9525">
+            <a:solidFill>
+              <a:srgbClr val="CDD2D7"/>
+            </a:solidFill>
+          </a:ln>
+        </p:spPr>
+        <p:style>
+          <a:lnRef idx="1">
+            <a:schemeClr val="accent1"/>
+          </a:lnRef>
+          <a:fillRef idx="3">
+            <a:schemeClr val="accent1"/>
+          </a:fillRef>
+          <a:effectRef idx="2">
+            <a:schemeClr val="accent1"/>
+          </a:effectRef>
+          <a:fontRef idx="minor">
+            <a:schemeClr val="lt1"/>
+          </a:fontRef>
+        </p:style>
+        <p:txBody>
+          <a:bodyPr wrap="square" lIns="91440" tIns="36576" rIns="91440" bIns="36576" rtlCol="0" anchor="ctr"/>
+          <a:lstStyle/>
+          <a:p>
+            <a:pPr algn="ctr"/>
+            <a:r>
+              <a:rPr sz="1100" b="1">
+                <a:solidFill>
+                  <a:srgbClr val="121212"/>
+                </a:solidFill>
+                <a:latin typeface="Arial"/>
+              </a:rPr>
+              <a:t>The contribution is a protocol to test DR models before trusting them, not a new network.</a:t>
             </a:r>
           </a:p>
         </p:txBody>

--- a/DR_Final_5min.pptx
+++ b/DR_Final_5min.pptx
@@ -2076,7 +2076,7 @@
           <a:lstStyle/>
           <a:p>
             <a:r>
-              <a:t>[0:25] The method uses three arms: A is DDR only, B is DDR plus all EyePACS grades, source-balanced, and C is DDR plus only EyePACS grades 1, 3 and 4, an old merge kept as a negative control. I add honest splits, a shortcut audit, and a frozen operating point at specificity 0.90 set on validation.</a:t>
+              <a:t>[0:30] The method uses three arms. A is DDR only, B is DDR plus all EyePACS grades, source-balanced, and C is DDR plus only EyePACS grades 1, 3 and 4, an old merge kept as a negative control. I add honest splits, a property analysis of size, brightness, colour and sharpness, and a frozen operating point at specificity 0.90 set on validation.</a:t>
             </a:r>
           </a:p>
         </p:txBody>
@@ -2146,7 +2146,7 @@
           <a:lstStyle/>
           <a:p>
             <a:r>
-              <a:t>[0:25] The model is simple: a fundus image is cropped and resized, passed through an EfficientNet-B0, then calibrated with temperature scaling and a prior-shift correction. The output is a probability of early disease and a flag, all set on validation data only.</a:t>
+              <a:t>[0:20] The model is simple: a fundus image is cropped and resized, passed through an EfficientNet-B0, then calibrated with temperature scaling and a prior-shift correction. The output is a probability of early disease and a flag, all set on validation data only.</a:t>
             </a:r>
           </a:p>
         </p:txBody>
@@ -2216,7 +2216,7 @@
           <a:lstStyle/>
           <a:p>
             <a:r>
-              <a:t>[0:20] For data I use DDR, EyePACS split by patient, and APTOS as an external test only. The splits are frozen files, and test sets are opened only through a declared analysis.</a:t>
+              <a:t>[0:15] For data I use DDR, EyePACS split by patient, and APTOS as an external test only. The splits are frozen files, and test sets are opened only through a declared analysis.</a:t>
             </a:r>
           </a:p>
         </p:txBody>
@@ -2286,7 +2286,7 @@
           <a:lstStyle/>
           <a:p>
             <a:r>
-              <a:t>[0:15] Next steps: train the arms with several seeds, compare the imbalance methods, test on unseen sources with confidence intervals, and finish the literature search and thesis.</a:t>
+              <a:t>[0:20] Next steps: train the three arms with several seeds, compare the imbalance methods, analyse image properties, test on unseen sources with confidence intervals, report sensitivity at a fixed specificity, and finish the literature search and thesis.</a:t>
             </a:r>
           </a:p>
         </p:txBody>
@@ -2747,7 +2747,7 @@
           <a:lstStyle/>
           <a:p>
             <a:r>
-              <a:t>[0:35] Here is the gap. Public datasets like DDR, EyePACS and APTOS are often pooled to get more data. A recent review notes that multi-dataset training can mask poor external generalization, and I found no study testing whether a merged model learns the disease or the source. Accuracy can look excellent while the model over-flags or uses camera cues. An over-flagging tool overloads graders; an under-flagging one misses early disease.</a:t>
+              <a:t>[0:30] Here is the gap. Public medical-image datasets are often pooled; here DDR, EyePACS and APTOS. A recent review notes that multi-dataset training can mask poor external generalization. In other fields, models have learned hospital or scanner site instead of disease, in chest X-rays, and dataset identity in general. I found no study testing this for early DR, or which image properties carry it. An over-flagging tool overloads graders; an under-flagging one misses early disease.</a:t>
             </a:r>
           </a:p>
         </p:txBody>
@@ -2817,7 +2817,7 @@
           <a:lstStyle/>
           <a:p>
             <a:r>
-              <a:t>[0:40] So my main question is: when datasets are merged for early-DR detection, does the model learn the disease or the source? Merging is common, yet I found no study testing it. RQ1 asks whether adding EyePACS really helps, using a negative-control merge. RQ2 asks whether a threshold frozen on validation survives a change of source, because AUROC can hide over-flagging or missed early cases. RQ3 asks whether capture cues like image size are predicting the label. The contribution is a protocol to test DR models before trusting them, not a new network.</a:t>
+              <a:t>[0:35] My main question is general: when medical-image datasets are merged, does a model learn the condition or the source? Early DR is my case study. RQ1: does a second source really help on unseen sources? A negative-control merge tests it. RQ2: does a threshold frozen on validation survive a change of source? RQ3: which image properties differ between sources, such as size, quality, brightness and colour, and how do they affect what a merged model learns? The contribution is a protocol, not a new network.</a:t>
             </a:r>
           </a:p>
         </p:txBody>
@@ -2887,7 +2887,7 @@
           <a:lstStyle/>
           <a:p>
             <a:r>
-              <a:t>[0:25] This builds on a few pieces. Gulshan and colleagues showed deep learning for referable DR. DDR, EyePACS and APTOS are my data sources, and temperature scaling gives calibrated outputs. A recent review and a cross-camera study describe dataset and camera effects, but for referable DR. I still need a systematic literature search.</a:t>
+              <a:t>[0:25] This builds on a few pieces. Gulshan and colleagues for referable DR, my three datasets, and temperature scaling for calibration. Torralba and Efros, Geirhos, Zech and DeGrave show that models learn dataset or site cues. A DR review and a cross-camera study describe dataset and camera effects. I still need a systematic literature search.</a:t>
             </a:r>
           </a:p>
         </p:txBody>
@@ -2957,7 +2957,7 @@
           <a:lstStyle/>
           <a:p>
             <a:r>
-              <a:t>[0:25] How is this different? My target is early DR at a fixed specificity. I test the merge itself, compare imbalance methods one at a time with a control, test on held-out patients and an external set, and report shortcut audits and calibrated probabilities. It is not a new network: the value is the design and the evidence.</a:t>
+              <a:t>[0:25] How is this different? My target is early DR at a fixed specificity. I test the merge itself, compare imbalance methods one at a time, test on held-out patients and an external set, and ask which image properties carry the source. DR is the case study; the protocol should apply to any merged medical-image task. It is not a new network.</a:t>
             </a:r>
           </a:p>
         </p:txBody>
@@ -22136,7 +22136,7 @@
               </a:spcAft>
             </a:pPr>
             <a:r>
-              <a:rPr sz="1500" b="1">
+              <a:rPr sz="1400" b="1">
                 <a:solidFill>
                   <a:srgbClr val="121212"/>
                 </a:solidFill>
@@ -22145,7 +22145,7 @@
               <a:t>• Train the three arms: </a:t>
             </a:r>
             <a:r>
-              <a:rPr sz="1400" b="0">
+              <a:rPr sz="1300" b="0">
                 <a:solidFill>
                   <a:srgbClr val="3a3a3a"/>
                 </a:solidFill>
@@ -22161,7 +22161,7 @@
               </a:spcAft>
             </a:pPr>
             <a:r>
-              <a:rPr sz="1500" b="1">
+              <a:rPr sz="1400" b="1">
                 <a:solidFill>
                   <a:srgbClr val="121212"/>
                 </a:solidFill>
@@ -22170,7 +22170,7 @@
               <a:t>• Compare imbalance methods: </a:t>
             </a:r>
             <a:r>
-              <a:rPr sz="1400" b="0">
+              <a:rPr sz="1300" b="0">
                 <a:solidFill>
                   <a:srgbClr val="3a3a3a"/>
                 </a:solidFill>
@@ -22186,7 +22186,32 @@
               </a:spcAft>
             </a:pPr>
             <a:r>
-              <a:rPr sz="1500" b="1">
+              <a:rPr sz="1400" b="1">
+                <a:solidFill>
+                  <a:srgbClr val="121212"/>
+                </a:solidFill>
+                <a:latin typeface="Arial"/>
+              </a:rPr>
+              <a:t>• Analyse image properties: </a:t>
+            </a:r>
+            <a:r>
+              <a:rPr sz="1300" b="0">
+                <a:solidFill>
+                  <a:srgbClr val="3a3a3a"/>
+                </a:solidFill>
+                <a:latin typeface="Arial"/>
+              </a:rPr>
+              <a:t>source prediction, scores within matched groups, and normalisation tests</a:t>
+            </a:r>
+          </a:p>
+          <a:p>
+            <a:pPr algn="l">
+              <a:spcAft>
+                <a:spcPts val="900"/>
+              </a:spcAft>
+            </a:pPr>
+            <a:r>
+              <a:rPr sz="1400" b="1">
                 <a:solidFill>
                   <a:srgbClr val="121212"/>
                 </a:solidFill>
@@ -22195,7 +22220,7 @@
               <a:t>• Test on unseen sources: </a:t>
             </a:r>
             <a:r>
-              <a:rPr sz="1400" b="0">
+              <a:rPr sz="1300" b="0">
                 <a:solidFill>
                   <a:srgbClr val="3a3a3a"/>
                 </a:solidFill>
@@ -22211,7 +22236,7 @@
               </a:spcAft>
             </a:pPr>
             <a:r>
-              <a:rPr sz="1500" b="1">
+              <a:rPr sz="1400" b="1">
                 <a:solidFill>
                   <a:srgbClr val="121212"/>
                 </a:solidFill>
@@ -22220,7 +22245,7 @@
               <a:t>• Calibrate and report: </a:t>
             </a:r>
             <a:r>
-              <a:rPr sz="1400" b="0">
+              <a:rPr sz="1300" b="0">
                 <a:solidFill>
                   <a:srgbClr val="3a3a3a"/>
                 </a:solidFill>
@@ -22236,7 +22261,7 @@
               </a:spcAft>
             </a:pPr>
             <a:r>
-              <a:rPr sz="1500" b="1">
+              <a:rPr sz="1400" b="1">
                 <a:solidFill>
                   <a:srgbClr val="121212"/>
                 </a:solidFill>
@@ -22245,7 +22270,7 @@
               <a:t>• Write up: </a:t>
             </a:r>
             <a:r>
-              <a:rPr sz="1400" b="0">
+              <a:rPr sz="1300" b="0">
                 <a:solidFill>
                   <a:srgbClr val="3a3a3a"/>
                 </a:solidFill>
@@ -22504,6 +22529,234 @@
                 </a:solidFill>
               </a:rPr>
               <a:t>• Sipka, T., et al. The hitchhiker’s guide to prior-shift adaptation. WACV, 2022.</a:t>
+            </a:r>
+          </a:p>
+          <a:p>
+            <a:pPr algn="l">
+              <a:lnSpc>
+                <a:spcPct val="105000"/>
+              </a:lnSpc>
+              <a:spcAft>
+                <a:spcPts val="400"/>
+              </a:spcAft>
+            </a:pPr>
+            <a:r>
+              <a:rPr sz="919" dirty="0">
+                <a:solidFill>
+                  <a:srgbClr val="121212"/>
+                </a:solidFill>
+                <a:latin typeface="Arial"/>
+              </a:rPr>
+              <a:t>• Torralba, A., &amp; Efros, A. Unbiased look at dataset bias. CVPR, 2011.</a:t>
+            </a:r>
+          </a:p>
+          <a:p>
+            <a:pPr algn="l">
+              <a:lnSpc>
+                <a:spcPct val="105000"/>
+              </a:lnSpc>
+              <a:spcAft>
+                <a:spcPts val="400"/>
+              </a:spcAft>
+            </a:pPr>
+            <a:r>
+              <a:rPr sz="919" dirty="0">
+                <a:solidFill>
+                  <a:srgbClr val="121212"/>
+                </a:solidFill>
+                <a:latin typeface="Arial"/>
+              </a:rPr>
+              <a:t>• Geirhos, R., et al. Shortcut learning in deep neural networks. Nature Machine Intelligence, 2020.</a:t>
+            </a:r>
+          </a:p>
+          <a:p>
+            <a:pPr algn="l">
+              <a:lnSpc>
+                <a:spcPct val="105000"/>
+              </a:lnSpc>
+              <a:spcAft>
+                <a:spcPts val="400"/>
+              </a:spcAft>
+            </a:pPr>
+            <a:r>
+              <a:rPr sz="919" dirty="0">
+                <a:solidFill>
+                  <a:srgbClr val="121212"/>
+                </a:solidFill>
+                <a:latin typeface="Arial"/>
+              </a:rPr>
+              <a:t>• Zech, J. R., et al. Variable generalization performance of a deep learning model to detect pneumonia in chest radiographs. PLOS Medicine, 2018.</a:t>
+            </a:r>
+          </a:p>
+          <a:p>
+            <a:pPr algn="l">
+              <a:lnSpc>
+                <a:spcPct val="105000"/>
+              </a:lnSpc>
+              <a:spcAft>
+                <a:spcPts val="400"/>
+              </a:spcAft>
+            </a:pPr>
+            <a:r>
+              <a:rPr sz="919" dirty="0">
+                <a:solidFill>
+                  <a:srgbClr val="121212"/>
+                </a:solidFill>
+                <a:latin typeface="Arial"/>
+              </a:rPr>
+              <a:t>• DeGrave, A. J., et al. AI for radiographic COVID-19 detection selects shortcuts over signal. Nature Machine Intelligence, 2021.</a:t>
+            </a:r>
+          </a:p>
+          <a:p>
+            <a:pPr algn="l">
+              <a:lnSpc>
+                <a:spcPct val="105000"/>
+              </a:lnSpc>
+              <a:spcAft>
+                <a:spcPts val="400"/>
+              </a:spcAft>
+            </a:pPr>
+            <a:r>
+              <a:rPr sz="919" dirty="0">
+                <a:solidFill>
+                  <a:srgbClr val="121212"/>
+                </a:solidFill>
+                <a:latin typeface="Arial"/>
+              </a:rPr>
+              <a:t>• Gulshan, V., et al. Development and validation of a deep learning algorithm for detection of diabetic retinopathy. JAMA, 2016.</a:t>
+            </a:r>
+          </a:p>
+          <a:p>
+            <a:pPr algn="l">
+              <a:lnSpc>
+                <a:spcPct val="105000"/>
+              </a:lnSpc>
+              <a:spcAft>
+                <a:spcPts val="400"/>
+              </a:spcAft>
+            </a:pPr>
+            <a:r>
+              <a:rPr sz="919" dirty="0">
+                <a:solidFill>
+                  <a:srgbClr val="121212"/>
+                </a:solidFill>
+                <a:latin typeface="Arial"/>
+              </a:rPr>
+              <a:t>• Tan, M., &amp; Le, Q. EfficientNet: Rethinking model scaling for convolutional neural networks. ICML, 2019.</a:t>
+            </a:r>
+          </a:p>
+          <a:p>
+            <a:pPr algn="l">
+              <a:lnSpc>
+                <a:spcPct val="105000"/>
+              </a:lnSpc>
+              <a:spcAft>
+                <a:spcPts val="400"/>
+              </a:spcAft>
+            </a:pPr>
+            <a:r>
+              <a:rPr sz="919" dirty="0">
+                <a:solidFill>
+                  <a:srgbClr val="121212"/>
+                </a:solidFill>
+                <a:latin typeface="Arial"/>
+              </a:rPr>
+              <a:t>• From Retinal Pixels to Patients: Evolution of Deep Learning Research in Diabetic Retinopathy Screening. arXiv:2511.11065, 2025.</a:t>
+            </a:r>
+          </a:p>
+          <a:p>
+            <a:pPr algn="l">
+              <a:lnSpc>
+                <a:spcPct val="105000"/>
+              </a:lnSpc>
+              <a:spcAft>
+                <a:spcPts val="400"/>
+              </a:spcAft>
+            </a:pPr>
+            <a:r>
+              <a:rPr sz="919" dirty="0">
+                <a:solidFill>
+                  <a:srgbClr val="121212"/>
+                </a:solidFill>
+                <a:latin typeface="Arial"/>
+              </a:rPr>
+              <a:t>• Cross-camera external validation for artificial intelligence software in diagnosis of diabetic retinopathy. PMC8926465, 2022.</a:t>
+            </a:r>
+          </a:p>
+          <a:p>
+            <a:pPr algn="l">
+              <a:lnSpc>
+                <a:spcPct val="105000"/>
+              </a:lnSpc>
+              <a:spcAft>
+                <a:spcPts val="400"/>
+              </a:spcAft>
+            </a:pPr>
+            <a:r>
+              <a:rPr sz="919" dirty="0">
+                <a:solidFill>
+                  <a:srgbClr val="121212"/>
+                </a:solidFill>
+                <a:latin typeface="Arial"/>
+              </a:rPr>
+              <a:t>• Torralba, A., &amp; Efros, A. Unbiased look at dataset bias. CVPR, 2011.</a:t>
+            </a:r>
+          </a:p>
+          <a:p>
+            <a:pPr algn="l">
+              <a:lnSpc>
+                <a:spcPct val="105000"/>
+              </a:lnSpc>
+              <a:spcAft>
+                <a:spcPts val="400"/>
+              </a:spcAft>
+            </a:pPr>
+            <a:r>
+              <a:rPr sz="919" dirty="0">
+                <a:solidFill>
+                  <a:srgbClr val="121212"/>
+                </a:solidFill>
+                <a:latin typeface="Arial"/>
+              </a:rPr>
+              <a:t>• Geirhos, R., et al. Shortcut learning in deep neural networks. Nature Machine Intelligence, 2020.</a:t>
+            </a:r>
+          </a:p>
+          <a:p>
+            <a:pPr algn="l">
+              <a:lnSpc>
+                <a:spcPct val="105000"/>
+              </a:lnSpc>
+              <a:spcAft>
+                <a:spcPts val="400"/>
+              </a:spcAft>
+            </a:pPr>
+            <a:r>
+              <a:rPr sz="919" dirty="0">
+                <a:solidFill>
+                  <a:srgbClr val="121212"/>
+                </a:solidFill>
+                <a:latin typeface="Arial"/>
+              </a:rPr>
+              <a:t>• Zech, J. R., et al. Variable generalization performance of a deep learning model to detect pneumonia in chest radiographs. PLOS Medicine, 2018.</a:t>
+            </a:r>
+          </a:p>
+          <a:p>
+            <a:pPr algn="l">
+              <a:lnSpc>
+                <a:spcPct val="105000"/>
+              </a:lnSpc>
+              <a:spcAft>
+                <a:spcPts val="400"/>
+              </a:spcAft>
+            </a:pPr>
+            <a:r>
+              <a:rPr sz="919" dirty="0">
+                <a:solidFill>
+                  <a:srgbClr val="121212"/>
+                </a:solidFill>
+                <a:latin typeface="Arial"/>
+              </a:rPr>
+              <a:t>• DeGrave, A. J., et al. AI for radiographic COVID-19 detection selects shortcuts over signal. Nature Machine Intelligence, 2021.</a:t>
             </a:r>
           </a:p>
           <a:p>
@@ -24203,7 +24456,7 @@
               </a:spcAft>
             </a:pPr>
             <a:r>
-              <a:rPr sz="1400" b="1">
+              <a:rPr sz="1300" b="1">
                 <a:solidFill>
                   <a:srgbClr val="121212"/>
                 </a:solidFill>
@@ -24212,13 +24465,13 @@
               <a:t>• Pooling is common: </a:t>
             </a:r>
             <a:r>
-              <a:rPr sz="1300" b="0">
+              <a:rPr sz="1200" b="0">
                 <a:solidFill>
                   <a:srgbClr val="3a3a3a"/>
                 </a:solidFill>
                 <a:latin typeface="Arial"/>
               </a:rPr>
-              <a:t>public datasets (DDR, EyePACS, APTOS) are combined to get more training data</a:t>
+              <a:t>public medical-image datasets are combined to get more training data; here DDR, EyePACS and APTOS</a:t>
             </a:r>
           </a:p>
           <a:p>
@@ -24228,7 +24481,7 @@
               </a:spcAft>
             </a:pPr>
             <a:r>
-              <a:rPr sz="1400" b="1">
+              <a:rPr sz="1300" b="1">
                 <a:solidFill>
                   <a:srgbClr val="121212"/>
                 </a:solidFill>
@@ -24237,13 +24490,13 @@
               <a:t>• An untested assumption: </a:t>
             </a:r>
             <a:r>
-              <a:rPr sz="1300" b="0">
+              <a:rPr sz="1200" b="0">
                 <a:solidFill>
                   <a:srgbClr val="3a3a3a"/>
                 </a:solidFill>
                 <a:latin typeface="Arial"/>
               </a:rPr>
-              <a:t>a 2025 review notes that multi-dataset training can mask poor external generalization</a:t>
+              <a:t>a 2025 DR review notes that multi-dataset training can mask poor external generalization</a:t>
             </a:r>
           </a:p>
           <a:p>
@@ -24253,22 +24506,22 @@
               </a:spcAft>
             </a:pPr>
             <a:r>
-              <a:rPr sz="1400" b="1">
+              <a:rPr sz="1300" b="1">
                 <a:solidFill>
                   <a:srgbClr val="121212"/>
                 </a:solidFill>
                 <a:latin typeface="Arial"/>
               </a:rPr>
-              <a:t>• Not found: </a:t>
+              <a:t>• Known in other fields: </a:t>
             </a:r>
             <a:r>
-              <a:rPr sz="1300" b="0">
+              <a:rPr sz="1200" b="0">
                 <a:solidFill>
                   <a:srgbClr val="3a3a3a"/>
                 </a:solidFill>
                 <a:latin typeface="Arial"/>
               </a:rPr>
-              <a:t>a study testing whether a merged model learns the disease or the source dataset</a:t>
+              <a:t>models have learned hospital or scanner site instead of disease in chest X-rays (Zech 2018; DeGrave 2021) and dataset identity in general (Torralba and Efros 2011)</a:t>
             </a:r>
           </a:p>
           <a:p>
@@ -24278,7 +24531,32 @@
               </a:spcAft>
             </a:pPr>
             <a:r>
-              <a:rPr sz="1400" b="1">
+              <a:rPr sz="1300" b="1">
+                <a:solidFill>
+                  <a:srgbClr val="121212"/>
+                </a:solidFill>
+                <a:latin typeface="Arial"/>
+              </a:rPr>
+              <a:t>• Not found for early DR: </a:t>
+            </a:r>
+            <a:r>
+              <a:rPr sz="1200" b="0">
+                <a:solidFill>
+                  <a:srgbClr val="3a3a3a"/>
+                </a:solidFill>
+                <a:latin typeface="Arial"/>
+              </a:rPr>
+              <a:t>a study testing whether a merged model learns the disease or the source, or which image properties carry it</a:t>
+            </a:r>
+          </a:p>
+          <a:p>
+            <a:pPr algn="l">
+              <a:spcAft>
+                <a:spcPts val="900"/>
+              </a:spcAft>
+            </a:pPr>
+            <a:r>
+              <a:rPr sz="1300" b="1">
                 <a:solidFill>
                   <a:srgbClr val="121212"/>
                 </a:solidFill>
@@ -24287,13 +24565,13 @@
               <a:t>• Hidden failures: </a:t>
             </a:r>
             <a:r>
-              <a:rPr sz="1300" b="0">
+              <a:rPr sz="1200" b="0">
                 <a:solidFill>
                   <a:srgbClr val="3a3a3a"/>
                 </a:solidFill>
                 <a:latin typeface="Arial"/>
               </a:rPr>
-              <a:t>in-domain accuracy or AUROC can look excellent while a model over-flags, uses camera cues or misses its target at a new site</a:t>
+              <a:t>in-domain accuracy or AUROC can look excellent while a model over-flags, uses capture cues or misses its target at a new site</a:t>
             </a:r>
           </a:p>
           <a:p>
@@ -24303,7 +24581,7 @@
               </a:spcAft>
             </a:pPr>
             <a:r>
-              <a:rPr sz="1400" b="1">
+              <a:rPr sz="1300" b="1">
                 <a:solidFill>
                   <a:srgbClr val="121212"/>
                 </a:solidFill>
@@ -24312,7 +24590,7 @@
               <a:t>• Why it matters: </a:t>
             </a:r>
             <a:r>
-              <a:rPr sz="1300" b="0">
+              <a:rPr sz="1200" b="0">
                 <a:solidFill>
                   <a:srgbClr val="3a3a3a"/>
                 </a:solidFill>
@@ -24376,7 +24654,7 @@
                 </a:solidFill>
                 <a:latin typeface="Arial"/>
               </a:rPr>
-              <a:t>Research Question</a:t>
+              <a:t>Research Questions</a:t>
             </a:r>
           </a:p>
         </p:txBody>
@@ -24411,7 +24689,7 @@
                 </a:solidFill>
                 <a:latin typeface="Arial"/>
               </a:rPr>
-              <a:t>What this project asks, and why it matters</a:t>
+              <a:t>Dataset merging in general, with early DR as the case study</a:t>
             </a:r>
           </a:p>
         </p:txBody>
@@ -24500,7 +24778,7 @@
               </a:spcAft>
             </a:pPr>
             <a:r>
-              <a:rPr sz="1400" b="1">
+              <a:rPr sz="1350" b="1">
                 <a:solidFill>
                   <a:srgbClr val="121212"/>
                 </a:solidFill>
@@ -24509,13 +24787,13 @@
               <a:t>• Main question: </a:t>
             </a:r>
             <a:r>
-              <a:rPr sz="1300" b="0">
+              <a:rPr sz="1250" b="0">
                 <a:solidFill>
                   <a:srgbClr val="3a3a3a"/>
                 </a:solidFill>
                 <a:latin typeface="Arial"/>
               </a:rPr>
-              <a:t>when datasets are merged for early-DR detection, does the model learn the disease or the source? Why: merging is common, yet I found no study testing it</a:t>
+              <a:t>when medical-image datasets are merged, does a model learn the condition or the source? Case study: early DR, grades 1-2</a:t>
             </a:r>
           </a:p>
           <a:p>
@@ -24525,7 +24803,7 @@
               </a:spcAft>
             </a:pPr>
             <a:r>
-              <a:rPr sz="1400" b="1">
+              <a:rPr sz="1350" b="1">
                 <a:solidFill>
                   <a:srgbClr val="121212"/>
                 </a:solidFill>
@@ -24534,13 +24812,13 @@
               <a:t>• RQ1 (the merge): </a:t>
             </a:r>
             <a:r>
-              <a:rPr sz="1300" b="0">
+              <a:rPr sz="1250" b="0">
                 <a:solidFill>
                   <a:srgbClr val="3a3a3a"/>
                 </a:solidFill>
                 <a:latin typeface="Arial"/>
               </a:rPr>
-              <a:t>does adding EyePACS to DDR improve early-DR sensitivity on unseen sources? Why: more data is assumed to help; a negative-control merge tests it</a:t>
+              <a:t>does adding a second source improve sensitivity at a fixed specificity on unseen sources? A negative-control merge tests it</a:t>
             </a:r>
           </a:p>
           <a:p>
@@ -24550,7 +24828,7 @@
               </a:spcAft>
             </a:pPr>
             <a:r>
-              <a:rPr sz="1400" b="1">
+              <a:rPr sz="1350" b="1">
                 <a:solidFill>
                   <a:srgbClr val="121212"/>
                 </a:solidFill>
@@ -24559,13 +24837,13 @@
               <a:t>• RQ2 (the threshold): </a:t>
             </a:r>
             <a:r>
-              <a:rPr sz="1300" b="0">
+              <a:rPr sz="1250" b="0">
                 <a:solidFill>
                   <a:srgbClr val="3a3a3a"/>
                 </a:solidFill>
                 <a:latin typeface="Arial"/>
               </a:rPr>
-              <a:t>does a threshold frozen on validation survive a change of source? Why: AUROC can hide over-flagging, which overloads graders, or missed early cases</a:t>
+              <a:t>does a threshold frozen on validation survive a change of source? AUROC can hide over-flagging or missed cases</a:t>
             </a:r>
           </a:p>
           <a:p>
@@ -24575,22 +24853,22 @@
               </a:spcAft>
             </a:pPr>
             <a:r>
-              <a:rPr sz="1400" b="1">
+              <a:rPr sz="1350" b="1">
                 <a:solidFill>
                   <a:srgbClr val="121212"/>
                 </a:solidFill>
                 <a:latin typeface="Arial"/>
               </a:rPr>
-              <a:t>• RQ3 (shortcuts): </a:t>
+              <a:t>• RQ3 (image properties): </a:t>
             </a:r>
             <a:r>
-              <a:rPr sz="1300" b="0">
+              <a:rPr sz="1250" b="0">
                 <a:solidFill>
                   <a:srgbClr val="3a3a3a"/>
                 </a:solidFill>
                 <a:latin typeface="Arial"/>
               </a:rPr>
-              <a:t>does image size or another capture cue predict the label? Why: a model could be rewarded for the camera instead of the disease</a:t>
+              <a:t>which properties differ between sources (size, quality, brightness, colour, sharpness; camera proxies) and how do they affect what a merged model learns?</a:t>
             </a:r>
           </a:p>
         </p:txBody>
@@ -24644,7 +24922,7 @@
                 </a:solidFill>
                 <a:latin typeface="Arial"/>
               </a:rPr>
-              <a:t>The contribution is a protocol to test DR models before trusting them, not a new network.</a:t>
+              <a:t>The contribution is a protocol to test merged-data models before trusting them, not a new network.</a:t>
             </a:r>
           </a:p>
         </p:txBody>
@@ -24737,7 +25015,7 @@
                 </a:solidFill>
                 <a:latin typeface="Arial"/>
               </a:rPr>
-              <a:t>Data and methods this project builds on</a:t>
+              <a:t>Data, methods and prior evidence this project builds on</a:t>
             </a:r>
           </a:p>
         </p:txBody>
@@ -24826,7 +25104,7 @@
               </a:spcAft>
             </a:pPr>
             <a:r>
-              <a:rPr sz="1400" b="1">
+              <a:rPr sz="1300" b="1">
                 <a:solidFill>
                   <a:srgbClr val="121212"/>
                 </a:solidFill>
@@ -24835,7 +25113,7 @@
               <a:t>• Gulshan et al. (2016): </a:t>
             </a:r>
             <a:r>
-              <a:rPr sz="1300" b="0">
+              <a:rPr sz="1200" b="0">
                 <a:solidFill>
                   <a:srgbClr val="3a3a3a"/>
                 </a:solidFill>
@@ -24851,16 +25129,16 @@
               </a:spcAft>
             </a:pPr>
             <a:r>
-              <a:rPr sz="1400" b="1">
+              <a:rPr sz="1300" b="1">
                 <a:solidFill>
                   <a:srgbClr val="121212"/>
                 </a:solidFill>
                 <a:latin typeface="Arial"/>
               </a:rPr>
-              <a:t>• DDR (Li et al., 2019), EyePACS (Kaggle, 2015), APTOS 2019: </a:t>
+              <a:t>• DDR, EyePACS, APTOS: </a:t>
             </a:r>
             <a:r>
-              <a:rPr sz="1300" b="0">
+              <a:rPr sz="1200" b="0">
                 <a:solidFill>
                   <a:srgbClr val="3a3a3a"/>
                 </a:solidFill>
@@ -24876,7 +25154,7 @@
               </a:spcAft>
             </a:pPr>
             <a:r>
-              <a:rPr sz="1400" b="1">
+              <a:rPr sz="1300" b="1">
                 <a:solidFill>
                   <a:srgbClr val="121212"/>
                 </a:solidFill>
@@ -24885,7 +25163,7 @@
               <a:t>• Guo et al. (2017): </a:t>
             </a:r>
             <a:r>
-              <a:rPr sz="1300" b="0">
+              <a:rPr sz="1200" b="0">
                 <a:solidFill>
                   <a:srgbClr val="3a3a3a"/>
                 </a:solidFill>
@@ -24901,22 +25179,22 @@
               </a:spcAft>
             </a:pPr>
             <a:r>
-              <a:rPr sz="1400" b="1">
+              <a:rPr sz="1300" b="1">
                 <a:solidFill>
                   <a:srgbClr val="121212"/>
                 </a:solidFill>
                 <a:latin typeface="Arial"/>
               </a:rPr>
-              <a:t>• Recent review (arXiv, 2025): </a:t>
+              <a:t>• Dataset bias and shortcuts: </a:t>
             </a:r>
             <a:r>
-              <a:rPr sz="1300" b="0">
+              <a:rPr sz="1200" b="0">
                 <a:solidFill>
                   <a:srgbClr val="3a3a3a"/>
                 </a:solidFill>
                 <a:latin typeface="Arial"/>
               </a:rPr>
-              <a:t>describes cross-dataset degradation and the need for external test sets</a:t>
+              <a:t>Torralba and Efros (2011), Geirhos et al. (2020), Zech et al. (2018), DeGrave et al. (2021): models learn dataset or site cues</a:t>
             </a:r>
           </a:p>
           <a:p>
@@ -24926,22 +25204,22 @@
               </a:spcAft>
             </a:pPr>
             <a:r>
-              <a:rPr sz="1400" b="1">
+              <a:rPr sz="1300" b="1">
                 <a:solidFill>
                   <a:srgbClr val="121212"/>
                 </a:solidFill>
                 <a:latin typeface="Arial"/>
               </a:rPr>
-              <a:t>• Cross-camera validation (2022): </a:t>
+              <a:t>• DR reviews and camera studies: </a:t>
             </a:r>
             <a:r>
-              <a:rPr sz="1300" b="0">
+              <a:rPr sz="1200" b="0">
                 <a:solidFill>
                   <a:srgbClr val="3a3a3a"/>
                 </a:solidFill>
                 <a:latin typeface="Arial"/>
               </a:rPr>
-              <a:t>one DR software tested across camera models, for referable DR only</a:t>
+              <a:t>a 2025 review on cross-dataset degradation; a 2022 cross-camera study for referable DR</a:t>
             </a:r>
           </a:p>
         </p:txBody>
@@ -25177,7 +25455,7 @@
               </a:spcAft>
             </a:pPr>
             <a:r>
-              <a:rPr sz="1500" b="1">
+              <a:rPr sz="1400" b="1">
                 <a:solidFill>
                   <a:srgbClr val="121212"/>
                 </a:solidFill>
@@ -25186,7 +25464,7 @@
               <a:t>• Target: </a:t>
             </a:r>
             <a:r>
-              <a:rPr sz="1400" b="0">
+              <a:rPr sz="1300" b="0">
                 <a:solidFill>
                   <a:srgbClr val="3a3a3a"/>
                 </a:solidFill>
@@ -25202,7 +25480,7 @@
               </a:spcAft>
             </a:pPr>
             <a:r>
-              <a:rPr sz="1500" b="1">
+              <a:rPr sz="1400" b="1">
                 <a:solidFill>
                   <a:srgbClr val="121212"/>
                 </a:solidFill>
@@ -25211,7 +25489,7 @@
               <a:t>• Data: </a:t>
             </a:r>
             <a:r>
-              <a:rPr sz="1400" b="0">
+              <a:rPr sz="1300" b="0">
                 <a:solidFill>
                   <a:srgbClr val="3a3a3a"/>
                 </a:solidFill>
@@ -25227,7 +25505,7 @@
               </a:spcAft>
             </a:pPr>
             <a:r>
-              <a:rPr sz="1500" b="1">
+              <a:rPr sz="1400" b="1">
                 <a:solidFill>
                   <a:srgbClr val="121212"/>
                 </a:solidFill>
@@ -25236,7 +25514,7 @@
               <a:t>• Imbalance: </a:t>
             </a:r>
             <a:r>
-              <a:rPr sz="1400" b="0">
+              <a:rPr sz="1300" b="0">
                 <a:solidFill>
                   <a:srgbClr val="3a3a3a"/>
                 </a:solidFill>
@@ -25252,7 +25530,7 @@
               </a:spcAft>
             </a:pPr>
             <a:r>
-              <a:rPr sz="1500" b="1">
+              <a:rPr sz="1400" b="1">
                 <a:solidFill>
                   <a:srgbClr val="121212"/>
                 </a:solidFill>
@@ -25261,7 +25539,7 @@
               <a:t>• Transfer: </a:t>
             </a:r>
             <a:r>
-              <a:rPr sz="1400" b="0">
+              <a:rPr sz="1300" b="0">
                 <a:solidFill>
                   <a:srgbClr val="3a3a3a"/>
                 </a:solidFill>
@@ -25277,22 +25555,47 @@
               </a:spcAft>
             </a:pPr>
             <a:r>
-              <a:rPr sz="1500" b="1">
+              <a:rPr sz="1400" b="1">
                 <a:solidFill>
                   <a:srgbClr val="121212"/>
                 </a:solidFill>
                 <a:latin typeface="Arial"/>
               </a:rPr>
-              <a:t>• Evidence: </a:t>
+              <a:t>• Properties: </a:t>
             </a:r>
             <a:r>
-              <a:rPr sz="1400" b="0">
+              <a:rPr sz="1300" b="0">
                 <a:solidFill>
                   <a:srgbClr val="3a3a3a"/>
                 </a:solidFill>
                 <a:latin typeface="Arial"/>
               </a:rPr>
-              <a:t>shortcut audits and calibrated probabilities, not just accuracy</a:t>
+              <a:t>which image properties carry the source, found by prediction, stratification and matching</a:t>
+            </a:r>
+          </a:p>
+          <a:p>
+            <a:pPr algn="l">
+              <a:spcAft>
+                <a:spcPts val="900"/>
+              </a:spcAft>
+            </a:pPr>
+            <a:r>
+              <a:rPr sz="1400" b="1">
+                <a:solidFill>
+                  <a:srgbClr val="121212"/>
+                </a:solidFill>
+                <a:latin typeface="Arial"/>
+              </a:rPr>
+              <a:t>• Scope: </a:t>
+            </a:r>
+            <a:r>
+              <a:rPr sz="1300" b="0">
+                <a:solidFill>
+                  <a:srgbClr val="3a3a3a"/>
+                </a:solidFill>
+                <a:latin typeface="Arial"/>
+              </a:rPr>
+              <a:t>DR is the case study; the protocol is written to apply to any merged medical-image task</a:t>
             </a:r>
           </a:p>
         </p:txBody>
@@ -25528,7 +25831,7 @@
               </a:spcAft>
             </a:pPr>
             <a:r>
-              <a:rPr sz="1400" b="1">
+              <a:rPr sz="1350" b="1">
                 <a:solidFill>
                   <a:srgbClr val="121212"/>
                 </a:solidFill>
@@ -25537,7 +25840,7 @@
               <a:t>• Three data arms: </a:t>
             </a:r>
             <a:r>
-              <a:rPr sz="1300" b="0">
+              <a:rPr sz="1250" b="0">
                 <a:solidFill>
                   <a:srgbClr val="3a3a3a"/>
                 </a:solidFill>
@@ -25553,7 +25856,7 @@
               </a:spcAft>
             </a:pPr>
             <a:r>
-              <a:rPr sz="1400" b="1">
+              <a:rPr sz="1350" b="1">
                 <a:solidFill>
                   <a:srgbClr val="121212"/>
                 </a:solidFill>
@@ -25562,7 +25865,7 @@
               <a:t>• Imbalance, one at a time: </a:t>
             </a:r>
             <a:r>
-              <a:rPr sz="1300" b="0">
+              <a:rPr sz="1250" b="0">
                 <a:solidFill>
                   <a:srgbClr val="3a3a3a"/>
                 </a:solidFill>
@@ -25578,7 +25881,7 @@
               </a:spcAft>
             </a:pPr>
             <a:r>
-              <a:rPr sz="1400" b="1">
+              <a:rPr sz="1350" b="1">
                 <a:solidFill>
                   <a:srgbClr val="121212"/>
                 </a:solidFill>
@@ -25587,7 +25890,7 @@
               <a:t>• Honest splits: </a:t>
             </a:r>
             <a:r>
-              <a:rPr sz="1300" b="0">
+              <a:rPr sz="1250" b="0">
                 <a:solidFill>
                   <a:srgbClr val="3a3a3a"/>
                 </a:solidFill>
@@ -25603,22 +25906,22 @@
               </a:spcAft>
             </a:pPr>
             <a:r>
-              <a:rPr sz="1400" b="1">
+              <a:rPr sz="1350" b="1">
                 <a:solidFill>
                   <a:srgbClr val="121212"/>
                 </a:solidFill>
                 <a:latin typeface="Arial"/>
               </a:rPr>
-              <a:t>• Shortcut audit: </a:t>
+              <a:t>• Property analysis: </a:t>
             </a:r>
             <a:r>
-              <a:rPr sz="1300" b="0">
+              <a:rPr sz="1250" b="0">
                 <a:solidFill>
                   <a:srgbClr val="3a3a3a"/>
                 </a:solidFill>
                 <a:latin typeface="Arial"/>
               </a:rPr>
-              <a:t>test whether image size, file size, colour or sharpness alone predict the label</a:t>
+              <a:t>can size, file size, brightness, colour or sharpness predict the source or the label, and do scores hold within matched groups?</a:t>
             </a:r>
           </a:p>
           <a:p>
@@ -25628,7 +25931,7 @@
               </a:spcAft>
             </a:pPr>
             <a:r>
-              <a:rPr sz="1400" b="1">
+              <a:rPr sz="1350" b="1">
                 <a:solidFill>
                   <a:srgbClr val="121212"/>
                 </a:solidFill>
@@ -25637,7 +25940,7 @@
               <a:t>• Frozen operating point: </a:t>
             </a:r>
             <a:r>
-              <a:rPr sz="1300" b="0">
+              <a:rPr sz="1250" b="0">
                 <a:solidFill>
                   <a:srgbClr val="3a3a3a"/>
                 </a:solidFill>
